--- a/docs/TAP_빠른사용가이드_v3.pptx
+++ b/docs/TAP_빠른사용가이드_v3.pptx
@@ -2,24 +2,24 @@
 <file path=ppt/presentation.xml><?xml version="1.0" encoding="utf-8"?>
 <p:presentation xmlns:p="http://schemas.openxmlformats.org/presentationml/2006/main">
   <p:sldMasterIdLst>
-    <p:sldMasterId xmlns:r="http://schemas.openxmlformats.org/officeDocument/2006/relationships" id="2147483648" r:id="R47d7b0cd20e24817"/>
+    <p:sldMasterId xmlns:r="http://schemas.openxmlformats.org/officeDocument/2006/relationships" id="2147483648" r:id="Rdd4b9f2597f4453e"/>
   </p:sldMasterIdLst>
   <p:notesMasterIdLst>
-    <p:notesMasterId xmlns:r="http://schemas.openxmlformats.org/officeDocument/2006/relationships" r:id="R9c95fd16123c4a9d"/>
+    <p:notesMasterId xmlns:r="http://schemas.openxmlformats.org/officeDocument/2006/relationships" r:id="R007a536964cd434e"/>
   </p:notesMasterIdLst>
   <p:sldIdLst>
-    <p:sldId xmlns:r="http://schemas.openxmlformats.org/officeDocument/2006/relationships" id="256" r:id="R523f36b761ba447c"/>
-    <p:sldId xmlns:r="http://schemas.openxmlformats.org/officeDocument/2006/relationships" id="257" r:id="R13e6180d5c0a406b"/>
-    <p:sldId xmlns:r="http://schemas.openxmlformats.org/officeDocument/2006/relationships" id="258" r:id="R6d06644605bf45ea"/>
-    <p:sldId xmlns:r="http://schemas.openxmlformats.org/officeDocument/2006/relationships" id="259" r:id="R634fee6bc5304818"/>
-    <p:sldId xmlns:r="http://schemas.openxmlformats.org/officeDocument/2006/relationships" id="260" r:id="R2e5c88a55e8d44fb"/>
-    <p:sldId xmlns:r="http://schemas.openxmlformats.org/officeDocument/2006/relationships" id="261" r:id="R1cce14b27b7b4e92"/>
-    <p:sldId xmlns:r="http://schemas.openxmlformats.org/officeDocument/2006/relationships" id="262" r:id="Raceddae9e01f4853"/>
-    <p:sldId xmlns:r="http://schemas.openxmlformats.org/officeDocument/2006/relationships" id="263" r:id="R836c7ccf32c748b7"/>
-    <p:sldId xmlns:r="http://schemas.openxmlformats.org/officeDocument/2006/relationships" id="264" r:id="R709a1ce35c0246b1"/>
-    <p:sldId xmlns:r="http://schemas.openxmlformats.org/officeDocument/2006/relationships" id="265" r:id="R3fe15bd2319f4235"/>
-    <p:sldId xmlns:r="http://schemas.openxmlformats.org/officeDocument/2006/relationships" id="266" r:id="R63e89965fa6f4914"/>
-    <p:sldId xmlns:r="http://schemas.openxmlformats.org/officeDocument/2006/relationships" id="267" r:id="R86017cf4505f4c98"/>
+    <p:sldId xmlns:r="http://schemas.openxmlformats.org/officeDocument/2006/relationships" id="256" r:id="R8c3e41d15baa4310"/>
+    <p:sldId xmlns:r="http://schemas.openxmlformats.org/officeDocument/2006/relationships" id="257" r:id="R19d0fcb31ff040de"/>
+    <p:sldId xmlns:r="http://schemas.openxmlformats.org/officeDocument/2006/relationships" id="258" r:id="R9476e9e87c7448f1"/>
+    <p:sldId xmlns:r="http://schemas.openxmlformats.org/officeDocument/2006/relationships" id="259" r:id="Rfd4ab9cd14d64044"/>
+    <p:sldId xmlns:r="http://schemas.openxmlformats.org/officeDocument/2006/relationships" id="260" r:id="R2246520730cc41b2"/>
+    <p:sldId xmlns:r="http://schemas.openxmlformats.org/officeDocument/2006/relationships" id="261" r:id="R4dd203cbd5b74dd3"/>
+    <p:sldId xmlns:r="http://schemas.openxmlformats.org/officeDocument/2006/relationships" id="262" r:id="Rbfd58fa392444d5b"/>
+    <p:sldId xmlns:r="http://schemas.openxmlformats.org/officeDocument/2006/relationships" id="263" r:id="R79470ac2d97945ff"/>
+    <p:sldId xmlns:r="http://schemas.openxmlformats.org/officeDocument/2006/relationships" id="264" r:id="R3a0bd71aafe74451"/>
+    <p:sldId xmlns:r="http://schemas.openxmlformats.org/officeDocument/2006/relationships" id="265" r:id="R74618910a8ed444d"/>
+    <p:sldId xmlns:r="http://schemas.openxmlformats.org/officeDocument/2006/relationships" id="266" r:id="R34dd654dfbc543cf"/>
+    <p:sldId xmlns:r="http://schemas.openxmlformats.org/officeDocument/2006/relationships" id="267" r:id="Re3179f797ee14463"/>
   </p:sldIdLst>
   <p:sldSz cx="18288000" cy="10287000"/>
   <p:notesSz cx="6858000" cy="9144000"/>
@@ -1694,8 +1694,8 @@
   </p:cSld>
   <p:clrMap bg1="lt1" tx1="dk1" bg2="lt2" tx2="dk2" accent1="accent1" accent2="accent2" accent3="accent3" accent4="accent4" accent5="accent5" accent6="accent6" hlink="hlink" folHlink="folHlink"/>
   <p:sldLayoutIdLst>
-    <p:sldLayoutId xmlns:r="http://schemas.openxmlformats.org/officeDocument/2006/relationships" id="2147483649" r:id="Ra1117aec06054acc"/>
-    <p:sldLayoutId xmlns:r="http://schemas.openxmlformats.org/officeDocument/2006/relationships" id="2147483650" r:id="Ra898f0a221d647e2"/>
+    <p:sldLayoutId xmlns:r="http://schemas.openxmlformats.org/officeDocument/2006/relationships" id="2147483649" r:id="R9ef68fcd43914285"/>
+    <p:sldLayoutId xmlns:r="http://schemas.openxmlformats.org/officeDocument/2006/relationships" id="2147483650" r:id="Rf14f6069e8c543ab"/>
   </p:sldLayoutIdLst>
   <p:hf sldNum="0" hdr="0" ftr="0" dt="0"/>
   <p:txStyles>
@@ -2224,7 +2224,7 @@
           <p:nvPr/>
         </p:nvPicPr>
         <p:blipFill>
-          <a:blip xmlns:r="http://schemas.openxmlformats.org/officeDocument/2006/relationships" xmlns:a="http://schemas.openxmlformats.org/drawingml/2006/main" r:embed="R149d2ef06e334ed4"/>
+          <a:blip xmlns:r="http://schemas.openxmlformats.org/officeDocument/2006/relationships" xmlns:a="http://schemas.openxmlformats.org/drawingml/2006/main" r:embed="R8b66cbf3fd244cf8"/>
           <a:srcRect xmlns:a="http://schemas.openxmlformats.org/drawingml/2006/main" l="0" t="-400" r="0" b="-400"/>
           <a:stretch xmlns:a="http://schemas.openxmlformats.org/drawingml/2006/main"/>
         </p:blipFill>
@@ -2247,7 +2247,7 @@
           <p:nvPr/>
         </p:nvPicPr>
         <p:blipFill>
-          <a:blip xmlns:r="http://schemas.openxmlformats.org/officeDocument/2006/relationships" xmlns:a="http://schemas.openxmlformats.org/drawingml/2006/main" r:embed="Rea4e4272e9dc40fb"/>
+          <a:blip xmlns:r="http://schemas.openxmlformats.org/officeDocument/2006/relationships" xmlns:a="http://schemas.openxmlformats.org/drawingml/2006/main" r:embed="R63fd2bcca4a74942"/>
           <a:srcRect xmlns:a="http://schemas.openxmlformats.org/drawingml/2006/main" l="-2083" t="0" r="-2083" b="0"/>
           <a:stretch xmlns:a="http://schemas.openxmlformats.org/drawingml/2006/main"/>
         </p:blipFill>
@@ -2503,7 +2503,7 @@
                 <a:ea typeface="페이퍼로지 3 Light"/>
                 <a:cs typeface="페이퍼로지 3 Light"/>
               </a:rPr>
-              <a:t>교육담당자 · 임직원 · KMA 운영자  |  2026.08</a:t>
+              <a:t>교육담당자 · 참여자 · KMA 관리자  |  2026.08</a:t>
             </a:r>
           </a:p>
         </p:txBody>
@@ -2880,7 +2880,7 @@
           <p:nvPr/>
         </p:nvPicPr>
         <p:blipFill>
-          <a:blip xmlns:r="http://schemas.openxmlformats.org/officeDocument/2006/relationships" xmlns:a="http://schemas.openxmlformats.org/drawingml/2006/main" r:embed="Rdb4d5f894d014aed"/>
+          <a:blip xmlns:r="http://schemas.openxmlformats.org/officeDocument/2006/relationships" xmlns:a="http://schemas.openxmlformats.org/drawingml/2006/main" r:embed="R5a0fec5106b44346"/>
           <a:srcRect xmlns:a="http://schemas.openxmlformats.org/drawingml/2006/main" l="-2083" t="0" r="-2083" b="0"/>
           <a:stretch xmlns:a="http://schemas.openxmlformats.org/drawingml/2006/main"/>
         </p:blipFill>
@@ -3003,7 +3003,7 @@
                 <a:ea typeface="페이퍼로지 4 Regular"/>
                 <a:cs typeface="페이퍼로지 4 Regular"/>
               </a:rPr>
-              <a:t>KMA OPERATOR</a:t>
+              <a:t>KMA ADMIN</a:t>
             </a:r>
           </a:p>
         </p:txBody>
@@ -3058,7 +3058,7 @@
                 <a:ea typeface="페이퍼로지 2 ExtraLight"/>
                 <a:cs typeface="페이퍼로지 2 ExtraLight"/>
               </a:rPr>
-              <a:t>KMA 운영자는 회원사 점수가 아니라</a:t>
+              <a:t>KMA 관리자는 회원사 점수가 아니라</a:t>
             </a:r>
           </a:p>
           <a:p xmlns:a="http://schemas.openxmlformats.org/drawingml/2006/main">
@@ -4285,14 +4285,13 @@
           <p:nvPr/>
         </p:nvPicPr>
         <p:blipFill>
-          <a:blip xmlns:r="http://schemas.openxmlformats.org/officeDocument/2006/relationships" xmlns:a="http://schemas.openxmlformats.org/drawingml/2006/main" r:embed="R190382fa3168429f"/>
-          <a:srcRect xmlns:a="http://schemas.openxmlformats.org/drawingml/2006/main" l="0" t="0" r="0" b="0"/>
+          <a:blip xmlns:r="http://schemas.openxmlformats.org/officeDocument/2006/relationships" xmlns:a="http://schemas.openxmlformats.org/drawingml/2006/main" r:embed="Rda5a4f580adb4ec1"/>
           <a:stretch xmlns:a="http://schemas.openxmlformats.org/drawingml/2006/main"/>
         </p:blipFill>
         <p:spPr>
           <a:xfrm xmlns:a="http://schemas.openxmlformats.org/drawingml/2006/main" flipH="0" flipV="0">
-            <a:off x="10668286" y="2095786"/>
-            <a:ext cx="6096286" cy="6476714"/>
+            <a:off x="10668286" y="3619563"/>
+            <a:ext cx="6096286" cy="3429161"/>
           </a:xfrm>
           <a:prstGeom xmlns:a="http://schemas.openxmlformats.org/drawingml/2006/main" prst="rect">
             <a:avLst/>
@@ -4330,7 +4329,7 @@
           <p:nvPr/>
         </p:nvPicPr>
         <p:blipFill>
-          <a:blip xmlns:r="http://schemas.openxmlformats.org/officeDocument/2006/relationships" xmlns:a="http://schemas.openxmlformats.org/drawingml/2006/main" r:embed="R3447d6523fee4099"/>
+          <a:blip xmlns:r="http://schemas.openxmlformats.org/officeDocument/2006/relationships" xmlns:a="http://schemas.openxmlformats.org/drawingml/2006/main" r:embed="Rb9857adf456847db"/>
           <a:srcRect xmlns:a="http://schemas.openxmlformats.org/drawingml/2006/main" l="-2083" t="0" r="-2083" b="0"/>
           <a:stretch xmlns:a="http://schemas.openxmlformats.org/drawingml/2006/main"/>
         </p:blipFill>
@@ -6179,7 +6178,7 @@
           <p:nvPr/>
         </p:nvPicPr>
         <p:blipFill>
-          <a:blip xmlns:r="http://schemas.openxmlformats.org/officeDocument/2006/relationships" xmlns:a="http://schemas.openxmlformats.org/drawingml/2006/main" r:embed="R004203f6e8ef4519"/>
+          <a:blip xmlns:r="http://schemas.openxmlformats.org/officeDocument/2006/relationships" xmlns:a="http://schemas.openxmlformats.org/drawingml/2006/main" r:embed="Rcba93933f45a420e"/>
           <a:srcRect xmlns:a="http://schemas.openxmlformats.org/drawingml/2006/main" l="-2083" t="0" r="-2083" b="0"/>
           <a:stretch xmlns:a="http://schemas.openxmlformats.org/drawingml/2006/main"/>
         </p:blipFill>
@@ -6202,7 +6201,7 @@
           <p:nvPr/>
         </p:nvPicPr>
         <p:blipFill>
-          <a:blip xmlns:r="http://schemas.openxmlformats.org/officeDocument/2006/relationships" xmlns:a="http://schemas.openxmlformats.org/drawingml/2006/main" r:embed="R79a2c0c0755b47f3"/>
+          <a:blip xmlns:r="http://schemas.openxmlformats.org/officeDocument/2006/relationships" xmlns:a="http://schemas.openxmlformats.org/drawingml/2006/main" r:embed="Rf0e10247930a4925"/>
           <a:srcRect xmlns:a="http://schemas.openxmlformats.org/drawingml/2006/main" l="-2083" t="0" r="-2083" b="0"/>
           <a:stretch xmlns:a="http://schemas.openxmlformats.org/drawingml/2006/main"/>
         </p:blipFill>
@@ -7097,7 +7096,7 @@
                 <a:ea typeface="페이퍼로지 5 Medium"/>
                 <a:cs typeface="페이퍼로지 5 Medium"/>
               </a:rPr>
-              <a:t>임직원</a:t>
+              <a:t>참여자</a:t>
             </a:r>
           </a:p>
         </p:txBody>
@@ -7207,7 +7206,7 @@
                 <a:ea typeface="페이퍼로지 5 Medium"/>
                 <a:cs typeface="페이퍼로지 5 Medium"/>
               </a:rPr>
-              <a:t>KMA 운영자</a:t>
+              <a:t>KMA 관리자</a:t>
             </a:r>
           </a:p>
         </p:txBody>
@@ -7812,7 +7811,7 @@
           <p:nvPr/>
         </p:nvPicPr>
         <p:blipFill>
-          <a:blip xmlns:r="http://schemas.openxmlformats.org/officeDocument/2006/relationships" xmlns:a="http://schemas.openxmlformats.org/drawingml/2006/main" r:embed="R2f97aae613b245cd"/>
+          <a:blip xmlns:r="http://schemas.openxmlformats.org/officeDocument/2006/relationships" xmlns:a="http://schemas.openxmlformats.org/drawingml/2006/main" r:embed="R44be7d70bd5a43e5"/>
           <a:srcRect xmlns:a="http://schemas.openxmlformats.org/drawingml/2006/main" l="-2083" t="0" r="-2083" b="0"/>
           <a:stretch xmlns:a="http://schemas.openxmlformats.org/drawingml/2006/main"/>
         </p:blipFill>
@@ -8908,7 +8907,7 @@
           <p:nvPr/>
         </p:nvPicPr>
         <p:blipFill>
-          <a:blip xmlns:r="http://schemas.openxmlformats.org/officeDocument/2006/relationships" xmlns:a="http://schemas.openxmlformats.org/drawingml/2006/main" r:embed="R0d127a8be3db486e"/>
+          <a:blip xmlns:r="http://schemas.openxmlformats.org/officeDocument/2006/relationships" xmlns:a="http://schemas.openxmlformats.org/drawingml/2006/main" r:embed="Rb426ffc7a2f7421f"/>
           <a:srcRect xmlns:a="http://schemas.openxmlformats.org/drawingml/2006/main" l="-2083" t="0" r="-2083" b="0"/>
           <a:stretch xmlns:a="http://schemas.openxmlformats.org/drawingml/2006/main"/>
         </p:blipFill>
@@ -9414,7 +9413,7 @@
                 <a:ea typeface="페이퍼로지 5 Medium"/>
                 <a:cs typeface="페이퍼로지 5 Medium"/>
               </a:rPr>
-              <a:t>임직원</a:t>
+              <a:t>참여자</a:t>
             </a:r>
           </a:p>
         </p:txBody>
@@ -9579,7 +9578,7 @@
                 <a:ea typeface="페이퍼로지 5 Medium"/>
                 <a:cs typeface="페이퍼로지 5 Medium"/>
               </a:rPr>
-              <a:t>KMA 운영자</a:t>
+              <a:t>KMA 관리자</a:t>
             </a:r>
           </a:p>
         </p:txBody>
@@ -10220,7 +10219,7 @@
                 <a:ea typeface="페이퍼로지 5 Medium"/>
                 <a:cs typeface="페이퍼로지 5 Medium"/>
               </a:rPr>
-              <a:t>임직원</a:t>
+              <a:t>참여자</a:t>
             </a:r>
           </a:p>
           <a:p xmlns:a="http://schemas.openxmlformats.org/drawingml/2006/main">
@@ -10313,7 +10312,7 @@
                 <a:ea typeface="페이퍼로지 5 Medium"/>
                 <a:cs typeface="페이퍼로지 5 Medium"/>
               </a:rPr>
-              <a:t>KMA 운영자</a:t>
+              <a:t>KMA 관리자</a:t>
             </a:r>
           </a:p>
           <a:p xmlns:a="http://schemas.openxmlformats.org/drawingml/2006/main">
@@ -10597,7 +10596,7 @@
                 <a:ea typeface="페이퍼로지 5 Medium"/>
                 <a:cs typeface="페이퍼로지 5 Medium"/>
               </a:rPr>
-              <a:t>교육담당자 · 임직원</a:t>
+              <a:t>교육담당자 · 참여자</a:t>
             </a:r>
           </a:p>
         </p:txBody>
@@ -10790,7 +10789,7 @@
           <p:nvPr/>
         </p:nvPicPr>
         <p:blipFill>
-          <a:blip xmlns:r="http://schemas.openxmlformats.org/officeDocument/2006/relationships" xmlns:a="http://schemas.openxmlformats.org/drawingml/2006/main" r:embed="R44588bdd076a431e"/>
+          <a:blip xmlns:r="http://schemas.openxmlformats.org/officeDocument/2006/relationships" xmlns:a="http://schemas.openxmlformats.org/drawingml/2006/main" r:embed="R5960ab507f124d85"/>
           <a:srcRect xmlns:a="http://schemas.openxmlformats.org/drawingml/2006/main" l="-2083" t="0" r="-2083" b="0"/>
           <a:stretch xmlns:a="http://schemas.openxmlformats.org/drawingml/2006/main"/>
         </p:blipFill>
@@ -13022,7 +13021,7 @@
           <p:nvPr/>
         </p:nvPicPr>
         <p:blipFill>
-          <a:blip xmlns:r="http://schemas.openxmlformats.org/officeDocument/2006/relationships" xmlns:a="http://schemas.openxmlformats.org/drawingml/2006/main" r:embed="R713834ef305a4c4a"/>
+          <a:blip xmlns:r="http://schemas.openxmlformats.org/officeDocument/2006/relationships" xmlns:a="http://schemas.openxmlformats.org/drawingml/2006/main" r:embed="Raa6cbfdf2be24b93"/>
           <a:srcRect xmlns:a="http://schemas.openxmlformats.org/drawingml/2006/main" l="-2083" t="0" r="-2083" b="0"/>
           <a:stretch xmlns:a="http://schemas.openxmlformats.org/drawingml/2006/main"/>
         </p:blipFill>
@@ -14769,7 +14768,7 @@
           <p:nvPr/>
         </p:nvPicPr>
         <p:blipFill>
-          <a:blip xmlns:r="http://schemas.openxmlformats.org/officeDocument/2006/relationships" xmlns:a="http://schemas.openxmlformats.org/drawingml/2006/main" r:embed="Rce9aedef239a47bb"/>
+          <a:blip xmlns:r="http://schemas.openxmlformats.org/officeDocument/2006/relationships" xmlns:a="http://schemas.openxmlformats.org/drawingml/2006/main" r:embed="R2a41ddb894634187"/>
           <a:srcRect xmlns:a="http://schemas.openxmlformats.org/drawingml/2006/main" l="-2083" t="0" r="-2083" b="0"/>
           <a:stretch xmlns:a="http://schemas.openxmlformats.org/drawingml/2006/main"/>
         </p:blipFill>
@@ -14792,7 +14791,7 @@
           <p:nvPr/>
         </p:nvPicPr>
         <p:blipFill>
-          <a:blip xmlns:r="http://schemas.openxmlformats.org/officeDocument/2006/relationships" xmlns:a="http://schemas.openxmlformats.org/drawingml/2006/main" r:embed="Rda2b6472142e47ba"/>
+          <a:blip xmlns:r="http://schemas.openxmlformats.org/officeDocument/2006/relationships" xmlns:a="http://schemas.openxmlformats.org/drawingml/2006/main" r:embed="Rabe3cf17e7e843c1"/>
           <a:srcRect xmlns:a="http://schemas.openxmlformats.org/drawingml/2006/main" l="-2083" t="0" r="-2083" b="0"/>
           <a:stretch xmlns:a="http://schemas.openxmlformats.org/drawingml/2006/main"/>
         </p:blipFill>
@@ -16594,7 +16593,7 @@
                 <a:ea typeface="페이퍼로지 6 SemiBold"/>
                 <a:cs typeface="페이퍼로지 6 SemiBold"/>
               </a:rPr>
-              <a:t>임직원</a:t>
+              <a:t>참여자</a:t>
             </a:r>
           </a:p>
         </p:txBody>
@@ -16910,7 +16909,7 @@
           <p:nvPr/>
         </p:nvPicPr>
         <p:blipFill>
-          <a:blip xmlns:r="http://schemas.openxmlformats.org/officeDocument/2006/relationships" xmlns:a="http://schemas.openxmlformats.org/drawingml/2006/main" r:embed="R035b710158074e70"/>
+          <a:blip xmlns:r="http://schemas.openxmlformats.org/officeDocument/2006/relationships" xmlns:a="http://schemas.openxmlformats.org/drawingml/2006/main" r:embed="Rc914676c7b004d72"/>
           <a:srcRect xmlns:a="http://schemas.openxmlformats.org/drawingml/2006/main" l="-2083" t="0" r="-2083" b="0"/>
           <a:stretch xmlns:a="http://schemas.openxmlformats.org/drawingml/2006/main"/>
         </p:blipFill>
@@ -18315,14 +18314,13 @@
           <p:nvPr/>
         </p:nvPicPr>
         <p:blipFill>
-          <a:blip xmlns:r="http://schemas.openxmlformats.org/officeDocument/2006/relationships" xmlns:a="http://schemas.openxmlformats.org/drawingml/2006/main" r:embed="R96ca6e6c33964ddc"/>
-          <a:srcRect xmlns:a="http://schemas.openxmlformats.org/drawingml/2006/main" l="0" t="0" r="0" b="0"/>
+          <a:blip xmlns:r="http://schemas.openxmlformats.org/officeDocument/2006/relationships" xmlns:a="http://schemas.openxmlformats.org/drawingml/2006/main" r:embed="R9fb51371cb8a4a95"/>
           <a:stretch xmlns:a="http://schemas.openxmlformats.org/drawingml/2006/main"/>
         </p:blipFill>
         <p:spPr>
           <a:xfrm xmlns:a="http://schemas.openxmlformats.org/drawingml/2006/main" flipH="0" flipV="0">
-            <a:off x="10668286" y="2095786"/>
-            <a:ext cx="6096286" cy="6476714"/>
+            <a:off x="10668286" y="3619563"/>
+            <a:ext cx="6096286" cy="3429161"/>
           </a:xfrm>
           <a:prstGeom xmlns:a="http://schemas.openxmlformats.org/drawingml/2006/main" prst="rect">
             <a:avLst/>
@@ -18452,7 +18450,7 @@
           <p:nvPr/>
         </p:nvPicPr>
         <p:blipFill>
-          <a:blip xmlns:r="http://schemas.openxmlformats.org/officeDocument/2006/relationships" xmlns:a="http://schemas.openxmlformats.org/drawingml/2006/main" r:embed="Rca477bb39e924d80"/>
+          <a:blip xmlns:r="http://schemas.openxmlformats.org/officeDocument/2006/relationships" xmlns:a="http://schemas.openxmlformats.org/drawingml/2006/main" r:embed="R574484fa17064c01"/>
           <a:srcRect xmlns:a="http://schemas.openxmlformats.org/drawingml/2006/main" l="-2083" t="0" r="-2083" b="0"/>
           <a:stretch xmlns:a="http://schemas.openxmlformats.org/drawingml/2006/main"/>
         </p:blipFill>
@@ -18575,7 +18573,7 @@
                 <a:ea typeface="페이퍼로지 4 Regular"/>
                 <a:cs typeface="페이퍼로지 4 Regular"/>
               </a:rPr>
-              <a:t>EMPLOYEE</a:t>
+              <a:t>PARTICIPANT</a:t>
             </a:r>
           </a:p>
         </p:txBody>
@@ -18630,7 +18628,7 @@
                 <a:ea typeface="페이퍼로지 2 ExtraLight"/>
                 <a:cs typeface="페이퍼로지 2 ExtraLight"/>
               </a:rPr>
-              <a:t>임직원은 최근 8주 행동에</a:t>
+              <a:t>참여자는 최근 8주 행동에</a:t>
             </a:r>
           </a:p>
           <a:p xmlns:a="http://schemas.openxmlformats.org/drawingml/2006/main">
@@ -19857,14 +19855,13 @@
           <p:nvPr/>
         </p:nvPicPr>
         <p:blipFill>
-          <a:blip xmlns:r="http://schemas.openxmlformats.org/officeDocument/2006/relationships" xmlns:a="http://schemas.openxmlformats.org/drawingml/2006/main" r:embed="R81f45c1ede58446c"/>
-          <a:srcRect xmlns:a="http://schemas.openxmlformats.org/drawingml/2006/main" l="0" t="0" r="0" b="0"/>
+          <a:blip xmlns:r="http://schemas.openxmlformats.org/officeDocument/2006/relationships" xmlns:a="http://schemas.openxmlformats.org/drawingml/2006/main" r:embed="Rb6bfe1111c564dbd"/>
           <a:stretch xmlns:a="http://schemas.openxmlformats.org/drawingml/2006/main"/>
         </p:blipFill>
         <p:spPr>
           <a:xfrm xmlns:a="http://schemas.openxmlformats.org/drawingml/2006/main" flipH="0" flipV="0">
-            <a:off x="10668286" y="2095786"/>
-            <a:ext cx="6096286" cy="6476714"/>
+            <a:off x="10668286" y="3619563"/>
+            <a:ext cx="6096286" cy="3429161"/>
           </a:xfrm>
           <a:prstGeom xmlns:a="http://schemas.openxmlformats.org/drawingml/2006/main" prst="rect">
             <a:avLst/>
@@ -19994,7 +19991,7 @@
           <p:nvPr/>
         </p:nvPicPr>
         <p:blipFill>
-          <a:blip xmlns:r="http://schemas.openxmlformats.org/officeDocument/2006/relationships" xmlns:a="http://schemas.openxmlformats.org/drawingml/2006/main" r:embed="R296d34cb36a2496b"/>
+          <a:blip xmlns:r="http://schemas.openxmlformats.org/officeDocument/2006/relationships" xmlns:a="http://schemas.openxmlformats.org/drawingml/2006/main" r:embed="R16e42a8f67fe4656"/>
           <a:srcRect xmlns:a="http://schemas.openxmlformats.org/drawingml/2006/main" l="-2083" t="0" r="-2083" b="0"/>
           <a:stretch xmlns:a="http://schemas.openxmlformats.org/drawingml/2006/main"/>
         </p:blipFill>
@@ -21399,14 +21396,13 @@
           <p:nvPr/>
         </p:nvPicPr>
         <p:blipFill>
-          <a:blip xmlns:r="http://schemas.openxmlformats.org/officeDocument/2006/relationships" xmlns:a="http://schemas.openxmlformats.org/drawingml/2006/main" r:embed="R044a0f5e892a45e3"/>
-          <a:srcRect xmlns:a="http://schemas.openxmlformats.org/drawingml/2006/main" l="0" t="0" r="0" b="0"/>
+          <a:blip xmlns:r="http://schemas.openxmlformats.org/officeDocument/2006/relationships" xmlns:a="http://schemas.openxmlformats.org/drawingml/2006/main" r:embed="R9a4cf989df00426e"/>
           <a:stretch xmlns:a="http://schemas.openxmlformats.org/drawingml/2006/main"/>
         </p:blipFill>
         <p:spPr>
           <a:xfrm xmlns:a="http://schemas.openxmlformats.org/drawingml/2006/main" flipH="0" flipV="0">
-            <a:off x="10668286" y="2095786"/>
-            <a:ext cx="6096286" cy="6476714"/>
+            <a:off x="10668286" y="3619563"/>
+            <a:ext cx="6096286" cy="3429161"/>
           </a:xfrm>
           <a:prstGeom xmlns:a="http://schemas.openxmlformats.org/drawingml/2006/main" prst="rect">
             <a:avLst/>

--- a/docs/TAP_빠른사용가이드_v3.pptx
+++ b/docs/TAP_빠른사용가이드_v3.pptx
@@ -2,24 +2,24 @@
 <file path=ppt/presentation.xml><?xml version="1.0" encoding="utf-8"?>
 <p:presentation xmlns:p="http://schemas.openxmlformats.org/presentationml/2006/main">
   <p:sldMasterIdLst>
-    <p:sldMasterId xmlns:r="http://schemas.openxmlformats.org/officeDocument/2006/relationships" id="2147483648" r:id="Rdd4b9f2597f4453e"/>
+    <p:sldMasterId xmlns:r="http://schemas.openxmlformats.org/officeDocument/2006/relationships" id="2147483648" r:id="R3c820b1812384ccd"/>
   </p:sldMasterIdLst>
   <p:notesMasterIdLst>
-    <p:notesMasterId xmlns:r="http://schemas.openxmlformats.org/officeDocument/2006/relationships" r:id="R007a536964cd434e"/>
+    <p:notesMasterId xmlns:r="http://schemas.openxmlformats.org/officeDocument/2006/relationships" r:id="R4f2c9f174d1f4377"/>
   </p:notesMasterIdLst>
   <p:sldIdLst>
-    <p:sldId xmlns:r="http://schemas.openxmlformats.org/officeDocument/2006/relationships" id="256" r:id="R8c3e41d15baa4310"/>
-    <p:sldId xmlns:r="http://schemas.openxmlformats.org/officeDocument/2006/relationships" id="257" r:id="R19d0fcb31ff040de"/>
-    <p:sldId xmlns:r="http://schemas.openxmlformats.org/officeDocument/2006/relationships" id="258" r:id="R9476e9e87c7448f1"/>
-    <p:sldId xmlns:r="http://schemas.openxmlformats.org/officeDocument/2006/relationships" id="259" r:id="Rfd4ab9cd14d64044"/>
-    <p:sldId xmlns:r="http://schemas.openxmlformats.org/officeDocument/2006/relationships" id="260" r:id="R2246520730cc41b2"/>
-    <p:sldId xmlns:r="http://schemas.openxmlformats.org/officeDocument/2006/relationships" id="261" r:id="R4dd203cbd5b74dd3"/>
-    <p:sldId xmlns:r="http://schemas.openxmlformats.org/officeDocument/2006/relationships" id="262" r:id="Rbfd58fa392444d5b"/>
-    <p:sldId xmlns:r="http://schemas.openxmlformats.org/officeDocument/2006/relationships" id="263" r:id="R79470ac2d97945ff"/>
-    <p:sldId xmlns:r="http://schemas.openxmlformats.org/officeDocument/2006/relationships" id="264" r:id="R3a0bd71aafe74451"/>
-    <p:sldId xmlns:r="http://schemas.openxmlformats.org/officeDocument/2006/relationships" id="265" r:id="R74618910a8ed444d"/>
-    <p:sldId xmlns:r="http://schemas.openxmlformats.org/officeDocument/2006/relationships" id="266" r:id="R34dd654dfbc543cf"/>
-    <p:sldId xmlns:r="http://schemas.openxmlformats.org/officeDocument/2006/relationships" id="267" r:id="Re3179f797ee14463"/>
+    <p:sldId xmlns:r="http://schemas.openxmlformats.org/officeDocument/2006/relationships" id="256" r:id="R9fed807168a741ce"/>
+    <p:sldId xmlns:r="http://schemas.openxmlformats.org/officeDocument/2006/relationships" id="257" r:id="R1f038625173741dd"/>
+    <p:sldId xmlns:r="http://schemas.openxmlformats.org/officeDocument/2006/relationships" id="258" r:id="R2f60270f67a5422e"/>
+    <p:sldId xmlns:r="http://schemas.openxmlformats.org/officeDocument/2006/relationships" id="259" r:id="R075944d1e7824c85"/>
+    <p:sldId xmlns:r="http://schemas.openxmlformats.org/officeDocument/2006/relationships" id="260" r:id="R5e41c9cbb5d644d5"/>
+    <p:sldId xmlns:r="http://schemas.openxmlformats.org/officeDocument/2006/relationships" id="261" r:id="R89c4382fa0da41cd"/>
+    <p:sldId xmlns:r="http://schemas.openxmlformats.org/officeDocument/2006/relationships" id="262" r:id="Ra46d3516f686440c"/>
+    <p:sldId xmlns:r="http://schemas.openxmlformats.org/officeDocument/2006/relationships" id="263" r:id="R516f4418bf3244ec"/>
+    <p:sldId xmlns:r="http://schemas.openxmlformats.org/officeDocument/2006/relationships" id="264" r:id="R570dd4d26bb544e3"/>
+    <p:sldId xmlns:r="http://schemas.openxmlformats.org/officeDocument/2006/relationships" id="265" r:id="Re5d8e35a347a47bf"/>
+    <p:sldId xmlns:r="http://schemas.openxmlformats.org/officeDocument/2006/relationships" id="266" r:id="Re09f77e0db4b421d"/>
+    <p:sldId xmlns:r="http://schemas.openxmlformats.org/officeDocument/2006/relationships" id="267" r:id="R6c14750eed804256"/>
   </p:sldIdLst>
   <p:sldSz cx="18288000" cy="10287000"/>
   <p:notesSz cx="6858000" cy="9144000"/>
@@ -503,7 +503,12 @@
           </a:p>
           <a:p xmlns:a="http://schemas.openxmlformats.org/drawingml/2006/main">
             <a:r>
-              <a:t>- TAP Streamlit application source and locally verified UI/content, 2026-08-12.</a:t>
+              <a:t>- TAP Streamlit application source and locally verified UI/content, 2026-08-13.</a:t>
+            </a:r>
+          </a:p>
+          <a:p xmlns:a="http://schemas.openxmlformats.org/drawingml/2006/main">
+            <a:r>
+              <a:t>- TAP education-evaluation review: docs/TAP_교육평가_검토보고서_v2.md.</a:t>
             </a:r>
           </a:p>
           <a:p xmlns:a="http://schemas.openxmlformats.org/drawingml/2006/main">
@@ -588,12 +593,17 @@
           </a:p>
           <a:p xmlns:a="http://schemas.openxmlformats.org/drawingml/2006/main">
             <a:r>
-              <a:t>- TAP Streamlit application source and locally verified UI/content, 2026-08-12.</a:t>
-            </a:r>
-          </a:p>
-          <a:p xmlns:a="http://schemas.openxmlformats.org/drawingml/2006/main">
-            <a:r>
-              <a:t>- Screenshot: locally verified TAP screen (question-bank.png), 2026-08-12.</a:t>
+              <a:t>- TAP Streamlit application source and locally verified UI/content, 2026-08-13.</a:t>
+            </a:r>
+          </a:p>
+          <a:p xmlns:a="http://schemas.openxmlformats.org/drawingml/2006/main">
+            <a:r>
+              <a:t>- TAP education-evaluation review: docs/TAP_교육평가_검토보고서_v2.md.</a:t>
+            </a:r>
+          </a:p>
+          <a:p xmlns:a="http://schemas.openxmlformats.org/drawingml/2006/main">
+            <a:r>
+              <a:t>- Screenshot: locally verified TAP screen (question-bank.png), 2026-08-13.</a:t>
             </a:r>
           </a:p>
           <a:p xmlns:a="http://schemas.openxmlformats.org/drawingml/2006/main">
@@ -678,7 +688,12 @@
           </a:p>
           <a:p xmlns:a="http://schemas.openxmlformats.org/drawingml/2006/main">
             <a:r>
-              <a:t>- TAP Streamlit application source and locally verified UI/content, 2026-08-12.</a:t>
+              <a:t>- TAP Streamlit application source and locally verified UI/content, 2026-08-13.</a:t>
+            </a:r>
+          </a:p>
+          <a:p xmlns:a="http://schemas.openxmlformats.org/drawingml/2006/main">
+            <a:r>
+              <a:t>- TAP education-evaluation review: docs/TAP_교육평가_검토보고서_v2.md.</a:t>
             </a:r>
           </a:p>
           <a:p xmlns:a="http://schemas.openxmlformats.org/drawingml/2006/main">
@@ -763,7 +778,12 @@
           </a:p>
           <a:p xmlns:a="http://schemas.openxmlformats.org/drawingml/2006/main">
             <a:r>
-              <a:t>- TAP Streamlit application source and locally verified UI/content, 2026-08-12.</a:t>
+              <a:t>- TAP Streamlit application source and locally verified UI/content, 2026-08-13.</a:t>
+            </a:r>
+          </a:p>
+          <a:p xmlns:a="http://schemas.openxmlformats.org/drawingml/2006/main">
+            <a:r>
+              <a:t>- TAP education-evaluation review: docs/TAP_교육평가_검토보고서_v2.md.</a:t>
             </a:r>
           </a:p>
           <a:p xmlns:a="http://schemas.openxmlformats.org/drawingml/2006/main">
@@ -848,7 +868,12 @@
           </a:p>
           <a:p xmlns:a="http://schemas.openxmlformats.org/drawingml/2006/main">
             <a:r>
-              <a:t>- TAP Streamlit application source and locally verified UI/content, 2026-08-12.</a:t>
+              <a:t>- TAP Streamlit application source and locally verified UI/content, 2026-08-13.</a:t>
+            </a:r>
+          </a:p>
+          <a:p xmlns:a="http://schemas.openxmlformats.org/drawingml/2006/main">
+            <a:r>
+              <a:t>- TAP education-evaluation review: docs/TAP_교육평가_검토보고서_v2.md.</a:t>
             </a:r>
           </a:p>
           <a:p xmlns:a="http://schemas.openxmlformats.org/drawingml/2006/main">
@@ -933,7 +958,12 @@
           </a:p>
           <a:p xmlns:a="http://schemas.openxmlformats.org/drawingml/2006/main">
             <a:r>
-              <a:t>- TAP Streamlit application source and locally verified UI/content, 2026-08-12.</a:t>
+              <a:t>- TAP Streamlit application source and locally verified UI/content, 2026-08-13.</a:t>
+            </a:r>
+          </a:p>
+          <a:p xmlns:a="http://schemas.openxmlformats.org/drawingml/2006/main">
+            <a:r>
+              <a:t>- TAP education-evaluation review: docs/TAP_교육평가_검토보고서_v2.md.</a:t>
             </a:r>
           </a:p>
           <a:p xmlns:a="http://schemas.openxmlformats.org/drawingml/2006/main">
@@ -1018,7 +1048,12 @@
           </a:p>
           <a:p xmlns:a="http://schemas.openxmlformats.org/drawingml/2006/main">
             <a:r>
-              <a:t>- TAP Streamlit application source and locally verified UI/content, 2026-08-12.</a:t>
+              <a:t>- TAP Streamlit application source and locally verified UI/content, 2026-08-13.</a:t>
+            </a:r>
+          </a:p>
+          <a:p xmlns:a="http://schemas.openxmlformats.org/drawingml/2006/main">
+            <a:r>
+              <a:t>- TAP education-evaluation review: docs/TAP_교육평가_검토보고서_v2.md.</a:t>
             </a:r>
           </a:p>
           <a:p xmlns:a="http://schemas.openxmlformats.org/drawingml/2006/main">
@@ -1103,7 +1138,12 @@
           </a:p>
           <a:p xmlns:a="http://schemas.openxmlformats.org/drawingml/2006/main">
             <a:r>
-              <a:t>- TAP Streamlit application source and locally verified UI/content, 2026-08-12.</a:t>
+              <a:t>- TAP Streamlit application source and locally verified UI/content, 2026-08-13.</a:t>
+            </a:r>
+          </a:p>
+          <a:p xmlns:a="http://schemas.openxmlformats.org/drawingml/2006/main">
+            <a:r>
+              <a:t>- TAP education-evaluation review: docs/TAP_교육평가_검토보고서_v2.md.</a:t>
             </a:r>
           </a:p>
           <a:p xmlns:a="http://schemas.openxmlformats.org/drawingml/2006/main">
@@ -1188,7 +1228,12 @@
           </a:p>
           <a:p xmlns:a="http://schemas.openxmlformats.org/drawingml/2006/main">
             <a:r>
-              <a:t>- TAP Streamlit application source and locally verified UI/content, 2026-08-12.</a:t>
+              <a:t>- TAP Streamlit application source and locally verified UI/content, 2026-08-13.</a:t>
+            </a:r>
+          </a:p>
+          <a:p xmlns:a="http://schemas.openxmlformats.org/drawingml/2006/main">
+            <a:r>
+              <a:t>- TAP education-evaluation review: docs/TAP_교육평가_검토보고서_v2.md.</a:t>
             </a:r>
           </a:p>
           <a:p xmlns:a="http://schemas.openxmlformats.org/drawingml/2006/main">
@@ -1273,12 +1318,17 @@
           </a:p>
           <a:p xmlns:a="http://schemas.openxmlformats.org/drawingml/2006/main">
             <a:r>
-              <a:t>- TAP Streamlit application source and locally verified UI/content, 2026-08-12.</a:t>
-            </a:r>
-          </a:p>
-          <a:p xmlns:a="http://schemas.openxmlformats.org/drawingml/2006/main">
-            <a:r>
-              <a:t>- Screenshot: locally verified TAP screen (project-setup.png), 2026-08-12.</a:t>
+              <a:t>- TAP Streamlit application source and locally verified UI/content, 2026-08-13.</a:t>
+            </a:r>
+          </a:p>
+          <a:p xmlns:a="http://schemas.openxmlformats.org/drawingml/2006/main">
+            <a:r>
+              <a:t>- TAP education-evaluation review: docs/TAP_교육평가_검토보고서_v2.md.</a:t>
+            </a:r>
+          </a:p>
+          <a:p xmlns:a="http://schemas.openxmlformats.org/drawingml/2006/main">
+            <a:r>
+              <a:t>- Screenshot: locally verified TAP screen (project-setup.png), 2026-08-13.</a:t>
             </a:r>
           </a:p>
           <a:p xmlns:a="http://schemas.openxmlformats.org/drawingml/2006/main">
@@ -1363,12 +1413,17 @@
           </a:p>
           <a:p xmlns:a="http://schemas.openxmlformats.org/drawingml/2006/main">
             <a:r>
-              <a:t>- TAP Streamlit application source and locally verified UI/content, 2026-08-12.</a:t>
-            </a:r>
-          </a:p>
-          <a:p xmlns:a="http://schemas.openxmlformats.org/drawingml/2006/main">
-            <a:r>
-              <a:t>- Screenshot: locally verified TAP screen (assessment.png), 2026-08-12.</a:t>
+              <a:t>- TAP Streamlit application source and locally verified UI/content, 2026-08-13.</a:t>
+            </a:r>
+          </a:p>
+          <a:p xmlns:a="http://schemas.openxmlformats.org/drawingml/2006/main">
+            <a:r>
+              <a:t>- TAP education-evaluation review: docs/TAP_교육평가_검토보고서_v2.md.</a:t>
+            </a:r>
+          </a:p>
+          <a:p xmlns:a="http://schemas.openxmlformats.org/drawingml/2006/main">
+            <a:r>
+              <a:t>- Screenshot: locally verified TAP screen (assessment.png), 2026-08-13.</a:t>
             </a:r>
           </a:p>
           <a:p xmlns:a="http://schemas.openxmlformats.org/drawingml/2006/main">
@@ -1453,12 +1508,17 @@
           </a:p>
           <a:p xmlns:a="http://schemas.openxmlformats.org/drawingml/2006/main">
             <a:r>
-              <a:t>- TAP Streamlit application source and locally verified UI/content, 2026-08-12.</a:t>
-            </a:r>
-          </a:p>
-          <a:p xmlns:a="http://schemas.openxmlformats.org/drawingml/2006/main">
-            <a:r>
-              <a:t>- Screenshot: locally verified TAP screen (organization-report.png), 2026-08-12.</a:t>
+              <a:t>- TAP Streamlit application source and locally verified UI/content, 2026-08-13.</a:t>
+            </a:r>
+          </a:p>
+          <a:p xmlns:a="http://schemas.openxmlformats.org/drawingml/2006/main">
+            <a:r>
+              <a:t>- TAP education-evaluation review: docs/TAP_교육평가_검토보고서_v2.md.</a:t>
+            </a:r>
+          </a:p>
+          <a:p xmlns:a="http://schemas.openxmlformats.org/drawingml/2006/main">
+            <a:r>
+              <a:t>- Screenshot: locally verified TAP screen (organization-report.png), 2026-08-13.</a:t>
             </a:r>
           </a:p>
           <a:p xmlns:a="http://schemas.openxmlformats.org/drawingml/2006/main">
@@ -1694,8 +1754,8 @@
   </p:cSld>
   <p:clrMap bg1="lt1" tx1="dk1" bg2="lt2" tx2="dk2" accent1="accent1" accent2="accent2" accent3="accent3" accent4="accent4" accent5="accent5" accent6="accent6" hlink="hlink" folHlink="folHlink"/>
   <p:sldLayoutIdLst>
-    <p:sldLayoutId xmlns:r="http://schemas.openxmlformats.org/officeDocument/2006/relationships" id="2147483649" r:id="R9ef68fcd43914285"/>
-    <p:sldLayoutId xmlns:r="http://schemas.openxmlformats.org/officeDocument/2006/relationships" id="2147483650" r:id="Rf14f6069e8c543ab"/>
+    <p:sldLayoutId xmlns:r="http://schemas.openxmlformats.org/officeDocument/2006/relationships" id="2147483649" r:id="R1f41691f2f9e4e4f"/>
+    <p:sldLayoutId xmlns:r="http://schemas.openxmlformats.org/officeDocument/2006/relationships" id="2147483650" r:id="R93252bea6e1843d0"/>
   </p:sldLayoutIdLst>
   <p:hf sldNum="0" hdr="0" ftr="0" dt="0"/>
   <p:txStyles>
@@ -2224,7 +2284,7 @@
           <p:nvPr/>
         </p:nvPicPr>
         <p:blipFill>
-          <a:blip xmlns:r="http://schemas.openxmlformats.org/officeDocument/2006/relationships" xmlns:a="http://schemas.openxmlformats.org/drawingml/2006/main" r:embed="R8b66cbf3fd244cf8"/>
+          <a:blip xmlns:r="http://schemas.openxmlformats.org/officeDocument/2006/relationships" xmlns:a="http://schemas.openxmlformats.org/drawingml/2006/main" r:embed="R7edfa00d68f049ab"/>
           <a:srcRect xmlns:a="http://schemas.openxmlformats.org/drawingml/2006/main" l="0" t="-400" r="0" b="-400"/>
           <a:stretch xmlns:a="http://schemas.openxmlformats.org/drawingml/2006/main"/>
         </p:blipFill>
@@ -2247,7 +2307,7 @@
           <p:nvPr/>
         </p:nvPicPr>
         <p:blipFill>
-          <a:blip xmlns:r="http://schemas.openxmlformats.org/officeDocument/2006/relationships" xmlns:a="http://schemas.openxmlformats.org/drawingml/2006/main" r:embed="R63fd2bcca4a74942"/>
+          <a:blip xmlns:r="http://schemas.openxmlformats.org/officeDocument/2006/relationships" xmlns:a="http://schemas.openxmlformats.org/drawingml/2006/main" r:embed="R632a43915a33403c"/>
           <a:srcRect xmlns:a="http://schemas.openxmlformats.org/drawingml/2006/main" l="-2083" t="0" r="-2083" b="0"/>
           <a:stretch xmlns:a="http://schemas.openxmlformats.org/drawingml/2006/main"/>
         </p:blipFill>
@@ -2366,7 +2426,7 @@
                 <a:ea typeface="페이퍼로지 5 Medium"/>
                 <a:cs typeface="페이퍼로지 5 Medium"/>
               </a:rPr>
-              <a:t>회원사 무료 업무행동 진단</a:t>
+              <a:t>회원사 교육 전후 역량평가</a:t>
             </a:r>
           </a:p>
         </p:txBody>
@@ -2424,7 +2484,7 @@
                 <a:ea typeface="페이퍼로지 2 ExtraLight"/>
                 <a:cs typeface="페이퍼로지 2 ExtraLight"/>
               </a:rPr>
-              <a:t>TAP 빠른 사용설명서</a:t>
+              <a:t>TAP 사용설명서</a:t>
             </a:r>
           </a:p>
           <a:p xmlns:a="http://schemas.openxmlformats.org/drawingml/2006/main">
@@ -2448,7 +2508,7 @@
                 <a:ea typeface="페이퍼로지 6 SemiBold"/>
                 <a:cs typeface="페이퍼로지 6 SemiBold"/>
               </a:rPr>
-              <a:t>진단 결과를 교육의 다음 행동으로</a:t>
+              <a:t>교육 전후 변화를 다음 개선으로</a:t>
             </a:r>
           </a:p>
         </p:txBody>
@@ -2880,7 +2940,7 @@
           <p:nvPr/>
         </p:nvPicPr>
         <p:blipFill>
-          <a:blip xmlns:r="http://schemas.openxmlformats.org/officeDocument/2006/relationships" xmlns:a="http://schemas.openxmlformats.org/drawingml/2006/main" r:embed="R5a0fec5106b44346"/>
+          <a:blip xmlns:r="http://schemas.openxmlformats.org/officeDocument/2006/relationships" xmlns:a="http://schemas.openxmlformats.org/drawingml/2006/main" r:embed="R2beb95d6c10142af"/>
           <a:srcRect xmlns:a="http://schemas.openxmlformats.org/drawingml/2006/main" l="-2083" t="0" r="-2083" b="0"/>
           <a:stretch xmlns:a="http://schemas.openxmlformats.org/drawingml/2006/main"/>
         </p:blipFill>
@@ -3058,7 +3118,7 @@
                 <a:ea typeface="페이퍼로지 2 ExtraLight"/>
                 <a:cs typeface="페이퍼로지 2 ExtraLight"/>
               </a:rPr>
-              <a:t>KMA 관리자는 회원사 점수가 아니라</a:t>
+              <a:t>운영 현황을 확인하고</a:t>
             </a:r>
           </a:p>
           <a:p xmlns:a="http://schemas.openxmlformats.org/drawingml/2006/main">
@@ -3082,7 +3142,7 @@
                 <a:ea typeface="페이퍼로지 6 SemiBold"/>
                 <a:cs typeface="페이퍼로지 6 SemiBold"/>
               </a:rPr>
-              <a:t>도구 품질을 관리합니다</a:t>
+              <a:t>문항 품질을 검수합니다</a:t>
             </a:r>
           </a:p>
         </p:txBody>
@@ -3137,7 +3197,7 @@
                 <a:ea typeface="페이퍼로지 3 Light"/>
                 <a:cs typeface="페이퍼로지 3 Light"/>
               </a:rPr>
-              <a:t>문항 버전 · 검수상태 · 과정 매핑 · 감사로그를 관리하며 개인 · 조직 점수는 기본 열람하지 않습니다.</a:t>
+              <a:t>회원사·프로젝트 수치는 운영 목업이며, 배포 문항은행을 검수합니다. 개인·조직 점수는 기본 열람하지 않습니다.</a:t>
             </a:r>
           </a:p>
         </p:txBody>
@@ -3745,7 +3805,7 @@
                 <a:ea typeface="페이퍼로지 5 Medium"/>
                 <a:cs typeface="페이퍼로지 5 Medium"/>
               </a:rPr>
-              <a:t>내려받기</a:t>
+              <a:t>주요 버튼</a:t>
             </a:r>
           </a:p>
         </p:txBody>
@@ -4285,7 +4345,7 @@
           <p:nvPr/>
         </p:nvPicPr>
         <p:blipFill>
-          <a:blip xmlns:r="http://schemas.openxmlformats.org/officeDocument/2006/relationships" xmlns:a="http://schemas.openxmlformats.org/drawingml/2006/main" r:embed="Rda5a4f580adb4ec1"/>
+          <a:blip xmlns:r="http://schemas.openxmlformats.org/officeDocument/2006/relationships" xmlns:a="http://schemas.openxmlformats.org/drawingml/2006/main" r:embed="R881dfa2b459649ca"/>
           <a:stretch xmlns:a="http://schemas.openxmlformats.org/drawingml/2006/main"/>
         </p:blipFill>
         <p:spPr>
@@ -4329,7 +4389,7 @@
           <p:nvPr/>
         </p:nvPicPr>
         <p:blipFill>
-          <a:blip xmlns:r="http://schemas.openxmlformats.org/officeDocument/2006/relationships" xmlns:a="http://schemas.openxmlformats.org/drawingml/2006/main" r:embed="Rb9857adf456847db"/>
+          <a:blip xmlns:r="http://schemas.openxmlformats.org/officeDocument/2006/relationships" xmlns:a="http://schemas.openxmlformats.org/drawingml/2006/main" r:embed="R37ff4497a2dc4211"/>
           <a:srcRect xmlns:a="http://schemas.openxmlformats.org/drawingml/2006/main" l="-2083" t="0" r="-2083" b="0"/>
           <a:stretch xmlns:a="http://schemas.openxmlformats.org/drawingml/2006/main"/>
         </p:blipFill>
@@ -4703,7 +4763,7 @@
                 <a:ea typeface="페이퍼로지 4 Regular"/>
                 <a:cs typeface="페이퍼로지 4 Regular"/>
               </a:rPr>
-              <a:t>새 프로젝트 만들기</a:t>
+              <a:t>사용설명서</a:t>
             </a:r>
           </a:p>
         </p:txBody>
@@ -4910,7 +4970,7 @@
                 <a:ea typeface="페이퍼로지 4 Regular"/>
                 <a:cs typeface="페이퍼로지 4 Regular"/>
               </a:rPr>
-              <a:t>프로젝트 설정 열기</a:t>
+              <a:t>교육평가 프로젝트</a:t>
             </a:r>
           </a:p>
           <a:p xmlns:a="http://schemas.openxmlformats.org/drawingml/2006/main">
@@ -4934,7 +4994,7 @@
                 <a:ea typeface="페이퍼로지 4 Regular"/>
                 <a:cs typeface="페이퍼로지 4 Regular"/>
               </a:rPr>
-              <a:t>진단 참여 화면 열기</a:t>
+              <a:t>사전·사후 검사</a:t>
             </a:r>
           </a:p>
         </p:txBody>
@@ -5165,7 +5225,7 @@
                 <a:ea typeface="페이퍼로지 4 Regular"/>
                 <a:cs typeface="페이퍼로지 4 Regular"/>
               </a:rPr>
-              <a:t>이전 문항 · 진단 초기화</a:t>
+              <a:t>이전 문항</a:t>
             </a:r>
           </a:p>
         </p:txBody>
@@ -5372,7 +5432,7 @@
                 <a:ea typeface="페이퍼로지 4 Regular"/>
                 <a:cs typeface="페이퍼로지 4 Regular"/>
               </a:rPr>
-              <a:t>과정 확인</a:t>
+              <a:t>결과 다시 보기</a:t>
             </a:r>
           </a:p>
           <a:p xmlns:a="http://schemas.openxmlformats.org/drawingml/2006/main">
@@ -5396,7 +5456,7 @@
                 <a:ea typeface="페이퍼로지 4 Regular"/>
                 <a:cs typeface="페이퍼로지 4 Regular"/>
               </a:rPr>
-              <a:t>결과 JSON · 결과 CSV</a:t>
+              <a:t>결과 CSV</a:t>
             </a:r>
           </a:p>
         </p:txBody>
@@ -5603,7 +5663,7 @@
                 <a:ea typeface="페이퍼로지 4 Regular"/>
                 <a:cs typeface="페이퍼로지 4 Regular"/>
               </a:rPr>
-              <a:t>CSV 양식 · 리포트 HTML</a:t>
+              <a:t>인쇄용 리포트 HTML</a:t>
             </a:r>
           </a:p>
           <a:p xmlns:a="http://schemas.openxmlformats.org/drawingml/2006/main">
@@ -6092,7 +6152,7 @@
                 <a:ea typeface="페이퍼로지 4 Regular"/>
                 <a:cs typeface="페이퍼로지 4 Regular"/>
               </a:rPr>
-              <a:t>APPENDIX</a:t>
+              <a:t>REFERENCE</a:t>
             </a:r>
           </a:p>
         </p:txBody>
@@ -6178,7 +6238,7 @@
           <p:nvPr/>
         </p:nvPicPr>
         <p:blipFill>
-          <a:blip xmlns:r="http://schemas.openxmlformats.org/officeDocument/2006/relationships" xmlns:a="http://schemas.openxmlformats.org/drawingml/2006/main" r:embed="Rcba93933f45a420e"/>
+          <a:blip xmlns:r="http://schemas.openxmlformats.org/officeDocument/2006/relationships" xmlns:a="http://schemas.openxmlformats.org/drawingml/2006/main" r:embed="Rc334e960428145ba"/>
           <a:srcRect xmlns:a="http://schemas.openxmlformats.org/drawingml/2006/main" l="-2083" t="0" r="-2083" b="0"/>
           <a:stretch xmlns:a="http://schemas.openxmlformats.org/drawingml/2006/main"/>
         </p:blipFill>
@@ -6201,7 +6261,7 @@
           <p:nvPr/>
         </p:nvPicPr>
         <p:blipFill>
-          <a:blip xmlns:r="http://schemas.openxmlformats.org/officeDocument/2006/relationships" xmlns:a="http://schemas.openxmlformats.org/drawingml/2006/main" r:embed="Rf0e10247930a4925"/>
+          <a:blip xmlns:r="http://schemas.openxmlformats.org/officeDocument/2006/relationships" xmlns:a="http://schemas.openxmlformats.org/drawingml/2006/main" r:embed="R14983dfa91304914"/>
           <a:srcRect xmlns:a="http://schemas.openxmlformats.org/drawingml/2006/main" l="-2083" t="0" r="-2083" b="0"/>
           <a:stretch xmlns:a="http://schemas.openxmlformats.org/drawingml/2006/main"/>
         </p:blipFill>
@@ -6522,7 +6582,7 @@
                 <a:ea typeface="페이퍼로지 2 ExtraLight"/>
                 <a:cs typeface="페이퍼로지 2 ExtraLight"/>
               </a:rPr>
-              <a:t>역할을 고르고 첫 버튼 하나만</a:t>
+              <a:t>역할을 고른 뒤 첫 메뉴에서</a:t>
             </a:r>
           </a:p>
           <a:p xmlns:a="http://schemas.openxmlformats.org/drawingml/2006/main">
@@ -6546,7 +6606,7 @@
                 <a:ea typeface="페이퍼로지 6 SemiBold"/>
                 <a:cs typeface="페이퍼로지 6 SemiBold"/>
               </a:rPr>
-              <a:t>누르면 시작됩니다</a:t>
+              <a:t>시작하세요</a:t>
             </a:r>
           </a:p>
         </p:txBody>
@@ -6601,7 +6661,7 @@
                 <a:ea typeface="페이퍼로지 3 Light"/>
                 <a:cs typeface="페이퍼로지 3 Light"/>
               </a:rPr>
-              <a:t>막히면 ‘처음 사용 안내’로 돌아오고, 아래 순서대로 상태를 확인하세요.</a:t>
+              <a:t>막히면 ‘처음 사용 안내’를 열거나 사이드바의 ‘사용설명서’ PDF를 확인하세요.</a:t>
             </a:r>
           </a:p>
         </p:txBody>
@@ -7041,7 +7101,7 @@
                 <a:ea typeface="페이퍼로지 4 Regular"/>
                 <a:cs typeface="페이퍼로지 4 Regular"/>
               </a:rPr>
-              <a:t>새 프로젝트 만들기</a:t>
+              <a:t>교육평가 프로젝트</a:t>
             </a:r>
           </a:p>
         </p:txBody>
@@ -7151,7 +7211,7 @@
                 <a:ea typeface="페이퍼로지 4 Regular"/>
                 <a:cs typeface="페이퍼로지 4 Regular"/>
               </a:rPr>
-              <a:t>진단 참여</a:t>
+              <a:t>사전·사후 검사</a:t>
             </a:r>
           </a:p>
         </p:txBody>
@@ -7371,7 +7431,7 @@
                 <a:ea typeface="페이퍼로지 4 Regular"/>
                 <a:cs typeface="페이퍼로지 4 Regular"/>
               </a:rPr>
-              <a:t>프로젝트 설정으로 이동</a:t>
+              <a:t>교육평가 설정으로 이동</a:t>
             </a:r>
           </a:p>
         </p:txBody>
@@ -7481,7 +7541,7 @@
                 <a:ea typeface="페이퍼로지 4 Regular"/>
                 <a:cs typeface="페이퍼로지 4 Regular"/>
               </a:rPr>
-              <a:t>응답 완료 여부 확인</a:t>
+              <a:t>전·후 완료 확인</a:t>
             </a:r>
           </a:p>
         </p:txBody>
@@ -7591,7 +7651,7 @@
                 <a:ea typeface="페이퍼로지 4 Regular"/>
                 <a:cs typeface="페이퍼로지 4 Regular"/>
               </a:rPr>
-              <a:t>필수 7열 · 버전 확인</a:t>
+              <a:t>필수 열 · ID · 시점 확인</a:t>
             </a:r>
           </a:p>
         </p:txBody>
@@ -7811,7 +7871,7 @@
           <p:nvPr/>
         </p:nvPicPr>
         <p:blipFill>
-          <a:blip xmlns:r="http://schemas.openxmlformats.org/officeDocument/2006/relationships" xmlns:a="http://schemas.openxmlformats.org/drawingml/2006/main" r:embed="R44be7d70bd5a43e5"/>
+          <a:blip xmlns:r="http://schemas.openxmlformats.org/officeDocument/2006/relationships" xmlns:a="http://schemas.openxmlformats.org/drawingml/2006/main" r:embed="R76adf81a182d4f69"/>
           <a:srcRect xmlns:a="http://schemas.openxmlformats.org/drawingml/2006/main" l="-2083" t="0" r="-2083" b="0"/>
           <a:stretch xmlns:a="http://schemas.openxmlformats.org/drawingml/2006/main"/>
         </p:blipFill>
@@ -7875,7 +7935,7 @@
                 <a:ea typeface="페이퍼로지 2 ExtraLight"/>
                 <a:cs typeface="페이퍼로지 2 ExtraLight"/>
               </a:rPr>
-              <a:t>TAP은 점수를 매기는 도구가 아니라,</a:t>
+              <a:t>TAP은 교육 전후의 변화를</a:t>
             </a:r>
           </a:p>
           <a:p xmlns:a="http://schemas.openxmlformats.org/drawingml/2006/main">
@@ -7899,7 +7959,7 @@
                 <a:ea typeface="페이퍼로지 6 SemiBold"/>
                 <a:cs typeface="페이퍼로지 6 SemiBold"/>
               </a:rPr>
-              <a:t>다음 행동을 정하는 도구입니다</a:t>
+              <a:t>같은 기준으로 확인합니다</a:t>
             </a:r>
           </a:p>
         </p:txBody>
@@ -7954,7 +8014,7 @@
                 <a:ea typeface="페이퍼로지 3 Light"/>
                 <a:cs typeface="페이퍼로지 3 Light"/>
               </a:rPr>
-              <a:t>최근 8주의 실제 업무행동을 확인해 개인에게는 개발 방향을,</a:t>
+              <a:t>교육 전 출발점을 기록하고, 현업 적용 8~10주 후 같은 행동문항으로</a:t>
             </a:r>
           </a:p>
           <a:p xmlns:a="http://schemas.openxmlformats.org/drawingml/2006/main">
@@ -7978,7 +8038,7 @@
                 <a:ea typeface="페이퍼로지 3 Light"/>
                 <a:cs typeface="페이퍼로지 3 Light"/>
               </a:rPr>
-              <a:t>조직에는 공통 교육수요를 제공합니다.</a:t>
+              <a:t>다시 측정해 변화와 현업 적용환경을 확인합니다.</a:t>
             </a:r>
           </a:p>
         </p:txBody>
@@ -8088,7 +8148,7 @@
                 <a:ea typeface="페이퍼로지 5 Medium"/>
                 <a:cs typeface="페이퍼로지 5 Medium"/>
               </a:rPr>
-              <a:t>개인 패턴</a:t>
+              <a:t>사전검사</a:t>
             </a:r>
           </a:p>
         </p:txBody>
@@ -8143,7 +8203,7 @@
                 <a:ea typeface="페이퍼로지 4 Regular"/>
                 <a:cs typeface="페이퍼로지 4 Regular"/>
               </a:rPr>
-              <a:t>행동빈도와</a:t>
+              <a:t>교육 전</a:t>
             </a:r>
           </a:p>
           <a:p xmlns:a="http://schemas.openxmlformats.org/drawingml/2006/main">
@@ -8167,7 +8227,7 @@
                 <a:ea typeface="페이퍼로지 4 Regular"/>
                 <a:cs typeface="페이퍼로지 4 Regular"/>
               </a:rPr>
-              <a:t>개발 후보 확인</a:t>
+              <a:t>출발점 기록</a:t>
             </a:r>
           </a:p>
         </p:txBody>
@@ -8277,7 +8337,7 @@
                 <a:ea typeface="페이퍼로지 5 Medium"/>
                 <a:cs typeface="페이퍼로지 5 Medium"/>
               </a:rPr>
-              <a:t>조직 교육수요</a:t>
+              <a:t>사후검사</a:t>
             </a:r>
           </a:p>
         </p:txBody>
@@ -8332,7 +8392,7 @@
                 <a:ea typeface="페이퍼로지 4 Regular"/>
                 <a:cs typeface="페이퍼로지 4 Regular"/>
               </a:rPr>
-              <a:t>N≥5 익명 집계와</a:t>
+              <a:t>같은 문항으로</a:t>
             </a:r>
           </a:p>
           <a:p xmlns:a="http://schemas.openxmlformats.org/drawingml/2006/main">
@@ -8356,7 +8416,7 @@
                 <a:ea typeface="페이퍼로지 4 Regular"/>
                 <a:cs typeface="페이퍼로지 4 Regular"/>
               </a:rPr>
-              <a:t>목표격차 확인</a:t>
+              <a:t>현업 행동 재측정</a:t>
             </a:r>
           </a:p>
         </p:txBody>
@@ -8521,7 +8581,7 @@
                 <a:ea typeface="페이퍼로지 4 Regular"/>
                 <a:cs typeface="페이퍼로지 4 Regular"/>
               </a:rPr>
-              <a:t>교육 또는 조직환경</a:t>
+              <a:t>짝지은 변화와 전이</a:t>
             </a:r>
           </a:p>
           <a:p xmlns:a="http://schemas.openxmlformats.org/drawingml/2006/main">
@@ -8545,7 +8605,7 @@
                 <a:ea typeface="페이퍼로지 4 Regular"/>
                 <a:cs typeface="페이퍼로지 4 Regular"/>
               </a:rPr>
-              <a:t>개선 결정</a:t>
+              <a:t>조건 확인</a:t>
             </a:r>
           </a:p>
         </p:txBody>
@@ -8907,7 +8967,7 @@
           <p:nvPr/>
         </p:nvPicPr>
         <p:blipFill>
-          <a:blip xmlns:r="http://schemas.openxmlformats.org/officeDocument/2006/relationships" xmlns:a="http://schemas.openxmlformats.org/drawingml/2006/main" r:embed="Rb426ffc7a2f7421f"/>
+          <a:blip xmlns:r="http://schemas.openxmlformats.org/officeDocument/2006/relationships" xmlns:a="http://schemas.openxmlformats.org/drawingml/2006/main" r:embed="R8b604f90197d4327"/>
           <a:srcRect xmlns:a="http://schemas.openxmlformats.org/drawingml/2006/main" l="-2083" t="0" r="-2083" b="0"/>
           <a:stretch xmlns:a="http://schemas.openxmlformats.org/drawingml/2006/main"/>
         </p:blipFill>
@@ -9043,7 +9103,7 @@
                 <a:ea typeface="페이퍼로지 2 ExtraLight"/>
                 <a:cs typeface="페이퍼로지 2 ExtraLight"/>
               </a:rPr>
-              <a:t>세 역할은 서로 다른 화면과</a:t>
+              <a:t>역할마다 필요한 화면과</a:t>
             </a:r>
             <a:endParaRPr sz="4800">
               <a:solidFill>
@@ -9075,7 +9135,7 @@
                 <a:ea typeface="페이퍼로지 6 SemiBold"/>
                 <a:cs typeface="페이퍼로지 6 SemiBold"/>
               </a:rPr>
-              <a:t>데이터만 봅니다</a:t>
+              <a:t>기본 열람범위가 다릅니다</a:t>
             </a:r>
             <a:endParaRPr sz="4800">
               <a:solidFill>
@@ -9138,7 +9198,7 @@
                 <a:ea typeface="페이퍼로지 3 Light"/>
                 <a:cs typeface="페이퍼로지 3 Light"/>
               </a:rPr>
-              <a:t>역할 전환에서 내 역할을 고르면 필요한 메뉴만 표시됩니다.</a:t>
+              <a:t>역할 전환은 데모 화면 안내용이며 실제 운영 권한 인증을 대신하지 않습니다.</a:t>
             </a:r>
           </a:p>
         </p:txBody>
@@ -9303,7 +9363,7 @@
                 <a:ea typeface="페이퍼로지 4 Regular"/>
                 <a:cs typeface="페이퍼로지 4 Regular"/>
               </a:rPr>
-              <a:t>프로젝트 · 조직집계</a:t>
+              <a:t>교육 일정 · 조직 변화</a:t>
             </a:r>
           </a:p>
         </p:txBody>
@@ -9468,7 +9528,7 @@
                 <a:ea typeface="페이퍼로지 4 Regular"/>
                 <a:cs typeface="페이퍼로지 4 Regular"/>
               </a:rPr>
-              <a:t>내 응답 · 내 리포트</a:t>
+              <a:t>사전·사후 · 내 변화</a:t>
             </a:r>
           </a:p>
         </p:txBody>
@@ -9633,7 +9693,7 @@
                 <a:ea typeface="페이퍼로지 4 Regular"/>
                 <a:cs typeface="페이퍼로지 4 Regular"/>
               </a:rPr>
-              <a:t>버전 · 문항 · 과정</a:t>
+              <a:t>운영현황 · 문항검수</a:t>
             </a:r>
           </a:p>
         </p:txBody>
@@ -10531,7 +10591,7 @@
                 <a:ea typeface="페이퍼로지 5 Medium"/>
                 <a:cs typeface="페이퍼로지 5 Medium"/>
               </a:rPr>
-              <a:t>점수 미열람</a:t>
+              <a:t>점수 기본 미열람</a:t>
             </a:r>
           </a:p>
         </p:txBody>
@@ -10789,7 +10849,7 @@
           <p:nvPr/>
         </p:nvPicPr>
         <p:blipFill>
-          <a:blip xmlns:r="http://schemas.openxmlformats.org/officeDocument/2006/relationships" xmlns:a="http://schemas.openxmlformats.org/drawingml/2006/main" r:embed="R5960ab507f124d85"/>
+          <a:blip xmlns:r="http://schemas.openxmlformats.org/officeDocument/2006/relationships" xmlns:a="http://schemas.openxmlformats.org/drawingml/2006/main" r:embed="R26e34f80e16f462b"/>
           <a:srcRect xmlns:a="http://schemas.openxmlformats.org/drawingml/2006/main" l="-2083" t="0" r="-2083" b="0"/>
           <a:stretch xmlns:a="http://schemas.openxmlformats.org/drawingml/2006/main"/>
         </p:blipFill>
@@ -10925,7 +10985,7 @@
                 <a:ea typeface="페이퍼로지 2 ExtraLight"/>
                 <a:cs typeface="페이퍼로지 2 ExtraLight"/>
               </a:rPr>
-              <a:t>결과는 교육과 조직개선 중</a:t>
+              <a:t>결과는 전후 변화와 현업 전이 중</a:t>
             </a:r>
           </a:p>
           <a:p xmlns:a="http://schemas.openxmlformats.org/drawingml/2006/main">
@@ -10949,7 +11009,7 @@
                 <a:ea typeface="페이퍼로지 6 SemiBold"/>
                 <a:cs typeface="페이퍼로지 6 SemiBold"/>
               </a:rPr>
-              <a:t>무엇이 필요한지 가르는 데 씁니다</a:t>
+              <a:t>무엇을 보완할지 정하는 데 씁니다</a:t>
             </a:r>
           </a:p>
         </p:txBody>
@@ -11004,7 +11064,7 @@
                 <a:ea typeface="페이퍼로지 3 Light"/>
                 <a:cs typeface="페이퍼로지 3 Light"/>
               </a:rPr>
-              <a:t>낮은 점수만으로 교육을 추천하지 않습니다.</a:t>
+              <a:t>사후점수만으로 교육효과를 단정하지 않습니다.</a:t>
             </a:r>
           </a:p>
           <a:p xmlns:a="http://schemas.openxmlformats.org/drawingml/2006/main">
@@ -11028,7 +11088,7 @@
                 <a:ea typeface="페이퍼로지 3 Light"/>
                 <a:cs typeface="페이퍼로지 3 Light"/>
               </a:rPr>
-              <a:t>업무환경 · 권한 · 도구 · 프로세스를 함께 봅니다.</a:t>
+              <a:t>적용기회 · 상사지원 · 도구 · 권한을 함께 봅니다.</a:t>
             </a:r>
           </a:p>
         </p:txBody>
@@ -11125,7 +11185,7 @@
                 <a:ea typeface="페이퍼로지 5 Medium"/>
                 <a:cs typeface="페이퍼로지 5 Medium"/>
               </a:rPr>
-              <a:t>개인 리포트 · 본인의 행동 패턴 확인</a:t>
+              <a:t>개인 리포트 · 본인의 사전·사후 변화 확인</a:t>
             </a:r>
           </a:p>
         </p:txBody>
@@ -11180,7 +11240,7 @@
                 <a:ea typeface="페이퍼로지 4 Regular"/>
                 <a:cs typeface="페이퍼로지 4 Regular"/>
               </a:rPr>
-              <a:t>행동빈도 · 개발 후보 · 과정 검토 우선순위</a:t>
+              <a:t>동일 문항의 전후 점수 · 관찰 변화 · 현업 적용환경</a:t>
             </a:r>
           </a:p>
         </p:txBody>
@@ -11277,7 +11337,7 @@
                 <a:ea typeface="페이퍼로지 5 Medium"/>
                 <a:cs typeface="페이퍼로지 5 Medium"/>
               </a:rPr>
-              <a:t>조직 리포트 · 공통 교육수요 확인</a:t>
+              <a:t>조직 리포트 · 짝지어진 집단 변화 확인</a:t>
             </a:r>
           </a:p>
         </p:txBody>
@@ -11332,7 +11392,7 @@
                 <a:ea typeface="페이퍼로지 5 Medium"/>
                 <a:cs typeface="페이퍼로지 5 Medium"/>
               </a:rPr>
-              <a:t>현재</a:t>
+              <a:t>사전</a:t>
             </a:r>
           </a:p>
         </p:txBody>
@@ -11387,7 +11447,7 @@
                 <a:ea typeface="페이퍼로지 4 Regular"/>
                 <a:cs typeface="페이퍼로지 4 Regular"/>
               </a:rPr>
-              <a:t>조직 평균</a:t>
+              <a:t>출발점</a:t>
             </a:r>
           </a:p>
         </p:txBody>
@@ -11442,7 +11502,7 @@
                 <a:ea typeface="페이퍼로지 5 Medium"/>
                 <a:cs typeface="페이퍼로지 5 Medium"/>
               </a:rPr>
-              <a:t>비교</a:t>
+              <a:t>사후</a:t>
             </a:r>
           </a:p>
         </p:txBody>
@@ -11497,7 +11557,7 @@
                 <a:ea typeface="페이퍼로지 4 Regular"/>
                 <a:cs typeface="페이퍼로지 4 Regular"/>
               </a:rPr>
-              <a:t>목표 격차</a:t>
+              <a:t>관찰 변화</a:t>
             </a:r>
           </a:p>
         </p:txBody>
@@ -11552,7 +11612,7 @@
                 <a:ea typeface="페이퍼로지 5 Medium"/>
                 <a:cs typeface="페이퍼로지 5 Medium"/>
               </a:rPr>
-              <a:t>판단</a:t>
+              <a:t>맥락</a:t>
             </a:r>
           </a:p>
         </p:txBody>
@@ -11607,7 +11667,7 @@
                 <a:ea typeface="페이퍼로지 4 Regular"/>
                 <a:cs typeface="페이퍼로지 4 Regular"/>
               </a:rPr>
-              <a:t>교육 · 환경</a:t>
+              <a:t>적용환경</a:t>
             </a:r>
           </a:p>
         </p:txBody>
@@ -11772,7 +11832,7 @@
                 <a:ea typeface="페이퍼로지 4 Regular"/>
                 <a:cs typeface="페이퍼로지 4 Regular"/>
               </a:rPr>
-              <a:t>시스템 요인이 주원인이면 교육 추천을 중단하고 조직개선을 먼저 검토합니다.</a:t>
+              <a:t>비교집단이 없으면 교육의 인과효과가 아니라 ‘교육 전후 관찰된 변화’로 표현합니다.</a:t>
             </a:r>
           </a:p>
         </p:txBody>
@@ -12031,7 +12091,7 @@
                 <a:ea typeface="페이퍼로지 6 SemiBold"/>
                 <a:cs typeface="페이퍼로지 6 SemiBold"/>
               </a:rPr>
-              <a:t>결과 해석의 두 갈래</a:t>
+              <a:t>교육 전후 해석의 흐름</a:t>
             </a:r>
           </a:p>
         </p:txBody>
@@ -12443,7 +12503,7 @@
                 <a:ea typeface="페이퍼로지 6 SemiBold"/>
                 <a:cs typeface="페이퍼로지 6 SemiBold"/>
               </a:rPr>
-              <a:t>행동</a:t>
+              <a:t>사전</a:t>
             </a:r>
           </a:p>
           <a:p xmlns:a="http://schemas.openxmlformats.org/drawingml/2006/main">
@@ -12467,7 +12527,7 @@
                 <a:ea typeface="페이퍼로지 6 SemiBold"/>
                 <a:cs typeface="페이퍼로지 6 SemiBold"/>
               </a:rPr>
-              <a:t>패턴</a:t>
+              <a:t>출발점</a:t>
             </a:r>
           </a:p>
         </p:txBody>
@@ -12530,7 +12590,7 @@
                 <a:ea typeface="페이퍼로지 6 SemiBold"/>
                 <a:cs typeface="페이퍼로지 6 SemiBold"/>
               </a:rPr>
-              <a:t>과정</a:t>
+              <a:t>전이</a:t>
             </a:r>
           </a:p>
           <a:p xmlns:a="http://schemas.openxmlformats.org/drawingml/2006/main">
@@ -12554,7 +12614,7 @@
                 <a:ea typeface="페이퍼로지 6 SemiBold"/>
                 <a:cs typeface="페이퍼로지 6 SemiBold"/>
               </a:rPr>
-              <a:t>검토</a:t>
+              <a:t>조건</a:t>
             </a:r>
           </a:p>
         </p:txBody>
@@ -12623,7 +12683,7 @@
                 <a:ea typeface="페이퍼로지 6 SemiBold"/>
                 <a:cs typeface="페이퍼로지 6 SemiBold"/>
               </a:rPr>
-              <a:t>공통</a:t>
+              <a:t>사후</a:t>
             </a:r>
           </a:p>
           <a:p xmlns:a="http://schemas.openxmlformats.org/drawingml/2006/main">
@@ -12647,7 +12707,7 @@
                 <a:ea typeface="페이퍼로지 6 SemiBold"/>
                 <a:cs typeface="페이퍼로지 6 SemiBold"/>
               </a:rPr>
-              <a:t>수요</a:t>
+              <a:t>재측정</a:t>
             </a:r>
           </a:p>
         </p:txBody>
@@ -12734,7 +12794,7 @@
                 <a:ea typeface="페이퍼로지 6 SemiBold"/>
                 <a:cs typeface="페이퍼로지 6 SemiBold"/>
               </a:rPr>
-              <a:t>계획</a:t>
+              <a:t>보완</a:t>
             </a:r>
           </a:p>
         </p:txBody>
@@ -12803,7 +12863,7 @@
                 <a:ea typeface="페이퍼로지 6 SemiBold"/>
                 <a:cs typeface="페이퍼로지 6 SemiBold"/>
               </a:rPr>
-              <a:t>원인</a:t>
+              <a:t>짝지은</a:t>
             </a:r>
           </a:p>
           <a:p xmlns:a="http://schemas.openxmlformats.org/drawingml/2006/main">
@@ -12827,7 +12887,7 @@
                 <a:ea typeface="페이퍼로지 6 SemiBold"/>
                 <a:cs typeface="페이퍼로지 6 SemiBold"/>
               </a:rPr>
-              <a:t>확인</a:t>
+              <a:t>변화</a:t>
             </a:r>
           </a:p>
         </p:txBody>
@@ -12985,7 +13045,7 @@
                 <a:ea typeface="페이퍼로지 5 Medium"/>
                 <a:cs typeface="페이퍼로지 5 Medium"/>
               </a:rPr>
-              <a:t>개인 순위가 아니라 다음 행동을 정하는 진단</a:t>
+              <a:t>개인 순위가 아니라 같은 사람의 전후 변화를 확인</a:t>
             </a:r>
           </a:p>
         </p:txBody>
@@ -13021,7 +13081,7 @@
           <p:nvPr/>
         </p:nvPicPr>
         <p:blipFill>
-          <a:blip xmlns:r="http://schemas.openxmlformats.org/officeDocument/2006/relationships" xmlns:a="http://schemas.openxmlformats.org/drawingml/2006/main" r:embed="Raa6cbfdf2be24b93"/>
+          <a:blip xmlns:r="http://schemas.openxmlformats.org/officeDocument/2006/relationships" xmlns:a="http://schemas.openxmlformats.org/drawingml/2006/main" r:embed="Rde75508f8b0e4732"/>
           <a:srcRect xmlns:a="http://schemas.openxmlformats.org/drawingml/2006/main" l="-2083" t="0" r="-2083" b="0"/>
           <a:stretch xmlns:a="http://schemas.openxmlformats.org/drawingml/2006/main"/>
         </p:blipFill>
@@ -13164,7 +13224,7 @@
                 <a:ea typeface="페이퍼로지 3 Light"/>
                 <a:cs typeface="페이퍼로지 3 Light"/>
               </a:rPr>
-              <a:t>교육개발용 자기보고 진단입니다. 아래 여섯 가지 경계를 지켜 사용합니다.</a:t>
+              <a:t>교육개발용 자기보고 전후 평가입니다. 아래 여섯 가지 경계를 지켜 사용합니다.</a:t>
             </a:r>
           </a:p>
         </p:txBody>
@@ -13730,7 +13790,7 @@
                 <a:ea typeface="페이퍼로지 5 Medium"/>
                 <a:cs typeface="페이퍼로지 5 Medium"/>
               </a:rPr>
-              <a:t>공유는 선택</a:t>
+              <a:t>개인결과 공유는 선택</a:t>
             </a:r>
           </a:p>
         </p:txBody>
@@ -13992,7 +14052,7 @@
                 <a:ea typeface="페이퍼로지 4 Regular"/>
                 <a:cs typeface="페이퍼로지 4 Regular"/>
               </a:rPr>
-              <a:t>소수집단 보호</a:t>
+              <a:t>공개 최소기준일 뿐</a:t>
             </a:r>
           </a:p>
         </p:txBody>
@@ -14144,7 +14204,7 @@
                 <a:ea typeface="페이퍼로지 5 Medium"/>
                 <a:cs typeface="페이퍼로지 5 Medium"/>
               </a:rPr>
-              <a:t>실데이터 금지</a:t>
+              <a:t>공개 데모 실데이터 금지</a:t>
             </a:r>
           </a:p>
         </p:txBody>
@@ -14199,7 +14259,7 @@
                 <a:ea typeface="페이퍼로지 4 Regular"/>
                 <a:cs typeface="페이퍼로지 4 Regular"/>
               </a:rPr>
-              <a:t>공개 데모는 세션 저장</a:t>
+              <a:t>세션에만 임시 저장</a:t>
             </a:r>
           </a:p>
         </p:txBody>
@@ -14351,7 +14411,7 @@
                 <a:ea typeface="페이퍼로지 5 Medium"/>
                 <a:cs typeface="페이퍼로지 5 Medium"/>
               </a:rPr>
-              <a:t>실증 전 단계</a:t>
+              <a:t>인과효과 아님</a:t>
             </a:r>
           </a:p>
         </p:txBody>
@@ -14406,7 +14466,7 @@
                 <a:ea typeface="페이퍼로지 4 Regular"/>
                 <a:cs typeface="페이퍼로지 4 Regular"/>
               </a:rPr>
-              <a:t>인지면접 · 파일럿 필요</a:t>
+              <a:t>비교집단 없으면 관찰 변화</a:t>
             </a:r>
           </a:p>
         </p:txBody>
@@ -14768,7 +14828,7 @@
           <p:nvPr/>
         </p:nvPicPr>
         <p:blipFill>
-          <a:blip xmlns:r="http://schemas.openxmlformats.org/officeDocument/2006/relationships" xmlns:a="http://schemas.openxmlformats.org/drawingml/2006/main" r:embed="R2a41ddb894634187"/>
+          <a:blip xmlns:r="http://schemas.openxmlformats.org/officeDocument/2006/relationships" xmlns:a="http://schemas.openxmlformats.org/drawingml/2006/main" r:embed="Ra73b3daf828c495b"/>
           <a:srcRect xmlns:a="http://schemas.openxmlformats.org/drawingml/2006/main" l="-2083" t="0" r="-2083" b="0"/>
           <a:stretch xmlns:a="http://schemas.openxmlformats.org/drawingml/2006/main"/>
         </p:blipFill>
@@ -14791,7 +14851,7 @@
           <p:nvPr/>
         </p:nvPicPr>
         <p:blipFill>
-          <a:blip xmlns:r="http://schemas.openxmlformats.org/officeDocument/2006/relationships" xmlns:a="http://schemas.openxmlformats.org/drawingml/2006/main" r:embed="Rabe3cf17e7e843c1"/>
+          <a:blip xmlns:r="http://schemas.openxmlformats.org/officeDocument/2006/relationships" xmlns:a="http://schemas.openxmlformats.org/drawingml/2006/main" r:embed="R804ef4a7f396442a"/>
           <a:srcRect xmlns:a="http://schemas.openxmlformats.org/drawingml/2006/main" l="-2083" t="0" r="-2083" b="0"/>
           <a:stretch xmlns:a="http://schemas.openxmlformats.org/drawingml/2006/main"/>
         </p:blipFill>
@@ -15112,7 +15172,7 @@
                 <a:ea typeface="페이퍼로지 2 ExtraLight"/>
                 <a:cs typeface="페이퍼로지 2 ExtraLight"/>
               </a:rPr>
-              <a:t>실제 사용은 네 단계로</a:t>
+              <a:t>설정 - 사전 - 교육·현업 -</a:t>
             </a:r>
           </a:p>
           <a:p xmlns:a="http://schemas.openxmlformats.org/drawingml/2006/main">
@@ -15136,7 +15196,7 @@
                 <a:ea typeface="페이퍼로지 6 SemiBold"/>
                 <a:cs typeface="페이퍼로지 6 SemiBold"/>
               </a:rPr>
-              <a:t>끝납니다</a:t>
+              <a:t>사후·리포트 순서입니다</a:t>
             </a:r>
           </a:p>
         </p:txBody>
@@ -15191,7 +15251,7 @@
                 <a:ea typeface="페이퍼로지 3 Light"/>
                 <a:cs typeface="페이퍼로지 3 Light"/>
               </a:rPr>
-              <a:t>앞부분의 원칙을 이해했다면, 이제 아래 순서만 따라가면 됩니다.</a:t>
+              <a:t>교육 전 출발점을 기록하고 현업 적용 뒤 같은 기준으로 다시 측정합니다.</a:t>
             </a:r>
           </a:p>
         </p:txBody>
@@ -15576,7 +15636,7 @@
                 <a:ea typeface="페이퍼로지 5 Medium"/>
                 <a:cs typeface="페이퍼로지 5 Medium"/>
               </a:rPr>
-              <a:t>프로젝트</a:t>
+              <a:t>교육·평가 설정</a:t>
             </a:r>
           </a:p>
         </p:txBody>
@@ -15631,7 +15691,7 @@
                 <a:ea typeface="페이퍼로지 4 Regular"/>
                 <a:cs typeface="페이퍼로지 4 Regular"/>
               </a:rPr>
-              <a:t>대상 · 기간 · 역량</a:t>
+              <a:t>교육일 · 전후 기간 · 역량</a:t>
             </a:r>
           </a:p>
         </p:txBody>
@@ -15686,7 +15746,7 @@
                 <a:ea typeface="페이퍼로지 5 Medium"/>
                 <a:cs typeface="페이퍼로지 5 Medium"/>
               </a:rPr>
-              <a:t>행동 응답</a:t>
+              <a:t>사전검사</a:t>
             </a:r>
           </a:p>
         </p:txBody>
@@ -15741,7 +15801,7 @@
                 <a:ea typeface="페이퍼로지 4 Regular"/>
                 <a:cs typeface="페이퍼로지 4 Regular"/>
               </a:rPr>
-              <a:t>최근 8주 · 1~5</a:t>
+              <a:t>교육 전 최근 8주</a:t>
             </a:r>
           </a:p>
         </p:txBody>
@@ -15796,7 +15856,7 @@
                 <a:ea typeface="페이퍼로지 5 Medium"/>
                 <a:cs typeface="페이퍼로지 5 Medium"/>
               </a:rPr>
-              <a:t>개인 결과</a:t>
+              <a:t>교육·현업 적용</a:t>
             </a:r>
           </a:p>
         </p:txBody>
@@ -15851,7 +15911,7 @@
                 <a:ea typeface="페이퍼로지 4 Regular"/>
                 <a:cs typeface="페이퍼로지 4 Regular"/>
               </a:rPr>
-              <a:t>본인 패턴 확인</a:t>
+              <a:t>적용기회 확보</a:t>
             </a:r>
           </a:p>
         </p:txBody>
@@ -15906,7 +15966,7 @@
                 <a:ea typeface="페이퍼로지 5 Medium"/>
                 <a:cs typeface="페이퍼로지 5 Medium"/>
               </a:rPr>
-              <a:t>조직 집계</a:t>
+              <a:t>사후검사</a:t>
             </a:r>
           </a:p>
         </p:txBody>
@@ -15961,7 +16021,7 @@
                 <a:ea typeface="페이퍼로지 4 Regular"/>
                 <a:cs typeface="페이퍼로지 4 Regular"/>
               </a:rPr>
-              <a:t>N≥5 익명 결과</a:t>
+              <a:t>같은 문항 · 최근 8주</a:t>
             </a:r>
           </a:p>
         </p:txBody>
@@ -16016,7 +16076,7 @@
                 <a:ea typeface="페이퍼로지 5 Medium"/>
                 <a:cs typeface="페이퍼로지 5 Medium"/>
               </a:rPr>
-              <a:t>원인 확인</a:t>
+              <a:t>짝지은 리포트</a:t>
             </a:r>
           </a:p>
         </p:txBody>
@@ -16071,7 +16131,7 @@
                 <a:ea typeface="페이퍼로지 4 Regular"/>
                 <a:cs typeface="페이퍼로지 4 Regular"/>
               </a:rPr>
-              <a:t>교육 · 환경 구분</a:t>
+              <a:t>동일 ID · 동일 버전</a:t>
             </a:r>
           </a:p>
         </p:txBody>
@@ -16126,7 +16186,7 @@
                 <a:ea typeface="페이퍼로지 5 Medium"/>
                 <a:cs typeface="페이퍼로지 5 Medium"/>
               </a:rPr>
-              <a:t>다음 행동</a:t>
+              <a:t>전이 해석</a:t>
             </a:r>
           </a:p>
         </p:txBody>
@@ -16181,7 +16241,7 @@
                 <a:ea typeface="페이퍼로지 4 Regular"/>
                 <a:cs typeface="페이퍼로지 4 Regular"/>
               </a:rPr>
-              <a:t>과정 또는 개선</a:t>
+              <a:t>교육 보완 · 환경 개선</a:t>
             </a:r>
           </a:p>
         </p:txBody>
@@ -16474,7 +16534,7 @@
                 <a:ea typeface="페이퍼로지 4 Regular"/>
                 <a:cs typeface="페이퍼로지 4 Regular"/>
               </a:rPr>
-              <a:t>1. 설정</a:t>
+              <a:t>1. 설정·사전</a:t>
             </a:r>
           </a:p>
           <a:p xmlns:a="http://schemas.openxmlformats.org/drawingml/2006/main">
@@ -16498,7 +16558,7 @@
                 <a:ea typeface="페이퍼로지 6 SemiBold"/>
                 <a:cs typeface="페이퍼로지 6 SemiBold"/>
               </a:rPr>
-              <a:t>교육담당자</a:t>
+              <a:t>교육담당자·참여자</a:t>
             </a:r>
           </a:p>
         </p:txBody>
@@ -16569,7 +16629,7 @@
                 <a:ea typeface="페이퍼로지 4 Regular"/>
                 <a:cs typeface="페이퍼로지 4 Regular"/>
               </a:rPr>
-              <a:t>2. 응답</a:t>
+              <a:t>2. 교육</a:t>
             </a:r>
           </a:p>
           <a:p xmlns:a="http://schemas.openxmlformats.org/drawingml/2006/main">
@@ -16593,7 +16653,7 @@
                 <a:ea typeface="페이퍼로지 6 SemiBold"/>
                 <a:cs typeface="페이퍼로지 6 SemiBold"/>
               </a:rPr>
-              <a:t>참여자</a:t>
+              <a:t>현업 적용</a:t>
             </a:r>
           </a:p>
         </p:txBody>
@@ -16686,7 +16746,7 @@
                 <a:ea typeface="페이퍼로지 4 Regular"/>
                 <a:cs typeface="페이퍼로지 4 Regular"/>
               </a:rPr>
-              <a:t>4단계 사용</a:t>
+              <a:t>전후 평가</a:t>
             </a:r>
           </a:p>
         </p:txBody>
@@ -16757,7 +16817,7 @@
                 <a:ea typeface="페이퍼로지 4 Regular"/>
                 <a:cs typeface="페이퍼로지 4 Regular"/>
               </a:rPr>
-              <a:t>3–4. 결과</a:t>
+              <a:t>3–4. 사후</a:t>
             </a:r>
           </a:p>
           <a:p xmlns:a="http://schemas.openxmlformats.org/drawingml/2006/main">
@@ -16781,7 +16841,7 @@
                 <a:ea typeface="페이퍼로지 6 SemiBold"/>
                 <a:cs typeface="페이퍼로지 6 SemiBold"/>
               </a:rPr>
-              <a:t>해석 · 결정</a:t>
+              <a:t>변화 · 전이</a:t>
             </a:r>
           </a:p>
         </p:txBody>
@@ -16909,7 +16969,7 @@
           <p:nvPr/>
         </p:nvPicPr>
         <p:blipFill>
-          <a:blip xmlns:r="http://schemas.openxmlformats.org/officeDocument/2006/relationships" xmlns:a="http://schemas.openxmlformats.org/drawingml/2006/main" r:embed="Rc914676c7b004d72"/>
+          <a:blip xmlns:r="http://schemas.openxmlformats.org/officeDocument/2006/relationships" xmlns:a="http://schemas.openxmlformats.org/drawingml/2006/main" r:embed="R6dd34fe127614ae1"/>
           <a:srcRect xmlns:a="http://schemas.openxmlformats.org/drawingml/2006/main" l="-2083" t="0" r="-2083" b="0"/>
           <a:stretch xmlns:a="http://schemas.openxmlformats.org/drawingml/2006/main"/>
         </p:blipFill>
@@ -17087,7 +17147,7 @@
                 <a:ea typeface="페이퍼로지 2 ExtraLight"/>
                 <a:cs typeface="페이퍼로지 2 ExtraLight"/>
               </a:rPr>
-              <a:t>교육담당자는 프로젝트를 구성한 뒤</a:t>
+              <a:t>교육담당자는 교육과 검사 일정을</a:t>
             </a:r>
           </a:p>
           <a:p xmlns:a="http://schemas.openxmlformats.org/drawingml/2006/main">
@@ -17111,7 +17171,7 @@
                 <a:ea typeface="페이퍼로지 6 SemiBold"/>
                 <a:cs typeface="페이퍼로지 6 SemiBold"/>
               </a:rPr>
-              <a:t>참여 화면을 확인합니다</a:t>
+              <a:t>먼저 고정합니다</a:t>
             </a:r>
           </a:p>
         </p:txBody>
@@ -17166,7 +17226,7 @@
                 <a:ea typeface="페이퍼로지 3 Light"/>
                 <a:cs typeface="페이퍼로지 3 Light"/>
               </a:rPr>
-              <a:t>진단 프로젝트에서 기본정보 · 역량 · 임시 목표 · 추천조건을 한 번에 저장합니다.</a:t>
+              <a:t>교육명 · 교육일 · 사전/사후 기간 · 측정역량을 한 번에 저장합니다. 사후는 교육 8~10주 후를 권장합니다.</a:t>
             </a:r>
           </a:p>
         </p:txBody>
@@ -17415,7 +17475,31 @@
                 <a:ea typeface="페이퍼로지 4 Regular"/>
                 <a:cs typeface="페이퍼로지 4 Regular"/>
               </a:rPr>
-              <a:t>프로젝트명 · 대상 · 기간</a:t>
+              <a:t>프로젝트명 · 교육과정명</a:t>
+            </a:r>
+          </a:p>
+          <a:p xmlns:a="http://schemas.openxmlformats.org/drawingml/2006/main">
+            <a:pPr algn="l">
+              <a:buNone/>
+              <a:defRPr>
+                <a:solidFill>
+                  <a:srgbClr val="1E2324"/>
+                </a:solidFill>
+                <a:latin typeface="페이퍼로지 4 Regular"/>
+                <a:ea typeface="페이퍼로지 4 Regular"/>
+                <a:cs typeface="페이퍼로지 4 Regular"/>
+              </a:defRPr>
+            </a:pPr>
+            <a:r>
+              <a:rPr sz="1100">
+                <a:solidFill>
+                  <a:srgbClr val="1E2324"/>
+                </a:solidFill>
+                <a:latin typeface="페이퍼로지 4 Regular"/>
+                <a:ea typeface="페이퍼로지 4 Regular"/>
+                <a:cs typeface="페이퍼로지 4 Regular"/>
+              </a:rPr>
+              <a:t>응답 대상</a:t>
             </a:r>
           </a:p>
         </p:txBody>
@@ -17567,7 +17651,7 @@
                 <a:ea typeface="페이퍼로지 4 Regular"/>
                 <a:cs typeface="페이퍼로지 4 Regular"/>
               </a:rPr>
-              <a:t>기본 + 선택역량 최대 4개</a:t>
+              <a:t>교육일 · 교육 전후 검사기간</a:t>
             </a:r>
           </a:p>
         </p:txBody>
@@ -17677,7 +17761,31 @@
                 <a:ea typeface="페이퍼로지 4 Regular"/>
                 <a:cs typeface="페이퍼로지 4 Regular"/>
               </a:rPr>
-              <a:t>목표 · 우선역량 · 격차 원인</a:t>
+              <a:t>현재 열 검사</a:t>
+            </a:r>
+          </a:p>
+          <a:p xmlns:a="http://schemas.openxmlformats.org/drawingml/2006/main">
+            <a:pPr algn="l">
+              <a:buNone/>
+              <a:defRPr>
+                <a:solidFill>
+                  <a:srgbClr val="1E2324"/>
+                </a:solidFill>
+                <a:latin typeface="페이퍼로지 4 Regular"/>
+                <a:ea typeface="페이퍼로지 4 Regular"/>
+                <a:cs typeface="페이퍼로지 4 Regular"/>
+              </a:defRPr>
+            </a:pPr>
+            <a:r>
+              <a:rPr sz="1000">
+                <a:solidFill>
+                  <a:srgbClr val="1E2324"/>
+                </a:solidFill>
+                <a:latin typeface="페이퍼로지 4 Regular"/>
+                <a:ea typeface="페이퍼로지 4 Regular"/>
+                <a:cs typeface="페이퍼로지 4 Regular"/>
+              </a:rPr>
+              <a:t>측정역량</a:t>
             </a:r>
           </a:p>
         </p:txBody>
@@ -17926,7 +18034,7 @@
                 <a:ea typeface="페이퍼로지 4 Regular"/>
                 <a:cs typeface="페이퍼로지 4 Regular"/>
               </a:rPr>
-              <a:t>새 프로젝트 만들기</a:t>
+              <a:t>교육평가 프로젝트 만들기</a:t>
             </a:r>
           </a:p>
         </p:txBody>
@@ -18078,7 +18186,7 @@
                 <a:ea typeface="페이퍼로지 4 Regular"/>
                 <a:cs typeface="페이퍼로지 4 Regular"/>
               </a:rPr>
-              <a:t>설정 저장 후 참여자 화면 확인</a:t>
+              <a:t>설정 저장 후 사전검사 확인</a:t>
             </a:r>
           </a:p>
         </p:txBody>
@@ -18188,7 +18296,31 @@
                 <a:ea typeface="페이퍼로지 4 Regular"/>
                 <a:cs typeface="페이퍼로지 4 Regular"/>
               </a:rPr>
-              <a:t>참여자 미리보기</a:t>
+              <a:t>교육 전·후</a:t>
+            </a:r>
+          </a:p>
+          <a:p xmlns:a="http://schemas.openxmlformats.org/drawingml/2006/main">
+            <a:pPr algn="l">
+              <a:buNone/>
+              <a:defRPr>
+                <a:solidFill>
+                  <a:srgbClr val="1E2324"/>
+                </a:solidFill>
+                <a:latin typeface="페이퍼로지 4 Regular"/>
+                <a:ea typeface="페이퍼로지 4 Regular"/>
+                <a:cs typeface="페이퍼로지 4 Regular"/>
+              </a:defRPr>
+            </a:pPr>
+            <a:r>
+              <a:rPr sz="1100">
+                <a:solidFill>
+                  <a:srgbClr val="1E2324"/>
+                </a:solidFill>
+                <a:latin typeface="페이퍼로지 4 Regular"/>
+                <a:ea typeface="페이퍼로지 4 Regular"/>
+                <a:cs typeface="페이퍼로지 4 Regular"/>
+              </a:rPr>
+              <a:t>역량평가 선택</a:t>
             </a:r>
           </a:p>
         </p:txBody>
@@ -18314,7 +18446,7 @@
           <p:nvPr/>
         </p:nvPicPr>
         <p:blipFill>
-          <a:blip xmlns:r="http://schemas.openxmlformats.org/officeDocument/2006/relationships" xmlns:a="http://schemas.openxmlformats.org/drawingml/2006/main" r:embed="R9fb51371cb8a4a95"/>
+          <a:blip xmlns:r="http://schemas.openxmlformats.org/officeDocument/2006/relationships" xmlns:a="http://schemas.openxmlformats.org/drawingml/2006/main" r:embed="R90641c02e9fb4f43"/>
           <a:stretch xmlns:a="http://schemas.openxmlformats.org/drawingml/2006/main"/>
         </p:blipFill>
         <p:spPr>
@@ -18450,7 +18582,7 @@
           <p:nvPr/>
         </p:nvPicPr>
         <p:blipFill>
-          <a:blip xmlns:r="http://schemas.openxmlformats.org/officeDocument/2006/relationships" xmlns:a="http://schemas.openxmlformats.org/drawingml/2006/main" r:embed="R574484fa17064c01"/>
+          <a:blip xmlns:r="http://schemas.openxmlformats.org/officeDocument/2006/relationships" xmlns:a="http://schemas.openxmlformats.org/drawingml/2006/main" r:embed="R8123ead290ae4fd7"/>
           <a:srcRect xmlns:a="http://schemas.openxmlformats.org/drawingml/2006/main" l="-2083" t="0" r="-2083" b="0"/>
           <a:stretch xmlns:a="http://schemas.openxmlformats.org/drawingml/2006/main"/>
         </p:blipFill>
@@ -18628,7 +18760,7 @@
                 <a:ea typeface="페이퍼로지 2 ExtraLight"/>
                 <a:cs typeface="페이퍼로지 2 ExtraLight"/>
               </a:rPr>
-              <a:t>참여자는 최근 8주 행동에</a:t>
+              <a:t>참여자는 사전·사후에</a:t>
             </a:r>
           </a:p>
           <a:p xmlns:a="http://schemas.openxmlformats.org/drawingml/2006/main">
@@ -18652,7 +18784,7 @@
                 <a:ea typeface="페이퍼로지 6 SemiBold"/>
                 <a:cs typeface="페이퍼로지 6 SemiBold"/>
               </a:rPr>
-              <a:t>한 문항씩 답합니다</a:t>
+              <a:t>같은 기준으로 답합니다</a:t>
             </a:r>
           </a:p>
         </p:txBody>
@@ -18707,7 +18839,7 @@
                 <a:ea typeface="페이퍼로지 3 Light"/>
                 <a:cs typeface="페이퍼로지 3 Light"/>
               </a:rPr>
-              <a:t>좋아 보이는 답이 아니라 실제 행동 빈도를 선택합니다. 수행 기회 없음은 미응답과 다르게 처리됩니다.</a:t>
+              <a:t>현재 검사단계를 먼저 확인합니다. 두 시점 모두 최근 8주 실제 행동을 답하고, 사후에는 현업 적용환경도 응답합니다.</a:t>
             </a:r>
           </a:p>
         </p:txBody>
@@ -18956,7 +19088,7 @@
                 <a:ea typeface="페이퍼로지 4 Regular"/>
                 <a:cs typeface="페이퍼로지 4 Regular"/>
               </a:rPr>
-              <a:t>수행 기회 없음 또는 1~5 선택</a:t>
+              <a:t>사전검사 · 사후검사 단계 확인</a:t>
             </a:r>
           </a:p>
         </p:txBody>
@@ -19108,7 +19240,7 @@
                 <a:ea typeface="페이퍼로지 4 Regular"/>
                 <a:cs typeface="페이퍼로지 4 Regular"/>
               </a:rPr>
-              <a:t>저장하고 다음</a:t>
+              <a:t>수행 기회 없음 또는 1~5</a:t>
             </a:r>
           </a:p>
         </p:txBody>
@@ -19218,7 +19350,7 @@
                 <a:ea typeface="페이퍼로지 4 Regular"/>
                 <a:cs typeface="페이퍼로지 4 Regular"/>
               </a:rPr>
-              <a:t>마지막 문항에서 결과 보기</a:t>
+              <a:t>현업전이 환경 확인 · 결과 보기</a:t>
             </a:r>
           </a:p>
         </p:txBody>
@@ -19619,7 +19751,7 @@
                 <a:ea typeface="페이퍼로지 4 Regular"/>
                 <a:cs typeface="페이퍼로지 4 Regular"/>
               </a:rPr>
-              <a:t>진단 초기화 → 초기화 확인</a:t>
+              <a:t>교육 전·후 검사 초기화 → 확인</a:t>
             </a:r>
           </a:p>
         </p:txBody>
@@ -19729,7 +19861,7 @@
                 <a:ea typeface="페이퍼로지 4 Regular"/>
                 <a:cs typeface="페이퍼로지 4 Regular"/>
               </a:rPr>
-              <a:t>내 리포트 · 과정 확인</a:t>
+              <a:t>내 변화 리포트</a:t>
             </a:r>
           </a:p>
         </p:txBody>
@@ -19855,7 +19987,7 @@
           <p:nvPr/>
         </p:nvPicPr>
         <p:blipFill>
-          <a:blip xmlns:r="http://schemas.openxmlformats.org/officeDocument/2006/relationships" xmlns:a="http://schemas.openxmlformats.org/drawingml/2006/main" r:embed="Rb6bfe1111c564dbd"/>
+          <a:blip xmlns:r="http://schemas.openxmlformats.org/officeDocument/2006/relationships" xmlns:a="http://schemas.openxmlformats.org/drawingml/2006/main" r:embed="R3919f162c8054e66"/>
           <a:stretch xmlns:a="http://schemas.openxmlformats.org/drawingml/2006/main"/>
         </p:blipFill>
         <p:spPr>
@@ -19991,7 +20123,7 @@
           <p:nvPr/>
         </p:nvPicPr>
         <p:blipFill>
-          <a:blip xmlns:r="http://schemas.openxmlformats.org/officeDocument/2006/relationships" xmlns:a="http://schemas.openxmlformats.org/drawingml/2006/main" r:embed="R16e42a8f67fe4656"/>
+          <a:blip xmlns:r="http://schemas.openxmlformats.org/officeDocument/2006/relationships" xmlns:a="http://schemas.openxmlformats.org/drawingml/2006/main" r:embed="R1e37c79d64f94702"/>
           <a:srcRect xmlns:a="http://schemas.openxmlformats.org/drawingml/2006/main" l="-2083" t="0" r="-2083" b="0"/>
           <a:stretch xmlns:a="http://schemas.openxmlformats.org/drawingml/2006/main"/>
         </p:blipFill>
@@ -20169,7 +20301,7 @@
                 <a:ea typeface="페이퍼로지 2 ExtraLight"/>
                 <a:cs typeface="페이퍼로지 2 ExtraLight"/>
               </a:rPr>
-              <a:t>익명 CSV를 올리면</a:t>
+              <a:t>동일 익명 ID의 전후 결과로</a:t>
             </a:r>
           </a:p>
           <a:p xmlns:a="http://schemas.openxmlformats.org/drawingml/2006/main">
@@ -20193,7 +20325,7 @@
                 <a:ea typeface="페이퍼로지 6 SemiBold"/>
                 <a:cs typeface="페이퍼로지 6 SemiBold"/>
               </a:rPr>
-              <a:t>A4 조직 리포트가 완성됩니다</a:t>
+              <a:t>짝지은 변화 리포트를 만듭니다</a:t>
             </a:r>
           </a:p>
         </p:txBody>
@@ -20248,7 +20380,7 @@
                 <a:ea typeface="페이퍼로지 3 Light"/>
                 <a:cs typeface="페이퍼로지 3 Light"/>
               </a:rPr>
-              <a:t>업로드가 없으면 예시 데이터가 표시됩니다. 실제 개인정보 · 기밀자료는 공개 데모에 올리지 마세요.</a:t>
+              <a:t>동일 참여자 · 동일 역량 · 동일 버전의 사전/사후 유효점수만 비교합니다. N&lt;5 결과는 보호됩니다.</a:t>
             </a:r>
           </a:p>
         </p:txBody>
@@ -20497,7 +20629,7 @@
                 <a:ea typeface="페이퍼로지 4 Regular"/>
                 <a:cs typeface="페이퍼로지 4 Regular"/>
               </a:rPr>
-              <a:t>CSV 양식 내려받기</a:t>
+              <a:t>사전·사후 CSV 양식 내려받기</a:t>
             </a:r>
           </a:p>
         </p:txBody>
@@ -20649,7 +20781,7 @@
                 <a:ea typeface="페이퍼로지 4 Regular"/>
                 <a:cs typeface="페이퍼로지 4 Regular"/>
               </a:rPr>
-              <a:t>필수 7열로 익명 결과 작성</a:t>
+              <a:t>익명 조직결과 CSV 업로드</a:t>
             </a:r>
           </a:p>
         </p:txBody>
@@ -20759,7 +20891,7 @@
                 <a:ea typeface="페이퍼로지 4 Regular"/>
                 <a:cs typeface="페이퍼로지 4 Regular"/>
               </a:rPr>
-              <a:t>익명 조직결과 CSV 업로드</a:t>
+              <a:t>동일 ID · pre/post · 버전 확인</a:t>
             </a:r>
           </a:p>
         </p:txBody>
@@ -21396,7 +21528,7 @@
           <p:nvPr/>
         </p:nvPicPr>
         <p:blipFill>
-          <a:blip xmlns:r="http://schemas.openxmlformats.org/officeDocument/2006/relationships" xmlns:a="http://schemas.openxmlformats.org/drawingml/2006/main" r:embed="R9a4cf989df00426e"/>
+          <a:blip xmlns:r="http://schemas.openxmlformats.org/officeDocument/2006/relationships" xmlns:a="http://schemas.openxmlformats.org/drawingml/2006/main" r:embed="Rc317fa18d51b4555"/>
           <a:stretch xmlns:a="http://schemas.openxmlformats.org/drawingml/2006/main"/>
         </p:blipFill>
         <p:spPr>

--- a/docs/TAP_빠른사용가이드_v3.pptx
+++ b/docs/TAP_빠른사용가이드_v3.pptx
@@ -2,24 +2,24 @@
 <file path=ppt/presentation.xml><?xml version="1.0" encoding="utf-8"?>
 <p:presentation xmlns:p="http://schemas.openxmlformats.org/presentationml/2006/main">
   <p:sldMasterIdLst>
-    <p:sldMasterId xmlns:r="http://schemas.openxmlformats.org/officeDocument/2006/relationships" id="2147483648" r:id="R3c820b1812384ccd"/>
+    <p:sldMasterId xmlns:r="http://schemas.openxmlformats.org/officeDocument/2006/relationships" id="2147483648" r:id="R40eaf6342e314e9a"/>
   </p:sldMasterIdLst>
   <p:notesMasterIdLst>
-    <p:notesMasterId xmlns:r="http://schemas.openxmlformats.org/officeDocument/2006/relationships" r:id="R4f2c9f174d1f4377"/>
+    <p:notesMasterId xmlns:r="http://schemas.openxmlformats.org/officeDocument/2006/relationships" r:id="Rc0b7dc3b28d048a9"/>
   </p:notesMasterIdLst>
   <p:sldIdLst>
-    <p:sldId xmlns:r="http://schemas.openxmlformats.org/officeDocument/2006/relationships" id="256" r:id="R9fed807168a741ce"/>
-    <p:sldId xmlns:r="http://schemas.openxmlformats.org/officeDocument/2006/relationships" id="257" r:id="R1f038625173741dd"/>
-    <p:sldId xmlns:r="http://schemas.openxmlformats.org/officeDocument/2006/relationships" id="258" r:id="R2f60270f67a5422e"/>
-    <p:sldId xmlns:r="http://schemas.openxmlformats.org/officeDocument/2006/relationships" id="259" r:id="R075944d1e7824c85"/>
-    <p:sldId xmlns:r="http://schemas.openxmlformats.org/officeDocument/2006/relationships" id="260" r:id="R5e41c9cbb5d644d5"/>
-    <p:sldId xmlns:r="http://schemas.openxmlformats.org/officeDocument/2006/relationships" id="261" r:id="R89c4382fa0da41cd"/>
-    <p:sldId xmlns:r="http://schemas.openxmlformats.org/officeDocument/2006/relationships" id="262" r:id="Ra46d3516f686440c"/>
-    <p:sldId xmlns:r="http://schemas.openxmlformats.org/officeDocument/2006/relationships" id="263" r:id="R516f4418bf3244ec"/>
-    <p:sldId xmlns:r="http://schemas.openxmlformats.org/officeDocument/2006/relationships" id="264" r:id="R570dd4d26bb544e3"/>
-    <p:sldId xmlns:r="http://schemas.openxmlformats.org/officeDocument/2006/relationships" id="265" r:id="Re5d8e35a347a47bf"/>
-    <p:sldId xmlns:r="http://schemas.openxmlformats.org/officeDocument/2006/relationships" id="266" r:id="Re09f77e0db4b421d"/>
-    <p:sldId xmlns:r="http://schemas.openxmlformats.org/officeDocument/2006/relationships" id="267" r:id="R6c14750eed804256"/>
+    <p:sldId xmlns:r="http://schemas.openxmlformats.org/officeDocument/2006/relationships" id="256" r:id="Rf6fd2150cc2f4470"/>
+    <p:sldId xmlns:r="http://schemas.openxmlformats.org/officeDocument/2006/relationships" id="257" r:id="R52da3efd086647a5"/>
+    <p:sldId xmlns:r="http://schemas.openxmlformats.org/officeDocument/2006/relationships" id="258" r:id="Rfff92b360c5f416c"/>
+    <p:sldId xmlns:r="http://schemas.openxmlformats.org/officeDocument/2006/relationships" id="259" r:id="Raf72f16d494f4204"/>
+    <p:sldId xmlns:r="http://schemas.openxmlformats.org/officeDocument/2006/relationships" id="260" r:id="R808a6952d0e748b5"/>
+    <p:sldId xmlns:r="http://schemas.openxmlformats.org/officeDocument/2006/relationships" id="261" r:id="R88b0607fcea748a8"/>
+    <p:sldId xmlns:r="http://schemas.openxmlformats.org/officeDocument/2006/relationships" id="262" r:id="Rde67c377e91c4915"/>
+    <p:sldId xmlns:r="http://schemas.openxmlformats.org/officeDocument/2006/relationships" id="263" r:id="R81dedd68c9424d06"/>
+    <p:sldId xmlns:r="http://schemas.openxmlformats.org/officeDocument/2006/relationships" id="264" r:id="R43c7c6c74ca94923"/>
+    <p:sldId xmlns:r="http://schemas.openxmlformats.org/officeDocument/2006/relationships" id="265" r:id="Rfcf3d71f9cd2401c"/>
+    <p:sldId xmlns:r="http://schemas.openxmlformats.org/officeDocument/2006/relationships" id="266" r:id="R580be1fdd5464110"/>
+    <p:sldId xmlns:r="http://schemas.openxmlformats.org/officeDocument/2006/relationships" id="267" r:id="Re7abb756e9cf4791"/>
   </p:sldIdLst>
   <p:sldSz cx="18288000" cy="10287000"/>
   <p:notesSz cx="6858000" cy="9144000"/>
@@ -593,7 +593,7 @@
           </a:p>
           <a:p xmlns:a="http://schemas.openxmlformats.org/drawingml/2006/main">
             <a:r>
-              <a:t>- TAP Streamlit application source and locally verified UI/content, 2026-08-13.</a:t>
+              <a:t>- TAP Streamlit application source and locally verified UI/content, 2026-08-16.</a:t>
             </a:r>
           </a:p>
           <a:p xmlns:a="http://schemas.openxmlformats.org/drawingml/2006/main">
@@ -603,7 +603,7 @@
           </a:p>
           <a:p xmlns:a="http://schemas.openxmlformats.org/drawingml/2006/main">
             <a:r>
-              <a:t>- Screenshot: locally verified TAP screen (question-bank.png), 2026-08-13.</a:t>
+              <a:t>- Screenshot: locally verified TAP screen (question-bank.png), 2026-08-16.</a:t>
             </a:r>
           </a:p>
           <a:p xmlns:a="http://schemas.openxmlformats.org/drawingml/2006/main">
@@ -688,7 +688,7 @@
           </a:p>
           <a:p xmlns:a="http://schemas.openxmlformats.org/drawingml/2006/main">
             <a:r>
-              <a:t>- TAP Streamlit application source and locally verified UI/content, 2026-08-13.</a:t>
+              <a:t>- TAP Streamlit application source and locally verified UI/content, 2026-08-16.</a:t>
             </a:r>
           </a:p>
           <a:p xmlns:a="http://schemas.openxmlformats.org/drawingml/2006/main">
@@ -778,7 +778,7 @@
           </a:p>
           <a:p xmlns:a="http://schemas.openxmlformats.org/drawingml/2006/main">
             <a:r>
-              <a:t>- TAP Streamlit application source and locally verified UI/content, 2026-08-13.</a:t>
+              <a:t>- TAP Streamlit application source and locally verified UI/content, 2026-08-16.</a:t>
             </a:r>
           </a:p>
           <a:p xmlns:a="http://schemas.openxmlformats.org/drawingml/2006/main">
@@ -1048,7 +1048,7 @@
           </a:p>
           <a:p xmlns:a="http://schemas.openxmlformats.org/drawingml/2006/main">
             <a:r>
-              <a:t>- TAP Streamlit application source and locally verified UI/content, 2026-08-13.</a:t>
+              <a:t>- TAP Streamlit application source and locally verified UI/content, 2026-08-16.</a:t>
             </a:r>
           </a:p>
           <a:p xmlns:a="http://schemas.openxmlformats.org/drawingml/2006/main">
@@ -1228,7 +1228,7 @@
           </a:p>
           <a:p xmlns:a="http://schemas.openxmlformats.org/drawingml/2006/main">
             <a:r>
-              <a:t>- TAP Streamlit application source and locally verified UI/content, 2026-08-13.</a:t>
+              <a:t>- TAP Streamlit application source and locally verified UI/content, 2026-08-16.</a:t>
             </a:r>
           </a:p>
           <a:p xmlns:a="http://schemas.openxmlformats.org/drawingml/2006/main">
@@ -1318,7 +1318,7 @@
           </a:p>
           <a:p xmlns:a="http://schemas.openxmlformats.org/drawingml/2006/main">
             <a:r>
-              <a:t>- TAP Streamlit application source and locally verified UI/content, 2026-08-13.</a:t>
+              <a:t>- TAP Streamlit application source and locally verified UI/content, 2026-08-16.</a:t>
             </a:r>
           </a:p>
           <a:p xmlns:a="http://schemas.openxmlformats.org/drawingml/2006/main">
@@ -1328,7 +1328,7 @@
           </a:p>
           <a:p xmlns:a="http://schemas.openxmlformats.org/drawingml/2006/main">
             <a:r>
-              <a:t>- Screenshot: locally verified TAP screen (project-setup.png), 2026-08-13.</a:t>
+              <a:t>- Screenshot: locally verified TAP screen (dashboard.png), 2026-08-16.</a:t>
             </a:r>
           </a:p>
           <a:p xmlns:a="http://schemas.openxmlformats.org/drawingml/2006/main">
@@ -1413,7 +1413,7 @@
           </a:p>
           <a:p xmlns:a="http://schemas.openxmlformats.org/drawingml/2006/main">
             <a:r>
-              <a:t>- TAP Streamlit application source and locally verified UI/content, 2026-08-13.</a:t>
+              <a:t>- TAP Streamlit application source and locally verified UI/content, 2026-08-16.</a:t>
             </a:r>
           </a:p>
           <a:p xmlns:a="http://schemas.openxmlformats.org/drawingml/2006/main">
@@ -1423,7 +1423,7 @@
           </a:p>
           <a:p xmlns:a="http://schemas.openxmlformats.org/drawingml/2006/main">
             <a:r>
-              <a:t>- Screenshot: locally verified TAP screen (assessment.png), 2026-08-13.</a:t>
+              <a:t>- Screenshot: locally verified TAP screen (assessment.png), 2026-08-16.</a:t>
             </a:r>
           </a:p>
           <a:p xmlns:a="http://schemas.openxmlformats.org/drawingml/2006/main">
@@ -1508,7 +1508,7 @@
           </a:p>
           <a:p xmlns:a="http://schemas.openxmlformats.org/drawingml/2006/main">
             <a:r>
-              <a:t>- TAP Streamlit application source and locally verified UI/content, 2026-08-13.</a:t>
+              <a:t>- TAP Streamlit application source and locally verified UI/content, 2026-08-16.</a:t>
             </a:r>
           </a:p>
           <a:p xmlns:a="http://schemas.openxmlformats.org/drawingml/2006/main">
@@ -1518,7 +1518,7 @@
           </a:p>
           <a:p xmlns:a="http://schemas.openxmlformats.org/drawingml/2006/main">
             <a:r>
-              <a:t>- Screenshot: locally verified TAP screen (organization-report.png), 2026-08-13.</a:t>
+              <a:t>- Screenshot: locally verified TAP screen (organization-report.png), 2026-08-16.</a:t>
             </a:r>
           </a:p>
           <a:p xmlns:a="http://schemas.openxmlformats.org/drawingml/2006/main">
@@ -1754,8 +1754,8 @@
   </p:cSld>
   <p:clrMap bg1="lt1" tx1="dk1" bg2="lt2" tx2="dk2" accent1="accent1" accent2="accent2" accent3="accent3" accent4="accent4" accent5="accent5" accent6="accent6" hlink="hlink" folHlink="folHlink"/>
   <p:sldLayoutIdLst>
-    <p:sldLayoutId xmlns:r="http://schemas.openxmlformats.org/officeDocument/2006/relationships" id="2147483649" r:id="R1f41691f2f9e4e4f"/>
-    <p:sldLayoutId xmlns:r="http://schemas.openxmlformats.org/officeDocument/2006/relationships" id="2147483650" r:id="R93252bea6e1843d0"/>
+    <p:sldLayoutId xmlns:r="http://schemas.openxmlformats.org/officeDocument/2006/relationships" id="2147483649" r:id="Rc7b6c295babc4081"/>
+    <p:sldLayoutId xmlns:r="http://schemas.openxmlformats.org/officeDocument/2006/relationships" id="2147483650" r:id="R33121d4346bd42a4"/>
   </p:sldLayoutIdLst>
   <p:hf sldNum="0" hdr="0" ftr="0" dt="0"/>
   <p:txStyles>
@@ -2284,7 +2284,7 @@
           <p:nvPr/>
         </p:nvPicPr>
         <p:blipFill>
-          <a:blip xmlns:r="http://schemas.openxmlformats.org/officeDocument/2006/relationships" xmlns:a="http://schemas.openxmlformats.org/drawingml/2006/main" r:embed="R7edfa00d68f049ab"/>
+          <a:blip xmlns:r="http://schemas.openxmlformats.org/officeDocument/2006/relationships" xmlns:a="http://schemas.openxmlformats.org/drawingml/2006/main" r:embed="R1191bf66b1ee4606"/>
           <a:srcRect xmlns:a="http://schemas.openxmlformats.org/drawingml/2006/main" l="0" t="-400" r="0" b="-400"/>
           <a:stretch xmlns:a="http://schemas.openxmlformats.org/drawingml/2006/main"/>
         </p:blipFill>
@@ -2307,7 +2307,7 @@
           <p:nvPr/>
         </p:nvPicPr>
         <p:blipFill>
-          <a:blip xmlns:r="http://schemas.openxmlformats.org/officeDocument/2006/relationships" xmlns:a="http://schemas.openxmlformats.org/drawingml/2006/main" r:embed="R632a43915a33403c"/>
+          <a:blip xmlns:r="http://schemas.openxmlformats.org/officeDocument/2006/relationships" xmlns:a="http://schemas.openxmlformats.org/drawingml/2006/main" r:embed="R5b8f0aced05d44ab"/>
           <a:srcRect xmlns:a="http://schemas.openxmlformats.org/drawingml/2006/main" l="-2083" t="0" r="-2083" b="0"/>
           <a:stretch xmlns:a="http://schemas.openxmlformats.org/drawingml/2006/main"/>
         </p:blipFill>
@@ -2940,7 +2940,7 @@
           <p:nvPr/>
         </p:nvPicPr>
         <p:blipFill>
-          <a:blip xmlns:r="http://schemas.openxmlformats.org/officeDocument/2006/relationships" xmlns:a="http://schemas.openxmlformats.org/drawingml/2006/main" r:embed="R2beb95d6c10142af"/>
+          <a:blip xmlns:r="http://schemas.openxmlformats.org/officeDocument/2006/relationships" xmlns:a="http://schemas.openxmlformats.org/drawingml/2006/main" r:embed="R4e6f0c8fcf3a4c27"/>
           <a:srcRect xmlns:a="http://schemas.openxmlformats.org/drawingml/2006/main" l="-2083" t="0" r="-2083" b="0"/>
           <a:stretch xmlns:a="http://schemas.openxmlformats.org/drawingml/2006/main"/>
         </p:blipFill>
@@ -3118,7 +3118,7 @@
                 <a:ea typeface="페이퍼로지 2 ExtraLight"/>
                 <a:cs typeface="페이퍼로지 2 ExtraLight"/>
               </a:rPr>
-              <a:t>운영 현황을 확인하고</a:t>
+              <a:t>실제 세션과 KMA 운영 목업을</a:t>
             </a:r>
           </a:p>
           <a:p xmlns:a="http://schemas.openxmlformats.org/drawingml/2006/main">
@@ -3142,7 +3142,7 @@
                 <a:ea typeface="페이퍼로지 6 SemiBold"/>
                 <a:cs typeface="페이퍼로지 6 SemiBold"/>
               </a:rPr>
-              <a:t>문항 품질을 검수합니다</a:t>
+              <a:t>구분해 확인합니다</a:t>
             </a:r>
           </a:p>
         </p:txBody>
@@ -3197,7 +3197,7 @@
                 <a:ea typeface="페이퍼로지 3 Light"/>
                 <a:cs typeface="페이퍼로지 3 Light"/>
               </a:rPr>
-              <a:t>회원사·프로젝트 수치는 운영 목업이며, 배포 문항은행을 검수합니다. 개인·조직 점수는 기본 열람하지 않습니다.</a:t>
+              <a:t>교육담당자 홈은 현재 브라우저 실데이터입니다. KMA ‘회원사 운영 화면’의 회원사·프로젝트 수치는 목업이며 문항 검수와 별개입니다.</a:t>
             </a:r>
           </a:p>
         </p:txBody>
@@ -3294,7 +3294,7 @@
                 <a:ea typeface="페이퍼로지 5 Medium"/>
                 <a:cs typeface="페이퍼로지 5 Medium"/>
               </a:rPr>
-              <a:t>검수 순서</a:t>
+              <a:t>화면 구분</a:t>
             </a:r>
           </a:p>
         </p:txBody>
@@ -3446,7 +3446,7 @@
                 <a:ea typeface="페이퍼로지 4 Regular"/>
                 <a:cs typeface="페이퍼로지 4 Regular"/>
               </a:rPr>
-              <a:t>KMA 대시보드</a:t>
+              <a:t>교육담당자 홈 = 실세션</a:t>
             </a:r>
           </a:p>
         </p:txBody>
@@ -3598,7 +3598,7 @@
                 <a:ea typeface="페이퍼로지 4 Regular"/>
                 <a:cs typeface="페이퍼로지 4 Regular"/>
               </a:rPr>
-              <a:t>문항은행 · 검수</a:t>
+              <a:t>KMA 운영 화면 = 목업</a:t>
             </a:r>
           </a:p>
         </p:txBody>
@@ -3708,7 +3708,7 @@
                 <a:ea typeface="페이퍼로지 4 Regular"/>
                 <a:cs typeface="페이퍼로지 4 Regular"/>
               </a:rPr>
-              <a:t>모듈군 · 원문 판정 필터</a:t>
+              <a:t>타 브라우저 미합산</a:t>
             </a:r>
           </a:p>
         </p:txBody>
@@ -3805,7 +3805,7 @@
                 <a:ea typeface="페이퍼로지 5 Medium"/>
                 <a:cs typeface="페이퍼로지 5 Medium"/>
               </a:rPr>
-              <a:t>주요 버튼</a:t>
+              <a:t>KMA 검수</a:t>
             </a:r>
           </a:p>
         </p:txBody>
@@ -4345,7 +4345,7 @@
           <p:nvPr/>
         </p:nvPicPr>
         <p:blipFill>
-          <a:blip xmlns:r="http://schemas.openxmlformats.org/officeDocument/2006/relationships" xmlns:a="http://schemas.openxmlformats.org/drawingml/2006/main" r:embed="R881dfa2b459649ca"/>
+          <a:blip xmlns:r="http://schemas.openxmlformats.org/officeDocument/2006/relationships" xmlns:a="http://schemas.openxmlformats.org/drawingml/2006/main" r:embed="R3c9eb3b9534140a7"/>
           <a:stretch xmlns:a="http://schemas.openxmlformats.org/drawingml/2006/main"/>
         </p:blipFill>
         <p:spPr>
@@ -4389,7 +4389,7 @@
           <p:nvPr/>
         </p:nvPicPr>
         <p:blipFill>
-          <a:blip xmlns:r="http://schemas.openxmlformats.org/officeDocument/2006/relationships" xmlns:a="http://schemas.openxmlformats.org/drawingml/2006/main" r:embed="R37ff4497a2dc4211"/>
+          <a:blip xmlns:r="http://schemas.openxmlformats.org/officeDocument/2006/relationships" xmlns:a="http://schemas.openxmlformats.org/drawingml/2006/main" r:embed="R56f4f1d3ecab48fc"/>
           <a:srcRect xmlns:a="http://schemas.openxmlformats.org/drawingml/2006/main" l="-2083" t="0" r="-2083" b="0"/>
           <a:stretch xmlns:a="http://schemas.openxmlformats.org/drawingml/2006/main"/>
         </p:blipFill>
@@ -4453,7 +4453,7 @@
                 <a:ea typeface="페이퍼로지 2 ExtraLight"/>
                 <a:cs typeface="페이퍼로지 2 ExtraLight"/>
               </a:rPr>
-              <a:t>기타 버튼은 목적에 따라</a:t>
+              <a:t>기타 버튼은 최신 명칭으로</a:t>
             </a:r>
           </a:p>
           <a:p xmlns:a="http://schemas.openxmlformats.org/drawingml/2006/main">
@@ -4477,7 +4477,7 @@
                 <a:ea typeface="페이퍼로지 6 SemiBold"/>
                 <a:cs typeface="페이퍼로지 6 SemiBold"/>
               </a:rPr>
-              <a:t>여섯 묶음으로 보면 됩니다</a:t>
+              <a:t>확인하면 됩니다</a:t>
             </a:r>
           </a:p>
         </p:txBody>
@@ -4532,7 +4532,7 @@
                 <a:ea typeface="페이퍼로지 3 Light"/>
                 <a:cs typeface="페이퍼로지 3 Light"/>
               </a:rPr>
-              <a:t>자주 찾는 버튼만 모았습니다. 세부 순서는 앞선 역할별 화면을 따르세요.</a:t>
+              <a:t>자주 찾는 기능만 모았습니다. 상세 순서는 앞선 역할별 화면을 따르세요.</a:t>
             </a:r>
           </a:p>
         </p:txBody>
@@ -5201,7 +5201,7 @@
                 <a:ea typeface="페이퍼로지 4 Regular"/>
                 <a:cs typeface="페이퍼로지 4 Regular"/>
               </a:rPr>
-              <a:t>저장하고 다음</a:t>
+              <a:t>다음 문항 →</a:t>
             </a:r>
           </a:p>
           <a:p xmlns:a="http://schemas.openxmlformats.org/drawingml/2006/main">
@@ -5432,7 +5432,7 @@
                 <a:ea typeface="페이퍼로지 4 Regular"/>
                 <a:cs typeface="페이퍼로지 4 Regular"/>
               </a:rPr>
-              <a:t>결과 다시 보기</a:t>
+              <a:t>내 변화 리포트</a:t>
             </a:r>
           </a:p>
           <a:p xmlns:a="http://schemas.openxmlformats.org/drawingml/2006/main">
@@ -5663,7 +5663,7 @@
                 <a:ea typeface="페이퍼로지 4 Regular"/>
                 <a:cs typeface="페이퍼로지 4 Regular"/>
               </a:rPr>
-              <a:t>인쇄용 리포트 HTML</a:t>
+              <a:t>예시 리포트 보기</a:t>
             </a:r>
           </a:p>
           <a:p xmlns:a="http://schemas.openxmlformats.org/drawingml/2006/main">
@@ -5687,7 +5687,7 @@
                 <a:ea typeface="페이퍼로지 4 Regular"/>
                 <a:cs typeface="페이퍼로지 4 Regular"/>
               </a:rPr>
-              <a:t>상세 결과 CSV</a:t>
+              <a:t>조직결과 CSV 업로드</a:t>
             </a:r>
           </a:p>
         </p:txBody>
@@ -5894,31 +5894,31 @@
                 <a:ea typeface="페이퍼로지 4 Regular"/>
                 <a:cs typeface="페이퍼로지 4 Regular"/>
               </a:rPr>
+              <a:t>회원사 운영 화면</a:t>
+            </a:r>
+          </a:p>
+          <a:p xmlns:a="http://schemas.openxmlformats.org/drawingml/2006/main">
+            <a:pPr algn="l">
+              <a:buNone/>
+              <a:defRPr>
+                <a:solidFill>
+                  <a:srgbClr val="6C7476"/>
+                </a:solidFill>
+                <a:latin typeface="페이퍼로지 4 Regular"/>
+                <a:ea typeface="페이퍼로지 4 Regular"/>
+                <a:cs typeface="페이퍼로지 4 Regular"/>
+              </a:defRPr>
+            </a:pPr>
+            <a:r>
+              <a:rPr sz="1100">
+                <a:solidFill>
+                  <a:srgbClr val="6C7476"/>
+                </a:solidFill>
+                <a:latin typeface="페이퍼로지 4 Regular"/>
+                <a:ea typeface="페이퍼로지 4 Regular"/>
+                <a:cs typeface="페이퍼로지 4 Regular"/>
+              </a:rPr>
               <a:t>전체 문항은행 검수</a:t>
-            </a:r>
-          </a:p>
-          <a:p xmlns:a="http://schemas.openxmlformats.org/drawingml/2006/main">
-            <a:pPr algn="l">
-              <a:buNone/>
-              <a:defRPr>
-                <a:solidFill>
-                  <a:srgbClr val="6C7476"/>
-                </a:solidFill>
-                <a:latin typeface="페이퍼로지 4 Regular"/>
-                <a:ea typeface="페이퍼로지 4 Regular"/>
-                <a:cs typeface="페이퍼로지 4 Regular"/>
-              </a:defRPr>
-            </a:pPr>
-            <a:r>
-              <a:rPr sz="1100">
-                <a:solidFill>
-                  <a:srgbClr val="6C7476"/>
-                </a:solidFill>
-                <a:latin typeface="페이퍼로지 4 Regular"/>
-                <a:ea typeface="페이퍼로지 4 Regular"/>
-                <a:cs typeface="페이퍼로지 4 Regular"/>
-              </a:rPr>
-              <a:t>필터 · 파일럿 후보 CSV</a:t>
             </a:r>
           </a:p>
         </p:txBody>
@@ -6238,7 +6238,7 @@
           <p:nvPr/>
         </p:nvPicPr>
         <p:blipFill>
-          <a:blip xmlns:r="http://schemas.openxmlformats.org/officeDocument/2006/relationships" xmlns:a="http://schemas.openxmlformats.org/drawingml/2006/main" r:embed="Rc334e960428145ba"/>
+          <a:blip xmlns:r="http://schemas.openxmlformats.org/officeDocument/2006/relationships" xmlns:a="http://schemas.openxmlformats.org/drawingml/2006/main" r:embed="Re2bd4fc8e10a4ea9"/>
           <a:srcRect xmlns:a="http://schemas.openxmlformats.org/drawingml/2006/main" l="-2083" t="0" r="-2083" b="0"/>
           <a:stretch xmlns:a="http://schemas.openxmlformats.org/drawingml/2006/main"/>
         </p:blipFill>
@@ -6261,7 +6261,7 @@
           <p:nvPr/>
         </p:nvPicPr>
         <p:blipFill>
-          <a:blip xmlns:r="http://schemas.openxmlformats.org/officeDocument/2006/relationships" xmlns:a="http://schemas.openxmlformats.org/drawingml/2006/main" r:embed="R14983dfa91304914"/>
+          <a:blip xmlns:r="http://schemas.openxmlformats.org/officeDocument/2006/relationships" xmlns:a="http://schemas.openxmlformats.org/drawingml/2006/main" r:embed="R0c4145a04c5743f5"/>
           <a:srcRect xmlns:a="http://schemas.openxmlformats.org/drawingml/2006/main" l="-2083" t="0" r="-2083" b="0"/>
           <a:stretch xmlns:a="http://schemas.openxmlformats.org/drawingml/2006/main"/>
         </p:blipFill>
@@ -6582,7 +6582,7 @@
                 <a:ea typeface="페이퍼로지 2 ExtraLight"/>
                 <a:cs typeface="페이퍼로지 2 ExtraLight"/>
               </a:rPr>
-              <a:t>역할을 고른 뒤 첫 메뉴에서</a:t>
+              <a:t>기준파일·N&lt;5·세션 초기화를</a:t>
             </a:r>
           </a:p>
           <a:p xmlns:a="http://schemas.openxmlformats.org/drawingml/2006/main">
@@ -6606,7 +6606,7 @@
                 <a:ea typeface="페이퍼로지 6 SemiBold"/>
                 <a:cs typeface="페이퍼로지 6 SemiBold"/>
               </a:rPr>
-              <a:t>시작하세요</a:t>
+              <a:t>먼저 확인하세요</a:t>
             </a:r>
           </a:p>
         </p:txBody>
@@ -6661,7 +6661,7 @@
                 <a:ea typeface="페이퍼로지 3 Light"/>
                 <a:cs typeface="페이퍼로지 3 Light"/>
               </a:rPr>
-              <a:t>막히면 ‘처음 사용 안내’를 열거나 사이드바의 ‘사용설명서’ PDF를 확인하세요.</a:t>
+              <a:t>브라우저 세션은 서버 DB가 아닙니다. 기준파일과 결과 CSV를 내려받아 보관하고, 필요하면 사이드바의 사용설명서 PDF를 확인하세요.</a:t>
             </a:r>
           </a:p>
         </p:txBody>
@@ -7046,7 +7046,7 @@
                 <a:ea typeface="페이퍼로지 5 Medium"/>
                 <a:cs typeface="페이퍼로지 5 Medium"/>
               </a:rPr>
-              <a:t>교육담당자</a:t>
+              <a:t>기준파일 없음</a:t>
             </a:r>
           </a:p>
         </p:txBody>
@@ -7101,7 +7101,7 @@
                 <a:ea typeface="페이퍼로지 4 Regular"/>
                 <a:cs typeface="페이퍼로지 4 Regular"/>
               </a:rPr>
-              <a:t>교육평가 프로젝트</a:t>
+              <a:t>사전 완료 후 JSON 저장</a:t>
             </a:r>
           </a:p>
         </p:txBody>
@@ -7156,7 +7156,7 @@
                 <a:ea typeface="페이퍼로지 5 Medium"/>
                 <a:cs typeface="페이퍼로지 5 Medium"/>
               </a:rPr>
-              <a:t>참여자</a:t>
+              <a:t>사후 복원 실패</a:t>
             </a:r>
           </a:p>
         </p:txBody>
@@ -7211,7 +7211,7 @@
                 <a:ea typeface="페이퍼로지 4 Regular"/>
                 <a:cs typeface="페이퍼로지 4 Regular"/>
               </a:rPr>
-              <a:t>사전·사후 검사</a:t>
+              <a:t>동일 ID · JSON 확인</a:t>
             </a:r>
           </a:p>
         </p:txBody>
@@ -7266,7 +7266,7 @@
                 <a:ea typeface="페이퍼로지 5 Medium"/>
                 <a:cs typeface="페이퍼로지 5 Medium"/>
               </a:rPr>
-              <a:t>KMA 관리자</a:t>
+              <a:t>N&lt;5 비공개</a:t>
             </a:r>
           </a:p>
         </p:txBody>
@@ -7321,7 +7321,7 @@
                 <a:ea typeface="페이퍼로지 4 Regular"/>
                 <a:cs typeface="페이퍼로지 4 Regular"/>
               </a:rPr>
-              <a:t>KMA 대시보드</a:t>
+              <a:t>표본 보호 정상 동작</a:t>
             </a:r>
           </a:p>
         </p:txBody>
@@ -7376,7 +7376,7 @@
                 <a:ea typeface="페이퍼로지 5 Medium"/>
                 <a:cs typeface="페이퍼로지 5 Medium"/>
               </a:rPr>
-              <a:t>프로젝트 없음</a:t>
+              <a:t>세션 초기화</a:t>
             </a:r>
           </a:p>
         </p:txBody>
@@ -7431,7 +7431,7 @@
                 <a:ea typeface="페이퍼로지 4 Regular"/>
                 <a:cs typeface="페이퍼로지 4 Regular"/>
               </a:rPr>
-              <a:t>교육평가 설정으로 이동</a:t>
+              <a:t>프로젝트 다시 설정</a:t>
             </a:r>
           </a:p>
         </p:txBody>
@@ -7486,7 +7486,7 @@
                 <a:ea typeface="페이퍼로지 5 Medium"/>
                 <a:cs typeface="페이퍼로지 5 Medium"/>
               </a:rPr>
-              <a:t>결과 없음</a:t>
+              <a:t>조직결과 없음</a:t>
             </a:r>
           </a:p>
         </p:txBody>
@@ -7541,7 +7541,7 @@
                 <a:ea typeface="페이퍼로지 4 Regular"/>
                 <a:cs typeface="페이퍼로지 4 Regular"/>
               </a:rPr>
-              <a:t>전·후 완료 확인</a:t>
+              <a:t>CSV 업로드 확인</a:t>
             </a:r>
           </a:p>
         </p:txBody>
@@ -7596,7 +7596,7 @@
                 <a:ea typeface="페이퍼로지 5 Medium"/>
                 <a:cs typeface="페이퍼로지 5 Medium"/>
               </a:rPr>
-              <a:t>CSV 오류</a:t>
+              <a:t>다시 시작</a:t>
             </a:r>
           </a:p>
         </p:txBody>
@@ -7651,7 +7651,7 @@
                 <a:ea typeface="페이퍼로지 4 Regular"/>
                 <a:cs typeface="페이퍼로지 4 Regular"/>
               </a:rPr>
-              <a:t>필수 열 · ID · 시점 확인</a:t>
+              <a:t>실제 검사 메뉴 확인</a:t>
             </a:r>
           </a:p>
         </p:txBody>
@@ -7871,7 +7871,7 @@
           <p:nvPr/>
         </p:nvPicPr>
         <p:blipFill>
-          <a:blip xmlns:r="http://schemas.openxmlformats.org/officeDocument/2006/relationships" xmlns:a="http://schemas.openxmlformats.org/drawingml/2006/main" r:embed="R76adf81a182d4f69"/>
+          <a:blip xmlns:r="http://schemas.openxmlformats.org/officeDocument/2006/relationships" xmlns:a="http://schemas.openxmlformats.org/drawingml/2006/main" r:embed="Rc44ab1c3ecbc43cc"/>
           <a:srcRect xmlns:a="http://schemas.openxmlformats.org/drawingml/2006/main" l="-2083" t="0" r="-2083" b="0"/>
           <a:stretch xmlns:a="http://schemas.openxmlformats.org/drawingml/2006/main"/>
         </p:blipFill>
@@ -8967,7 +8967,7 @@
           <p:nvPr/>
         </p:nvPicPr>
         <p:blipFill>
-          <a:blip xmlns:r="http://schemas.openxmlformats.org/officeDocument/2006/relationships" xmlns:a="http://schemas.openxmlformats.org/drawingml/2006/main" r:embed="R8b604f90197d4327"/>
+          <a:blip xmlns:r="http://schemas.openxmlformats.org/officeDocument/2006/relationships" xmlns:a="http://schemas.openxmlformats.org/drawingml/2006/main" r:embed="R5c318ab4289e4462"/>
           <a:srcRect xmlns:a="http://schemas.openxmlformats.org/drawingml/2006/main" l="-2083" t="0" r="-2083" b="0"/>
           <a:stretch xmlns:a="http://schemas.openxmlformats.org/drawingml/2006/main"/>
         </p:blipFill>
@@ -10849,7 +10849,7 @@
           <p:nvPr/>
         </p:nvPicPr>
         <p:blipFill>
-          <a:blip xmlns:r="http://schemas.openxmlformats.org/officeDocument/2006/relationships" xmlns:a="http://schemas.openxmlformats.org/drawingml/2006/main" r:embed="R26e34f80e16f462b"/>
+          <a:blip xmlns:r="http://schemas.openxmlformats.org/officeDocument/2006/relationships" xmlns:a="http://schemas.openxmlformats.org/drawingml/2006/main" r:embed="R275224034b4c4077"/>
           <a:srcRect xmlns:a="http://schemas.openxmlformats.org/drawingml/2006/main" l="-2083" t="0" r="-2083" b="0"/>
           <a:stretch xmlns:a="http://schemas.openxmlformats.org/drawingml/2006/main"/>
         </p:blipFill>
@@ -10985,7 +10985,7 @@
                 <a:ea typeface="페이퍼로지 2 ExtraLight"/>
                 <a:cs typeface="페이퍼로지 2 ExtraLight"/>
               </a:rPr>
-              <a:t>결과는 전후 변화와 현업 전이 중</a:t>
+              <a:t>전후 변화와 전이 조건으로</a:t>
             </a:r>
           </a:p>
           <a:p xmlns:a="http://schemas.openxmlformats.org/drawingml/2006/main">
@@ -11009,7 +11009,7 @@
                 <a:ea typeface="페이퍼로지 6 SemiBold"/>
                 <a:cs typeface="페이퍼로지 6 SemiBold"/>
               </a:rPr>
-              <a:t>무엇을 보완할지 정하는 데 씁니다</a:t>
+              <a:t>다음 개선을 정합니다</a:t>
             </a:r>
           </a:p>
         </p:txBody>
@@ -13081,7 +13081,7 @@
           <p:nvPr/>
         </p:nvPicPr>
         <p:blipFill>
-          <a:blip xmlns:r="http://schemas.openxmlformats.org/officeDocument/2006/relationships" xmlns:a="http://schemas.openxmlformats.org/drawingml/2006/main" r:embed="Rde75508f8b0e4732"/>
+          <a:blip xmlns:r="http://schemas.openxmlformats.org/officeDocument/2006/relationships" xmlns:a="http://schemas.openxmlformats.org/drawingml/2006/main" r:embed="R3a8c950a55314ba2"/>
           <a:srcRect xmlns:a="http://schemas.openxmlformats.org/drawingml/2006/main" l="-2083" t="0" r="-2083" b="0"/>
           <a:stretch xmlns:a="http://schemas.openxmlformats.org/drawingml/2006/main"/>
         </p:blipFill>
@@ -14828,7 +14828,7 @@
           <p:nvPr/>
         </p:nvPicPr>
         <p:blipFill>
-          <a:blip xmlns:r="http://schemas.openxmlformats.org/officeDocument/2006/relationships" xmlns:a="http://schemas.openxmlformats.org/drawingml/2006/main" r:embed="Ra73b3daf828c495b"/>
+          <a:blip xmlns:r="http://schemas.openxmlformats.org/officeDocument/2006/relationships" xmlns:a="http://schemas.openxmlformats.org/drawingml/2006/main" r:embed="R8840d189b4c0478f"/>
           <a:srcRect xmlns:a="http://schemas.openxmlformats.org/drawingml/2006/main" l="-2083" t="0" r="-2083" b="0"/>
           <a:stretch xmlns:a="http://schemas.openxmlformats.org/drawingml/2006/main"/>
         </p:blipFill>
@@ -14851,7 +14851,7 @@
           <p:nvPr/>
         </p:nvPicPr>
         <p:blipFill>
-          <a:blip xmlns:r="http://schemas.openxmlformats.org/officeDocument/2006/relationships" xmlns:a="http://schemas.openxmlformats.org/drawingml/2006/main" r:embed="R804ef4a7f396442a"/>
+          <a:blip xmlns:r="http://schemas.openxmlformats.org/officeDocument/2006/relationships" xmlns:a="http://schemas.openxmlformats.org/drawingml/2006/main" r:embed="Rf8968bbfc97a4c84"/>
           <a:srcRect xmlns:a="http://schemas.openxmlformats.org/drawingml/2006/main" l="-2083" t="0" r="-2083" b="0"/>
           <a:stretch xmlns:a="http://schemas.openxmlformats.org/drawingml/2006/main"/>
         </p:blipFill>
@@ -15172,7 +15172,7 @@
                 <a:ea typeface="페이퍼로지 2 ExtraLight"/>
                 <a:cs typeface="페이퍼로지 2 ExtraLight"/>
               </a:rPr>
-              <a:t>설정 - 사전 - 교육·현업 -</a:t>
+              <a:t>사전 완료 - 기준파일 저장 -</a:t>
             </a:r>
           </a:p>
           <a:p xmlns:a="http://schemas.openxmlformats.org/drawingml/2006/main">
@@ -15196,7 +15196,7 @@
                 <a:ea typeface="페이퍼로지 6 SemiBold"/>
                 <a:cs typeface="페이퍼로지 6 SemiBold"/>
               </a:rPr>
-              <a:t>사후·리포트 순서입니다</a:t>
+              <a:t>사후 복원·비교 순서입니다</a:t>
             </a:r>
           </a:p>
         </p:txBody>
@@ -15251,7 +15251,7 @@
                 <a:ea typeface="페이퍼로지 3 Light"/>
                 <a:cs typeface="페이퍼로지 3 Light"/>
               </a:rPr>
-              <a:t>교육 전 출발점을 기록하고 현업 적용 뒤 같은 기준으로 다시 측정합니다.</a:t>
+              <a:t>사전 완료 직후 기준파일 JSON을 저장하고, 8~10주 뒤 불러와 사후검사를 시작합니다.</a:t>
             </a:r>
           </a:p>
         </p:txBody>
@@ -15801,7 +15801,7 @@
                 <a:ea typeface="페이퍼로지 4 Regular"/>
                 <a:cs typeface="페이퍼로지 4 Regular"/>
               </a:rPr>
-              <a:t>교육 전 최근 8주</a:t>
+              <a:t>동일 ID · 동일 문항</a:t>
             </a:r>
           </a:p>
         </p:txBody>
@@ -15856,7 +15856,7 @@
                 <a:ea typeface="페이퍼로지 5 Medium"/>
                 <a:cs typeface="페이퍼로지 5 Medium"/>
               </a:rPr>
-              <a:t>교육·현업 적용</a:t>
+              <a:t>기준파일 저장</a:t>
             </a:r>
           </a:p>
         </p:txBody>
@@ -15911,7 +15911,7 @@
                 <a:ea typeface="페이퍼로지 4 Regular"/>
                 <a:cs typeface="페이퍼로지 4 Regular"/>
               </a:rPr>
-              <a:t>적용기회 확보</a:t>
+              <a:t>JSON 내려받기</a:t>
             </a:r>
           </a:p>
         </p:txBody>
@@ -15966,7 +15966,7 @@
                 <a:ea typeface="페이퍼로지 5 Medium"/>
                 <a:cs typeface="페이퍼로지 5 Medium"/>
               </a:rPr>
-              <a:t>사후검사</a:t>
+              <a:t>8~10주 후 복원</a:t>
             </a:r>
           </a:p>
         </p:txBody>
@@ -16021,7 +16021,7 @@
                 <a:ea typeface="페이퍼로지 4 Regular"/>
                 <a:cs typeface="페이퍼로지 4 Regular"/>
               </a:rPr>
-              <a:t>같은 문항 · 최근 8주</a:t>
+              <a:t>JSON 업로드 · 확인</a:t>
             </a:r>
           </a:p>
         </p:txBody>
@@ -16076,7 +16076,7 @@
                 <a:ea typeface="페이퍼로지 5 Medium"/>
                 <a:cs typeface="페이퍼로지 5 Medium"/>
               </a:rPr>
-              <a:t>짝지은 리포트</a:t>
+              <a:t>사후검사</a:t>
             </a:r>
           </a:p>
         </p:txBody>
@@ -16131,7 +16131,7 @@
                 <a:ea typeface="페이퍼로지 4 Regular"/>
                 <a:cs typeface="페이퍼로지 4 Regular"/>
               </a:rPr>
-              <a:t>동일 ID · 동일 버전</a:t>
+              <a:t>같은 문항 · 최근 8주</a:t>
             </a:r>
           </a:p>
         </p:txBody>
@@ -16186,7 +16186,7 @@
                 <a:ea typeface="페이퍼로지 5 Medium"/>
                 <a:cs typeface="페이퍼로지 5 Medium"/>
               </a:rPr>
-              <a:t>전이 해석</a:t>
+              <a:t>전후 비교</a:t>
             </a:r>
           </a:p>
         </p:txBody>
@@ -16241,7 +16241,7 @@
                 <a:ea typeface="페이퍼로지 4 Regular"/>
                 <a:cs typeface="페이퍼로지 4 Regular"/>
               </a:rPr>
-              <a:t>교육 보완 · 환경 개선</a:t>
+              <a:t>짝지은 변화 · 전이</a:t>
             </a:r>
           </a:p>
         </p:txBody>
@@ -16558,7 +16558,7 @@
                 <a:ea typeface="페이퍼로지 6 SemiBold"/>
                 <a:cs typeface="페이퍼로지 6 SemiBold"/>
               </a:rPr>
-              <a:t>교육담당자·참여자</a:t>
+              <a:t>ID 입력·응답</a:t>
             </a:r>
           </a:p>
         </p:txBody>
@@ -16629,7 +16629,7 @@
                 <a:ea typeface="페이퍼로지 4 Regular"/>
                 <a:cs typeface="페이퍼로지 4 Regular"/>
               </a:rPr>
-              <a:t>2. 교육</a:t>
+              <a:t>2. 기준파일</a:t>
             </a:r>
           </a:p>
           <a:p xmlns:a="http://schemas.openxmlformats.org/drawingml/2006/main">
@@ -16653,7 +16653,7 @@
                 <a:ea typeface="페이퍼로지 6 SemiBold"/>
                 <a:cs typeface="페이퍼로지 6 SemiBold"/>
               </a:rPr>
-              <a:t>현업 적용</a:t>
+              <a:t>JSON 저장</a:t>
             </a:r>
           </a:p>
         </p:txBody>
@@ -16746,7 +16746,7 @@
                 <a:ea typeface="페이퍼로지 4 Regular"/>
                 <a:cs typeface="페이퍼로지 4 Regular"/>
               </a:rPr>
-              <a:t>전후 평가</a:t>
+              <a:t>전후 비교</a:t>
             </a:r>
           </a:p>
         </p:txBody>
@@ -16817,7 +16817,7 @@
                 <a:ea typeface="페이퍼로지 4 Regular"/>
                 <a:cs typeface="페이퍼로지 4 Regular"/>
               </a:rPr>
-              <a:t>3–4. 사후</a:t>
+              <a:t>3–4. 8~10주</a:t>
             </a:r>
           </a:p>
           <a:p xmlns:a="http://schemas.openxmlformats.org/drawingml/2006/main">
@@ -16841,7 +16841,7 @@
                 <a:ea typeface="페이퍼로지 6 SemiBold"/>
                 <a:cs typeface="페이퍼로지 6 SemiBold"/>
               </a:rPr>
-              <a:t>변화 · 전이</a:t>
+              <a:t>복원·사후</a:t>
             </a:r>
           </a:p>
         </p:txBody>
@@ -16969,7 +16969,7 @@
           <p:nvPr/>
         </p:nvPicPr>
         <p:blipFill>
-          <a:blip xmlns:r="http://schemas.openxmlformats.org/officeDocument/2006/relationships" xmlns:a="http://schemas.openxmlformats.org/drawingml/2006/main" r:embed="R6dd34fe127614ae1"/>
+          <a:blip xmlns:r="http://schemas.openxmlformats.org/officeDocument/2006/relationships" xmlns:a="http://schemas.openxmlformats.org/drawingml/2006/main" r:embed="R15b75468e27742e7"/>
           <a:srcRect xmlns:a="http://schemas.openxmlformats.org/drawingml/2006/main" l="-2083" t="0" r="-2083" b="0"/>
           <a:stretch xmlns:a="http://schemas.openxmlformats.org/drawingml/2006/main"/>
         </p:blipFill>
@@ -17147,7 +17147,7 @@
                 <a:ea typeface="페이퍼로지 2 ExtraLight"/>
                 <a:cs typeface="페이퍼로지 2 ExtraLight"/>
               </a:rPr>
-              <a:t>교육담당자는 교육과 검사 일정을</a:t>
+              <a:t>관리자 대시보드는 현재 세션의</a:t>
             </a:r>
           </a:p>
           <a:p xmlns:a="http://schemas.openxmlformats.org/drawingml/2006/main">
@@ -17171,7 +17171,7 @@
                 <a:ea typeface="페이퍼로지 6 SemiBold"/>
                 <a:cs typeface="페이퍼로지 6 SemiBold"/>
               </a:rPr>
-              <a:t>먼저 고정합니다</a:t>
+              <a:t>실제 상태만 보여줍니다</a:t>
             </a:r>
           </a:p>
         </p:txBody>
@@ -17226,7 +17226,7 @@
                 <a:ea typeface="페이퍼로지 3 Light"/>
                 <a:cs typeface="페이퍼로지 3 Light"/>
               </a:rPr>
-              <a:t>교육명 · 교육일 · 사전/사후 기간 · 측정역량을 한 번에 저장합니다. 사후는 교육 8~10주 후를 권장합니다.</a:t>
+              <a:t>사전검사는 프로젝트를 만든 동일 브라우저에서만 시작합니다. 홈은 0/1 프로젝트·참여자와 전후 상태를 표시하며 서버 DB·타 브라우저는 합산하지 않습니다.</a:t>
             </a:r>
           </a:p>
         </p:txBody>
@@ -17323,7 +17323,7 @@
                 <a:ea typeface="페이퍼로지 5 Medium"/>
                 <a:cs typeface="페이퍼로지 5 Medium"/>
               </a:rPr>
-              <a:t>입력 순서</a:t>
+              <a:t>대시보드 확인</a:t>
             </a:r>
           </a:p>
         </p:txBody>
@@ -17475,31 +17475,7 @@
                 <a:ea typeface="페이퍼로지 4 Regular"/>
                 <a:cs typeface="페이퍼로지 4 Regular"/>
               </a:rPr>
-              <a:t>프로젝트명 · 교육과정명</a:t>
-            </a:r>
-          </a:p>
-          <a:p xmlns:a="http://schemas.openxmlformats.org/drawingml/2006/main">
-            <a:pPr algn="l">
-              <a:buNone/>
-              <a:defRPr>
-                <a:solidFill>
-                  <a:srgbClr val="1E2324"/>
-                </a:solidFill>
-                <a:latin typeface="페이퍼로지 4 Regular"/>
-                <a:ea typeface="페이퍼로지 4 Regular"/>
-                <a:cs typeface="페이퍼로지 4 Regular"/>
-              </a:defRPr>
-            </a:pPr>
-            <a:r>
-              <a:rPr sz="1100">
-                <a:solidFill>
-                  <a:srgbClr val="1E2324"/>
-                </a:solidFill>
-                <a:latin typeface="페이퍼로지 4 Regular"/>
-                <a:ea typeface="페이퍼로지 4 Regular"/>
-                <a:cs typeface="페이퍼로지 4 Regular"/>
-              </a:rPr>
-              <a:t>응답 대상</a:t>
+              <a:t>프로젝트 · 참여자 0/1</a:t>
             </a:r>
           </a:p>
         </p:txBody>
@@ -17651,7 +17627,7 @@
                 <a:ea typeface="페이퍼로지 4 Regular"/>
                 <a:cs typeface="페이퍼로지 4 Regular"/>
               </a:rPr>
-              <a:t>교육일 · 교육 전후 검사기간</a:t>
+              <a:t>사전·사후 응답 · 완료</a:t>
             </a:r>
           </a:p>
         </p:txBody>
@@ -17761,31 +17737,7 @@
                 <a:ea typeface="페이퍼로지 4 Regular"/>
                 <a:cs typeface="페이퍼로지 4 Regular"/>
               </a:rPr>
-              <a:t>현재 열 검사</a:t>
-            </a:r>
-          </a:p>
-          <a:p xmlns:a="http://schemas.openxmlformats.org/drawingml/2006/main">
-            <a:pPr algn="l">
-              <a:buNone/>
-              <a:defRPr>
-                <a:solidFill>
-                  <a:srgbClr val="1E2324"/>
-                </a:solidFill>
-                <a:latin typeface="페이퍼로지 4 Regular"/>
-                <a:ea typeface="페이퍼로지 4 Regular"/>
-                <a:cs typeface="페이퍼로지 4 Regular"/>
-              </a:defRPr>
-            </a:pPr>
-            <a:r>
-              <a:rPr sz="1000">
-                <a:solidFill>
-                  <a:srgbClr val="1E2324"/>
-                </a:solidFill>
-                <a:latin typeface="페이퍼로지 4 Regular"/>
-                <a:ea typeface="페이퍼로지 4 Regular"/>
-                <a:cs typeface="페이퍼로지 4 Regular"/>
-              </a:rPr>
-              <a:t>측정역량</a:t>
+              <a:t>짝지은 완료 상태</a:t>
             </a:r>
           </a:p>
         </p:txBody>
@@ -17882,7 +17834,7 @@
                 <a:ea typeface="페이퍼로지 5 Medium"/>
                 <a:cs typeface="페이퍼로지 5 Medium"/>
               </a:rPr>
-              <a:t>핵심 버튼</a:t>
+              <a:t>프로젝트 설정</a:t>
             </a:r>
           </a:p>
         </p:txBody>
@@ -18034,7 +17986,7 @@
                 <a:ea typeface="페이퍼로지 4 Regular"/>
                 <a:cs typeface="페이퍼로지 4 Regular"/>
               </a:rPr>
-              <a:t>교육평가 프로젝트 만들기</a:t>
+              <a:t>교육평가 프로젝트</a:t>
             </a:r>
           </a:p>
         </p:txBody>
@@ -18186,7 +18138,7 @@
                 <a:ea typeface="페이퍼로지 4 Regular"/>
                 <a:cs typeface="페이퍼로지 4 Regular"/>
               </a:rPr>
-              <a:t>설정 저장 후 사전검사 확인</a:t>
+              <a:t>교육일 · 전후 기간</a:t>
             </a:r>
           </a:p>
         </p:txBody>
@@ -18296,31 +18248,7 @@
                 <a:ea typeface="페이퍼로지 4 Regular"/>
                 <a:cs typeface="페이퍼로지 4 Regular"/>
               </a:rPr>
-              <a:t>교육 전·후</a:t>
-            </a:r>
-          </a:p>
-          <a:p xmlns:a="http://schemas.openxmlformats.org/drawingml/2006/main">
-            <a:pPr algn="l">
-              <a:buNone/>
-              <a:defRPr>
-                <a:solidFill>
-                  <a:srgbClr val="1E2324"/>
-                </a:solidFill>
-                <a:latin typeface="페이퍼로지 4 Regular"/>
-                <a:ea typeface="페이퍼로지 4 Regular"/>
-                <a:cs typeface="페이퍼로지 4 Regular"/>
-              </a:defRPr>
-            </a:pPr>
-            <a:r>
-              <a:rPr sz="1100">
-                <a:solidFill>
-                  <a:srgbClr val="1E2324"/>
-                </a:solidFill>
-                <a:latin typeface="페이퍼로지 4 Regular"/>
-                <a:ea typeface="페이퍼로지 4 Regular"/>
-                <a:cs typeface="페이퍼로지 4 Regular"/>
-              </a:rPr>
-              <a:t>역량평가 선택</a:t>
+              <a:t>역량 선택 · 저장</a:t>
             </a:r>
           </a:p>
         </p:txBody>
@@ -18446,7 +18374,7 @@
           <p:nvPr/>
         </p:nvPicPr>
         <p:blipFill>
-          <a:blip xmlns:r="http://schemas.openxmlformats.org/officeDocument/2006/relationships" xmlns:a="http://schemas.openxmlformats.org/drawingml/2006/main" r:embed="R90641c02e9fb4f43"/>
+          <a:blip xmlns:r="http://schemas.openxmlformats.org/officeDocument/2006/relationships" xmlns:a="http://schemas.openxmlformats.org/drawingml/2006/main" r:embed="R41e779f8b0fe4820"/>
           <a:stretch xmlns:a="http://schemas.openxmlformats.org/drawingml/2006/main"/>
         </p:blipFill>
         <p:spPr>
@@ -18582,7 +18510,7 @@
           <p:nvPr/>
         </p:nvPicPr>
         <p:blipFill>
-          <a:blip xmlns:r="http://schemas.openxmlformats.org/officeDocument/2006/relationships" xmlns:a="http://schemas.openxmlformats.org/drawingml/2006/main" r:embed="R8123ead290ae4fd7"/>
+          <a:blip xmlns:r="http://schemas.openxmlformats.org/officeDocument/2006/relationships" xmlns:a="http://schemas.openxmlformats.org/drawingml/2006/main" r:embed="Rffc9af59d12848ab"/>
           <a:srcRect xmlns:a="http://schemas.openxmlformats.org/drawingml/2006/main" l="-2083" t="0" r="-2083" b="0"/>
           <a:stretch xmlns:a="http://schemas.openxmlformats.org/drawingml/2006/main"/>
         </p:blipFill>
@@ -18760,7 +18688,7 @@
                 <a:ea typeface="페이퍼로지 2 ExtraLight"/>
                 <a:cs typeface="페이퍼로지 2 ExtraLight"/>
               </a:rPr>
-              <a:t>참여자는 사전·사후에</a:t>
+              <a:t>교육 참여자 ID를 입력하고</a:t>
             </a:r>
           </a:p>
           <a:p xmlns:a="http://schemas.openxmlformats.org/drawingml/2006/main">
@@ -18784,7 +18712,7 @@
                 <a:ea typeface="페이퍼로지 6 SemiBold"/>
                 <a:cs typeface="페이퍼로지 6 SemiBold"/>
               </a:rPr>
-              <a:t>같은 기준으로 답합니다</a:t>
+              <a:t>실제 검사를 진행합니다</a:t>
             </a:r>
           </a:p>
         </p:txBody>
@@ -18839,7 +18767,7 @@
                 <a:ea typeface="페이퍼로지 3 Light"/>
                 <a:cs typeface="페이퍼로지 3 Light"/>
               </a:rPr>
-              <a:t>현재 검사단계를 먼저 확인합니다. 두 시점 모두 최근 8주 실제 행동을 답하고, 사후에는 현업 적용환경도 응답합니다.</a:t>
+              <a:t>ID가 비어 있어도 문항은 보이지만 저장은 차단됩니다. 사전 완료 뒤 기준파일 JSON을 저장하고, 사후 시작 전에 업로드해 복원합니다.</a:t>
             </a:r>
           </a:p>
         </p:txBody>
@@ -18936,7 +18864,7 @@
                 <a:ea typeface="페이퍼로지 5 Medium"/>
                 <a:cs typeface="페이퍼로지 5 Medium"/>
               </a:rPr>
-              <a:t>응답 순서</a:t>
+              <a:t>검사 순서</a:t>
             </a:r>
           </a:p>
         </p:txBody>
@@ -19088,7 +19016,7 @@
                 <a:ea typeface="페이퍼로지 4 Regular"/>
                 <a:cs typeface="페이퍼로지 4 Regular"/>
               </a:rPr>
-              <a:t>사전검사 · 사후검사 단계 확인</a:t>
+              <a:t>교육 참여자 ID 입력</a:t>
             </a:r>
           </a:p>
         </p:txBody>
@@ -19240,7 +19168,7 @@
                 <a:ea typeface="페이퍼로지 4 Regular"/>
                 <a:cs typeface="페이퍼로지 4 Regular"/>
               </a:rPr>
-              <a:t>수행 기회 없음 또는 1~5</a:t>
+              <a:t>응답 선택 → 다음 문항 →</a:t>
             </a:r>
           </a:p>
         </p:txBody>
@@ -19350,7 +19278,7 @@
                 <a:ea typeface="페이퍼로지 4 Regular"/>
                 <a:cs typeface="페이퍼로지 4 Regular"/>
               </a:rPr>
-              <a:t>현업전이 환경 확인 · 결과 보기</a:t>
+              <a:t>사전 완료 → 기준파일 저장</a:t>
             </a:r>
           </a:p>
         </p:txBody>
@@ -19447,7 +19375,7 @@
                 <a:ea typeface="페이퍼로지 5 Medium"/>
                 <a:cs typeface="페이퍼로지 5 Medium"/>
               </a:rPr>
-              <a:t>보조 버튼</a:t>
+              <a:t>사후 복원</a:t>
             </a:r>
           </a:p>
         </p:txBody>
@@ -19599,7 +19527,7 @@
                 <a:ea typeface="페이퍼로지 4 Regular"/>
                 <a:cs typeface="페이퍼로지 4 Regular"/>
               </a:rPr>
-              <a:t>이전 문항</a:t>
+              <a:t>동일 ID로 접속</a:t>
             </a:r>
           </a:p>
         </p:txBody>
@@ -19751,7 +19679,7 @@
                 <a:ea typeface="페이퍼로지 4 Regular"/>
                 <a:cs typeface="페이퍼로지 4 Regular"/>
               </a:rPr>
-              <a:t>교육 전·후 검사 초기화 → 확인</a:t>
+              <a:t>기준파일 JSON 업로드</a:t>
             </a:r>
           </a:p>
         </p:txBody>
@@ -19861,7 +19789,7 @@
                 <a:ea typeface="페이퍼로지 4 Regular"/>
                 <a:cs typeface="페이퍼로지 4 Regular"/>
               </a:rPr>
-              <a:t>내 변화 리포트</a:t>
+              <a:t>복원 확인 → 사후검사</a:t>
             </a:r>
           </a:p>
         </p:txBody>
@@ -19987,7 +19915,7 @@
           <p:nvPr/>
         </p:nvPicPr>
         <p:blipFill>
-          <a:blip xmlns:r="http://schemas.openxmlformats.org/officeDocument/2006/relationships" xmlns:a="http://schemas.openxmlformats.org/drawingml/2006/main" r:embed="R3919f162c8054e66"/>
+          <a:blip xmlns:r="http://schemas.openxmlformats.org/officeDocument/2006/relationships" xmlns:a="http://schemas.openxmlformats.org/drawingml/2006/main" r:embed="R0118d6b0b4b64c45"/>
           <a:stretch xmlns:a="http://schemas.openxmlformats.org/drawingml/2006/main"/>
         </p:blipFill>
         <p:spPr>
@@ -20123,7 +20051,7 @@
           <p:nvPr/>
         </p:nvPicPr>
         <p:blipFill>
-          <a:blip xmlns:r="http://schemas.openxmlformats.org/officeDocument/2006/relationships" xmlns:a="http://schemas.openxmlformats.org/drawingml/2006/main" r:embed="R1e37c79d64f94702"/>
+          <a:blip xmlns:r="http://schemas.openxmlformats.org/officeDocument/2006/relationships" xmlns:a="http://schemas.openxmlformats.org/drawingml/2006/main" r:embed="R5ace817cbf6b42a7"/>
           <a:srcRect xmlns:a="http://schemas.openxmlformats.org/drawingml/2006/main" l="-2083" t="0" r="-2083" b="0"/>
           <a:stretch xmlns:a="http://schemas.openxmlformats.org/drawingml/2006/main"/>
         </p:blipFill>
@@ -20301,7 +20229,7 @@
                 <a:ea typeface="페이퍼로지 2 ExtraLight"/>
                 <a:cs typeface="페이퍼로지 2 ExtraLight"/>
               </a:rPr>
-              <a:t>동일 익명 ID의 전후 결과로</a:t>
+              <a:t>개인 결과 CSV를 취합해</a:t>
             </a:r>
           </a:p>
           <a:p xmlns:a="http://schemas.openxmlformats.org/drawingml/2006/main">
@@ -20325,7 +20253,7 @@
                 <a:ea typeface="페이퍼로지 6 SemiBold"/>
                 <a:cs typeface="페이퍼로지 6 SemiBold"/>
               </a:rPr>
-              <a:t>짝지은 변화 리포트를 만듭니다</a:t>
+              <a:t>조직 전후 리포트를 만듭니다</a:t>
             </a:r>
           </a:p>
         </p:txBody>
@@ -20380,7 +20308,7 @@
                 <a:ea typeface="페이퍼로지 3 Light"/>
                 <a:cs typeface="페이퍼로지 3 Light"/>
               </a:rPr>
-              <a:t>동일 참여자 · 동일 역량 · 동일 버전의 사전/사후 유효점수만 비교합니다. N&lt;5 결과는 보호됩니다.</a:t>
+              <a:t>참여자별 결과 CSV를 조직결과 CSV로 합쳐 업로드합니다. 동일 ID를 짝지으며 역량별 N≥5만 공개하고, ‘예시 리포트 보기’는 샘플입니다.</a:t>
             </a:r>
           </a:p>
         </p:txBody>
@@ -20629,7 +20557,7 @@
                 <a:ea typeface="페이퍼로지 4 Regular"/>
                 <a:cs typeface="페이퍼로지 4 Regular"/>
               </a:rPr>
-              <a:t>사전·사후 CSV 양식 내려받기</a:t>
+              <a:t>개인 결과 CSV 취합</a:t>
             </a:r>
           </a:p>
         </p:txBody>
@@ -20781,7 +20709,7 @@
                 <a:ea typeface="페이퍼로지 4 Regular"/>
                 <a:cs typeface="페이퍼로지 4 Regular"/>
               </a:rPr>
-              <a:t>익명 조직결과 CSV 업로드</a:t>
+              <a:t>조직결과 CSV로 병합</a:t>
             </a:r>
           </a:p>
         </p:txBody>
@@ -20891,7 +20819,7 @@
                 <a:ea typeface="페이퍼로지 4 Regular"/>
                 <a:cs typeface="페이퍼로지 4 Regular"/>
               </a:rPr>
-              <a:t>동일 ID · pre/post · 버전 확인</a:t>
+              <a:t>조직 리포트에 업로드</a:t>
             </a:r>
           </a:p>
         </p:txBody>
@@ -20988,7 +20916,7 @@
                 <a:ea typeface="페이퍼로지 5 Medium"/>
                 <a:cs typeface="페이퍼로지 5 Medium"/>
               </a:rPr>
-              <a:t>출력 버튼</a:t>
+              <a:t>해석 기준</a:t>
             </a:r>
           </a:p>
         </p:txBody>
@@ -21140,7 +21068,7 @@
                 <a:ea typeface="페이퍼로지 4 Regular"/>
                 <a:cs typeface="페이퍼로지 4 Regular"/>
               </a:rPr>
-              <a:t>인쇄용 리포트 HTML</a:t>
+              <a:t>동일 ID · 역량 · 버전</a:t>
             </a:r>
           </a:p>
         </p:txBody>
@@ -21292,7 +21220,7 @@
                 <a:ea typeface="페이퍼로지 4 Regular"/>
                 <a:cs typeface="페이퍼로지 4 Regular"/>
               </a:rPr>
-              <a:t>상세 결과 CSV</a:t>
+              <a:t>역량별 짝지은 N≥5</a:t>
             </a:r>
           </a:p>
         </p:txBody>
@@ -21402,7 +21330,7 @@
                 <a:ea typeface="페이퍼로지 4 Regular"/>
                 <a:cs typeface="페이퍼로지 4 Regular"/>
               </a:rPr>
-              <a:t>집계 검수표 보기</a:t>
+              <a:t>예시 · 실데이터 구분</a:t>
             </a:r>
           </a:p>
         </p:txBody>
@@ -21528,7 +21456,7 @@
           <p:nvPr/>
         </p:nvPicPr>
         <p:blipFill>
-          <a:blip xmlns:r="http://schemas.openxmlformats.org/officeDocument/2006/relationships" xmlns:a="http://schemas.openxmlformats.org/drawingml/2006/main" r:embed="Rc317fa18d51b4555"/>
+          <a:blip xmlns:r="http://schemas.openxmlformats.org/officeDocument/2006/relationships" xmlns:a="http://schemas.openxmlformats.org/drawingml/2006/main" r:embed="Rcf74acda9f634211"/>
           <a:stretch xmlns:a="http://schemas.openxmlformats.org/drawingml/2006/main"/>
         </p:blipFill>
         <p:spPr>

--- a/docs/TAP_빠른사용가이드_v3.pptx
+++ b/docs/TAP_빠른사용가이드_v3.pptx
@@ -2,24 +2,24 @@
 <file path=ppt/presentation.xml><?xml version="1.0" encoding="utf-8"?>
 <p:presentation xmlns:p="http://schemas.openxmlformats.org/presentationml/2006/main">
   <p:sldMasterIdLst>
-    <p:sldMasterId xmlns:r="http://schemas.openxmlformats.org/officeDocument/2006/relationships" id="2147483648" r:id="R40eaf6342e314e9a"/>
+    <p:sldMasterId xmlns:r="http://schemas.openxmlformats.org/officeDocument/2006/relationships" id="2147483648" r:id="R5e718c3381974cfa"/>
   </p:sldMasterIdLst>
   <p:notesMasterIdLst>
-    <p:notesMasterId xmlns:r="http://schemas.openxmlformats.org/officeDocument/2006/relationships" r:id="Rc0b7dc3b28d048a9"/>
+    <p:notesMasterId xmlns:r="http://schemas.openxmlformats.org/officeDocument/2006/relationships" r:id="R663f4000e4264ea7"/>
   </p:notesMasterIdLst>
   <p:sldIdLst>
-    <p:sldId xmlns:r="http://schemas.openxmlformats.org/officeDocument/2006/relationships" id="256" r:id="Rf6fd2150cc2f4470"/>
-    <p:sldId xmlns:r="http://schemas.openxmlformats.org/officeDocument/2006/relationships" id="257" r:id="R52da3efd086647a5"/>
-    <p:sldId xmlns:r="http://schemas.openxmlformats.org/officeDocument/2006/relationships" id="258" r:id="Rfff92b360c5f416c"/>
-    <p:sldId xmlns:r="http://schemas.openxmlformats.org/officeDocument/2006/relationships" id="259" r:id="Raf72f16d494f4204"/>
-    <p:sldId xmlns:r="http://schemas.openxmlformats.org/officeDocument/2006/relationships" id="260" r:id="R808a6952d0e748b5"/>
-    <p:sldId xmlns:r="http://schemas.openxmlformats.org/officeDocument/2006/relationships" id="261" r:id="R88b0607fcea748a8"/>
-    <p:sldId xmlns:r="http://schemas.openxmlformats.org/officeDocument/2006/relationships" id="262" r:id="Rde67c377e91c4915"/>
-    <p:sldId xmlns:r="http://schemas.openxmlformats.org/officeDocument/2006/relationships" id="263" r:id="R81dedd68c9424d06"/>
-    <p:sldId xmlns:r="http://schemas.openxmlformats.org/officeDocument/2006/relationships" id="264" r:id="R43c7c6c74ca94923"/>
-    <p:sldId xmlns:r="http://schemas.openxmlformats.org/officeDocument/2006/relationships" id="265" r:id="Rfcf3d71f9cd2401c"/>
-    <p:sldId xmlns:r="http://schemas.openxmlformats.org/officeDocument/2006/relationships" id="266" r:id="R580be1fdd5464110"/>
-    <p:sldId xmlns:r="http://schemas.openxmlformats.org/officeDocument/2006/relationships" id="267" r:id="Re7abb756e9cf4791"/>
+    <p:sldId xmlns:r="http://schemas.openxmlformats.org/officeDocument/2006/relationships" id="256" r:id="R8cab738111af40fa"/>
+    <p:sldId xmlns:r="http://schemas.openxmlformats.org/officeDocument/2006/relationships" id="257" r:id="Rb566b1cff3674855"/>
+    <p:sldId xmlns:r="http://schemas.openxmlformats.org/officeDocument/2006/relationships" id="258" r:id="R8f95c2de7f54471d"/>
+    <p:sldId xmlns:r="http://schemas.openxmlformats.org/officeDocument/2006/relationships" id="259" r:id="Rc11af562d5644864"/>
+    <p:sldId xmlns:r="http://schemas.openxmlformats.org/officeDocument/2006/relationships" id="260" r:id="R091356f9bd124fdd"/>
+    <p:sldId xmlns:r="http://schemas.openxmlformats.org/officeDocument/2006/relationships" id="261" r:id="Rda1d94d9df554aef"/>
+    <p:sldId xmlns:r="http://schemas.openxmlformats.org/officeDocument/2006/relationships" id="262" r:id="R8ff4bf4e3c7c4cb7"/>
+    <p:sldId xmlns:r="http://schemas.openxmlformats.org/officeDocument/2006/relationships" id="263" r:id="R3dbc54836d984b41"/>
+    <p:sldId xmlns:r="http://schemas.openxmlformats.org/officeDocument/2006/relationships" id="264" r:id="Rbcc3a16b9b994397"/>
+    <p:sldId xmlns:r="http://schemas.openxmlformats.org/officeDocument/2006/relationships" id="265" r:id="R20c6c954f172440c"/>
+    <p:sldId xmlns:r="http://schemas.openxmlformats.org/officeDocument/2006/relationships" id="266" r:id="R86d0f67d7b314265"/>
+    <p:sldId xmlns:r="http://schemas.openxmlformats.org/officeDocument/2006/relationships" id="267" r:id="R4f8a3660d2684fa3"/>
   </p:sldIdLst>
   <p:sldSz cx="18288000" cy="10287000"/>
   <p:notesSz cx="6858000" cy="9144000"/>
@@ -1754,8 +1754,8 @@
   </p:cSld>
   <p:clrMap bg1="lt1" tx1="dk1" bg2="lt2" tx2="dk2" accent1="accent1" accent2="accent2" accent3="accent3" accent4="accent4" accent5="accent5" accent6="accent6" hlink="hlink" folHlink="folHlink"/>
   <p:sldLayoutIdLst>
-    <p:sldLayoutId xmlns:r="http://schemas.openxmlformats.org/officeDocument/2006/relationships" id="2147483649" r:id="Rc7b6c295babc4081"/>
-    <p:sldLayoutId xmlns:r="http://schemas.openxmlformats.org/officeDocument/2006/relationships" id="2147483650" r:id="R33121d4346bd42a4"/>
+    <p:sldLayoutId xmlns:r="http://schemas.openxmlformats.org/officeDocument/2006/relationships" id="2147483649" r:id="Rd4a81bd6afaa471e"/>
+    <p:sldLayoutId xmlns:r="http://schemas.openxmlformats.org/officeDocument/2006/relationships" id="2147483650" r:id="R499ca122ee014e02"/>
   </p:sldLayoutIdLst>
   <p:hf sldNum="0" hdr="0" ftr="0" dt="0"/>
   <p:txStyles>
@@ -2284,7 +2284,7 @@
           <p:nvPr/>
         </p:nvPicPr>
         <p:blipFill>
-          <a:blip xmlns:r="http://schemas.openxmlformats.org/officeDocument/2006/relationships" xmlns:a="http://schemas.openxmlformats.org/drawingml/2006/main" r:embed="R1191bf66b1ee4606"/>
+          <a:blip xmlns:r="http://schemas.openxmlformats.org/officeDocument/2006/relationships" xmlns:a="http://schemas.openxmlformats.org/drawingml/2006/main" r:embed="R749dfbe7c695436a"/>
           <a:srcRect xmlns:a="http://schemas.openxmlformats.org/drawingml/2006/main" l="0" t="-400" r="0" b="-400"/>
           <a:stretch xmlns:a="http://schemas.openxmlformats.org/drawingml/2006/main"/>
         </p:blipFill>
@@ -2307,7 +2307,7 @@
           <p:nvPr/>
         </p:nvPicPr>
         <p:blipFill>
-          <a:blip xmlns:r="http://schemas.openxmlformats.org/officeDocument/2006/relationships" xmlns:a="http://schemas.openxmlformats.org/drawingml/2006/main" r:embed="R5b8f0aced05d44ab"/>
+          <a:blip xmlns:r="http://schemas.openxmlformats.org/officeDocument/2006/relationships" xmlns:a="http://schemas.openxmlformats.org/drawingml/2006/main" r:embed="R30c766c67d464c8d"/>
           <a:srcRect xmlns:a="http://schemas.openxmlformats.org/drawingml/2006/main" l="-2083" t="0" r="-2083" b="0"/>
           <a:stretch xmlns:a="http://schemas.openxmlformats.org/drawingml/2006/main"/>
         </p:blipFill>
@@ -2940,7 +2940,7 @@
           <p:nvPr/>
         </p:nvPicPr>
         <p:blipFill>
-          <a:blip xmlns:r="http://schemas.openxmlformats.org/officeDocument/2006/relationships" xmlns:a="http://schemas.openxmlformats.org/drawingml/2006/main" r:embed="R4e6f0c8fcf3a4c27"/>
+          <a:blip xmlns:r="http://schemas.openxmlformats.org/officeDocument/2006/relationships" xmlns:a="http://schemas.openxmlformats.org/drawingml/2006/main" r:embed="Rff0b04ea54444cdb"/>
           <a:srcRect xmlns:a="http://schemas.openxmlformats.org/drawingml/2006/main" l="-2083" t="0" r="-2083" b="0"/>
           <a:stretch xmlns:a="http://schemas.openxmlformats.org/drawingml/2006/main"/>
         </p:blipFill>
@@ -4345,7 +4345,7 @@
           <p:nvPr/>
         </p:nvPicPr>
         <p:blipFill>
-          <a:blip xmlns:r="http://schemas.openxmlformats.org/officeDocument/2006/relationships" xmlns:a="http://schemas.openxmlformats.org/drawingml/2006/main" r:embed="R3c9eb3b9534140a7"/>
+          <a:blip xmlns:r="http://schemas.openxmlformats.org/officeDocument/2006/relationships" xmlns:a="http://schemas.openxmlformats.org/drawingml/2006/main" r:embed="R162e0e55c36e4685"/>
           <a:stretch xmlns:a="http://schemas.openxmlformats.org/drawingml/2006/main"/>
         </p:blipFill>
         <p:spPr>
@@ -4389,7 +4389,7 @@
           <p:nvPr/>
         </p:nvPicPr>
         <p:blipFill>
-          <a:blip xmlns:r="http://schemas.openxmlformats.org/officeDocument/2006/relationships" xmlns:a="http://schemas.openxmlformats.org/drawingml/2006/main" r:embed="R56f4f1d3ecab48fc"/>
+          <a:blip xmlns:r="http://schemas.openxmlformats.org/officeDocument/2006/relationships" xmlns:a="http://schemas.openxmlformats.org/drawingml/2006/main" r:embed="Rd57c85cacda2443f"/>
           <a:srcRect xmlns:a="http://schemas.openxmlformats.org/drawingml/2006/main" l="-2083" t="0" r="-2083" b="0"/>
           <a:stretch xmlns:a="http://schemas.openxmlformats.org/drawingml/2006/main"/>
         </p:blipFill>
@@ -6238,7 +6238,7 @@
           <p:nvPr/>
         </p:nvPicPr>
         <p:blipFill>
-          <a:blip xmlns:r="http://schemas.openxmlformats.org/officeDocument/2006/relationships" xmlns:a="http://schemas.openxmlformats.org/drawingml/2006/main" r:embed="Re2bd4fc8e10a4ea9"/>
+          <a:blip xmlns:r="http://schemas.openxmlformats.org/officeDocument/2006/relationships" xmlns:a="http://schemas.openxmlformats.org/drawingml/2006/main" r:embed="R9e598b83357d4753"/>
           <a:srcRect xmlns:a="http://schemas.openxmlformats.org/drawingml/2006/main" l="-2083" t="0" r="-2083" b="0"/>
           <a:stretch xmlns:a="http://schemas.openxmlformats.org/drawingml/2006/main"/>
         </p:blipFill>
@@ -6261,7 +6261,7 @@
           <p:nvPr/>
         </p:nvPicPr>
         <p:blipFill>
-          <a:blip xmlns:r="http://schemas.openxmlformats.org/officeDocument/2006/relationships" xmlns:a="http://schemas.openxmlformats.org/drawingml/2006/main" r:embed="R0c4145a04c5743f5"/>
+          <a:blip xmlns:r="http://schemas.openxmlformats.org/officeDocument/2006/relationships" xmlns:a="http://schemas.openxmlformats.org/drawingml/2006/main" r:embed="R69f79df3266f4516"/>
           <a:srcRect xmlns:a="http://schemas.openxmlformats.org/drawingml/2006/main" l="-2083" t="0" r="-2083" b="0"/>
           <a:stretch xmlns:a="http://schemas.openxmlformats.org/drawingml/2006/main"/>
         </p:blipFill>
@@ -7871,7 +7871,7 @@
           <p:nvPr/>
         </p:nvPicPr>
         <p:blipFill>
-          <a:blip xmlns:r="http://schemas.openxmlformats.org/officeDocument/2006/relationships" xmlns:a="http://schemas.openxmlformats.org/drawingml/2006/main" r:embed="Rc44ab1c3ecbc43cc"/>
+          <a:blip xmlns:r="http://schemas.openxmlformats.org/officeDocument/2006/relationships" xmlns:a="http://schemas.openxmlformats.org/drawingml/2006/main" r:embed="R6fcefc68130e4e13"/>
           <a:srcRect xmlns:a="http://schemas.openxmlformats.org/drawingml/2006/main" l="-2083" t="0" r="-2083" b="0"/>
           <a:stretch xmlns:a="http://schemas.openxmlformats.org/drawingml/2006/main"/>
         </p:blipFill>
@@ -8967,7 +8967,7 @@
           <p:nvPr/>
         </p:nvPicPr>
         <p:blipFill>
-          <a:blip xmlns:r="http://schemas.openxmlformats.org/officeDocument/2006/relationships" xmlns:a="http://schemas.openxmlformats.org/drawingml/2006/main" r:embed="R5c318ab4289e4462"/>
+          <a:blip xmlns:r="http://schemas.openxmlformats.org/officeDocument/2006/relationships" xmlns:a="http://schemas.openxmlformats.org/drawingml/2006/main" r:embed="R97202d65c3c547c6"/>
           <a:srcRect xmlns:a="http://schemas.openxmlformats.org/drawingml/2006/main" l="-2083" t="0" r="-2083" b="0"/>
           <a:stretch xmlns:a="http://schemas.openxmlformats.org/drawingml/2006/main"/>
         </p:blipFill>
@@ -10849,7 +10849,7 @@
           <p:nvPr/>
         </p:nvPicPr>
         <p:blipFill>
-          <a:blip xmlns:r="http://schemas.openxmlformats.org/officeDocument/2006/relationships" xmlns:a="http://schemas.openxmlformats.org/drawingml/2006/main" r:embed="R275224034b4c4077"/>
+          <a:blip xmlns:r="http://schemas.openxmlformats.org/officeDocument/2006/relationships" xmlns:a="http://schemas.openxmlformats.org/drawingml/2006/main" r:embed="R518646dc08bf4645"/>
           <a:srcRect xmlns:a="http://schemas.openxmlformats.org/drawingml/2006/main" l="-2083" t="0" r="-2083" b="0"/>
           <a:stretch xmlns:a="http://schemas.openxmlformats.org/drawingml/2006/main"/>
         </p:blipFill>
@@ -13081,7 +13081,7 @@
           <p:nvPr/>
         </p:nvPicPr>
         <p:blipFill>
-          <a:blip xmlns:r="http://schemas.openxmlformats.org/officeDocument/2006/relationships" xmlns:a="http://schemas.openxmlformats.org/drawingml/2006/main" r:embed="R3a8c950a55314ba2"/>
+          <a:blip xmlns:r="http://schemas.openxmlformats.org/officeDocument/2006/relationships" xmlns:a="http://schemas.openxmlformats.org/drawingml/2006/main" r:embed="R0d99b3122f0642ee"/>
           <a:srcRect xmlns:a="http://schemas.openxmlformats.org/drawingml/2006/main" l="-2083" t="0" r="-2083" b="0"/>
           <a:stretch xmlns:a="http://schemas.openxmlformats.org/drawingml/2006/main"/>
         </p:blipFill>
@@ -14828,7 +14828,7 @@
           <p:nvPr/>
         </p:nvPicPr>
         <p:blipFill>
-          <a:blip xmlns:r="http://schemas.openxmlformats.org/officeDocument/2006/relationships" xmlns:a="http://schemas.openxmlformats.org/drawingml/2006/main" r:embed="R8840d189b4c0478f"/>
+          <a:blip xmlns:r="http://schemas.openxmlformats.org/officeDocument/2006/relationships" xmlns:a="http://schemas.openxmlformats.org/drawingml/2006/main" r:embed="Re91471a7824a44b4"/>
           <a:srcRect xmlns:a="http://schemas.openxmlformats.org/drawingml/2006/main" l="-2083" t="0" r="-2083" b="0"/>
           <a:stretch xmlns:a="http://schemas.openxmlformats.org/drawingml/2006/main"/>
         </p:blipFill>
@@ -14851,7 +14851,7 @@
           <p:nvPr/>
         </p:nvPicPr>
         <p:blipFill>
-          <a:blip xmlns:r="http://schemas.openxmlformats.org/officeDocument/2006/relationships" xmlns:a="http://schemas.openxmlformats.org/drawingml/2006/main" r:embed="Rf8968bbfc97a4c84"/>
+          <a:blip xmlns:r="http://schemas.openxmlformats.org/officeDocument/2006/relationships" xmlns:a="http://schemas.openxmlformats.org/drawingml/2006/main" r:embed="R5e86cd7bff714aa3"/>
           <a:srcRect xmlns:a="http://schemas.openxmlformats.org/drawingml/2006/main" l="-2083" t="0" r="-2083" b="0"/>
           <a:stretch xmlns:a="http://schemas.openxmlformats.org/drawingml/2006/main"/>
         </p:blipFill>
@@ -16969,7 +16969,7 @@
           <p:nvPr/>
         </p:nvPicPr>
         <p:blipFill>
-          <a:blip xmlns:r="http://schemas.openxmlformats.org/officeDocument/2006/relationships" xmlns:a="http://schemas.openxmlformats.org/drawingml/2006/main" r:embed="R15b75468e27742e7"/>
+          <a:blip xmlns:r="http://schemas.openxmlformats.org/officeDocument/2006/relationships" xmlns:a="http://schemas.openxmlformats.org/drawingml/2006/main" r:embed="R3baf8946ae38419d"/>
           <a:srcRect xmlns:a="http://schemas.openxmlformats.org/drawingml/2006/main" l="-2083" t="0" r="-2083" b="0"/>
           <a:stretch xmlns:a="http://schemas.openxmlformats.org/drawingml/2006/main"/>
         </p:blipFill>
@@ -18374,7 +18374,7 @@
           <p:nvPr/>
         </p:nvPicPr>
         <p:blipFill>
-          <a:blip xmlns:r="http://schemas.openxmlformats.org/officeDocument/2006/relationships" xmlns:a="http://schemas.openxmlformats.org/drawingml/2006/main" r:embed="R41e779f8b0fe4820"/>
+          <a:blip xmlns:r="http://schemas.openxmlformats.org/officeDocument/2006/relationships" xmlns:a="http://schemas.openxmlformats.org/drawingml/2006/main" r:embed="R144e251c962a4446"/>
           <a:stretch xmlns:a="http://schemas.openxmlformats.org/drawingml/2006/main"/>
         </p:blipFill>
         <p:spPr>
@@ -18510,7 +18510,7 @@
           <p:nvPr/>
         </p:nvPicPr>
         <p:blipFill>
-          <a:blip xmlns:r="http://schemas.openxmlformats.org/officeDocument/2006/relationships" xmlns:a="http://schemas.openxmlformats.org/drawingml/2006/main" r:embed="Rffc9af59d12848ab"/>
+          <a:blip xmlns:r="http://schemas.openxmlformats.org/officeDocument/2006/relationships" xmlns:a="http://schemas.openxmlformats.org/drawingml/2006/main" r:embed="R442900fc6afc464f"/>
           <a:srcRect xmlns:a="http://schemas.openxmlformats.org/drawingml/2006/main" l="-2083" t="0" r="-2083" b="0"/>
           <a:stretch xmlns:a="http://schemas.openxmlformats.org/drawingml/2006/main"/>
         </p:blipFill>
@@ -19915,7 +19915,7 @@
           <p:nvPr/>
         </p:nvPicPr>
         <p:blipFill>
-          <a:blip xmlns:r="http://schemas.openxmlformats.org/officeDocument/2006/relationships" xmlns:a="http://schemas.openxmlformats.org/drawingml/2006/main" r:embed="R0118d6b0b4b64c45"/>
+          <a:blip xmlns:r="http://schemas.openxmlformats.org/officeDocument/2006/relationships" xmlns:a="http://schemas.openxmlformats.org/drawingml/2006/main" r:embed="R4d2056b855e14be3"/>
           <a:stretch xmlns:a="http://schemas.openxmlformats.org/drawingml/2006/main"/>
         </p:blipFill>
         <p:spPr>
@@ -20051,7 +20051,7 @@
           <p:nvPr/>
         </p:nvPicPr>
         <p:blipFill>
-          <a:blip xmlns:r="http://schemas.openxmlformats.org/officeDocument/2006/relationships" xmlns:a="http://schemas.openxmlformats.org/drawingml/2006/main" r:embed="R5ace817cbf6b42a7"/>
+          <a:blip xmlns:r="http://schemas.openxmlformats.org/officeDocument/2006/relationships" xmlns:a="http://schemas.openxmlformats.org/drawingml/2006/main" r:embed="Rb144f754570345a3"/>
           <a:srcRect xmlns:a="http://schemas.openxmlformats.org/drawingml/2006/main" l="-2083" t="0" r="-2083" b="0"/>
           <a:stretch xmlns:a="http://schemas.openxmlformats.org/drawingml/2006/main"/>
         </p:blipFill>
@@ -20308,7 +20308,7 @@
                 <a:ea typeface="페이퍼로지 3 Light"/>
                 <a:cs typeface="페이퍼로지 3 Light"/>
               </a:rPr>
-              <a:t>참여자별 결과 CSV를 조직결과 CSV로 합쳐 업로드합니다. 동일 ID를 짝지으며 역량별 N≥5만 공개하고, ‘예시 리포트 보기’는 샘플입니다.</a:t>
+              <a:t>공유 체크만으로 결과는 자동 전송되지 않습니다. 조직 집계는 개인 결과 CSV를 안전하게 별도 전달·취합해 업로드합니다. 동일 ID를 짝지으며 역량별 N≥5만 공개하고, ‘예시 리포트 보기’는 샘플입니다.</a:t>
             </a:r>
           </a:p>
         </p:txBody>
@@ -21456,7 +21456,7 @@
           <p:nvPr/>
         </p:nvPicPr>
         <p:blipFill>
-          <a:blip xmlns:r="http://schemas.openxmlformats.org/officeDocument/2006/relationships" xmlns:a="http://schemas.openxmlformats.org/drawingml/2006/main" r:embed="Rcf74acda9f634211"/>
+          <a:blip xmlns:r="http://schemas.openxmlformats.org/officeDocument/2006/relationships" xmlns:a="http://schemas.openxmlformats.org/drawingml/2006/main" r:embed="Rb1a2162992c64c30"/>
           <a:stretch xmlns:a="http://schemas.openxmlformats.org/drawingml/2006/main"/>
         </p:blipFill>
         <p:spPr>

--- a/docs/TAP_빠른사용가이드_v3.pptx
+++ b/docs/TAP_빠른사용가이드_v3.pptx
@@ -2,24 +2,24 @@
 <file path=ppt/presentation.xml><?xml version="1.0" encoding="utf-8"?>
 <p:presentation xmlns:p="http://schemas.openxmlformats.org/presentationml/2006/main">
   <p:sldMasterIdLst>
-    <p:sldMasterId xmlns:r="http://schemas.openxmlformats.org/officeDocument/2006/relationships" id="2147483648" r:id="R5e718c3381974cfa"/>
+    <p:sldMasterId xmlns:r="http://schemas.openxmlformats.org/officeDocument/2006/relationships" id="2147483648" r:id="R4403d42e6acb4a13"/>
   </p:sldMasterIdLst>
   <p:notesMasterIdLst>
-    <p:notesMasterId xmlns:r="http://schemas.openxmlformats.org/officeDocument/2006/relationships" r:id="R663f4000e4264ea7"/>
+    <p:notesMasterId xmlns:r="http://schemas.openxmlformats.org/officeDocument/2006/relationships" r:id="R67140de23a874947"/>
   </p:notesMasterIdLst>
   <p:sldIdLst>
-    <p:sldId xmlns:r="http://schemas.openxmlformats.org/officeDocument/2006/relationships" id="256" r:id="R8cab738111af40fa"/>
-    <p:sldId xmlns:r="http://schemas.openxmlformats.org/officeDocument/2006/relationships" id="257" r:id="Rb566b1cff3674855"/>
-    <p:sldId xmlns:r="http://schemas.openxmlformats.org/officeDocument/2006/relationships" id="258" r:id="R8f95c2de7f54471d"/>
-    <p:sldId xmlns:r="http://schemas.openxmlformats.org/officeDocument/2006/relationships" id="259" r:id="Rc11af562d5644864"/>
-    <p:sldId xmlns:r="http://schemas.openxmlformats.org/officeDocument/2006/relationships" id="260" r:id="R091356f9bd124fdd"/>
-    <p:sldId xmlns:r="http://schemas.openxmlformats.org/officeDocument/2006/relationships" id="261" r:id="Rda1d94d9df554aef"/>
-    <p:sldId xmlns:r="http://schemas.openxmlformats.org/officeDocument/2006/relationships" id="262" r:id="R8ff4bf4e3c7c4cb7"/>
-    <p:sldId xmlns:r="http://schemas.openxmlformats.org/officeDocument/2006/relationships" id="263" r:id="R3dbc54836d984b41"/>
-    <p:sldId xmlns:r="http://schemas.openxmlformats.org/officeDocument/2006/relationships" id="264" r:id="Rbcc3a16b9b994397"/>
-    <p:sldId xmlns:r="http://schemas.openxmlformats.org/officeDocument/2006/relationships" id="265" r:id="R20c6c954f172440c"/>
-    <p:sldId xmlns:r="http://schemas.openxmlformats.org/officeDocument/2006/relationships" id="266" r:id="R86d0f67d7b314265"/>
-    <p:sldId xmlns:r="http://schemas.openxmlformats.org/officeDocument/2006/relationships" id="267" r:id="R4f8a3660d2684fa3"/>
+    <p:sldId xmlns:r="http://schemas.openxmlformats.org/officeDocument/2006/relationships" id="256" r:id="R223fcd8e2e7e4916"/>
+    <p:sldId xmlns:r="http://schemas.openxmlformats.org/officeDocument/2006/relationships" id="257" r:id="R48f81ee1f284464f"/>
+    <p:sldId xmlns:r="http://schemas.openxmlformats.org/officeDocument/2006/relationships" id="258" r:id="Rf0bd8f261546480a"/>
+    <p:sldId xmlns:r="http://schemas.openxmlformats.org/officeDocument/2006/relationships" id="259" r:id="Raf96e82311724744"/>
+    <p:sldId xmlns:r="http://schemas.openxmlformats.org/officeDocument/2006/relationships" id="260" r:id="Ra8740d4f4b7346aa"/>
+    <p:sldId xmlns:r="http://schemas.openxmlformats.org/officeDocument/2006/relationships" id="261" r:id="Rb27d648cfc6544fc"/>
+    <p:sldId xmlns:r="http://schemas.openxmlformats.org/officeDocument/2006/relationships" id="262" r:id="Re72307610e184dda"/>
+    <p:sldId xmlns:r="http://schemas.openxmlformats.org/officeDocument/2006/relationships" id="263" r:id="Rfe78941619ed45cd"/>
+    <p:sldId xmlns:r="http://schemas.openxmlformats.org/officeDocument/2006/relationships" id="264" r:id="R13a660a708db4756"/>
+    <p:sldId xmlns:r="http://schemas.openxmlformats.org/officeDocument/2006/relationships" id="265" r:id="R7b5f7489dc074c88"/>
+    <p:sldId xmlns:r="http://schemas.openxmlformats.org/officeDocument/2006/relationships" id="266" r:id="Rb87f14c776334f6d"/>
+    <p:sldId xmlns:r="http://schemas.openxmlformats.org/officeDocument/2006/relationships" id="267" r:id="Rdf683cfa533944d5"/>
   </p:sldIdLst>
   <p:sldSz cx="18288000" cy="10287000"/>
   <p:notesSz cx="6858000" cy="9144000"/>
@@ -593,7 +593,7 @@
           </a:p>
           <a:p xmlns:a="http://schemas.openxmlformats.org/drawingml/2006/main">
             <a:r>
-              <a:t>- TAP Streamlit application source and locally verified UI/content, 2026-08-16.</a:t>
+              <a:t>- TAP Streamlit application source and GitHub synthetic demo persistence flow, inspected 2026-08-17.</a:t>
             </a:r>
           </a:p>
           <a:p xmlns:a="http://schemas.openxmlformats.org/drawingml/2006/main">
@@ -688,7 +688,7 @@
           </a:p>
           <a:p xmlns:a="http://schemas.openxmlformats.org/drawingml/2006/main">
             <a:r>
-              <a:t>- TAP Streamlit application source and locally verified UI/content, 2026-08-16.</a:t>
+              <a:t>- TAP Streamlit application source and GitHub synthetic demo persistence flow, inspected 2026-08-17.</a:t>
             </a:r>
           </a:p>
           <a:p xmlns:a="http://schemas.openxmlformats.org/drawingml/2006/main">
@@ -778,7 +778,7 @@
           </a:p>
           <a:p xmlns:a="http://schemas.openxmlformats.org/drawingml/2006/main">
             <a:r>
-              <a:t>- TAP Streamlit application source and locally verified UI/content, 2026-08-16.</a:t>
+              <a:t>- TAP Streamlit application source and GitHub synthetic demo persistence flow, inspected 2026-08-17.</a:t>
             </a:r>
           </a:p>
           <a:p xmlns:a="http://schemas.openxmlformats.org/drawingml/2006/main">
@@ -1048,7 +1048,7 @@
           </a:p>
           <a:p xmlns:a="http://schemas.openxmlformats.org/drawingml/2006/main">
             <a:r>
-              <a:t>- TAP Streamlit application source and locally verified UI/content, 2026-08-16.</a:t>
+              <a:t>- TAP Streamlit application source and GitHub synthetic demo persistence flow, inspected 2026-08-17.</a:t>
             </a:r>
           </a:p>
           <a:p xmlns:a="http://schemas.openxmlformats.org/drawingml/2006/main">
@@ -1228,7 +1228,7 @@
           </a:p>
           <a:p xmlns:a="http://schemas.openxmlformats.org/drawingml/2006/main">
             <a:r>
-              <a:t>- TAP Streamlit application source and locally verified UI/content, 2026-08-16.</a:t>
+              <a:t>- TAP Streamlit application source and GitHub synthetic demo persistence flow, inspected 2026-08-17.</a:t>
             </a:r>
           </a:p>
           <a:p xmlns:a="http://schemas.openxmlformats.org/drawingml/2006/main">
@@ -1318,7 +1318,7 @@
           </a:p>
           <a:p xmlns:a="http://schemas.openxmlformats.org/drawingml/2006/main">
             <a:r>
-              <a:t>- TAP Streamlit application source and locally verified UI/content, 2026-08-16.</a:t>
+              <a:t>- TAP Streamlit application source and GitHub synthetic demo persistence flow, inspected 2026-08-17.</a:t>
             </a:r>
           </a:p>
           <a:p xmlns:a="http://schemas.openxmlformats.org/drawingml/2006/main">
@@ -1413,7 +1413,7 @@
           </a:p>
           <a:p xmlns:a="http://schemas.openxmlformats.org/drawingml/2006/main">
             <a:r>
-              <a:t>- TAP Streamlit application source and locally verified UI/content, 2026-08-16.</a:t>
+              <a:t>- TAP Streamlit application source and GitHub synthetic demo persistence flow, inspected 2026-08-17.</a:t>
             </a:r>
           </a:p>
           <a:p xmlns:a="http://schemas.openxmlformats.org/drawingml/2006/main">
@@ -1508,7 +1508,7 @@
           </a:p>
           <a:p xmlns:a="http://schemas.openxmlformats.org/drawingml/2006/main">
             <a:r>
-              <a:t>- TAP Streamlit application source and locally verified UI/content, 2026-08-16.</a:t>
+              <a:t>- TAP Streamlit application source and GitHub synthetic demo persistence flow, inspected 2026-08-17.</a:t>
             </a:r>
           </a:p>
           <a:p xmlns:a="http://schemas.openxmlformats.org/drawingml/2006/main">
@@ -1754,8 +1754,8 @@
   </p:cSld>
   <p:clrMap bg1="lt1" tx1="dk1" bg2="lt2" tx2="dk2" accent1="accent1" accent2="accent2" accent3="accent3" accent4="accent4" accent5="accent5" accent6="accent6" hlink="hlink" folHlink="folHlink"/>
   <p:sldLayoutIdLst>
-    <p:sldLayoutId xmlns:r="http://schemas.openxmlformats.org/officeDocument/2006/relationships" id="2147483649" r:id="Rd4a81bd6afaa471e"/>
-    <p:sldLayoutId xmlns:r="http://schemas.openxmlformats.org/officeDocument/2006/relationships" id="2147483650" r:id="R499ca122ee014e02"/>
+    <p:sldLayoutId xmlns:r="http://schemas.openxmlformats.org/officeDocument/2006/relationships" id="2147483649" r:id="R47bff17f3bb4451a"/>
+    <p:sldLayoutId xmlns:r="http://schemas.openxmlformats.org/officeDocument/2006/relationships" id="2147483650" r:id="R537847a9eef541a5"/>
   </p:sldLayoutIdLst>
   <p:hf sldNum="0" hdr="0" ftr="0" dt="0"/>
   <p:txStyles>
@@ -2284,7 +2284,7 @@
           <p:nvPr/>
         </p:nvPicPr>
         <p:blipFill>
-          <a:blip xmlns:r="http://schemas.openxmlformats.org/officeDocument/2006/relationships" xmlns:a="http://schemas.openxmlformats.org/drawingml/2006/main" r:embed="R749dfbe7c695436a"/>
+          <a:blip xmlns:r="http://schemas.openxmlformats.org/officeDocument/2006/relationships" xmlns:a="http://schemas.openxmlformats.org/drawingml/2006/main" r:embed="R35b874634ca840cd"/>
           <a:srcRect xmlns:a="http://schemas.openxmlformats.org/drawingml/2006/main" l="0" t="-400" r="0" b="-400"/>
           <a:stretch xmlns:a="http://schemas.openxmlformats.org/drawingml/2006/main"/>
         </p:blipFill>
@@ -2307,7 +2307,7 @@
           <p:nvPr/>
         </p:nvPicPr>
         <p:blipFill>
-          <a:blip xmlns:r="http://schemas.openxmlformats.org/officeDocument/2006/relationships" xmlns:a="http://schemas.openxmlformats.org/drawingml/2006/main" r:embed="R30c766c67d464c8d"/>
+          <a:blip xmlns:r="http://schemas.openxmlformats.org/officeDocument/2006/relationships" xmlns:a="http://schemas.openxmlformats.org/drawingml/2006/main" r:embed="Ra2012af9bfcf4781"/>
           <a:srcRect xmlns:a="http://schemas.openxmlformats.org/drawingml/2006/main" l="-2083" t="0" r="-2083" b="0"/>
           <a:stretch xmlns:a="http://schemas.openxmlformats.org/drawingml/2006/main"/>
         </p:blipFill>
@@ -2940,7 +2940,7 @@
           <p:nvPr/>
         </p:nvPicPr>
         <p:blipFill>
-          <a:blip xmlns:r="http://schemas.openxmlformats.org/officeDocument/2006/relationships" xmlns:a="http://schemas.openxmlformats.org/drawingml/2006/main" r:embed="Rff0b04ea54444cdb"/>
+          <a:blip xmlns:r="http://schemas.openxmlformats.org/officeDocument/2006/relationships" xmlns:a="http://schemas.openxmlformats.org/drawingml/2006/main" r:embed="R1676431d5ec84ab9"/>
           <a:srcRect xmlns:a="http://schemas.openxmlformats.org/drawingml/2006/main" l="-2083" t="0" r="-2083" b="0"/>
           <a:stretch xmlns:a="http://schemas.openxmlformats.org/drawingml/2006/main"/>
         </p:blipFill>
@@ -3118,7 +3118,7 @@
                 <a:ea typeface="페이퍼로지 2 ExtraLight"/>
                 <a:cs typeface="페이퍼로지 2 ExtraLight"/>
               </a:rPr>
-              <a:t>실제 세션과 KMA 운영 목업을</a:t>
+              <a:t>KMA 대시보드는 연결 시</a:t>
             </a:r>
           </a:p>
           <a:p xmlns:a="http://schemas.openxmlformats.org/drawingml/2006/main">
@@ -3142,7 +3142,7 @@
                 <a:ea typeface="페이퍼로지 6 SemiBold"/>
                 <a:cs typeface="페이퍼로지 6 SemiBold"/>
               </a:rPr>
-              <a:t>구분해 확인합니다</a:t>
+              <a:t>누적 합계로 전환됩니다</a:t>
             </a:r>
           </a:p>
         </p:txBody>
@@ -3197,7 +3197,7 @@
                 <a:ea typeface="페이퍼로지 3 Light"/>
                 <a:cs typeface="페이퍼로지 3 Light"/>
               </a:rPr>
-              <a:t>교육담당자 홈은 현재 브라우저 실데이터입니다. KMA ‘회원사 운영 화면’의 회원사·프로젝트 수치는 목업이며 문항 검수와 별개입니다.</a:t>
+              <a:t>GitHub 연결 시 demo-data의 합성 프로젝트·참여자·사전·사후 완료 건을 집계합니다. 미연결 또는 데이터 없음 상태에서는 샘플을 표시하며 문항은행 검수는 계속 사용할 수 있습니다.</a:t>
             </a:r>
           </a:p>
         </p:txBody>
@@ -3446,7 +3446,7 @@
                 <a:ea typeface="페이퍼로지 4 Regular"/>
                 <a:cs typeface="페이퍼로지 4 Regular"/>
               </a:rPr>
-              <a:t>교육담당자 홈 = 실세션</a:t>
+              <a:t>연결 시 누적 합계</a:t>
             </a:r>
           </a:p>
         </p:txBody>
@@ -3598,7 +3598,7 @@
                 <a:ea typeface="페이퍼로지 4 Regular"/>
                 <a:cs typeface="페이퍼로지 4 Regular"/>
               </a:rPr>
-              <a:t>KMA 운영 화면 = 목업</a:t>
+              <a:t>미연결 시 샘플</a:t>
             </a:r>
           </a:p>
         </p:txBody>
@@ -3708,7 +3708,7 @@
                 <a:ea typeface="페이퍼로지 4 Regular"/>
                 <a:cs typeface="페이퍼로지 4 Regular"/>
               </a:rPr>
-              <a:t>타 브라우저 미합산</a:t>
+              <a:t>개인 식별값 미표시</a:t>
             </a:r>
           </a:p>
         </p:txBody>
@@ -4345,7 +4345,7 @@
           <p:nvPr/>
         </p:nvPicPr>
         <p:blipFill>
-          <a:blip xmlns:r="http://schemas.openxmlformats.org/officeDocument/2006/relationships" xmlns:a="http://schemas.openxmlformats.org/drawingml/2006/main" r:embed="R162e0e55c36e4685"/>
+          <a:blip xmlns:r="http://schemas.openxmlformats.org/officeDocument/2006/relationships" xmlns:a="http://schemas.openxmlformats.org/drawingml/2006/main" r:embed="R00f7ea704e634509"/>
           <a:stretch xmlns:a="http://schemas.openxmlformats.org/drawingml/2006/main"/>
         </p:blipFill>
         <p:spPr>
@@ -4389,7 +4389,7 @@
           <p:nvPr/>
         </p:nvPicPr>
         <p:blipFill>
-          <a:blip xmlns:r="http://schemas.openxmlformats.org/officeDocument/2006/relationships" xmlns:a="http://schemas.openxmlformats.org/drawingml/2006/main" r:embed="Rd57c85cacda2443f"/>
+          <a:blip xmlns:r="http://schemas.openxmlformats.org/officeDocument/2006/relationships" xmlns:a="http://schemas.openxmlformats.org/drawingml/2006/main" r:embed="R54e29ba7fa9b47d1"/>
           <a:srcRect xmlns:a="http://schemas.openxmlformats.org/drawingml/2006/main" l="-2083" t="0" r="-2083" b="0"/>
           <a:stretch xmlns:a="http://schemas.openxmlformats.org/drawingml/2006/main"/>
         </p:blipFill>
@@ -4453,7 +4453,7 @@
                 <a:ea typeface="페이퍼로지 2 ExtraLight"/>
                 <a:cs typeface="페이퍼로지 2 ExtraLight"/>
               </a:rPr>
-              <a:t>기타 버튼은 최신 명칭으로</a:t>
+              <a:t>프로젝트 코드와 새로고침까지</a:t>
             </a:r>
           </a:p>
           <a:p xmlns:a="http://schemas.openxmlformats.org/drawingml/2006/main">
@@ -4477,7 +4477,7 @@
                 <a:ea typeface="페이퍼로지 6 SemiBold"/>
                 <a:cs typeface="페이퍼로지 6 SemiBold"/>
               </a:rPr>
-              <a:t>확인하면 됩니다</a:t>
+              <a:t>핵심 버튼만 확인합니다</a:t>
             </a:r>
           </a:p>
         </p:txBody>
@@ -4532,7 +4532,7 @@
                 <a:ea typeface="페이퍼로지 3 Light"/>
                 <a:cs typeface="페이퍼로지 3 Light"/>
               </a:rPr>
-              <a:t>자주 찾는 기능만 모았습니다. 상세 순서는 앞선 역할별 화면을 따르세요.</a:t>
+              <a:t>검사 완료 저장은 자동입니다. JSON은 GitHub 연결 실패에 대비한 백업으로 내려받습니다.</a:t>
             </a:r>
           </a:p>
         </p:txBody>
@@ -4970,7 +4970,7 @@
                 <a:ea typeface="페이퍼로지 4 Regular"/>
                 <a:cs typeface="페이퍼로지 4 Regular"/>
               </a:rPr>
-              <a:t>교육평가 프로젝트</a:t>
+              <a:t>프로젝트 설정</a:t>
             </a:r>
           </a:p>
           <a:p xmlns:a="http://schemas.openxmlformats.org/drawingml/2006/main">
@@ -4994,7 +4994,7 @@
                 <a:ea typeface="페이퍼로지 4 Regular"/>
                 <a:cs typeface="페이퍼로지 4 Regular"/>
               </a:rPr>
-              <a:t>사전·사후 검사</a:t>
+              <a:t>프로젝트 코드</a:t>
             </a:r>
           </a:p>
         </p:txBody>
@@ -5201,7 +5201,7 @@
                 <a:ea typeface="페이퍼로지 4 Regular"/>
                 <a:cs typeface="페이퍼로지 4 Regular"/>
               </a:rPr>
-              <a:t>다음 문항 →</a:t>
+              <a:t>기획검증 접속코드</a:t>
             </a:r>
           </a:p>
           <a:p xmlns:a="http://schemas.openxmlformats.org/drawingml/2006/main">
@@ -5225,7 +5225,7 @@
                 <a:ea typeface="페이퍼로지 4 Regular"/>
                 <a:cs typeface="페이퍼로지 4 Regular"/>
               </a:rPr>
-              <a:t>이전 문항</a:t>
+              <a:t>실제 검사</a:t>
             </a:r>
           </a:p>
         </p:txBody>
@@ -5663,7 +5663,7 @@
                 <a:ea typeface="페이퍼로지 4 Regular"/>
                 <a:cs typeface="페이퍼로지 4 Regular"/>
               </a:rPr>
-              <a:t>예시 리포트 보기</a:t>
+              <a:t>누적 새로고침</a:t>
             </a:r>
           </a:p>
           <a:p xmlns:a="http://schemas.openxmlformats.org/drawingml/2006/main">
@@ -5687,7 +5687,7 @@
                 <a:ea typeface="페이퍼로지 4 Regular"/>
                 <a:cs typeface="페이퍼로지 4 Regular"/>
               </a:rPr>
-              <a:t>조직결과 CSV 업로드</a:t>
+              <a:t>조직 리포트</a:t>
             </a:r>
           </a:p>
         </p:txBody>
@@ -6238,7 +6238,7 @@
           <p:nvPr/>
         </p:nvPicPr>
         <p:blipFill>
-          <a:blip xmlns:r="http://schemas.openxmlformats.org/officeDocument/2006/relationships" xmlns:a="http://schemas.openxmlformats.org/drawingml/2006/main" r:embed="R9e598b83357d4753"/>
+          <a:blip xmlns:r="http://schemas.openxmlformats.org/officeDocument/2006/relationships" xmlns:a="http://schemas.openxmlformats.org/drawingml/2006/main" r:embed="R82fa6676bb2c41ae"/>
           <a:srcRect xmlns:a="http://schemas.openxmlformats.org/drawingml/2006/main" l="-2083" t="0" r="-2083" b="0"/>
           <a:stretch xmlns:a="http://schemas.openxmlformats.org/drawingml/2006/main"/>
         </p:blipFill>
@@ -6261,7 +6261,7 @@
           <p:nvPr/>
         </p:nvPicPr>
         <p:blipFill>
-          <a:blip xmlns:r="http://schemas.openxmlformats.org/officeDocument/2006/relationships" xmlns:a="http://schemas.openxmlformats.org/drawingml/2006/main" r:embed="R69f79df3266f4516"/>
+          <a:blip xmlns:r="http://schemas.openxmlformats.org/officeDocument/2006/relationships" xmlns:a="http://schemas.openxmlformats.org/drawingml/2006/main" r:embed="R782e85d975714891"/>
           <a:srcRect xmlns:a="http://schemas.openxmlformats.org/drawingml/2006/main" l="-2083" t="0" r="-2083" b="0"/>
           <a:stretch xmlns:a="http://schemas.openxmlformats.org/drawingml/2006/main"/>
         </p:blipFill>
@@ -6582,7 +6582,7 @@
                 <a:ea typeface="페이퍼로지 2 ExtraLight"/>
                 <a:cs typeface="페이퍼로지 2 ExtraLight"/>
               </a:rPr>
-              <a:t>기준파일·N&lt;5·세션 초기화를</a:t>
+              <a:t>접속코드·GitHub 연결·N&lt;5를</a:t>
             </a:r>
           </a:p>
           <a:p xmlns:a="http://schemas.openxmlformats.org/drawingml/2006/main">
@@ -6661,7 +6661,7 @@
                 <a:ea typeface="페이퍼로지 3 Light"/>
                 <a:cs typeface="페이퍼로지 3 Light"/>
               </a:rPr>
-              <a:t>브라우저 세션은 서버 DB가 아닙니다. 기준파일과 결과 CSV를 내려받아 보관하고, 필요하면 사이드바의 사용설명서 PDF를 확인하세요.</a:t>
+              <a:t>이 저장 방식은 기획검증용 합성데이터 전용입니다. Streamlit Secrets에 PAT·저장소·접속코드를 등록하고, 실운영에서는 자체 서버 DB로 전환하세요.</a:t>
             </a:r>
           </a:p>
         </p:txBody>
@@ -7046,7 +7046,7 @@
                 <a:ea typeface="페이퍼로지 5 Medium"/>
                 <a:cs typeface="페이퍼로지 5 Medium"/>
               </a:rPr>
-              <a:t>기준파일 없음</a:t>
+              <a:t>접속코드 오류</a:t>
             </a:r>
           </a:p>
         </p:txBody>
@@ -7101,7 +7101,7 @@
                 <a:ea typeface="페이퍼로지 4 Regular"/>
                 <a:cs typeface="페이퍼로지 4 Regular"/>
               </a:rPr>
-              <a:t>사전 완료 후 JSON 저장</a:t>
+              <a:t>공유 코드 다시 입력</a:t>
             </a:r>
           </a:p>
         </p:txBody>
@@ -7156,7 +7156,7 @@
                 <a:ea typeface="페이퍼로지 5 Medium"/>
                 <a:cs typeface="페이퍼로지 5 Medium"/>
               </a:rPr>
-              <a:t>사후 복원 실패</a:t>
+              <a:t>GitHub 미연결</a:t>
             </a:r>
           </a:p>
         </p:txBody>
@@ -7211,7 +7211,7 @@
                 <a:ea typeface="페이퍼로지 4 Regular"/>
                 <a:cs typeface="페이퍼로지 4 Regular"/>
               </a:rPr>
-              <a:t>동일 ID · JSON 확인</a:t>
+              <a:t>Secrets · PAT 확인</a:t>
             </a:r>
           </a:p>
         </p:txBody>
@@ -7376,7 +7376,7 @@
                 <a:ea typeface="페이퍼로지 5 Medium"/>
                 <a:cs typeface="페이퍼로지 5 Medium"/>
               </a:rPr>
-              <a:t>세션 초기화</a:t>
+              <a:t>저장·복원 실패</a:t>
             </a:r>
           </a:p>
         </p:txBody>
@@ -7431,7 +7431,7 @@
                 <a:ea typeface="페이퍼로지 4 Regular"/>
                 <a:cs typeface="페이퍼로지 4 Regular"/>
               </a:rPr>
-              <a:t>프로젝트 다시 설정</a:t>
+              <a:t>동일 코드·ID · JSON 확인</a:t>
             </a:r>
           </a:p>
         </p:txBody>
@@ -7486,7 +7486,7 @@
                 <a:ea typeface="페이퍼로지 5 Medium"/>
                 <a:cs typeface="페이퍼로지 5 Medium"/>
               </a:rPr>
-              <a:t>조직결과 없음</a:t>
+              <a:t>데이터 분기</a:t>
             </a:r>
           </a:p>
         </p:txBody>
@@ -7541,7 +7541,7 @@
                 <a:ea typeface="페이퍼로지 4 Regular"/>
                 <a:cs typeface="페이퍼로지 4 Regular"/>
               </a:rPr>
-              <a:t>CSV 업로드 확인</a:t>
+              <a:t>demo-data 전용 확인</a:t>
             </a:r>
           </a:p>
         </p:txBody>
@@ -7596,7 +7596,7 @@
                 <a:ea typeface="페이퍼로지 5 Medium"/>
                 <a:cs typeface="페이퍼로지 5 Medium"/>
               </a:rPr>
-              <a:t>다시 시작</a:t>
+              <a:t>연결 없이 사용</a:t>
             </a:r>
           </a:p>
         </p:txBody>
@@ -7651,7 +7651,7 @@
                 <a:ea typeface="페이퍼로지 4 Regular"/>
                 <a:cs typeface="페이퍼로지 4 Regular"/>
               </a:rPr>
-              <a:t>실제 검사 메뉴 확인</a:t>
+              <a:t>세션 · JSON · CSV 사용</a:t>
             </a:r>
           </a:p>
         </p:txBody>
@@ -7871,7 +7871,7 @@
           <p:nvPr/>
         </p:nvPicPr>
         <p:blipFill>
-          <a:blip xmlns:r="http://schemas.openxmlformats.org/officeDocument/2006/relationships" xmlns:a="http://schemas.openxmlformats.org/drawingml/2006/main" r:embed="R6fcefc68130e4e13"/>
+          <a:blip xmlns:r="http://schemas.openxmlformats.org/officeDocument/2006/relationships" xmlns:a="http://schemas.openxmlformats.org/drawingml/2006/main" r:embed="Rb349ef7116df4831"/>
           <a:srcRect xmlns:a="http://schemas.openxmlformats.org/drawingml/2006/main" l="-2083" t="0" r="-2083" b="0"/>
           <a:stretch xmlns:a="http://schemas.openxmlformats.org/drawingml/2006/main"/>
         </p:blipFill>
@@ -8967,7 +8967,7 @@
           <p:nvPr/>
         </p:nvPicPr>
         <p:blipFill>
-          <a:blip xmlns:r="http://schemas.openxmlformats.org/officeDocument/2006/relationships" xmlns:a="http://schemas.openxmlformats.org/drawingml/2006/main" r:embed="R97202d65c3c547c6"/>
+          <a:blip xmlns:r="http://schemas.openxmlformats.org/officeDocument/2006/relationships" xmlns:a="http://schemas.openxmlformats.org/drawingml/2006/main" r:embed="Rf6408ae0ee8f4fe7"/>
           <a:srcRect xmlns:a="http://schemas.openxmlformats.org/drawingml/2006/main" l="-2083" t="0" r="-2083" b="0"/>
           <a:stretch xmlns:a="http://schemas.openxmlformats.org/drawingml/2006/main"/>
         </p:blipFill>
@@ -10849,7 +10849,7 @@
           <p:nvPr/>
         </p:nvPicPr>
         <p:blipFill>
-          <a:blip xmlns:r="http://schemas.openxmlformats.org/officeDocument/2006/relationships" xmlns:a="http://schemas.openxmlformats.org/drawingml/2006/main" r:embed="R518646dc08bf4645"/>
+          <a:blip xmlns:r="http://schemas.openxmlformats.org/officeDocument/2006/relationships" xmlns:a="http://schemas.openxmlformats.org/drawingml/2006/main" r:embed="R68edc56a0f004e0d"/>
           <a:srcRect xmlns:a="http://schemas.openxmlformats.org/drawingml/2006/main" l="-2083" t="0" r="-2083" b="0"/>
           <a:stretch xmlns:a="http://schemas.openxmlformats.org/drawingml/2006/main"/>
         </p:blipFill>
@@ -13081,7 +13081,7 @@
           <p:nvPr/>
         </p:nvPicPr>
         <p:blipFill>
-          <a:blip xmlns:r="http://schemas.openxmlformats.org/officeDocument/2006/relationships" xmlns:a="http://schemas.openxmlformats.org/drawingml/2006/main" r:embed="R0d99b3122f0642ee"/>
+          <a:blip xmlns:r="http://schemas.openxmlformats.org/officeDocument/2006/relationships" xmlns:a="http://schemas.openxmlformats.org/drawingml/2006/main" r:embed="R1eeee3ff54604ab9"/>
           <a:srcRect xmlns:a="http://schemas.openxmlformats.org/drawingml/2006/main" l="-2083" t="0" r="-2083" b="0"/>
           <a:stretch xmlns:a="http://schemas.openxmlformats.org/drawingml/2006/main"/>
         </p:blipFill>
@@ -14828,7 +14828,7 @@
           <p:nvPr/>
         </p:nvPicPr>
         <p:blipFill>
-          <a:blip xmlns:r="http://schemas.openxmlformats.org/officeDocument/2006/relationships" xmlns:a="http://schemas.openxmlformats.org/drawingml/2006/main" r:embed="Re91471a7824a44b4"/>
+          <a:blip xmlns:r="http://schemas.openxmlformats.org/officeDocument/2006/relationships" xmlns:a="http://schemas.openxmlformats.org/drawingml/2006/main" r:embed="Re0df7fe853d04b90"/>
           <a:srcRect xmlns:a="http://schemas.openxmlformats.org/drawingml/2006/main" l="-2083" t="0" r="-2083" b="0"/>
           <a:stretch xmlns:a="http://schemas.openxmlformats.org/drawingml/2006/main"/>
         </p:blipFill>
@@ -14851,7 +14851,7 @@
           <p:nvPr/>
         </p:nvPicPr>
         <p:blipFill>
-          <a:blip xmlns:r="http://schemas.openxmlformats.org/officeDocument/2006/relationships" xmlns:a="http://schemas.openxmlformats.org/drawingml/2006/main" r:embed="R5e86cd7bff714aa3"/>
+          <a:blip xmlns:r="http://schemas.openxmlformats.org/officeDocument/2006/relationships" xmlns:a="http://schemas.openxmlformats.org/drawingml/2006/main" r:embed="R9b1e5c3ec9e9496d"/>
           <a:srcRect xmlns:a="http://schemas.openxmlformats.org/drawingml/2006/main" l="-2083" t="0" r="-2083" b="0"/>
           <a:stretch xmlns:a="http://schemas.openxmlformats.org/drawingml/2006/main"/>
         </p:blipFill>
@@ -15172,7 +15172,7 @@
                 <a:ea typeface="페이퍼로지 2 ExtraLight"/>
                 <a:cs typeface="페이퍼로지 2 ExtraLight"/>
               </a:rPr>
-              <a:t>사전 완료 - 기준파일 저장 -</a:t>
+              <a:t>프로젝트 코드로 사전·사후를</a:t>
             </a:r>
           </a:p>
           <a:p xmlns:a="http://schemas.openxmlformats.org/drawingml/2006/main">
@@ -15196,7 +15196,7 @@
                 <a:ea typeface="페이퍼로지 6 SemiBold"/>
                 <a:cs typeface="페이퍼로지 6 SemiBold"/>
               </a:rPr>
-              <a:t>사후 복원·비교 순서입니다</a:t>
+              <a:t>같은 기록에 연결합니다</a:t>
             </a:r>
           </a:p>
         </p:txBody>
@@ -15251,7 +15251,7 @@
                 <a:ea typeface="페이퍼로지 3 Light"/>
                 <a:cs typeface="페이퍼로지 3 Light"/>
               </a:rPr>
-              <a:t>사전 완료 직후 기준파일 JSON을 저장하고, 8~10주 뒤 불러와 사후검사를 시작합니다.</a:t>
+              <a:t>설정 저장 뒤 프로젝트 코드를 공유합니다. 참여자는 접속코드와 같은 ID로 사전·사후검사를 연결합니다.</a:t>
             </a:r>
           </a:p>
         </p:txBody>
@@ -15691,7 +15691,7 @@
                 <a:ea typeface="페이퍼로지 4 Regular"/>
                 <a:cs typeface="페이퍼로지 4 Regular"/>
               </a:rPr>
-              <a:t>교육일 · 전후 기간 · 역량</a:t>
+              <a:t>프로젝트 코드 · 기간 · 역량</a:t>
             </a:r>
           </a:p>
         </p:txBody>
@@ -15801,7 +15801,7 @@
                 <a:ea typeface="페이퍼로지 4 Regular"/>
                 <a:cs typeface="페이퍼로지 4 Regular"/>
               </a:rPr>
-              <a:t>동일 ID · 동일 문항</a:t>
+              <a:t>접속코드 · 참여자 ID</a:t>
             </a:r>
           </a:p>
         </p:txBody>
@@ -15856,7 +15856,7 @@
                 <a:ea typeface="페이퍼로지 5 Medium"/>
                 <a:cs typeface="페이퍼로지 5 Medium"/>
               </a:rPr>
-              <a:t>기준파일 저장</a:t>
+              <a:t>완료 기록 저장</a:t>
             </a:r>
           </a:p>
         </p:txBody>
@@ -15911,7 +15911,7 @@
                 <a:ea typeface="페이퍼로지 4 Regular"/>
                 <a:cs typeface="페이퍼로지 4 Regular"/>
               </a:rPr>
-              <a:t>JSON 내려받기</a:t>
+              <a:t>사전 완료 시 GitHub 저장</a:t>
             </a:r>
           </a:p>
         </p:txBody>
@@ -16021,7 +16021,7 @@
                 <a:ea typeface="페이퍼로지 4 Regular"/>
                 <a:cs typeface="페이퍼로지 4 Regular"/>
               </a:rPr>
-              <a:t>JSON 업로드 · 확인</a:t>
+              <a:t>프로젝트 코드 · 동일 ID</a:t>
             </a:r>
           </a:p>
         </p:txBody>
@@ -16534,7 +16534,7 @@
                 <a:ea typeface="페이퍼로지 4 Regular"/>
                 <a:cs typeface="페이퍼로지 4 Regular"/>
               </a:rPr>
-              <a:t>1. 설정·사전</a:t>
+              <a:t>1. 프로젝트 설정</a:t>
             </a:r>
           </a:p>
           <a:p xmlns:a="http://schemas.openxmlformats.org/drawingml/2006/main">
@@ -16558,7 +16558,7 @@
                 <a:ea typeface="페이퍼로지 6 SemiBold"/>
                 <a:cs typeface="페이퍼로지 6 SemiBold"/>
               </a:rPr>
-              <a:t>ID 입력·응답</a:t>
+              <a:t>코드 공유</a:t>
             </a:r>
           </a:p>
         </p:txBody>
@@ -16629,7 +16629,7 @@
                 <a:ea typeface="페이퍼로지 4 Regular"/>
                 <a:cs typeface="페이퍼로지 4 Regular"/>
               </a:rPr>
-              <a:t>2. 기준파일</a:t>
+              <a:t>2. 사전 완료</a:t>
             </a:r>
           </a:p>
           <a:p xmlns:a="http://schemas.openxmlformats.org/drawingml/2006/main">
@@ -16653,7 +16653,7 @@
                 <a:ea typeface="페이퍼로지 6 SemiBold"/>
                 <a:cs typeface="페이퍼로지 6 SemiBold"/>
               </a:rPr>
-              <a:t>JSON 저장</a:t>
+              <a:t>GitHub 저장</a:t>
             </a:r>
           </a:p>
         </p:txBody>
@@ -16817,7 +16817,7 @@
                 <a:ea typeface="페이퍼로지 4 Regular"/>
                 <a:cs typeface="페이퍼로지 4 Regular"/>
               </a:rPr>
-              <a:t>3–4. 8~10주</a:t>
+              <a:t>3–4. 같은 ID</a:t>
             </a:r>
           </a:p>
           <a:p xmlns:a="http://schemas.openxmlformats.org/drawingml/2006/main">
@@ -16969,7 +16969,7 @@
           <p:nvPr/>
         </p:nvPicPr>
         <p:blipFill>
-          <a:blip xmlns:r="http://schemas.openxmlformats.org/officeDocument/2006/relationships" xmlns:a="http://schemas.openxmlformats.org/drawingml/2006/main" r:embed="R3baf8946ae38419d"/>
+          <a:blip xmlns:r="http://schemas.openxmlformats.org/officeDocument/2006/relationships" xmlns:a="http://schemas.openxmlformats.org/drawingml/2006/main" r:embed="Reffadb3015b94d56"/>
           <a:srcRect xmlns:a="http://schemas.openxmlformats.org/drawingml/2006/main" l="-2083" t="0" r="-2083" b="0"/>
           <a:stretch xmlns:a="http://schemas.openxmlformats.org/drawingml/2006/main"/>
         </p:blipFill>
@@ -17147,7 +17147,7 @@
                 <a:ea typeface="페이퍼로지 2 ExtraLight"/>
                 <a:cs typeface="페이퍼로지 2 ExtraLight"/>
               </a:rPr>
-              <a:t>관리자 대시보드는 현재 세션의</a:t>
+              <a:t>관리자 대시보드는 완료된</a:t>
             </a:r>
           </a:p>
           <a:p xmlns:a="http://schemas.openxmlformats.org/drawingml/2006/main">
@@ -17171,7 +17171,7 @@
                 <a:ea typeface="페이퍼로지 6 SemiBold"/>
                 <a:cs typeface="페이퍼로지 6 SemiBold"/>
               </a:rPr>
-              <a:t>실제 상태만 보여줍니다</a:t>
+              <a:t>합성데이터를 누적합니다</a:t>
             </a:r>
           </a:p>
         </p:txBody>
@@ -17226,7 +17226,7 @@
                 <a:ea typeface="페이퍼로지 3 Light"/>
                 <a:cs typeface="페이퍼로지 3 Light"/>
               </a:rPr>
-              <a:t>사전검사는 프로젝트를 만든 동일 브라우저에서만 시작합니다. 홈은 0/1 프로젝트·참여자와 전후 상태를 표시하며 서버 DB·타 브라우저는 합산하지 않습니다.</a:t>
+              <a:t>GitHub 저장을 켜면 demo-data 분기의 완료된 사전·사후 스냅샷을 프로젝트 코드 기준으로 합산합니다. 연결이 없거나 오류가 나면 현재 세션 데이터로 전환합니다.</a:t>
             </a:r>
           </a:p>
         </p:txBody>
@@ -17475,7 +17475,7 @@
                 <a:ea typeface="페이퍼로지 4 Regular"/>
                 <a:cs typeface="페이퍼로지 4 Regular"/>
               </a:rPr>
-              <a:t>프로젝트 · 참여자 0/1</a:t>
+              <a:t>누적 프로젝트 · 참여자</a:t>
             </a:r>
           </a:p>
         </p:txBody>
@@ -17627,7 +17627,7 @@
                 <a:ea typeface="페이퍼로지 4 Regular"/>
                 <a:cs typeface="페이퍼로지 4 Regular"/>
               </a:rPr>
-              <a:t>사전·사후 응답 · 완료</a:t>
+              <a:t>사전·사후 완료 건수</a:t>
             </a:r>
           </a:p>
         </p:txBody>
@@ -17737,7 +17737,7 @@
                 <a:ea typeface="페이퍼로지 4 Regular"/>
                 <a:cs typeface="페이퍼로지 4 Regular"/>
               </a:rPr>
-              <a:t>짝지은 완료 상태</a:t>
+              <a:t>짝지은 변화 상태</a:t>
             </a:r>
           </a:p>
         </p:txBody>
@@ -17986,7 +17986,7 @@
                 <a:ea typeface="페이퍼로지 4 Regular"/>
                 <a:cs typeface="페이퍼로지 4 Regular"/>
               </a:rPr>
-              <a:t>교육평가 프로젝트</a:t>
+              <a:t>프로젝트 코드 생성</a:t>
             </a:r>
           </a:p>
         </p:txBody>
@@ -18374,7 +18374,7 @@
           <p:nvPr/>
         </p:nvPicPr>
         <p:blipFill>
-          <a:blip xmlns:r="http://schemas.openxmlformats.org/officeDocument/2006/relationships" xmlns:a="http://schemas.openxmlformats.org/drawingml/2006/main" r:embed="R144e251c962a4446"/>
+          <a:blip xmlns:r="http://schemas.openxmlformats.org/officeDocument/2006/relationships" xmlns:a="http://schemas.openxmlformats.org/drawingml/2006/main" r:embed="R76525f252fe14ad4"/>
           <a:stretch xmlns:a="http://schemas.openxmlformats.org/drawingml/2006/main"/>
         </p:blipFill>
         <p:spPr>
@@ -18510,7 +18510,7 @@
           <p:nvPr/>
         </p:nvPicPr>
         <p:blipFill>
-          <a:blip xmlns:r="http://schemas.openxmlformats.org/officeDocument/2006/relationships" xmlns:a="http://schemas.openxmlformats.org/drawingml/2006/main" r:embed="R442900fc6afc464f"/>
+          <a:blip xmlns:r="http://schemas.openxmlformats.org/officeDocument/2006/relationships" xmlns:a="http://schemas.openxmlformats.org/drawingml/2006/main" r:embed="Rd927e6d02622491e"/>
           <a:srcRect xmlns:a="http://schemas.openxmlformats.org/drawingml/2006/main" l="-2083" t="0" r="-2083" b="0"/>
           <a:stretch xmlns:a="http://schemas.openxmlformats.org/drawingml/2006/main"/>
         </p:blipFill>
@@ -18688,7 +18688,7 @@
                 <a:ea typeface="페이퍼로지 2 ExtraLight"/>
                 <a:cs typeface="페이퍼로지 2 ExtraLight"/>
               </a:rPr>
-              <a:t>교육 참여자 ID를 입력하고</a:t>
+              <a:t>프로젝트 코드·접속코드·ID로</a:t>
             </a:r>
           </a:p>
           <a:p xmlns:a="http://schemas.openxmlformats.org/drawingml/2006/main">
@@ -18712,7 +18712,7 @@
                 <a:ea typeface="페이퍼로지 6 SemiBold"/>
                 <a:cs typeface="페이퍼로지 6 SemiBold"/>
               </a:rPr>
-              <a:t>실제 검사를 진행합니다</a:t>
+              <a:t>실제 검사에 참여합니다</a:t>
             </a:r>
           </a:p>
         </p:txBody>
@@ -18767,7 +18767,7 @@
                 <a:ea typeface="페이퍼로지 3 Light"/>
                 <a:cs typeface="페이퍼로지 3 Light"/>
               </a:rPr>
-              <a:t>ID가 비어 있어도 문항은 보이지만 저장은 차단됩니다. 사전 완료 뒤 기준파일 JSON을 저장하고, 사후 시작 전에 업로드해 복원합니다.</a:t>
+              <a:t>사전·사후 완료 시점에만 GitHub에 저장합니다. 사후는 같은 프로젝트 코드와 참여자 ID로 사전 결과를 불러오며, 실패하면 기준파일 JSON으로 복원합니다.</a:t>
             </a:r>
           </a:p>
         </p:txBody>
@@ -19016,7 +19016,7 @@
                 <a:ea typeface="페이퍼로지 4 Regular"/>
                 <a:cs typeface="페이퍼로지 4 Regular"/>
               </a:rPr>
-              <a:t>교육 참여자 ID 입력</a:t>
+              <a:t>프로젝트 코드 입력</a:t>
             </a:r>
           </a:p>
         </p:txBody>
@@ -19168,7 +19168,7 @@
                 <a:ea typeface="페이퍼로지 4 Regular"/>
                 <a:cs typeface="페이퍼로지 4 Regular"/>
               </a:rPr>
-              <a:t>응답 선택 → 다음 문항 →</a:t>
+              <a:t>기획검증 접속코드 입력</a:t>
             </a:r>
           </a:p>
         </p:txBody>
@@ -19278,7 +19278,7 @@
                 <a:ea typeface="페이퍼로지 4 Regular"/>
                 <a:cs typeface="페이퍼로지 4 Regular"/>
               </a:rPr>
-              <a:t>사전 완료 → 기준파일 저장</a:t>
+              <a:t>참여자 ID · 응답 · 완료</a:t>
             </a:r>
           </a:p>
         </p:txBody>
@@ -19527,7 +19527,7 @@
                 <a:ea typeface="페이퍼로지 4 Regular"/>
                 <a:cs typeface="페이퍼로지 4 Regular"/>
               </a:rPr>
-              <a:t>동일 ID로 접속</a:t>
+              <a:t>같은 코드 · ID로 접속</a:t>
             </a:r>
           </a:p>
         </p:txBody>
@@ -19679,7 +19679,7 @@
                 <a:ea typeface="페이퍼로지 4 Regular"/>
                 <a:cs typeface="페이퍼로지 4 Regular"/>
               </a:rPr>
-              <a:t>기준파일 JSON 업로드</a:t>
+              <a:t>사전 완료 기록 불러오기</a:t>
             </a:r>
           </a:p>
         </p:txBody>
@@ -19789,7 +19789,7 @@
                 <a:ea typeface="페이퍼로지 4 Regular"/>
                 <a:cs typeface="페이퍼로지 4 Regular"/>
               </a:rPr>
-              <a:t>복원 확인 → 사후검사</a:t>
+              <a:t>실패 시 JSON 업로드</a:t>
             </a:r>
           </a:p>
         </p:txBody>
@@ -19915,7 +19915,7 @@
           <p:nvPr/>
         </p:nvPicPr>
         <p:blipFill>
-          <a:blip xmlns:r="http://schemas.openxmlformats.org/officeDocument/2006/relationships" xmlns:a="http://schemas.openxmlformats.org/drawingml/2006/main" r:embed="R4d2056b855e14be3"/>
+          <a:blip xmlns:r="http://schemas.openxmlformats.org/officeDocument/2006/relationships" xmlns:a="http://schemas.openxmlformats.org/drawingml/2006/main" r:embed="Rc377ea65311a4c67"/>
           <a:stretch xmlns:a="http://schemas.openxmlformats.org/drawingml/2006/main"/>
         </p:blipFill>
         <p:spPr>
@@ -20051,7 +20051,7 @@
           <p:nvPr/>
         </p:nvPicPr>
         <p:blipFill>
-          <a:blip xmlns:r="http://schemas.openxmlformats.org/officeDocument/2006/relationships" xmlns:a="http://schemas.openxmlformats.org/drawingml/2006/main" r:embed="Rb144f754570345a3"/>
+          <a:blip xmlns:r="http://schemas.openxmlformats.org/officeDocument/2006/relationships" xmlns:a="http://schemas.openxmlformats.org/drawingml/2006/main" r:embed="Re38b7503e20b4588"/>
           <a:srcRect xmlns:a="http://schemas.openxmlformats.org/drawingml/2006/main" l="-2083" t="0" r="-2083" b="0"/>
           <a:stretch xmlns:a="http://schemas.openxmlformats.org/drawingml/2006/main"/>
         </p:blipFill>
@@ -20229,7 +20229,7 @@
                 <a:ea typeface="페이퍼로지 2 ExtraLight"/>
                 <a:cs typeface="페이퍼로지 2 ExtraLight"/>
               </a:rPr>
-              <a:t>개인 결과 CSV를 취합해</a:t>
+              <a:t>프로젝트 코드만 입력하면</a:t>
             </a:r>
           </a:p>
           <a:p xmlns:a="http://schemas.openxmlformats.org/drawingml/2006/main">
@@ -20253,7 +20253,7 @@
                 <a:ea typeface="페이퍼로지 6 SemiBold"/>
                 <a:cs typeface="페이퍼로지 6 SemiBold"/>
               </a:rPr>
-              <a:t>조직 전후 리포트를 만듭니다</a:t>
+              <a:t>조직 전후 리포트를 불러옵니다</a:t>
             </a:r>
           </a:p>
         </p:txBody>
@@ -20308,7 +20308,7 @@
                 <a:ea typeface="페이퍼로지 3 Light"/>
                 <a:cs typeface="페이퍼로지 3 Light"/>
               </a:rPr>
-              <a:t>공유 체크만으로 결과는 자동 전송되지 않습니다. 조직 집계는 개인 결과 CSV를 안전하게 별도 전달·취합해 업로드합니다. 동일 ID를 짝지으며 역량별 N≥5만 공개하고, ‘예시 리포트 보기’는 샘플입니다.</a:t>
+              <a:t>GitHub 연결 시 프로젝트 코드의 완료 데이터를 우선 집계하고, 연결이 없으면 현재 세션 또는 조직결과 CSV를 사용합니다. 동일 ID를 짝지으며 역량별 N≥5만 공개합니다.</a:t>
             </a:r>
           </a:p>
         </p:txBody>
@@ -20557,7 +20557,7 @@
                 <a:ea typeface="페이퍼로지 4 Regular"/>
                 <a:cs typeface="페이퍼로지 4 Regular"/>
               </a:rPr>
-              <a:t>개인 결과 CSV 취합</a:t>
+              <a:t>프로젝트 코드 입력</a:t>
             </a:r>
           </a:p>
         </p:txBody>
@@ -20709,7 +20709,7 @@
                 <a:ea typeface="페이퍼로지 4 Regular"/>
                 <a:cs typeface="페이퍼로지 4 Regular"/>
               </a:rPr>
-              <a:t>조직결과 CSV로 병합</a:t>
+              <a:t>누적 완료 데이터 조회</a:t>
             </a:r>
           </a:p>
         </p:txBody>
@@ -20819,7 +20819,7 @@
                 <a:ea typeface="페이퍼로지 4 Regular"/>
                 <a:cs typeface="페이퍼로지 4 Regular"/>
               </a:rPr>
-              <a:t>조직 리포트에 업로드</a:t>
+              <a:t>조직 리포트 생성</a:t>
             </a:r>
           </a:p>
         </p:txBody>
@@ -21330,7 +21330,7 @@
                 <a:ea typeface="페이퍼로지 4 Regular"/>
                 <a:cs typeface="페이퍼로지 4 Regular"/>
               </a:rPr>
-              <a:t>예시 · 실데이터 구분</a:t>
+              <a:t>GitHub · 세션 · CSV 구분</a:t>
             </a:r>
           </a:p>
         </p:txBody>
@@ -21456,7 +21456,7 @@
           <p:nvPr/>
         </p:nvPicPr>
         <p:blipFill>
-          <a:blip xmlns:r="http://schemas.openxmlformats.org/officeDocument/2006/relationships" xmlns:a="http://schemas.openxmlformats.org/drawingml/2006/main" r:embed="Rb1a2162992c64c30"/>
+          <a:blip xmlns:r="http://schemas.openxmlformats.org/officeDocument/2006/relationships" xmlns:a="http://schemas.openxmlformats.org/drawingml/2006/main" r:embed="R6be76066685a45cf"/>
           <a:stretch xmlns:a="http://schemas.openxmlformats.org/drawingml/2006/main"/>
         </p:blipFill>
         <p:spPr>

--- a/docs/TAP_빠른사용가이드_v3.pptx
+++ b/docs/TAP_빠른사용가이드_v3.pptx
@@ -2,24 +2,24 @@
 <file path=ppt/presentation.xml><?xml version="1.0" encoding="utf-8"?>
 <p:presentation xmlns:p="http://schemas.openxmlformats.org/presentationml/2006/main">
   <p:sldMasterIdLst>
-    <p:sldMasterId xmlns:r="http://schemas.openxmlformats.org/officeDocument/2006/relationships" id="2147483648" r:id="R4403d42e6acb4a13"/>
+    <p:sldMasterId xmlns:r="http://schemas.openxmlformats.org/officeDocument/2006/relationships" id="2147483648" r:id="R4059f06efc5e4776"/>
   </p:sldMasterIdLst>
   <p:notesMasterIdLst>
-    <p:notesMasterId xmlns:r="http://schemas.openxmlformats.org/officeDocument/2006/relationships" r:id="R67140de23a874947"/>
+    <p:notesMasterId xmlns:r="http://schemas.openxmlformats.org/officeDocument/2006/relationships" r:id="R02a3d6bbaefe4a28"/>
   </p:notesMasterIdLst>
   <p:sldIdLst>
-    <p:sldId xmlns:r="http://schemas.openxmlformats.org/officeDocument/2006/relationships" id="256" r:id="R223fcd8e2e7e4916"/>
-    <p:sldId xmlns:r="http://schemas.openxmlformats.org/officeDocument/2006/relationships" id="257" r:id="R48f81ee1f284464f"/>
-    <p:sldId xmlns:r="http://schemas.openxmlformats.org/officeDocument/2006/relationships" id="258" r:id="Rf0bd8f261546480a"/>
-    <p:sldId xmlns:r="http://schemas.openxmlformats.org/officeDocument/2006/relationships" id="259" r:id="Raf96e82311724744"/>
-    <p:sldId xmlns:r="http://schemas.openxmlformats.org/officeDocument/2006/relationships" id="260" r:id="Ra8740d4f4b7346aa"/>
-    <p:sldId xmlns:r="http://schemas.openxmlformats.org/officeDocument/2006/relationships" id="261" r:id="Rb27d648cfc6544fc"/>
-    <p:sldId xmlns:r="http://schemas.openxmlformats.org/officeDocument/2006/relationships" id="262" r:id="Re72307610e184dda"/>
-    <p:sldId xmlns:r="http://schemas.openxmlformats.org/officeDocument/2006/relationships" id="263" r:id="Rfe78941619ed45cd"/>
-    <p:sldId xmlns:r="http://schemas.openxmlformats.org/officeDocument/2006/relationships" id="264" r:id="R13a660a708db4756"/>
-    <p:sldId xmlns:r="http://schemas.openxmlformats.org/officeDocument/2006/relationships" id="265" r:id="R7b5f7489dc074c88"/>
-    <p:sldId xmlns:r="http://schemas.openxmlformats.org/officeDocument/2006/relationships" id="266" r:id="Rb87f14c776334f6d"/>
-    <p:sldId xmlns:r="http://schemas.openxmlformats.org/officeDocument/2006/relationships" id="267" r:id="Rdf683cfa533944d5"/>
+    <p:sldId xmlns:r="http://schemas.openxmlformats.org/officeDocument/2006/relationships" id="256" r:id="R2dde065a6804468a"/>
+    <p:sldId xmlns:r="http://schemas.openxmlformats.org/officeDocument/2006/relationships" id="257" r:id="Rb95aa0dba7e34986"/>
+    <p:sldId xmlns:r="http://schemas.openxmlformats.org/officeDocument/2006/relationships" id="258" r:id="R1172f940d2b94601"/>
+    <p:sldId xmlns:r="http://schemas.openxmlformats.org/officeDocument/2006/relationships" id="259" r:id="Rf1e23ed4a5cd4e85"/>
+    <p:sldId xmlns:r="http://schemas.openxmlformats.org/officeDocument/2006/relationships" id="260" r:id="Rc8e6b171ca67454b"/>
+    <p:sldId xmlns:r="http://schemas.openxmlformats.org/officeDocument/2006/relationships" id="261" r:id="Rc710130561f5414a"/>
+    <p:sldId xmlns:r="http://schemas.openxmlformats.org/officeDocument/2006/relationships" id="262" r:id="Rb32e22bf54a3453c"/>
+    <p:sldId xmlns:r="http://schemas.openxmlformats.org/officeDocument/2006/relationships" id="263" r:id="Rc60b960d2eda4ca3"/>
+    <p:sldId xmlns:r="http://schemas.openxmlformats.org/officeDocument/2006/relationships" id="264" r:id="R4514318d5d0641cd"/>
+    <p:sldId xmlns:r="http://schemas.openxmlformats.org/officeDocument/2006/relationships" id="265" r:id="Rc9165d854c044e94"/>
+    <p:sldId xmlns:r="http://schemas.openxmlformats.org/officeDocument/2006/relationships" id="266" r:id="Rbb2e48ceae364851"/>
+    <p:sldId xmlns:r="http://schemas.openxmlformats.org/officeDocument/2006/relationships" id="267" r:id="Rc723469750e24c97"/>
   </p:sldIdLst>
   <p:sldSz cx="18288000" cy="10287000"/>
   <p:notesSz cx="6858000" cy="9144000"/>
@@ -498,17 +498,22 @@
           </a:p>
           <a:p xmlns:a="http://schemas.openxmlformats.org/drawingml/2006/main">
             <a:r>
-              <a:t>- User-provided template: 수지향_사업개편_PPT기획안_v13.pptx.</a:t>
-            </a:r>
-          </a:p>
-          <a:p xmlns:a="http://schemas.openxmlformats.org/drawingml/2006/main">
-            <a:r>
-              <a:t>- TAP Streamlit application source and locally verified UI/content, 2026-08-13.</a:t>
+              <a:t>- Source guide deck and inherited visual template: docs/TAP_빠른사용가이드_v3.pptx.</a:t>
+            </a:r>
+          </a:p>
+          <a:p xmlns:a="http://schemas.openxmlformats.org/drawingml/2006/main">
+            <a:r>
+              <a:t>- TAP application source, README, and current implemented flows, inspected 2026-08-20.</a:t>
             </a:r>
           </a:p>
           <a:p xmlns:a="http://schemas.openxmlformats.org/drawingml/2006/main">
             <a:r>
               <a:t>- TAP education-evaluation review: docs/TAP_교육평가_검토보고서_v2.md.</a:t>
+            </a:r>
+          </a:p>
+          <a:p xmlns:a="http://schemas.openxmlformats.org/drawingml/2006/main">
+            <a:r>
+              <a:t>- Slide 9 screenshot: current organization-report project selection screen supplied by the user.</a:t>
             </a:r>
           </a:p>
           <a:p xmlns:a="http://schemas.openxmlformats.org/drawingml/2006/main">
@@ -588,12 +593,12 @@
           </a:p>
           <a:p xmlns:a="http://schemas.openxmlformats.org/drawingml/2006/main">
             <a:r>
-              <a:t>- User-provided template: 수지향_사업개편_PPT기획안_v13.pptx.</a:t>
-            </a:r>
-          </a:p>
-          <a:p xmlns:a="http://schemas.openxmlformats.org/drawingml/2006/main">
-            <a:r>
-              <a:t>- TAP Streamlit application source and GitHub synthetic demo persistence flow, inspected 2026-08-17.</a:t>
+              <a:t>- Source guide deck and inherited visual template: docs/TAP_빠른사용가이드_v3.pptx.</a:t>
+            </a:r>
+          </a:p>
+          <a:p xmlns:a="http://schemas.openxmlformats.org/drawingml/2006/main">
+            <a:r>
+              <a:t>- TAP application source, README, and current implemented flows, inspected 2026-08-20.</a:t>
             </a:r>
           </a:p>
           <a:p xmlns:a="http://schemas.openxmlformats.org/drawingml/2006/main">
@@ -603,7 +608,7 @@
           </a:p>
           <a:p xmlns:a="http://schemas.openxmlformats.org/drawingml/2006/main">
             <a:r>
-              <a:t>- Screenshot: locally verified TAP screen (question-bank.png), 2026-08-16.</a:t>
+              <a:t>- Slide 9 screenshot: current organization-report project selection screen supplied by the user.</a:t>
             </a:r>
           </a:p>
           <a:p xmlns:a="http://schemas.openxmlformats.org/drawingml/2006/main">
@@ -683,17 +688,22 @@
           </a:p>
           <a:p xmlns:a="http://schemas.openxmlformats.org/drawingml/2006/main">
             <a:r>
-              <a:t>- User-provided template: 수지향_사업개편_PPT기획안_v13.pptx.</a:t>
-            </a:r>
-          </a:p>
-          <a:p xmlns:a="http://schemas.openxmlformats.org/drawingml/2006/main">
-            <a:r>
-              <a:t>- TAP Streamlit application source and GitHub synthetic demo persistence flow, inspected 2026-08-17.</a:t>
+              <a:t>- Source guide deck and inherited visual template: docs/TAP_빠른사용가이드_v3.pptx.</a:t>
+            </a:r>
+          </a:p>
+          <a:p xmlns:a="http://schemas.openxmlformats.org/drawingml/2006/main">
+            <a:r>
+              <a:t>- TAP application source, README, and current implemented flows, inspected 2026-08-20.</a:t>
             </a:r>
           </a:p>
           <a:p xmlns:a="http://schemas.openxmlformats.org/drawingml/2006/main">
             <a:r>
               <a:t>- TAP education-evaluation review: docs/TAP_교육평가_검토보고서_v2.md.</a:t>
+            </a:r>
+          </a:p>
+          <a:p xmlns:a="http://schemas.openxmlformats.org/drawingml/2006/main">
+            <a:r>
+              <a:t>- Slide 9 screenshot: current organization-report project selection screen supplied by the user.</a:t>
             </a:r>
           </a:p>
           <a:p xmlns:a="http://schemas.openxmlformats.org/drawingml/2006/main">
@@ -773,17 +783,22 @@
           </a:p>
           <a:p xmlns:a="http://schemas.openxmlformats.org/drawingml/2006/main">
             <a:r>
-              <a:t>- User-provided template: 수지향_사업개편_PPT기획안_v13.pptx.</a:t>
-            </a:r>
-          </a:p>
-          <a:p xmlns:a="http://schemas.openxmlformats.org/drawingml/2006/main">
-            <a:r>
-              <a:t>- TAP Streamlit application source and GitHub synthetic demo persistence flow, inspected 2026-08-17.</a:t>
+              <a:t>- Source guide deck and inherited visual template: docs/TAP_빠른사용가이드_v3.pptx.</a:t>
+            </a:r>
+          </a:p>
+          <a:p xmlns:a="http://schemas.openxmlformats.org/drawingml/2006/main">
+            <a:r>
+              <a:t>- TAP application source, README, and current implemented flows, inspected 2026-08-20.</a:t>
             </a:r>
           </a:p>
           <a:p xmlns:a="http://schemas.openxmlformats.org/drawingml/2006/main">
             <a:r>
               <a:t>- TAP education-evaluation review: docs/TAP_교육평가_검토보고서_v2.md.</a:t>
+            </a:r>
+          </a:p>
+          <a:p xmlns:a="http://schemas.openxmlformats.org/drawingml/2006/main">
+            <a:r>
+              <a:t>- Slide 9 screenshot: current organization-report project selection screen supplied by the user.</a:t>
             </a:r>
           </a:p>
           <a:p xmlns:a="http://schemas.openxmlformats.org/drawingml/2006/main">
@@ -863,17 +878,22 @@
           </a:p>
           <a:p xmlns:a="http://schemas.openxmlformats.org/drawingml/2006/main">
             <a:r>
-              <a:t>- User-provided template: 수지향_사업개편_PPT기획안_v13.pptx.</a:t>
-            </a:r>
-          </a:p>
-          <a:p xmlns:a="http://schemas.openxmlformats.org/drawingml/2006/main">
-            <a:r>
-              <a:t>- TAP Streamlit application source and locally verified UI/content, 2026-08-13.</a:t>
+              <a:t>- Source guide deck and inherited visual template: docs/TAP_빠른사용가이드_v3.pptx.</a:t>
+            </a:r>
+          </a:p>
+          <a:p xmlns:a="http://schemas.openxmlformats.org/drawingml/2006/main">
+            <a:r>
+              <a:t>- TAP application source, README, and current implemented flows, inspected 2026-08-20.</a:t>
             </a:r>
           </a:p>
           <a:p xmlns:a="http://schemas.openxmlformats.org/drawingml/2006/main">
             <a:r>
               <a:t>- TAP education-evaluation review: docs/TAP_교육평가_검토보고서_v2.md.</a:t>
+            </a:r>
+          </a:p>
+          <a:p xmlns:a="http://schemas.openxmlformats.org/drawingml/2006/main">
+            <a:r>
+              <a:t>- Slide 9 screenshot: current organization-report project selection screen supplied by the user.</a:t>
             </a:r>
           </a:p>
           <a:p xmlns:a="http://schemas.openxmlformats.org/drawingml/2006/main">
@@ -953,17 +973,22 @@
           </a:p>
           <a:p xmlns:a="http://schemas.openxmlformats.org/drawingml/2006/main">
             <a:r>
-              <a:t>- User-provided template: 수지향_사업개편_PPT기획안_v13.pptx.</a:t>
-            </a:r>
-          </a:p>
-          <a:p xmlns:a="http://schemas.openxmlformats.org/drawingml/2006/main">
-            <a:r>
-              <a:t>- TAP Streamlit application source and locally verified UI/content, 2026-08-13.</a:t>
+              <a:t>- Source guide deck and inherited visual template: docs/TAP_빠른사용가이드_v3.pptx.</a:t>
+            </a:r>
+          </a:p>
+          <a:p xmlns:a="http://schemas.openxmlformats.org/drawingml/2006/main">
+            <a:r>
+              <a:t>- TAP application source, README, and current implemented flows, inspected 2026-08-20.</a:t>
             </a:r>
           </a:p>
           <a:p xmlns:a="http://schemas.openxmlformats.org/drawingml/2006/main">
             <a:r>
               <a:t>- TAP education-evaluation review: docs/TAP_교육평가_검토보고서_v2.md.</a:t>
+            </a:r>
+          </a:p>
+          <a:p xmlns:a="http://schemas.openxmlformats.org/drawingml/2006/main">
+            <a:r>
+              <a:t>- Slide 9 screenshot: current organization-report project selection screen supplied by the user.</a:t>
             </a:r>
           </a:p>
           <a:p xmlns:a="http://schemas.openxmlformats.org/drawingml/2006/main">
@@ -1043,17 +1068,22 @@
           </a:p>
           <a:p xmlns:a="http://schemas.openxmlformats.org/drawingml/2006/main">
             <a:r>
-              <a:t>- User-provided template: 수지향_사업개편_PPT기획안_v13.pptx.</a:t>
-            </a:r>
-          </a:p>
-          <a:p xmlns:a="http://schemas.openxmlformats.org/drawingml/2006/main">
-            <a:r>
-              <a:t>- TAP Streamlit application source and GitHub synthetic demo persistence flow, inspected 2026-08-17.</a:t>
+              <a:t>- Source guide deck and inherited visual template: docs/TAP_빠른사용가이드_v3.pptx.</a:t>
+            </a:r>
+          </a:p>
+          <a:p xmlns:a="http://schemas.openxmlformats.org/drawingml/2006/main">
+            <a:r>
+              <a:t>- TAP application source, README, and current implemented flows, inspected 2026-08-20.</a:t>
             </a:r>
           </a:p>
           <a:p xmlns:a="http://schemas.openxmlformats.org/drawingml/2006/main">
             <a:r>
               <a:t>- TAP education-evaluation review: docs/TAP_교육평가_검토보고서_v2.md.</a:t>
+            </a:r>
+          </a:p>
+          <a:p xmlns:a="http://schemas.openxmlformats.org/drawingml/2006/main">
+            <a:r>
+              <a:t>- Slide 9 screenshot: current organization-report project selection screen supplied by the user.</a:t>
             </a:r>
           </a:p>
           <a:p xmlns:a="http://schemas.openxmlformats.org/drawingml/2006/main">
@@ -1133,17 +1163,22 @@
           </a:p>
           <a:p xmlns:a="http://schemas.openxmlformats.org/drawingml/2006/main">
             <a:r>
-              <a:t>- User-provided template: 수지향_사업개편_PPT기획안_v13.pptx.</a:t>
-            </a:r>
-          </a:p>
-          <a:p xmlns:a="http://schemas.openxmlformats.org/drawingml/2006/main">
-            <a:r>
-              <a:t>- TAP Streamlit application source and locally verified UI/content, 2026-08-13.</a:t>
+              <a:t>- Source guide deck and inherited visual template: docs/TAP_빠른사용가이드_v3.pptx.</a:t>
+            </a:r>
+          </a:p>
+          <a:p xmlns:a="http://schemas.openxmlformats.org/drawingml/2006/main">
+            <a:r>
+              <a:t>- TAP application source, README, and current implemented flows, inspected 2026-08-20.</a:t>
             </a:r>
           </a:p>
           <a:p xmlns:a="http://schemas.openxmlformats.org/drawingml/2006/main">
             <a:r>
               <a:t>- TAP education-evaluation review: docs/TAP_교육평가_검토보고서_v2.md.</a:t>
+            </a:r>
+          </a:p>
+          <a:p xmlns:a="http://schemas.openxmlformats.org/drawingml/2006/main">
+            <a:r>
+              <a:t>- Slide 9 screenshot: current organization-report project selection screen supplied by the user.</a:t>
             </a:r>
           </a:p>
           <a:p xmlns:a="http://schemas.openxmlformats.org/drawingml/2006/main">
@@ -1223,17 +1258,22 @@
           </a:p>
           <a:p xmlns:a="http://schemas.openxmlformats.org/drawingml/2006/main">
             <a:r>
-              <a:t>- User-provided template: 수지향_사업개편_PPT기획안_v13.pptx.</a:t>
-            </a:r>
-          </a:p>
-          <a:p xmlns:a="http://schemas.openxmlformats.org/drawingml/2006/main">
-            <a:r>
-              <a:t>- TAP Streamlit application source and GitHub synthetic demo persistence flow, inspected 2026-08-17.</a:t>
+              <a:t>- Source guide deck and inherited visual template: docs/TAP_빠른사용가이드_v3.pptx.</a:t>
+            </a:r>
+          </a:p>
+          <a:p xmlns:a="http://schemas.openxmlformats.org/drawingml/2006/main">
+            <a:r>
+              <a:t>- TAP application source, README, and current implemented flows, inspected 2026-08-20.</a:t>
             </a:r>
           </a:p>
           <a:p xmlns:a="http://schemas.openxmlformats.org/drawingml/2006/main">
             <a:r>
               <a:t>- TAP education-evaluation review: docs/TAP_교육평가_검토보고서_v2.md.</a:t>
+            </a:r>
+          </a:p>
+          <a:p xmlns:a="http://schemas.openxmlformats.org/drawingml/2006/main">
+            <a:r>
+              <a:t>- Slide 9 screenshot: current organization-report project selection screen supplied by the user.</a:t>
             </a:r>
           </a:p>
           <a:p xmlns:a="http://schemas.openxmlformats.org/drawingml/2006/main">
@@ -1313,12 +1353,12 @@
           </a:p>
           <a:p xmlns:a="http://schemas.openxmlformats.org/drawingml/2006/main">
             <a:r>
-              <a:t>- User-provided template: 수지향_사업개편_PPT기획안_v13.pptx.</a:t>
-            </a:r>
-          </a:p>
-          <a:p xmlns:a="http://schemas.openxmlformats.org/drawingml/2006/main">
-            <a:r>
-              <a:t>- TAP Streamlit application source and GitHub synthetic demo persistence flow, inspected 2026-08-17.</a:t>
+              <a:t>- Source guide deck and inherited visual template: docs/TAP_빠른사용가이드_v3.pptx.</a:t>
+            </a:r>
+          </a:p>
+          <a:p xmlns:a="http://schemas.openxmlformats.org/drawingml/2006/main">
+            <a:r>
+              <a:t>- TAP application source, README, and current implemented flows, inspected 2026-08-20.</a:t>
             </a:r>
           </a:p>
           <a:p xmlns:a="http://schemas.openxmlformats.org/drawingml/2006/main">
@@ -1328,7 +1368,7 @@
           </a:p>
           <a:p xmlns:a="http://schemas.openxmlformats.org/drawingml/2006/main">
             <a:r>
-              <a:t>- Screenshot: locally verified TAP screen (dashboard.png), 2026-08-16.</a:t>
+              <a:t>- Slide 9 screenshot: current organization-report project selection screen supplied by the user.</a:t>
             </a:r>
           </a:p>
           <a:p xmlns:a="http://schemas.openxmlformats.org/drawingml/2006/main">
@@ -1408,12 +1448,12 @@
           </a:p>
           <a:p xmlns:a="http://schemas.openxmlformats.org/drawingml/2006/main">
             <a:r>
-              <a:t>- User-provided template: 수지향_사업개편_PPT기획안_v13.pptx.</a:t>
-            </a:r>
-          </a:p>
-          <a:p xmlns:a="http://schemas.openxmlformats.org/drawingml/2006/main">
-            <a:r>
-              <a:t>- TAP Streamlit application source and GitHub synthetic demo persistence flow, inspected 2026-08-17.</a:t>
+              <a:t>- Source guide deck and inherited visual template: docs/TAP_빠른사용가이드_v3.pptx.</a:t>
+            </a:r>
+          </a:p>
+          <a:p xmlns:a="http://schemas.openxmlformats.org/drawingml/2006/main">
+            <a:r>
+              <a:t>- TAP application source, README, and current implemented flows, inspected 2026-08-20.</a:t>
             </a:r>
           </a:p>
           <a:p xmlns:a="http://schemas.openxmlformats.org/drawingml/2006/main">
@@ -1423,7 +1463,7 @@
           </a:p>
           <a:p xmlns:a="http://schemas.openxmlformats.org/drawingml/2006/main">
             <a:r>
-              <a:t>- Screenshot: locally verified TAP screen (assessment.png), 2026-08-16.</a:t>
+              <a:t>- Slide 9 screenshot: current organization-report project selection screen supplied by the user.</a:t>
             </a:r>
           </a:p>
           <a:p xmlns:a="http://schemas.openxmlformats.org/drawingml/2006/main">
@@ -1503,12 +1543,12 @@
           </a:p>
           <a:p xmlns:a="http://schemas.openxmlformats.org/drawingml/2006/main">
             <a:r>
-              <a:t>- User-provided template: 수지향_사업개편_PPT기획안_v13.pptx.</a:t>
-            </a:r>
-          </a:p>
-          <a:p xmlns:a="http://schemas.openxmlformats.org/drawingml/2006/main">
-            <a:r>
-              <a:t>- TAP Streamlit application source and GitHub synthetic demo persistence flow, inspected 2026-08-17.</a:t>
+              <a:t>- Source guide deck and inherited visual template: docs/TAP_빠른사용가이드_v3.pptx.</a:t>
+            </a:r>
+          </a:p>
+          <a:p xmlns:a="http://schemas.openxmlformats.org/drawingml/2006/main">
+            <a:r>
+              <a:t>- TAP application source, README, and current implemented flows, inspected 2026-08-20.</a:t>
             </a:r>
           </a:p>
           <a:p xmlns:a="http://schemas.openxmlformats.org/drawingml/2006/main">
@@ -1518,7 +1558,7 @@
           </a:p>
           <a:p xmlns:a="http://schemas.openxmlformats.org/drawingml/2006/main">
             <a:r>
-              <a:t>- Screenshot: locally verified TAP screen (organization-report.png), 2026-08-16.</a:t>
+              <a:t>- Slide 9 screenshot: current organization-report project selection screen supplied by the user.</a:t>
             </a:r>
           </a:p>
           <a:p xmlns:a="http://schemas.openxmlformats.org/drawingml/2006/main">
@@ -1754,8 +1794,8 @@
   </p:cSld>
   <p:clrMap bg1="lt1" tx1="dk1" bg2="lt2" tx2="dk2" accent1="accent1" accent2="accent2" accent3="accent3" accent4="accent4" accent5="accent5" accent6="accent6" hlink="hlink" folHlink="folHlink"/>
   <p:sldLayoutIdLst>
-    <p:sldLayoutId xmlns:r="http://schemas.openxmlformats.org/officeDocument/2006/relationships" id="2147483649" r:id="R47bff17f3bb4451a"/>
-    <p:sldLayoutId xmlns:r="http://schemas.openxmlformats.org/officeDocument/2006/relationships" id="2147483650" r:id="R537847a9eef541a5"/>
+    <p:sldLayoutId xmlns:r="http://schemas.openxmlformats.org/officeDocument/2006/relationships" id="2147483649" r:id="R0da8652531a04e5b"/>
+    <p:sldLayoutId xmlns:r="http://schemas.openxmlformats.org/officeDocument/2006/relationships" id="2147483650" r:id="Ra4346326004f42d4"/>
   </p:sldLayoutIdLst>
   <p:hf sldNum="0" hdr="0" ftr="0" dt="0"/>
   <p:txStyles>
@@ -2284,7 +2324,7 @@
           <p:nvPr/>
         </p:nvPicPr>
         <p:blipFill>
-          <a:blip xmlns:r="http://schemas.openxmlformats.org/officeDocument/2006/relationships" xmlns:a="http://schemas.openxmlformats.org/drawingml/2006/main" r:embed="R35b874634ca840cd"/>
+          <a:blip xmlns:r="http://schemas.openxmlformats.org/officeDocument/2006/relationships" xmlns:a="http://schemas.openxmlformats.org/drawingml/2006/main" r:embed="R6d71a60de7234e7e"/>
           <a:srcRect xmlns:a="http://schemas.openxmlformats.org/drawingml/2006/main" l="0" t="-400" r="0" b="-400"/>
           <a:stretch xmlns:a="http://schemas.openxmlformats.org/drawingml/2006/main"/>
         </p:blipFill>
@@ -2307,7 +2347,7 @@
           <p:nvPr/>
         </p:nvPicPr>
         <p:blipFill>
-          <a:blip xmlns:r="http://schemas.openxmlformats.org/officeDocument/2006/relationships" xmlns:a="http://schemas.openxmlformats.org/drawingml/2006/main" r:embed="Ra2012af9bfcf4781"/>
+          <a:blip xmlns:r="http://schemas.openxmlformats.org/officeDocument/2006/relationships" xmlns:a="http://schemas.openxmlformats.org/drawingml/2006/main" r:embed="Rc303b0e7bd3f477c"/>
           <a:srcRect xmlns:a="http://schemas.openxmlformats.org/drawingml/2006/main" l="-2083" t="0" r="-2083" b="0"/>
           <a:stretch xmlns:a="http://schemas.openxmlformats.org/drawingml/2006/main"/>
         </p:blipFill>
@@ -2357,9 +2397,9 @@
                 <a:solidFill>
                   <a:srgbClr val="00B5AC"/>
                 </a:solidFill>
-                <a:latin typeface="페이퍼로지 4 Regular"/>
-                <a:ea typeface="페이퍼로지 4 Regular"/>
-                <a:cs typeface="페이퍼로지 4 Regular"/>
+                <a:latin typeface="Pretendard"/>
+                <a:ea typeface="Pretendard"/>
+                <a:cs typeface="Pretendard"/>
               </a:defRPr>
             </a:pPr>
             <a:r>
@@ -2367,9 +2407,9 @@
                 <a:solidFill>
                   <a:srgbClr val="00B5AC"/>
                 </a:solidFill>
-                <a:latin typeface="페이퍼로지 4 Regular"/>
-                <a:ea typeface="페이퍼로지 4 Regular"/>
-                <a:cs typeface="페이퍼로지 4 Regular"/>
+                <a:latin typeface="Pretendard"/>
+                <a:ea typeface="Pretendard"/>
+                <a:cs typeface="Pretendard"/>
               </a:rPr>
               <a:t>TAP USER GUIDE</a:t>
             </a:r>
@@ -2412,9 +2452,9 @@
                 <a:solidFill>
                   <a:srgbClr val="6C7476"/>
                 </a:solidFill>
-                <a:latin typeface="페이퍼로지 5 Medium"/>
-                <a:ea typeface="페이퍼로지 5 Medium"/>
-                <a:cs typeface="페이퍼로지 5 Medium"/>
+                <a:latin typeface="Pretendard"/>
+                <a:ea typeface="Pretendard"/>
+                <a:cs typeface="Pretendard"/>
               </a:defRPr>
             </a:pPr>
             <a:r>
@@ -2422,11 +2462,11 @@
                 <a:solidFill>
                   <a:srgbClr val="6C7476"/>
                 </a:solidFill>
-                <a:latin typeface="페이퍼로지 5 Medium"/>
-                <a:ea typeface="페이퍼로지 5 Medium"/>
-                <a:cs typeface="페이퍼로지 5 Medium"/>
-              </a:rPr>
-              <a:t>회원사 교육 전후 역량평가</a:t>
+                <a:latin typeface="Pretendard"/>
+                <a:ea typeface="Pretendard"/>
+                <a:cs typeface="Pretendard"/>
+              </a:rPr>
+              <a:t>회원사 교육 전/후 역량평가</a:t>
             </a:r>
           </a:p>
         </p:txBody>
@@ -2470,9 +2510,9 @@
                 <a:solidFill>
                   <a:srgbClr val="0A0E10"/>
                 </a:solidFill>
-                <a:latin typeface="페이퍼로지 2 ExtraLight"/>
-                <a:ea typeface="페이퍼로지 2 ExtraLight"/>
-                <a:cs typeface="페이퍼로지 2 ExtraLight"/>
+                <a:latin typeface="Pretendard"/>
+                <a:ea typeface="Pretendard"/>
+                <a:cs typeface="Pretendard"/>
               </a:defRPr>
             </a:pPr>
             <a:r>
@@ -2480,9 +2520,9 @@
                 <a:solidFill>
                   <a:srgbClr val="0A0E10"/>
                 </a:solidFill>
-                <a:latin typeface="페이퍼로지 2 ExtraLight"/>
-                <a:ea typeface="페이퍼로지 2 ExtraLight"/>
-                <a:cs typeface="페이퍼로지 2 ExtraLight"/>
+                <a:latin typeface="Pretendard"/>
+                <a:ea typeface="Pretendard"/>
+                <a:cs typeface="Pretendard"/>
               </a:rPr>
               <a:t>TAP 사용설명서</a:t>
             </a:r>
@@ -2494,9 +2534,9 @@
                 <a:solidFill>
                   <a:srgbClr val="0A0E10"/>
                 </a:solidFill>
-                <a:latin typeface="페이퍼로지 2 ExtraLight"/>
-                <a:ea typeface="페이퍼로지 2 ExtraLight"/>
-                <a:cs typeface="페이퍼로지 2 ExtraLight"/>
+                <a:latin typeface="Pretendard"/>
+                <a:ea typeface="Pretendard"/>
+                <a:cs typeface="Pretendard"/>
               </a:defRPr>
             </a:pPr>
             <a:r>
@@ -2504,11 +2544,11 @@
                 <a:solidFill>
                   <a:srgbClr val="0A0E10"/>
                 </a:solidFill>
-                <a:latin typeface="페이퍼로지 6 SemiBold"/>
-                <a:ea typeface="페이퍼로지 6 SemiBold"/>
-                <a:cs typeface="페이퍼로지 6 SemiBold"/>
-              </a:rPr>
-              <a:t>교육 전후 변화를 다음 개선으로</a:t>
+                <a:latin typeface="Pretendard"/>
+                <a:ea typeface="Pretendard"/>
+                <a:cs typeface="Pretendard"/>
+              </a:rPr>
+              <a:t>교육 전/후 변화를 다음 개선으로</a:t>
             </a:r>
           </a:p>
         </p:txBody>
@@ -2549,9 +2589,9 @@
                 <a:solidFill>
                   <a:srgbClr val="6C7476"/>
                 </a:solidFill>
-                <a:latin typeface="페이퍼로지 3 Light"/>
-                <a:ea typeface="페이퍼로지 3 Light"/>
-                <a:cs typeface="페이퍼로지 3 Light"/>
+                <a:latin typeface="Pretendard"/>
+                <a:ea typeface="Pretendard"/>
+                <a:cs typeface="Pretendard"/>
               </a:defRPr>
             </a:pPr>
             <a:r>
@@ -2559,9 +2599,9 @@
                 <a:solidFill>
                   <a:srgbClr val="6C7476"/>
                 </a:solidFill>
-                <a:latin typeface="페이퍼로지 3 Light"/>
-                <a:ea typeface="페이퍼로지 3 Light"/>
-                <a:cs typeface="페이퍼로지 3 Light"/>
+                <a:latin typeface="Pretendard"/>
+                <a:ea typeface="Pretendard"/>
+                <a:cs typeface="Pretendard"/>
               </a:rPr>
               <a:t>교육담당자 · 참여자 · KMA 관리자  |  2026.08</a:t>
             </a:r>
@@ -2604,9 +2644,9 @@
                 <a:solidFill>
                   <a:srgbClr val="1E2324"/>
                 </a:solidFill>
-                <a:latin typeface="페이퍼로지 3 Light"/>
-                <a:ea typeface="페이퍼로지 3 Light"/>
-                <a:cs typeface="페이퍼로지 3 Light"/>
+                <a:latin typeface="Pretendard"/>
+                <a:ea typeface="Pretendard"/>
+                <a:cs typeface="Pretendard"/>
               </a:defRPr>
             </a:pPr>
             <a:r>
@@ -2614,9 +2654,9 @@
                 <a:solidFill>
                   <a:srgbClr val="1E2324"/>
                 </a:solidFill>
-                <a:latin typeface="페이퍼로지 3 Light"/>
-                <a:ea typeface="페이퍼로지 3 Light"/>
-                <a:cs typeface="페이퍼로지 3 Light"/>
+                <a:latin typeface="Pretendard"/>
+                <a:ea typeface="Pretendard"/>
+                <a:cs typeface="Pretendard"/>
               </a:rPr>
               <a:t>이해</a:t>
             </a:r>
@@ -2701,9 +2741,9 @@
                 <a:solidFill>
                   <a:srgbClr val="1E2324"/>
                 </a:solidFill>
-                <a:latin typeface="페이퍼로지 3 Light"/>
-                <a:ea typeface="페이퍼로지 3 Light"/>
-                <a:cs typeface="페이퍼로지 3 Light"/>
+                <a:latin typeface="Pretendard"/>
+                <a:ea typeface="Pretendard"/>
+                <a:cs typeface="Pretendard"/>
               </a:defRPr>
             </a:pPr>
             <a:r>
@@ -2711,9 +2751,9 @@
                 <a:solidFill>
                   <a:srgbClr val="1E2324"/>
                 </a:solidFill>
-                <a:latin typeface="페이퍼로지 3 Light"/>
-                <a:ea typeface="페이퍼로지 3 Light"/>
-                <a:cs typeface="페이퍼로지 3 Light"/>
+                <a:latin typeface="Pretendard"/>
+                <a:ea typeface="Pretendard"/>
+                <a:cs typeface="Pretendard"/>
               </a:rPr>
               <a:t>사용 순서</a:t>
             </a:r>
@@ -2798,9 +2838,9 @@
                 <a:solidFill>
                   <a:srgbClr val="1E2324"/>
                 </a:solidFill>
-                <a:latin typeface="페이퍼로지 3 Light"/>
-                <a:ea typeface="페이퍼로지 3 Light"/>
-                <a:cs typeface="페이퍼로지 3 Light"/>
+                <a:latin typeface="Pretendard"/>
+                <a:ea typeface="Pretendard"/>
+                <a:cs typeface="Pretendard"/>
               </a:defRPr>
             </a:pPr>
             <a:r>
@@ -2808,9 +2848,9 @@
                 <a:solidFill>
                   <a:srgbClr val="1E2324"/>
                 </a:solidFill>
-                <a:latin typeface="페이퍼로지 3 Light"/>
-                <a:ea typeface="페이퍼로지 3 Light"/>
-                <a:cs typeface="페이퍼로지 3 Light"/>
+                <a:latin typeface="Pretendard"/>
+                <a:ea typeface="Pretendard"/>
+                <a:cs typeface="Pretendard"/>
               </a:rPr>
               <a:t>버튼 안내</a:t>
             </a:r>
@@ -2940,7 +2980,7 @@
           <p:nvPr/>
         </p:nvPicPr>
         <p:blipFill>
-          <a:blip xmlns:r="http://schemas.openxmlformats.org/officeDocument/2006/relationships" xmlns:a="http://schemas.openxmlformats.org/drawingml/2006/main" r:embed="R1676431d5ec84ab9"/>
+          <a:blip xmlns:r="http://schemas.openxmlformats.org/officeDocument/2006/relationships" xmlns:a="http://schemas.openxmlformats.org/drawingml/2006/main" r:embed="Rb27da471ccd9465f"/>
           <a:srcRect xmlns:a="http://schemas.openxmlformats.org/drawingml/2006/main" l="-2083" t="0" r="-2083" b="0"/>
           <a:stretch xmlns:a="http://schemas.openxmlformats.org/drawingml/2006/main"/>
         </p:blipFill>
@@ -3036,9 +3076,9 @@
                 <a:solidFill>
                   <a:srgbClr val="6C7476"/>
                 </a:solidFill>
-                <a:latin typeface="페이퍼로지 4 Regular"/>
-                <a:ea typeface="페이퍼로지 4 Regular"/>
-                <a:cs typeface="페이퍼로지 4 Regular"/>
+                <a:latin typeface="Pretendard"/>
+                <a:ea typeface="Pretendard"/>
+                <a:cs typeface="Pretendard"/>
               </a:defRPr>
             </a:lvl1pPr>
           </a:lstStyle>
@@ -3049,9 +3089,9 @@
                 <a:solidFill>
                   <a:srgbClr val="6C7476"/>
                 </a:solidFill>
-                <a:latin typeface="페이퍼로지 4 Regular"/>
-                <a:ea typeface="페이퍼로지 4 Regular"/>
-                <a:cs typeface="페이퍼로지 4 Regular"/>
+                <a:latin typeface="Pretendard"/>
+                <a:ea typeface="Pretendard"/>
+                <a:cs typeface="Pretendard"/>
               </a:defRPr>
             </a:pPr>
             <a:r>
@@ -3059,9 +3099,9 @@
                 <a:solidFill>
                   <a:srgbClr val="6C7476"/>
                 </a:solidFill>
-                <a:latin typeface="페이퍼로지 4 Regular"/>
-                <a:ea typeface="페이퍼로지 4 Regular"/>
-                <a:cs typeface="페이퍼로지 4 Regular"/>
+                <a:latin typeface="Pretendard"/>
+                <a:ea typeface="Pretendard"/>
+                <a:cs typeface="Pretendard"/>
               </a:rPr>
               <a:t>KMA ADMIN</a:t>
             </a:r>
@@ -3104,9 +3144,9 @@
                 <a:solidFill>
                   <a:srgbClr val="0A0E10"/>
                 </a:solidFill>
-                <a:latin typeface="페이퍼로지 2 ExtraLight"/>
-                <a:ea typeface="페이퍼로지 2 ExtraLight"/>
-                <a:cs typeface="페이퍼로지 2 ExtraLight"/>
+                <a:latin typeface="Pretendard"/>
+                <a:ea typeface="Pretendard"/>
+                <a:cs typeface="Pretendard"/>
               </a:defRPr>
             </a:pPr>
             <a:r>
@@ -3114,9 +3154,9 @@
                 <a:solidFill>
                   <a:srgbClr val="0A0E10"/>
                 </a:solidFill>
-                <a:latin typeface="페이퍼로지 2 ExtraLight"/>
-                <a:ea typeface="페이퍼로지 2 ExtraLight"/>
-                <a:cs typeface="페이퍼로지 2 ExtraLight"/>
+                <a:latin typeface="Pretendard"/>
+                <a:ea typeface="Pretendard"/>
+                <a:cs typeface="Pretendard"/>
               </a:rPr>
               <a:t>KMA 대시보드는 연결 시</a:t>
             </a:r>
@@ -3128,9 +3168,9 @@
                 <a:solidFill>
                   <a:srgbClr val="0A0E10"/>
                 </a:solidFill>
-                <a:latin typeface="페이퍼로지 2 ExtraLight"/>
-                <a:ea typeface="페이퍼로지 2 ExtraLight"/>
-                <a:cs typeface="페이퍼로지 2 ExtraLight"/>
+                <a:latin typeface="Pretendard"/>
+                <a:ea typeface="Pretendard"/>
+                <a:cs typeface="Pretendard"/>
               </a:defRPr>
             </a:pPr>
             <a:r>
@@ -3138,9 +3178,9 @@
                 <a:solidFill>
                   <a:srgbClr val="0A0E10"/>
                 </a:solidFill>
-                <a:latin typeface="페이퍼로지 6 SemiBold"/>
-                <a:ea typeface="페이퍼로지 6 SemiBold"/>
-                <a:cs typeface="페이퍼로지 6 SemiBold"/>
+                <a:latin typeface="Pretendard"/>
+                <a:ea typeface="Pretendard"/>
+                <a:cs typeface="Pretendard"/>
               </a:rPr>
               <a:t>누적 합계로 전환됩니다</a:t>
             </a:r>
@@ -3183,9 +3223,9 @@
                 <a:solidFill>
                   <a:srgbClr val="6C7476"/>
                 </a:solidFill>
-                <a:latin typeface="페이퍼로지 3 Light"/>
-                <a:ea typeface="페이퍼로지 3 Light"/>
-                <a:cs typeface="페이퍼로지 3 Light"/>
+                <a:latin typeface="Pretendard"/>
+                <a:ea typeface="Pretendard"/>
+                <a:cs typeface="Pretendard"/>
               </a:defRPr>
             </a:pPr>
             <a:r>
@@ -3193,11 +3233,11 @@
                 <a:solidFill>
                   <a:srgbClr val="6C7476"/>
                 </a:solidFill>
-                <a:latin typeface="페이퍼로지 3 Light"/>
-                <a:ea typeface="페이퍼로지 3 Light"/>
-                <a:cs typeface="페이퍼로지 3 Light"/>
-              </a:rPr>
-              <a:t>GitHub 연결 시 demo-data의 합성 프로젝트·참여자·사전·사후 완료 건을 집계합니다. 미연결 또는 데이터 없음 상태에서는 샘플을 표시하며 문항은행 검수는 계속 사용할 수 있습니다.</a:t>
+                <a:latin typeface="Pretendard"/>
+                <a:ea typeface="Pretendard"/>
+                <a:cs typeface="Pretendard"/>
+              </a:rPr>
+              <a:t>GitHub 연결 시 demo-data의 합성 프로젝트·참여자·교육 전/후 완료 건을 집계합니다. 미연결 또는 데이터 없음 상태에서는 샘플을 표시하며 문항은행 검수는 계속 사용할 수 있습니다.</a:t>
             </a:r>
           </a:p>
         </p:txBody>
@@ -3280,9 +3320,9 @@
                 <a:solidFill>
                   <a:srgbClr val="0A0E10"/>
                 </a:solidFill>
-                <a:latin typeface="페이퍼로지 5 Medium"/>
-                <a:ea typeface="페이퍼로지 5 Medium"/>
-                <a:cs typeface="페이퍼로지 5 Medium"/>
+                <a:latin typeface="Pretendard"/>
+                <a:ea typeface="Pretendard"/>
+                <a:cs typeface="Pretendard"/>
               </a:defRPr>
             </a:pPr>
             <a:r>
@@ -3290,9 +3330,9 @@
                 <a:solidFill>
                   <a:srgbClr val="0A0E10"/>
                 </a:solidFill>
-                <a:latin typeface="페이퍼로지 5 Medium"/>
-                <a:ea typeface="페이퍼로지 5 Medium"/>
-                <a:cs typeface="페이퍼로지 5 Medium"/>
+                <a:latin typeface="Pretendard"/>
+                <a:ea typeface="Pretendard"/>
+                <a:cs typeface="Pretendard"/>
               </a:rPr>
               <a:t>화면 구분</a:t>
             </a:r>
@@ -3377,9 +3417,9 @@
                 <a:solidFill>
                   <a:srgbClr val="00B5AC"/>
                 </a:solidFill>
-                <a:latin typeface="페이퍼로지 5 Medium"/>
-                <a:ea typeface="페이퍼로지 5 Medium"/>
-                <a:cs typeface="페이퍼로지 5 Medium"/>
+                <a:latin typeface="Pretendard"/>
+                <a:ea typeface="Pretendard"/>
+                <a:cs typeface="Pretendard"/>
               </a:defRPr>
             </a:pPr>
             <a:r>
@@ -3387,9 +3427,9 @@
                 <a:solidFill>
                   <a:srgbClr val="00B5AC"/>
                 </a:solidFill>
-                <a:latin typeface="페이퍼로지 5 Medium"/>
-                <a:ea typeface="페이퍼로지 5 Medium"/>
-                <a:cs typeface="페이퍼로지 5 Medium"/>
+                <a:latin typeface="Pretendard"/>
+                <a:ea typeface="Pretendard"/>
+                <a:cs typeface="Pretendard"/>
               </a:rPr>
               <a:t>01</a:t>
             </a:r>
@@ -3432,9 +3472,9 @@
                 <a:solidFill>
                   <a:srgbClr val="1E2324"/>
                 </a:solidFill>
-                <a:latin typeface="페이퍼로지 4 Regular"/>
-                <a:ea typeface="페이퍼로지 4 Regular"/>
-                <a:cs typeface="페이퍼로지 4 Regular"/>
+                <a:latin typeface="Pretendard"/>
+                <a:ea typeface="Pretendard"/>
+                <a:cs typeface="Pretendard"/>
               </a:defRPr>
             </a:pPr>
             <a:r>
@@ -3442,9 +3482,9 @@
                 <a:solidFill>
                   <a:srgbClr val="1E2324"/>
                 </a:solidFill>
-                <a:latin typeface="페이퍼로지 4 Regular"/>
-                <a:ea typeface="페이퍼로지 4 Regular"/>
-                <a:cs typeface="페이퍼로지 4 Regular"/>
+                <a:latin typeface="Pretendard"/>
+                <a:ea typeface="Pretendard"/>
+                <a:cs typeface="Pretendard"/>
               </a:rPr>
               <a:t>연결 시 누적 합계</a:t>
             </a:r>
@@ -3529,9 +3569,9 @@
                 <a:solidFill>
                   <a:srgbClr val="00B5AC"/>
                 </a:solidFill>
-                <a:latin typeface="페이퍼로지 5 Medium"/>
-                <a:ea typeface="페이퍼로지 5 Medium"/>
-                <a:cs typeface="페이퍼로지 5 Medium"/>
+                <a:latin typeface="Pretendard"/>
+                <a:ea typeface="Pretendard"/>
+                <a:cs typeface="Pretendard"/>
               </a:defRPr>
             </a:pPr>
             <a:r>
@@ -3539,9 +3579,9 @@
                 <a:solidFill>
                   <a:srgbClr val="00B5AC"/>
                 </a:solidFill>
-                <a:latin typeface="페이퍼로지 5 Medium"/>
-                <a:ea typeface="페이퍼로지 5 Medium"/>
-                <a:cs typeface="페이퍼로지 5 Medium"/>
+                <a:latin typeface="Pretendard"/>
+                <a:ea typeface="Pretendard"/>
+                <a:cs typeface="Pretendard"/>
               </a:rPr>
               <a:t>02</a:t>
             </a:r>
@@ -3584,9 +3624,9 @@
                 <a:solidFill>
                   <a:srgbClr val="1E2324"/>
                 </a:solidFill>
-                <a:latin typeface="페이퍼로지 4 Regular"/>
-                <a:ea typeface="페이퍼로지 4 Regular"/>
-                <a:cs typeface="페이퍼로지 4 Regular"/>
+                <a:latin typeface="Pretendard"/>
+                <a:ea typeface="Pretendard"/>
+                <a:cs typeface="Pretendard"/>
               </a:defRPr>
             </a:pPr>
             <a:r>
@@ -3594,9 +3634,9 @@
                 <a:solidFill>
                   <a:srgbClr val="1E2324"/>
                 </a:solidFill>
-                <a:latin typeface="페이퍼로지 4 Regular"/>
-                <a:ea typeface="페이퍼로지 4 Regular"/>
-                <a:cs typeface="페이퍼로지 4 Regular"/>
+                <a:latin typeface="Pretendard"/>
+                <a:ea typeface="Pretendard"/>
+                <a:cs typeface="Pretendard"/>
               </a:rPr>
               <a:t>미연결 시 샘플</a:t>
             </a:r>
@@ -3639,9 +3679,9 @@
                 <a:solidFill>
                   <a:srgbClr val="00B5AC"/>
                 </a:solidFill>
-                <a:latin typeface="페이퍼로지 5 Medium"/>
-                <a:ea typeface="페이퍼로지 5 Medium"/>
-                <a:cs typeface="페이퍼로지 5 Medium"/>
+                <a:latin typeface="Pretendard"/>
+                <a:ea typeface="Pretendard"/>
+                <a:cs typeface="Pretendard"/>
               </a:defRPr>
             </a:pPr>
             <a:r>
@@ -3649,9 +3689,9 @@
                 <a:solidFill>
                   <a:srgbClr val="00B5AC"/>
                 </a:solidFill>
-                <a:latin typeface="페이퍼로지 5 Medium"/>
-                <a:ea typeface="페이퍼로지 5 Medium"/>
-                <a:cs typeface="페이퍼로지 5 Medium"/>
+                <a:latin typeface="Pretendard"/>
+                <a:ea typeface="Pretendard"/>
+                <a:cs typeface="Pretendard"/>
               </a:rPr>
               <a:t>03</a:t>
             </a:r>
@@ -3694,9 +3734,9 @@
                 <a:solidFill>
                   <a:srgbClr val="1E2324"/>
                 </a:solidFill>
-                <a:latin typeface="페이퍼로지 4 Regular"/>
-                <a:ea typeface="페이퍼로지 4 Regular"/>
-                <a:cs typeface="페이퍼로지 4 Regular"/>
+                <a:latin typeface="Pretendard"/>
+                <a:ea typeface="Pretendard"/>
+                <a:cs typeface="Pretendard"/>
               </a:defRPr>
             </a:pPr>
             <a:r>
@@ -3704,9 +3744,9 @@
                 <a:solidFill>
                   <a:srgbClr val="1E2324"/>
                 </a:solidFill>
-                <a:latin typeface="페이퍼로지 4 Regular"/>
-                <a:ea typeface="페이퍼로지 4 Regular"/>
-                <a:cs typeface="페이퍼로지 4 Regular"/>
+                <a:latin typeface="Pretendard"/>
+                <a:ea typeface="Pretendard"/>
+                <a:cs typeface="Pretendard"/>
               </a:rPr>
               <a:t>개인 식별값 미표시</a:t>
             </a:r>
@@ -3791,9 +3831,9 @@
                 <a:solidFill>
                   <a:srgbClr val="0A0E10"/>
                 </a:solidFill>
-                <a:latin typeface="페이퍼로지 5 Medium"/>
-                <a:ea typeface="페이퍼로지 5 Medium"/>
-                <a:cs typeface="페이퍼로지 5 Medium"/>
+                <a:latin typeface="Pretendard"/>
+                <a:ea typeface="Pretendard"/>
+                <a:cs typeface="Pretendard"/>
               </a:defRPr>
             </a:pPr>
             <a:r>
@@ -3801,9 +3841,9 @@
                 <a:solidFill>
                   <a:srgbClr val="0A0E10"/>
                 </a:solidFill>
-                <a:latin typeface="페이퍼로지 5 Medium"/>
-                <a:ea typeface="페이퍼로지 5 Medium"/>
-                <a:cs typeface="페이퍼로지 5 Medium"/>
+                <a:latin typeface="Pretendard"/>
+                <a:ea typeface="Pretendard"/>
+                <a:cs typeface="Pretendard"/>
               </a:rPr>
               <a:t>KMA 검수</a:t>
             </a:r>
@@ -3888,9 +3928,9 @@
                 <a:solidFill>
                   <a:srgbClr val="00B5AC"/>
                 </a:solidFill>
-                <a:latin typeface="페이퍼로지 5 Medium"/>
-                <a:ea typeface="페이퍼로지 5 Medium"/>
-                <a:cs typeface="페이퍼로지 5 Medium"/>
+                <a:latin typeface="Pretendard"/>
+                <a:ea typeface="Pretendard"/>
+                <a:cs typeface="Pretendard"/>
               </a:defRPr>
             </a:pPr>
             <a:r>
@@ -3898,9 +3938,9 @@
                 <a:solidFill>
                   <a:srgbClr val="00B5AC"/>
                 </a:solidFill>
-                <a:latin typeface="페이퍼로지 5 Medium"/>
-                <a:ea typeface="페이퍼로지 5 Medium"/>
-                <a:cs typeface="페이퍼로지 5 Medium"/>
+                <a:latin typeface="Pretendard"/>
+                <a:ea typeface="Pretendard"/>
+                <a:cs typeface="Pretendard"/>
               </a:rPr>
               <a:t>01</a:t>
             </a:r>
@@ -3943,9 +3983,9 @@
                 <a:solidFill>
                   <a:srgbClr val="1E2324"/>
                 </a:solidFill>
-                <a:latin typeface="페이퍼로지 4 Regular"/>
-                <a:ea typeface="페이퍼로지 4 Regular"/>
-                <a:cs typeface="페이퍼로지 4 Regular"/>
+                <a:latin typeface="Pretendard"/>
+                <a:ea typeface="Pretendard"/>
+                <a:cs typeface="Pretendard"/>
               </a:defRPr>
             </a:pPr>
             <a:r>
@@ -3953,9 +3993,9 @@
                 <a:solidFill>
                   <a:srgbClr val="1E2324"/>
                 </a:solidFill>
-                <a:latin typeface="페이퍼로지 4 Regular"/>
-                <a:ea typeface="페이퍼로지 4 Regular"/>
-                <a:cs typeface="페이퍼로지 4 Regular"/>
+                <a:latin typeface="Pretendard"/>
+                <a:ea typeface="Pretendard"/>
+                <a:cs typeface="Pretendard"/>
               </a:rPr>
               <a:t>전체 문항은행 검수</a:t>
             </a:r>
@@ -4040,9 +4080,9 @@
                 <a:solidFill>
                   <a:srgbClr val="00B5AC"/>
                 </a:solidFill>
-                <a:latin typeface="페이퍼로지 5 Medium"/>
-                <a:ea typeface="페이퍼로지 5 Medium"/>
-                <a:cs typeface="페이퍼로지 5 Medium"/>
+                <a:latin typeface="Pretendard"/>
+                <a:ea typeface="Pretendard"/>
+                <a:cs typeface="Pretendard"/>
               </a:defRPr>
             </a:pPr>
             <a:r>
@@ -4050,9 +4090,9 @@
                 <a:solidFill>
                   <a:srgbClr val="00B5AC"/>
                 </a:solidFill>
-                <a:latin typeface="페이퍼로지 5 Medium"/>
-                <a:ea typeface="페이퍼로지 5 Medium"/>
-                <a:cs typeface="페이퍼로지 5 Medium"/>
+                <a:latin typeface="Pretendard"/>
+                <a:ea typeface="Pretendard"/>
+                <a:cs typeface="Pretendard"/>
               </a:rPr>
               <a:t>02</a:t>
             </a:r>
@@ -4095,9 +4135,9 @@
                 <a:solidFill>
                   <a:srgbClr val="1E2324"/>
                 </a:solidFill>
-                <a:latin typeface="페이퍼로지 4 Regular"/>
-                <a:ea typeface="페이퍼로지 4 Regular"/>
-                <a:cs typeface="페이퍼로지 4 Regular"/>
+                <a:latin typeface="Pretendard"/>
+                <a:ea typeface="Pretendard"/>
+                <a:cs typeface="Pretendard"/>
               </a:defRPr>
             </a:pPr>
             <a:r>
@@ -4105,9 +4145,9 @@
                 <a:solidFill>
                   <a:srgbClr val="1E2324"/>
                 </a:solidFill>
-                <a:latin typeface="페이퍼로지 4 Regular"/>
-                <a:ea typeface="페이퍼로지 4 Regular"/>
-                <a:cs typeface="페이퍼로지 4 Regular"/>
+                <a:latin typeface="Pretendard"/>
+                <a:ea typeface="Pretendard"/>
+                <a:cs typeface="Pretendard"/>
               </a:rPr>
               <a:t>필터 결과 CSV</a:t>
             </a:r>
@@ -4150,9 +4190,9 @@
                 <a:solidFill>
                   <a:srgbClr val="00B5AC"/>
                 </a:solidFill>
-                <a:latin typeface="페이퍼로지 5 Medium"/>
-                <a:ea typeface="페이퍼로지 5 Medium"/>
-                <a:cs typeface="페이퍼로지 5 Medium"/>
+                <a:latin typeface="Pretendard"/>
+                <a:ea typeface="Pretendard"/>
+                <a:cs typeface="Pretendard"/>
               </a:defRPr>
             </a:pPr>
             <a:r>
@@ -4160,9 +4200,9 @@
                 <a:solidFill>
                   <a:srgbClr val="00B5AC"/>
                 </a:solidFill>
-                <a:latin typeface="페이퍼로지 5 Medium"/>
-                <a:ea typeface="페이퍼로지 5 Medium"/>
-                <a:cs typeface="페이퍼로지 5 Medium"/>
+                <a:latin typeface="Pretendard"/>
+                <a:ea typeface="Pretendard"/>
+                <a:cs typeface="Pretendard"/>
               </a:rPr>
               <a:t>03</a:t>
             </a:r>
@@ -4205,9 +4245,9 @@
                 <a:solidFill>
                   <a:srgbClr val="1E2324"/>
                 </a:solidFill>
-                <a:latin typeface="페이퍼로지 4 Regular"/>
-                <a:ea typeface="페이퍼로지 4 Regular"/>
-                <a:cs typeface="페이퍼로지 4 Regular"/>
+                <a:latin typeface="Pretendard"/>
+                <a:ea typeface="Pretendard"/>
+                <a:cs typeface="Pretendard"/>
               </a:defRPr>
             </a:pPr>
             <a:r>
@@ -4215,9 +4255,9 @@
                 <a:solidFill>
                   <a:srgbClr val="1E2324"/>
                 </a:solidFill>
-                <a:latin typeface="페이퍼로지 4 Regular"/>
-                <a:ea typeface="페이퍼로지 4 Regular"/>
-                <a:cs typeface="페이퍼로지 4 Regular"/>
+                <a:latin typeface="Pretendard"/>
+                <a:ea typeface="Pretendard"/>
+                <a:cs typeface="Pretendard"/>
               </a:rPr>
               <a:t>파일럿 후보 CSV</a:t>
             </a:r>
@@ -4260,9 +4300,9 @@
                 <a:solidFill>
                   <a:srgbClr val="98A4A6"/>
                 </a:solidFill>
-                <a:latin typeface="페이퍼로지 4 Regular"/>
-                <a:ea typeface="페이퍼로지 4 Regular"/>
-                <a:cs typeface="페이퍼로지 4 Regular"/>
+                <a:latin typeface="Pretendard"/>
+                <a:ea typeface="Pretendard"/>
+                <a:cs typeface="Pretendard"/>
               </a:defRPr>
             </a:pPr>
             <a:r>
@@ -4270,9 +4310,9 @@
                 <a:solidFill>
                   <a:srgbClr val="98A4A6"/>
                 </a:solidFill>
-                <a:latin typeface="페이퍼로지 4 Regular"/>
-                <a:ea typeface="페이퍼로지 4 Regular"/>
-                <a:cs typeface="페이퍼로지 4 Regular"/>
+                <a:latin typeface="Pretendard"/>
+                <a:ea typeface="Pretendard"/>
+                <a:cs typeface="Pretendard"/>
               </a:rPr>
               <a:t>10</a:t>
             </a:r>
@@ -4317,9 +4357,9 @@
                 <a:solidFill>
                   <a:srgbClr val="00B5AC"/>
                 </a:solidFill>
-                <a:latin typeface="페이퍼로지 4 Regular"/>
-                <a:ea typeface="페이퍼로지 4 Regular"/>
-                <a:cs typeface="페이퍼로지 4 Regular"/>
+                <a:latin typeface="Pretendard"/>
+                <a:ea typeface="Pretendard"/>
+                <a:cs typeface="Pretendard"/>
               </a:defRPr>
             </a:pPr>
             <a:r>
@@ -4327,9 +4367,9 @@
                 <a:solidFill>
                   <a:srgbClr val="00B5AC"/>
                 </a:solidFill>
-                <a:latin typeface="페이퍼로지 4 Regular"/>
-                <a:ea typeface="페이퍼로지 4 Regular"/>
-                <a:cs typeface="페이퍼로지 4 Regular"/>
+                <a:latin typeface="Pretendard"/>
+                <a:ea typeface="Pretendard"/>
+                <a:cs typeface="Pretendard"/>
               </a:rPr>
               <a:t>HOW TO</a:t>
             </a:r>
@@ -4345,7 +4385,7 @@
           <p:nvPr/>
         </p:nvPicPr>
         <p:blipFill>
-          <a:blip xmlns:r="http://schemas.openxmlformats.org/officeDocument/2006/relationships" xmlns:a="http://schemas.openxmlformats.org/drawingml/2006/main" r:embed="R00f7ea704e634509"/>
+          <a:blip xmlns:r="http://schemas.openxmlformats.org/officeDocument/2006/relationships" xmlns:a="http://schemas.openxmlformats.org/drawingml/2006/main" r:embed="R894e48a285c34a7c"/>
           <a:stretch xmlns:a="http://schemas.openxmlformats.org/drawingml/2006/main"/>
         </p:blipFill>
         <p:spPr>
@@ -4389,7 +4429,7 @@
           <p:nvPr/>
         </p:nvPicPr>
         <p:blipFill>
-          <a:blip xmlns:r="http://schemas.openxmlformats.org/officeDocument/2006/relationships" xmlns:a="http://schemas.openxmlformats.org/drawingml/2006/main" r:embed="R54e29ba7fa9b47d1"/>
+          <a:blip xmlns:r="http://schemas.openxmlformats.org/officeDocument/2006/relationships" xmlns:a="http://schemas.openxmlformats.org/drawingml/2006/main" r:embed="Rf44df709972f482e"/>
           <a:srcRect xmlns:a="http://schemas.openxmlformats.org/drawingml/2006/main" l="-2083" t="0" r="-2083" b="0"/>
           <a:stretch xmlns:a="http://schemas.openxmlformats.org/drawingml/2006/main"/>
         </p:blipFill>
@@ -4439,9 +4479,9 @@
                 <a:solidFill>
                   <a:srgbClr val="0A0E10"/>
                 </a:solidFill>
-                <a:latin typeface="페이퍼로지 2 ExtraLight"/>
-                <a:ea typeface="페이퍼로지 2 ExtraLight"/>
-                <a:cs typeface="페이퍼로지 2 ExtraLight"/>
+                <a:latin typeface="Pretendard"/>
+                <a:ea typeface="Pretendard"/>
+                <a:cs typeface="Pretendard"/>
               </a:defRPr>
             </a:pPr>
             <a:r>
@@ -4449,11 +4489,11 @@
                 <a:solidFill>
                   <a:srgbClr val="0A0E10"/>
                 </a:solidFill>
-                <a:latin typeface="페이퍼로지 2 ExtraLight"/>
-                <a:ea typeface="페이퍼로지 2 ExtraLight"/>
-                <a:cs typeface="페이퍼로지 2 ExtraLight"/>
-              </a:rPr>
-              <a:t>프로젝트 코드와 새로고침까지</a:t>
+                <a:latin typeface="Pretendard"/>
+                <a:ea typeface="Pretendard"/>
+                <a:cs typeface="Pretendard"/>
+              </a:rPr>
+              <a:t>검사 참여·측정 원칙·PDF 안내서를</a:t>
             </a:r>
           </a:p>
           <a:p xmlns:a="http://schemas.openxmlformats.org/drawingml/2006/main">
@@ -4463,9 +4503,9 @@
                 <a:solidFill>
                   <a:srgbClr val="0A0E10"/>
                 </a:solidFill>
-                <a:latin typeface="페이퍼로지 2 ExtraLight"/>
-                <a:ea typeface="페이퍼로지 2 ExtraLight"/>
-                <a:cs typeface="페이퍼로지 2 ExtraLight"/>
+                <a:latin typeface="Pretendard"/>
+                <a:ea typeface="Pretendard"/>
+                <a:cs typeface="Pretendard"/>
               </a:defRPr>
             </a:pPr>
             <a:r>
@@ -4473,11 +4513,11 @@
                 <a:solidFill>
                   <a:srgbClr val="0A0E10"/>
                 </a:solidFill>
-                <a:latin typeface="페이퍼로지 6 SemiBold"/>
-                <a:ea typeface="페이퍼로지 6 SemiBold"/>
-                <a:cs typeface="페이퍼로지 6 SemiBold"/>
-              </a:rPr>
-              <a:t>핵심 버튼만 확인합니다</a:t>
+                <a:latin typeface="Pretendard"/>
+                <a:ea typeface="Pretendard"/>
+                <a:cs typeface="Pretendard"/>
+              </a:rPr>
+              <a:t>오픈페이지에서 확인합니다</a:t>
             </a:r>
           </a:p>
         </p:txBody>
@@ -4518,9 +4558,9 @@
                 <a:solidFill>
                   <a:srgbClr val="6C7476"/>
                 </a:solidFill>
-                <a:latin typeface="페이퍼로지 3 Light"/>
-                <a:ea typeface="페이퍼로지 3 Light"/>
-                <a:cs typeface="페이퍼로지 3 Light"/>
+                <a:latin typeface="Pretendard"/>
+                <a:ea typeface="Pretendard"/>
+                <a:cs typeface="Pretendard"/>
               </a:defRPr>
             </a:pPr>
             <a:r>
@@ -4528,11 +4568,35 @@
                 <a:solidFill>
                   <a:srgbClr val="6C7476"/>
                 </a:solidFill>
-                <a:latin typeface="페이퍼로지 3 Light"/>
-                <a:ea typeface="페이퍼로지 3 Light"/>
-                <a:cs typeface="페이퍼로지 3 Light"/>
-              </a:rPr>
-              <a:t>검사 완료 저장은 자동입니다. JSON은 GitHub 연결 실패에 대비한 백업으로 내려받습니다.</a:t>
+                <a:latin typeface="Pretendard"/>
+                <a:ea typeface="Pretendard"/>
+                <a:cs typeface="Pretendard"/>
+              </a:rPr>
+              <a:t>검사 참여는 교육 전 검사로, 측정 원칙은 내부 섹션으로 이동합니다.</a:t>
+            </a:r>
+          </a:p>
+          <a:p xmlns:a="http://schemas.openxmlformats.org/drawingml/2006/main">
+            <a:pPr algn="l">
+              <a:buNone/>
+              <a:defRPr>
+                <a:solidFill>
+                  <a:srgbClr val="6C7476"/>
+                </a:solidFill>
+                <a:latin typeface="Pretendard"/>
+                <a:ea typeface="Pretendard"/>
+                <a:cs typeface="Pretendard"/>
+              </a:defRPr>
+            </a:pPr>
+            <a:r>
+              <a:rPr sz="1600">
+                <a:solidFill>
+                  <a:srgbClr val="6C7476"/>
+                </a:solidFill>
+                <a:latin typeface="Pretendard"/>
+                <a:ea typeface="Pretendard"/>
+                <a:cs typeface="Pretendard"/>
+              </a:rPr>
+              <a:t>상·하단 사용설명서는 PDF로 바로 내려받습니다.</a:t>
             </a:r>
           </a:p>
         </p:txBody>
@@ -4615,9 +4679,9 @@
                 <a:solidFill>
                   <a:srgbClr val="00B5AC"/>
                 </a:solidFill>
-                <a:latin typeface="페이퍼로지 5 Medium"/>
-                <a:ea typeface="페이퍼로지 5 Medium"/>
-                <a:cs typeface="페이퍼로지 5 Medium"/>
+                <a:latin typeface="Pretendard"/>
+                <a:ea typeface="Pretendard"/>
+                <a:cs typeface="Pretendard"/>
               </a:defRPr>
             </a:pPr>
             <a:r>
@@ -4625,9 +4689,9 @@
                 <a:solidFill>
                   <a:srgbClr val="00B5AC"/>
                 </a:solidFill>
-                <a:latin typeface="페이퍼로지 5 Medium"/>
-                <a:ea typeface="페이퍼로지 5 Medium"/>
-                <a:cs typeface="페이퍼로지 5 Medium"/>
+                <a:latin typeface="Pretendard"/>
+                <a:ea typeface="Pretendard"/>
+                <a:cs typeface="Pretendard"/>
               </a:rPr>
               <a:t>01</a:t>
             </a:r>
@@ -4670,9 +4734,9 @@
                 <a:solidFill>
                   <a:srgbClr val="0A0E10"/>
                 </a:solidFill>
-                <a:latin typeface="페이퍼로지 5 Medium"/>
-                <a:ea typeface="페이퍼로지 5 Medium"/>
-                <a:cs typeface="페이퍼로지 5 Medium"/>
+                <a:latin typeface="Pretendard"/>
+                <a:ea typeface="Pretendard"/>
+                <a:cs typeface="Pretendard"/>
               </a:defRPr>
             </a:pPr>
             <a:r>
@@ -4680,11 +4744,11 @@
                 <a:solidFill>
                   <a:srgbClr val="0A0E10"/>
                 </a:solidFill>
-                <a:latin typeface="페이퍼로지 5 Medium"/>
-                <a:ea typeface="페이퍼로지 5 Medium"/>
-                <a:cs typeface="페이퍼로지 5 Medium"/>
-              </a:rPr>
-              <a:t>시작</a:t>
+                <a:latin typeface="Pretendard"/>
+                <a:ea typeface="Pretendard"/>
+                <a:cs typeface="Pretendard"/>
+              </a:rPr>
+              <a:t>검사 참여</a:t>
             </a:r>
           </a:p>
         </p:txBody>
@@ -4725,9 +4789,9 @@
                 <a:solidFill>
                   <a:srgbClr val="6C7476"/>
                 </a:solidFill>
-                <a:latin typeface="페이퍼로지 4 Regular"/>
-                <a:ea typeface="페이퍼로지 4 Regular"/>
-                <a:cs typeface="페이퍼로지 4 Regular"/>
+                <a:latin typeface="Pretendard"/>
+                <a:ea typeface="Pretendard"/>
+                <a:cs typeface="Pretendard"/>
               </a:defRPr>
             </a:pPr>
             <a:r>
@@ -4735,35 +4799,11 @@
                 <a:solidFill>
                   <a:srgbClr val="6C7476"/>
                 </a:solidFill>
-                <a:latin typeface="페이퍼로지 4 Regular"/>
-                <a:ea typeface="페이퍼로지 4 Regular"/>
-                <a:cs typeface="페이퍼로지 4 Regular"/>
-              </a:rPr>
-              <a:t>처음 사용 안내</a:t>
-            </a:r>
-          </a:p>
-          <a:p xmlns:a="http://schemas.openxmlformats.org/drawingml/2006/main">
-            <a:pPr algn="l">
-              <a:buNone/>
-              <a:defRPr>
-                <a:solidFill>
-                  <a:srgbClr val="6C7476"/>
-                </a:solidFill>
-                <a:latin typeface="페이퍼로지 4 Regular"/>
-                <a:ea typeface="페이퍼로지 4 Regular"/>
-                <a:cs typeface="페이퍼로지 4 Regular"/>
-              </a:defRPr>
-            </a:pPr>
-            <a:r>
-              <a:rPr sz="1100">
-                <a:solidFill>
-                  <a:srgbClr val="6C7476"/>
-                </a:solidFill>
-                <a:latin typeface="페이퍼로지 4 Regular"/>
-                <a:ea typeface="페이퍼로지 4 Regular"/>
-                <a:cs typeface="페이퍼로지 4 Regular"/>
-              </a:rPr>
-              <a:t>사용설명서</a:t>
+                <a:latin typeface="Pretendard"/>
+                <a:ea typeface="Pretendard"/>
+                <a:cs typeface="Pretendard"/>
+              </a:rPr>
+              <a:t>교육 전 검사로 이동</a:t>
             </a:r>
           </a:p>
         </p:txBody>
@@ -4846,9 +4886,9 @@
                 <a:solidFill>
                   <a:srgbClr val="00B5AC"/>
                 </a:solidFill>
-                <a:latin typeface="페이퍼로지 5 Medium"/>
-                <a:ea typeface="페이퍼로지 5 Medium"/>
-                <a:cs typeface="페이퍼로지 5 Medium"/>
+                <a:latin typeface="Pretendard"/>
+                <a:ea typeface="Pretendard"/>
+                <a:cs typeface="Pretendard"/>
               </a:defRPr>
             </a:pPr>
             <a:r>
@@ -4856,9 +4896,9 @@
                 <a:solidFill>
                   <a:srgbClr val="00B5AC"/>
                 </a:solidFill>
-                <a:latin typeface="페이퍼로지 5 Medium"/>
-                <a:ea typeface="페이퍼로지 5 Medium"/>
-                <a:cs typeface="페이퍼로지 5 Medium"/>
+                <a:latin typeface="Pretendard"/>
+                <a:ea typeface="Pretendard"/>
+                <a:cs typeface="Pretendard"/>
               </a:rPr>
               <a:t>02</a:t>
             </a:r>
@@ -4901,9 +4941,9 @@
                 <a:solidFill>
                   <a:srgbClr val="0A0E10"/>
                 </a:solidFill>
-                <a:latin typeface="페이퍼로지 5 Medium"/>
-                <a:ea typeface="페이퍼로지 5 Medium"/>
-                <a:cs typeface="페이퍼로지 5 Medium"/>
+                <a:latin typeface="Pretendard"/>
+                <a:ea typeface="Pretendard"/>
+                <a:cs typeface="Pretendard"/>
               </a:defRPr>
             </a:pPr>
             <a:r>
@@ -4911,11 +4951,11 @@
                 <a:solidFill>
                   <a:srgbClr val="0A0E10"/>
                 </a:solidFill>
-                <a:latin typeface="페이퍼로지 5 Medium"/>
-                <a:ea typeface="페이퍼로지 5 Medium"/>
-                <a:cs typeface="페이퍼로지 5 Medium"/>
-              </a:rPr>
-              <a:t>이동</a:t>
+                <a:latin typeface="Pretendard"/>
+                <a:ea typeface="Pretendard"/>
+                <a:cs typeface="Pretendard"/>
+              </a:rPr>
+              <a:t>측정 원칙</a:t>
             </a:r>
           </a:p>
         </p:txBody>
@@ -4956,9 +4996,9 @@
                 <a:solidFill>
                   <a:srgbClr val="6C7476"/>
                 </a:solidFill>
-                <a:latin typeface="페이퍼로지 4 Regular"/>
-                <a:ea typeface="페이퍼로지 4 Regular"/>
-                <a:cs typeface="페이퍼로지 4 Regular"/>
+                <a:latin typeface="Pretendard"/>
+                <a:ea typeface="Pretendard"/>
+                <a:cs typeface="Pretendard"/>
               </a:defRPr>
             </a:pPr>
             <a:r>
@@ -4966,35 +5006,11 @@
                 <a:solidFill>
                   <a:srgbClr val="6C7476"/>
                 </a:solidFill>
-                <a:latin typeface="페이퍼로지 4 Regular"/>
-                <a:ea typeface="페이퍼로지 4 Regular"/>
-                <a:cs typeface="페이퍼로지 4 Regular"/>
-              </a:rPr>
-              <a:t>프로젝트 설정</a:t>
-            </a:r>
-          </a:p>
-          <a:p xmlns:a="http://schemas.openxmlformats.org/drawingml/2006/main">
-            <a:pPr algn="l">
-              <a:buNone/>
-              <a:defRPr>
-                <a:solidFill>
-                  <a:srgbClr val="6C7476"/>
-                </a:solidFill>
-                <a:latin typeface="페이퍼로지 4 Regular"/>
-                <a:ea typeface="페이퍼로지 4 Regular"/>
-                <a:cs typeface="페이퍼로지 4 Regular"/>
-              </a:defRPr>
-            </a:pPr>
-            <a:r>
-              <a:rPr sz="1100">
-                <a:solidFill>
-                  <a:srgbClr val="6C7476"/>
-                </a:solidFill>
-                <a:latin typeface="페이퍼로지 4 Regular"/>
-                <a:ea typeface="페이퍼로지 4 Regular"/>
-                <a:cs typeface="페이퍼로지 4 Regular"/>
-              </a:rPr>
-              <a:t>프로젝트 코드</a:t>
+                <a:latin typeface="Pretendard"/>
+                <a:ea typeface="Pretendard"/>
+                <a:cs typeface="Pretendard"/>
+              </a:rPr>
+              <a:t>오픈페이지 내부 섹션</a:t>
             </a:r>
           </a:p>
         </p:txBody>
@@ -5077,9 +5093,9 @@
                 <a:solidFill>
                   <a:srgbClr val="00B5AC"/>
                 </a:solidFill>
-                <a:latin typeface="페이퍼로지 5 Medium"/>
-                <a:ea typeface="페이퍼로지 5 Medium"/>
-                <a:cs typeface="페이퍼로지 5 Medium"/>
+                <a:latin typeface="Pretendard"/>
+                <a:ea typeface="Pretendard"/>
+                <a:cs typeface="Pretendard"/>
               </a:defRPr>
             </a:pPr>
             <a:r>
@@ -5087,9 +5103,9 @@
                 <a:solidFill>
                   <a:srgbClr val="00B5AC"/>
                 </a:solidFill>
-                <a:latin typeface="페이퍼로지 5 Medium"/>
-                <a:ea typeface="페이퍼로지 5 Medium"/>
-                <a:cs typeface="페이퍼로지 5 Medium"/>
+                <a:latin typeface="Pretendard"/>
+                <a:ea typeface="Pretendard"/>
+                <a:cs typeface="Pretendard"/>
               </a:rPr>
               <a:t>03</a:t>
             </a:r>
@@ -5132,9 +5148,9 @@
                 <a:solidFill>
                   <a:srgbClr val="0A0E10"/>
                 </a:solidFill>
-                <a:latin typeface="페이퍼로지 5 Medium"/>
-                <a:ea typeface="페이퍼로지 5 Medium"/>
-                <a:cs typeface="페이퍼로지 5 Medium"/>
+                <a:latin typeface="Pretendard"/>
+                <a:ea typeface="Pretendard"/>
+                <a:cs typeface="Pretendard"/>
               </a:defRPr>
             </a:pPr>
             <a:r>
@@ -5142,11 +5158,11 @@
                 <a:solidFill>
                   <a:srgbClr val="0A0E10"/>
                 </a:solidFill>
-                <a:latin typeface="페이퍼로지 5 Medium"/>
-                <a:ea typeface="페이퍼로지 5 Medium"/>
-                <a:cs typeface="페이퍼로지 5 Medium"/>
-              </a:rPr>
-              <a:t>응답</a:t>
+                <a:latin typeface="Pretendard"/>
+                <a:ea typeface="Pretendard"/>
+                <a:cs typeface="Pretendard"/>
+              </a:rPr>
+              <a:t>사용설명서</a:t>
             </a:r>
           </a:p>
         </p:txBody>
@@ -5187,9 +5203,9 @@
                 <a:solidFill>
                   <a:srgbClr val="6C7476"/>
                 </a:solidFill>
-                <a:latin typeface="페이퍼로지 4 Regular"/>
-                <a:ea typeface="페이퍼로지 4 Regular"/>
-                <a:cs typeface="페이퍼로지 4 Regular"/>
+                <a:latin typeface="Pretendard"/>
+                <a:ea typeface="Pretendard"/>
+                <a:cs typeface="Pretendard"/>
               </a:defRPr>
             </a:pPr>
             <a:r>
@@ -5197,35 +5213,11 @@
                 <a:solidFill>
                   <a:srgbClr val="6C7476"/>
                 </a:solidFill>
-                <a:latin typeface="페이퍼로지 4 Regular"/>
-                <a:ea typeface="페이퍼로지 4 Regular"/>
-                <a:cs typeface="페이퍼로지 4 Regular"/>
-              </a:rPr>
-              <a:t>기획검증 접속코드</a:t>
-            </a:r>
-          </a:p>
-          <a:p xmlns:a="http://schemas.openxmlformats.org/drawingml/2006/main">
-            <a:pPr algn="l">
-              <a:buNone/>
-              <a:defRPr>
-                <a:solidFill>
-                  <a:srgbClr val="6C7476"/>
-                </a:solidFill>
-                <a:latin typeface="페이퍼로지 4 Regular"/>
-                <a:ea typeface="페이퍼로지 4 Regular"/>
-                <a:cs typeface="페이퍼로지 4 Regular"/>
-              </a:defRPr>
-            </a:pPr>
-            <a:r>
-              <a:rPr sz="1100">
-                <a:solidFill>
-                  <a:srgbClr val="6C7476"/>
-                </a:solidFill>
-                <a:latin typeface="페이퍼로지 4 Regular"/>
-                <a:ea typeface="페이퍼로지 4 Regular"/>
-                <a:cs typeface="페이퍼로지 4 Regular"/>
-              </a:rPr>
-              <a:t>실제 검사</a:t>
+                <a:latin typeface="Pretendard"/>
+                <a:ea typeface="Pretendard"/>
+                <a:cs typeface="Pretendard"/>
+              </a:rPr>
+              <a:t>상·하단 PDF 즉시 다운로드</a:t>
             </a:r>
           </a:p>
         </p:txBody>
@@ -5308,9 +5300,9 @@
                 <a:solidFill>
                   <a:srgbClr val="00B5AC"/>
                 </a:solidFill>
-                <a:latin typeface="페이퍼로지 5 Medium"/>
-                <a:ea typeface="페이퍼로지 5 Medium"/>
-                <a:cs typeface="페이퍼로지 5 Medium"/>
+                <a:latin typeface="Pretendard"/>
+                <a:ea typeface="Pretendard"/>
+                <a:cs typeface="Pretendard"/>
               </a:defRPr>
             </a:pPr>
             <a:r>
@@ -5318,9 +5310,9 @@
                 <a:solidFill>
                   <a:srgbClr val="00B5AC"/>
                 </a:solidFill>
-                <a:latin typeface="페이퍼로지 5 Medium"/>
-                <a:ea typeface="페이퍼로지 5 Medium"/>
-                <a:cs typeface="페이퍼로지 5 Medium"/>
+                <a:latin typeface="Pretendard"/>
+                <a:ea typeface="Pretendard"/>
+                <a:cs typeface="Pretendard"/>
               </a:rPr>
               <a:t>04</a:t>
             </a:r>
@@ -5363,9 +5355,9 @@
                 <a:solidFill>
                   <a:srgbClr val="0A0E10"/>
                 </a:solidFill>
-                <a:latin typeface="페이퍼로지 5 Medium"/>
-                <a:ea typeface="페이퍼로지 5 Medium"/>
-                <a:cs typeface="페이퍼로지 5 Medium"/>
+                <a:latin typeface="Pretendard"/>
+                <a:ea typeface="Pretendard"/>
+                <a:cs typeface="Pretendard"/>
               </a:defRPr>
             </a:pPr>
             <a:r>
@@ -5373,9 +5365,9 @@
                 <a:solidFill>
                   <a:srgbClr val="0A0E10"/>
                 </a:solidFill>
-                <a:latin typeface="페이퍼로지 5 Medium"/>
-                <a:ea typeface="페이퍼로지 5 Medium"/>
-                <a:cs typeface="페이퍼로지 5 Medium"/>
+                <a:latin typeface="Pretendard"/>
+                <a:ea typeface="Pretendard"/>
+                <a:cs typeface="Pretendard"/>
               </a:rPr>
               <a:t>개인 결과</a:t>
             </a:r>
@@ -5418,9 +5410,9 @@
                 <a:solidFill>
                   <a:srgbClr val="6C7476"/>
                 </a:solidFill>
-                <a:latin typeface="페이퍼로지 4 Regular"/>
-                <a:ea typeface="페이퍼로지 4 Regular"/>
-                <a:cs typeface="페이퍼로지 4 Regular"/>
+                <a:latin typeface="Pretendard"/>
+                <a:ea typeface="Pretendard"/>
+                <a:cs typeface="Pretendard"/>
               </a:defRPr>
             </a:pPr>
             <a:r>
@@ -5428,9 +5420,9 @@
                 <a:solidFill>
                   <a:srgbClr val="6C7476"/>
                 </a:solidFill>
-                <a:latin typeface="페이퍼로지 4 Regular"/>
-                <a:ea typeface="페이퍼로지 4 Regular"/>
-                <a:cs typeface="페이퍼로지 4 Regular"/>
+                <a:latin typeface="Pretendard"/>
+                <a:ea typeface="Pretendard"/>
+                <a:cs typeface="Pretendard"/>
               </a:rPr>
               <a:t>내 변화 리포트</a:t>
             </a:r>
@@ -5442,9 +5434,9 @@
                 <a:solidFill>
                   <a:srgbClr val="6C7476"/>
                 </a:solidFill>
-                <a:latin typeface="페이퍼로지 4 Regular"/>
-                <a:ea typeface="페이퍼로지 4 Regular"/>
-                <a:cs typeface="페이퍼로지 4 Regular"/>
+                <a:latin typeface="Pretendard"/>
+                <a:ea typeface="Pretendard"/>
+                <a:cs typeface="Pretendard"/>
               </a:defRPr>
             </a:pPr>
             <a:r>
@@ -5452,9 +5444,9 @@
                 <a:solidFill>
                   <a:srgbClr val="6C7476"/>
                 </a:solidFill>
-                <a:latin typeface="페이퍼로지 4 Regular"/>
-                <a:ea typeface="페이퍼로지 4 Regular"/>
-                <a:cs typeface="페이퍼로지 4 Regular"/>
+                <a:latin typeface="Pretendard"/>
+                <a:ea typeface="Pretendard"/>
+                <a:cs typeface="Pretendard"/>
               </a:rPr>
               <a:t>결과 CSV</a:t>
             </a:r>
@@ -5539,9 +5531,9 @@
                 <a:solidFill>
                   <a:srgbClr val="00B5AC"/>
                 </a:solidFill>
-                <a:latin typeface="페이퍼로지 5 Medium"/>
-                <a:ea typeface="페이퍼로지 5 Medium"/>
-                <a:cs typeface="페이퍼로지 5 Medium"/>
+                <a:latin typeface="Pretendard"/>
+                <a:ea typeface="Pretendard"/>
+                <a:cs typeface="Pretendard"/>
               </a:defRPr>
             </a:pPr>
             <a:r>
@@ -5549,9 +5541,9 @@
                 <a:solidFill>
                   <a:srgbClr val="00B5AC"/>
                 </a:solidFill>
-                <a:latin typeface="페이퍼로지 5 Medium"/>
-                <a:ea typeface="페이퍼로지 5 Medium"/>
-                <a:cs typeface="페이퍼로지 5 Medium"/>
+                <a:latin typeface="Pretendard"/>
+                <a:ea typeface="Pretendard"/>
+                <a:cs typeface="Pretendard"/>
               </a:rPr>
               <a:t>05</a:t>
             </a:r>
@@ -5594,9 +5586,9 @@
                 <a:solidFill>
                   <a:srgbClr val="0A0E10"/>
                 </a:solidFill>
-                <a:latin typeface="페이퍼로지 5 Medium"/>
-                <a:ea typeface="페이퍼로지 5 Medium"/>
-                <a:cs typeface="페이퍼로지 5 Medium"/>
+                <a:latin typeface="Pretendard"/>
+                <a:ea typeface="Pretendard"/>
+                <a:cs typeface="Pretendard"/>
               </a:defRPr>
             </a:pPr>
             <a:r>
@@ -5604,9 +5596,9 @@
                 <a:solidFill>
                   <a:srgbClr val="0A0E10"/>
                 </a:solidFill>
-                <a:latin typeface="페이퍼로지 5 Medium"/>
-                <a:ea typeface="페이퍼로지 5 Medium"/>
-                <a:cs typeface="페이퍼로지 5 Medium"/>
+                <a:latin typeface="Pretendard"/>
+                <a:ea typeface="Pretendard"/>
+                <a:cs typeface="Pretendard"/>
               </a:rPr>
               <a:t>조직 결과</a:t>
             </a:r>
@@ -5649,9 +5641,9 @@
                 <a:solidFill>
                   <a:srgbClr val="6C7476"/>
                 </a:solidFill>
-                <a:latin typeface="페이퍼로지 4 Regular"/>
-                <a:ea typeface="페이퍼로지 4 Regular"/>
-                <a:cs typeface="페이퍼로지 4 Regular"/>
+                <a:latin typeface="Pretendard"/>
+                <a:ea typeface="Pretendard"/>
+                <a:cs typeface="Pretendard"/>
               </a:defRPr>
             </a:pPr>
             <a:r>
@@ -5659,11 +5651,11 @@
                 <a:solidFill>
                   <a:srgbClr val="6C7476"/>
                 </a:solidFill>
-                <a:latin typeface="페이퍼로지 4 Regular"/>
-                <a:ea typeface="페이퍼로지 4 Regular"/>
-                <a:cs typeface="페이퍼로지 4 Regular"/>
-              </a:rPr>
-              <a:t>누적 새로고침</a:t>
+                <a:latin typeface="Pretendard"/>
+                <a:ea typeface="Pretendard"/>
+                <a:cs typeface="Pretendard"/>
+              </a:rPr>
+              <a:t>교육 전후 리포트</a:t>
             </a:r>
           </a:p>
           <a:p xmlns:a="http://schemas.openxmlformats.org/drawingml/2006/main">
@@ -5673,9 +5665,9 @@
                 <a:solidFill>
                   <a:srgbClr val="6C7476"/>
                 </a:solidFill>
-                <a:latin typeface="페이퍼로지 4 Regular"/>
-                <a:ea typeface="페이퍼로지 4 Regular"/>
-                <a:cs typeface="페이퍼로지 4 Regular"/>
+                <a:latin typeface="Pretendard"/>
+                <a:ea typeface="Pretendard"/>
+                <a:cs typeface="Pretendard"/>
               </a:defRPr>
             </a:pPr>
             <a:r>
@@ -5683,11 +5675,11 @@
                 <a:solidFill>
                   <a:srgbClr val="6C7476"/>
                 </a:solidFill>
-                <a:latin typeface="페이퍼로지 4 Regular"/>
-                <a:ea typeface="페이퍼로지 4 Regular"/>
-                <a:cs typeface="페이퍼로지 4 Regular"/>
-              </a:rPr>
-              <a:t>조직 리포트</a:t>
+                <a:latin typeface="Pretendard"/>
+                <a:ea typeface="Pretendard"/>
+                <a:cs typeface="Pretendard"/>
+              </a:rPr>
+              <a:t>프로젝트 새로고침</a:t>
             </a:r>
           </a:p>
         </p:txBody>
@@ -5770,9 +5762,9 @@
                 <a:solidFill>
                   <a:srgbClr val="00B5AC"/>
                 </a:solidFill>
-                <a:latin typeface="페이퍼로지 5 Medium"/>
-                <a:ea typeface="페이퍼로지 5 Medium"/>
-                <a:cs typeface="페이퍼로지 5 Medium"/>
+                <a:latin typeface="Pretendard"/>
+                <a:ea typeface="Pretendard"/>
+                <a:cs typeface="Pretendard"/>
               </a:defRPr>
             </a:pPr>
             <a:r>
@@ -5780,9 +5772,9 @@
                 <a:solidFill>
                   <a:srgbClr val="00B5AC"/>
                 </a:solidFill>
-                <a:latin typeface="페이퍼로지 5 Medium"/>
-                <a:ea typeface="페이퍼로지 5 Medium"/>
-                <a:cs typeface="페이퍼로지 5 Medium"/>
+                <a:latin typeface="Pretendard"/>
+                <a:ea typeface="Pretendard"/>
+                <a:cs typeface="Pretendard"/>
               </a:rPr>
               <a:t>06</a:t>
             </a:r>
@@ -5825,9 +5817,9 @@
                 <a:solidFill>
                   <a:srgbClr val="0A0E10"/>
                 </a:solidFill>
-                <a:latin typeface="페이퍼로지 5 Medium"/>
-                <a:ea typeface="페이퍼로지 5 Medium"/>
-                <a:cs typeface="페이퍼로지 5 Medium"/>
+                <a:latin typeface="Pretendard"/>
+                <a:ea typeface="Pretendard"/>
+                <a:cs typeface="Pretendard"/>
               </a:defRPr>
             </a:pPr>
             <a:r>
@@ -5835,9 +5827,9 @@
                 <a:solidFill>
                   <a:srgbClr val="0A0E10"/>
                 </a:solidFill>
-                <a:latin typeface="페이퍼로지 5 Medium"/>
-                <a:ea typeface="페이퍼로지 5 Medium"/>
-                <a:cs typeface="페이퍼로지 5 Medium"/>
+                <a:latin typeface="Pretendard"/>
+                <a:ea typeface="Pretendard"/>
+                <a:cs typeface="Pretendard"/>
               </a:rPr>
               <a:t>KMA 검수</a:t>
             </a:r>
@@ -5880,9 +5872,9 @@
                 <a:solidFill>
                   <a:srgbClr val="6C7476"/>
                 </a:solidFill>
-                <a:latin typeface="페이퍼로지 4 Regular"/>
-                <a:ea typeface="페이퍼로지 4 Regular"/>
-                <a:cs typeface="페이퍼로지 4 Regular"/>
+                <a:latin typeface="Pretendard"/>
+                <a:ea typeface="Pretendard"/>
+                <a:cs typeface="Pretendard"/>
               </a:defRPr>
             </a:pPr>
             <a:r>
@@ -5890,11 +5882,11 @@
                 <a:solidFill>
                   <a:srgbClr val="6C7476"/>
                 </a:solidFill>
-                <a:latin typeface="페이퍼로지 4 Regular"/>
-                <a:ea typeface="페이퍼로지 4 Regular"/>
-                <a:cs typeface="페이퍼로지 4 Regular"/>
-              </a:rPr>
-              <a:t>회원사 운영 화면</a:t>
+                <a:latin typeface="Pretendard"/>
+                <a:ea typeface="Pretendard"/>
+                <a:cs typeface="Pretendard"/>
+              </a:rPr>
+              <a:t>관리자 대시보드</a:t>
             </a:r>
           </a:p>
           <a:p xmlns:a="http://schemas.openxmlformats.org/drawingml/2006/main">
@@ -5904,9 +5896,9 @@
                 <a:solidFill>
                   <a:srgbClr val="6C7476"/>
                 </a:solidFill>
-                <a:latin typeface="페이퍼로지 4 Regular"/>
-                <a:ea typeface="페이퍼로지 4 Regular"/>
-                <a:cs typeface="페이퍼로지 4 Regular"/>
+                <a:latin typeface="Pretendard"/>
+                <a:ea typeface="Pretendard"/>
+                <a:cs typeface="Pretendard"/>
               </a:defRPr>
             </a:pPr>
             <a:r>
@@ -5914,11 +5906,11 @@
                 <a:solidFill>
                   <a:srgbClr val="6C7476"/>
                 </a:solidFill>
-                <a:latin typeface="페이퍼로지 4 Regular"/>
-                <a:ea typeface="페이퍼로지 4 Regular"/>
-                <a:cs typeface="페이퍼로지 4 Regular"/>
-              </a:rPr>
-              <a:t>전체 문항은행 검수</a:t>
+                <a:latin typeface="Pretendard"/>
+                <a:ea typeface="Pretendard"/>
+                <a:cs typeface="Pretendard"/>
+              </a:rPr>
+              <a:t>문항은행 검수</a:t>
             </a:r>
           </a:p>
         </p:txBody>
@@ -5959,9 +5951,9 @@
                 <a:solidFill>
                   <a:srgbClr val="98A4A6"/>
                 </a:solidFill>
-                <a:latin typeface="페이퍼로지 4 Regular"/>
-                <a:ea typeface="페이퍼로지 4 Regular"/>
-                <a:cs typeface="페이퍼로지 4 Regular"/>
+                <a:latin typeface="Pretendard"/>
+                <a:ea typeface="Pretendard"/>
+                <a:cs typeface="Pretendard"/>
               </a:defRPr>
             </a:pPr>
             <a:r>
@@ -5969,9 +5961,9 @@
                 <a:solidFill>
                   <a:srgbClr val="98A4A6"/>
                 </a:solidFill>
-                <a:latin typeface="페이퍼로지 4 Regular"/>
-                <a:ea typeface="페이퍼로지 4 Regular"/>
-                <a:cs typeface="페이퍼로지 4 Regular"/>
+                <a:latin typeface="Pretendard"/>
+                <a:ea typeface="Pretendard"/>
+                <a:cs typeface="Pretendard"/>
               </a:rPr>
               <a:t>11</a:t>
             </a:r>
@@ -6066,9 +6058,9 @@
                 <a:solidFill>
                   <a:srgbClr val="00B5AC"/>
                 </a:solidFill>
-                <a:latin typeface="페이퍼로지 4 Regular"/>
-                <a:ea typeface="페이퍼로지 4 Regular"/>
-                <a:cs typeface="페이퍼로지 4 Regular"/>
+                <a:latin typeface="Pretendard"/>
+                <a:ea typeface="Pretendard"/>
+                <a:cs typeface="Pretendard"/>
               </a:defRPr>
             </a:pPr>
             <a:r>
@@ -6076,9 +6068,9 @@
                 <a:solidFill>
                   <a:srgbClr val="00B5AC"/>
                 </a:solidFill>
-                <a:latin typeface="페이퍼로지 4 Regular"/>
-                <a:ea typeface="페이퍼로지 4 Regular"/>
-                <a:cs typeface="페이퍼로지 4 Regular"/>
+                <a:latin typeface="Pretendard"/>
+                <a:ea typeface="Pretendard"/>
+                <a:cs typeface="Pretendard"/>
               </a:rPr>
               <a:t>BUTTON REFERENCE</a:t>
             </a:r>
@@ -6125,9 +6117,9 @@
                 <a:solidFill>
                   <a:srgbClr val="6C7476"/>
                 </a:solidFill>
-                <a:latin typeface="페이퍼로지 4 Regular"/>
-                <a:ea typeface="페이퍼로지 4 Regular"/>
-                <a:cs typeface="페이퍼로지 4 Regular"/>
+                <a:latin typeface="Pretendard"/>
+                <a:ea typeface="Pretendard"/>
+                <a:cs typeface="Pretendard"/>
               </a:defRPr>
             </a:lvl1pPr>
           </a:lstStyle>
@@ -6138,9 +6130,9 @@
                 <a:solidFill>
                   <a:srgbClr val="6C7476"/>
                 </a:solidFill>
-                <a:latin typeface="페이퍼로지 4 Regular"/>
-                <a:ea typeface="페이퍼로지 4 Regular"/>
-                <a:cs typeface="페이퍼로지 4 Regular"/>
+                <a:latin typeface="Pretendard"/>
+                <a:ea typeface="Pretendard"/>
+                <a:cs typeface="Pretendard"/>
               </a:defRPr>
             </a:pPr>
             <a:r>
@@ -6148,9 +6140,9 @@
                 <a:solidFill>
                   <a:srgbClr val="6C7476"/>
                 </a:solidFill>
-                <a:latin typeface="페이퍼로지 4 Regular"/>
-                <a:ea typeface="페이퍼로지 4 Regular"/>
-                <a:cs typeface="페이퍼로지 4 Regular"/>
+                <a:latin typeface="Pretendard"/>
+                <a:ea typeface="Pretendard"/>
+                <a:cs typeface="Pretendard"/>
               </a:rPr>
               <a:t>REFERENCE</a:t>
             </a:r>
@@ -6238,7 +6230,7 @@
           <p:nvPr/>
         </p:nvPicPr>
         <p:blipFill>
-          <a:blip xmlns:r="http://schemas.openxmlformats.org/officeDocument/2006/relationships" xmlns:a="http://schemas.openxmlformats.org/drawingml/2006/main" r:embed="R82fa6676bb2c41ae"/>
+          <a:blip xmlns:r="http://schemas.openxmlformats.org/officeDocument/2006/relationships" xmlns:a="http://schemas.openxmlformats.org/drawingml/2006/main" r:embed="R22083307dad0468b"/>
           <a:srcRect xmlns:a="http://schemas.openxmlformats.org/drawingml/2006/main" l="-2083" t="0" r="-2083" b="0"/>
           <a:stretch xmlns:a="http://schemas.openxmlformats.org/drawingml/2006/main"/>
         </p:blipFill>
@@ -6261,7 +6253,7 @@
           <p:nvPr/>
         </p:nvPicPr>
         <p:blipFill>
-          <a:blip xmlns:r="http://schemas.openxmlformats.org/officeDocument/2006/relationships" xmlns:a="http://schemas.openxmlformats.org/drawingml/2006/main" r:embed="R782e85d975714891"/>
+          <a:blip xmlns:r="http://schemas.openxmlformats.org/officeDocument/2006/relationships" xmlns:a="http://schemas.openxmlformats.org/drawingml/2006/main" r:embed="R30ca117d8c8b40db"/>
           <a:srcRect xmlns:a="http://schemas.openxmlformats.org/drawingml/2006/main" l="-2083" t="0" r="-2083" b="0"/>
           <a:stretch xmlns:a="http://schemas.openxmlformats.org/drawingml/2006/main"/>
         </p:blipFill>
@@ -6568,9 +6560,9 @@
                 <a:solidFill>
                   <a:srgbClr val="0A0E10"/>
                 </a:solidFill>
-                <a:latin typeface="페이퍼로지 2 ExtraLight"/>
-                <a:ea typeface="페이퍼로지 2 ExtraLight"/>
-                <a:cs typeface="페이퍼로지 2 ExtraLight"/>
+                <a:latin typeface="Pretendard"/>
+                <a:ea typeface="Pretendard"/>
+                <a:cs typeface="Pretendard"/>
               </a:defRPr>
             </a:pPr>
             <a:r>
@@ -6578,11 +6570,11 @@
                 <a:solidFill>
                   <a:srgbClr val="0A0E10"/>
                 </a:solidFill>
-                <a:latin typeface="페이퍼로지 2 ExtraLight"/>
-                <a:ea typeface="페이퍼로지 2 ExtraLight"/>
-                <a:cs typeface="페이퍼로지 2 ExtraLight"/>
-              </a:rPr>
-              <a:t>접속코드·GitHub 연결·N&lt;5를</a:t>
+                <a:latin typeface="Pretendard"/>
+                <a:ea typeface="Pretendard"/>
+                <a:cs typeface="Pretendard"/>
+              </a:rPr>
+              <a:t>접속코드·GitHub 연결·</a:t>
             </a:r>
           </a:p>
           <a:p xmlns:a="http://schemas.openxmlformats.org/drawingml/2006/main">
@@ -6592,9 +6584,9 @@
                 <a:solidFill>
                   <a:srgbClr val="0A0E10"/>
                 </a:solidFill>
-                <a:latin typeface="페이퍼로지 2 ExtraLight"/>
-                <a:ea typeface="페이퍼로지 2 ExtraLight"/>
-                <a:cs typeface="페이퍼로지 2 ExtraLight"/>
+                <a:latin typeface="Pretendard"/>
+                <a:ea typeface="Pretendard"/>
+                <a:cs typeface="Pretendard"/>
               </a:defRPr>
             </a:pPr>
             <a:r>
@@ -6602,11 +6594,11 @@
                 <a:solidFill>
                   <a:srgbClr val="0A0E10"/>
                 </a:solidFill>
-                <a:latin typeface="페이퍼로지 6 SemiBold"/>
-                <a:ea typeface="페이퍼로지 6 SemiBold"/>
-                <a:cs typeface="페이퍼로지 6 SemiBold"/>
-              </a:rPr>
-              <a:t>먼저 확인하세요</a:t>
+                <a:latin typeface="Pretendard"/>
+                <a:ea typeface="Pretendard"/>
+                <a:cs typeface="Pretendard"/>
+              </a:rPr>
+              <a:t>5명 공개 기준을 먼저 확인하세요</a:t>
             </a:r>
           </a:p>
         </p:txBody>
@@ -6647,9 +6639,9 @@
                 <a:solidFill>
                   <a:srgbClr val="6C7476"/>
                 </a:solidFill>
-                <a:latin typeface="페이퍼로지 3 Light"/>
-                <a:ea typeface="페이퍼로지 3 Light"/>
-                <a:cs typeface="페이퍼로지 3 Light"/>
+                <a:latin typeface="Pretendard"/>
+                <a:ea typeface="Pretendard"/>
+                <a:cs typeface="Pretendard"/>
               </a:defRPr>
             </a:pPr>
             <a:r>
@@ -6657,11 +6649,11 @@
                 <a:solidFill>
                   <a:srgbClr val="6C7476"/>
                 </a:solidFill>
-                <a:latin typeface="페이퍼로지 3 Light"/>
-                <a:ea typeface="페이퍼로지 3 Light"/>
-                <a:cs typeface="페이퍼로지 3 Light"/>
-              </a:rPr>
-              <a:t>이 저장 방식은 기획검증용 합성데이터 전용입니다. Streamlit Secrets에 PAT·저장소·접속코드를 등록하고, 실운영에서는 자체 서버 DB로 전환하세요.</a:t>
+                <a:latin typeface="Pretendard"/>
+                <a:ea typeface="Pretendard"/>
+                <a:cs typeface="Pretendard"/>
+              </a:rPr>
+              <a:t>기획검증용 합성 데이터 전용입니다. Streamlit Secrets에 GitHub PAT·저장소·접속코드를 등록합니다. 실운영에서는 자체 서버 DB로 전환하세요.</a:t>
             </a:r>
           </a:p>
         </p:txBody>
@@ -6702,9 +6694,9 @@
                 <a:solidFill>
                   <a:srgbClr val="FFFFFF"/>
                 </a:solidFill>
-                <a:latin typeface="페이퍼로지 5 Medium"/>
-                <a:ea typeface="페이퍼로지 5 Medium"/>
-                <a:cs typeface="페이퍼로지 5 Medium"/>
+                <a:latin typeface="Pretendard"/>
+                <a:ea typeface="Pretendard"/>
+                <a:cs typeface="Pretendard"/>
               </a:defRPr>
             </a:pPr>
             <a:r>
@@ -6712,9 +6704,9 @@
                 <a:solidFill>
                   <a:srgbClr val="FFFFFF"/>
                 </a:solidFill>
-                <a:latin typeface="페이퍼로지 5 Medium"/>
-                <a:ea typeface="페이퍼로지 5 Medium"/>
-                <a:cs typeface="페이퍼로지 5 Medium"/>
+                <a:latin typeface="Pretendard"/>
+                <a:ea typeface="Pretendard"/>
+                <a:cs typeface="Pretendard"/>
               </a:rPr>
               <a:t>01</a:t>
             </a:r>
@@ -6757,9 +6749,9 @@
                 <a:solidFill>
                   <a:srgbClr val="00B5AC"/>
                 </a:solidFill>
-                <a:latin typeface="페이퍼로지 5 Medium"/>
-                <a:ea typeface="페이퍼로지 5 Medium"/>
-                <a:cs typeface="페이퍼로지 5 Medium"/>
+                <a:latin typeface="Pretendard"/>
+                <a:ea typeface="Pretendard"/>
+                <a:cs typeface="Pretendard"/>
               </a:defRPr>
             </a:pPr>
             <a:r>
@@ -6767,9 +6759,9 @@
                 <a:solidFill>
                   <a:srgbClr val="00B5AC"/>
                 </a:solidFill>
-                <a:latin typeface="페이퍼로지 5 Medium"/>
-                <a:ea typeface="페이퍼로지 5 Medium"/>
-                <a:cs typeface="페이퍼로지 5 Medium"/>
+                <a:latin typeface="Pretendard"/>
+                <a:ea typeface="Pretendard"/>
+                <a:cs typeface="Pretendard"/>
               </a:rPr>
               <a:t>02</a:t>
             </a:r>
@@ -6812,9 +6804,9 @@
                 <a:solidFill>
                   <a:srgbClr val="00B5AC"/>
                 </a:solidFill>
-                <a:latin typeface="페이퍼로지 5 Medium"/>
-                <a:ea typeface="페이퍼로지 5 Medium"/>
-                <a:cs typeface="페이퍼로지 5 Medium"/>
+                <a:latin typeface="Pretendard"/>
+                <a:ea typeface="Pretendard"/>
+                <a:cs typeface="Pretendard"/>
               </a:defRPr>
             </a:pPr>
             <a:r>
@@ -6822,9 +6814,9 @@
                 <a:solidFill>
                   <a:srgbClr val="00B5AC"/>
                 </a:solidFill>
-                <a:latin typeface="페이퍼로지 5 Medium"/>
-                <a:ea typeface="페이퍼로지 5 Medium"/>
-                <a:cs typeface="페이퍼로지 5 Medium"/>
+                <a:latin typeface="Pretendard"/>
+                <a:ea typeface="Pretendard"/>
+                <a:cs typeface="Pretendard"/>
               </a:rPr>
               <a:t>03</a:t>
             </a:r>
@@ -6867,9 +6859,9 @@
                 <a:solidFill>
                   <a:srgbClr val="00B5AC"/>
                 </a:solidFill>
-                <a:latin typeface="페이퍼로지 5 Medium"/>
-                <a:ea typeface="페이퍼로지 5 Medium"/>
-                <a:cs typeface="페이퍼로지 5 Medium"/>
+                <a:latin typeface="Pretendard"/>
+                <a:ea typeface="Pretendard"/>
+                <a:cs typeface="Pretendard"/>
               </a:defRPr>
             </a:pPr>
             <a:r>
@@ -6877,9 +6869,9 @@
                 <a:solidFill>
                   <a:srgbClr val="00B5AC"/>
                 </a:solidFill>
-                <a:latin typeface="페이퍼로지 5 Medium"/>
-                <a:ea typeface="페이퍼로지 5 Medium"/>
-                <a:cs typeface="페이퍼로지 5 Medium"/>
+                <a:latin typeface="Pretendard"/>
+                <a:ea typeface="Pretendard"/>
+                <a:cs typeface="Pretendard"/>
               </a:rPr>
               <a:t>04</a:t>
             </a:r>
@@ -6922,9 +6914,9 @@
                 <a:solidFill>
                   <a:srgbClr val="00B5AC"/>
                 </a:solidFill>
-                <a:latin typeface="페이퍼로지 5 Medium"/>
-                <a:ea typeface="페이퍼로지 5 Medium"/>
-                <a:cs typeface="페이퍼로지 5 Medium"/>
+                <a:latin typeface="Pretendard"/>
+                <a:ea typeface="Pretendard"/>
+                <a:cs typeface="Pretendard"/>
               </a:defRPr>
             </a:pPr>
             <a:r>
@@ -6932,9 +6924,9 @@
                 <a:solidFill>
                   <a:srgbClr val="00B5AC"/>
                 </a:solidFill>
-                <a:latin typeface="페이퍼로지 5 Medium"/>
-                <a:ea typeface="페이퍼로지 5 Medium"/>
-                <a:cs typeface="페이퍼로지 5 Medium"/>
+                <a:latin typeface="Pretendard"/>
+                <a:ea typeface="Pretendard"/>
+                <a:cs typeface="Pretendard"/>
               </a:rPr>
               <a:t>05</a:t>
             </a:r>
@@ -6977,9 +6969,9 @@
                 <a:solidFill>
                   <a:srgbClr val="00B5AC"/>
                 </a:solidFill>
-                <a:latin typeface="페이퍼로지 5 Medium"/>
-                <a:ea typeface="페이퍼로지 5 Medium"/>
-                <a:cs typeface="페이퍼로지 5 Medium"/>
+                <a:latin typeface="Pretendard"/>
+                <a:ea typeface="Pretendard"/>
+                <a:cs typeface="Pretendard"/>
               </a:defRPr>
             </a:pPr>
             <a:r>
@@ -6987,9 +6979,9 @@
                 <a:solidFill>
                   <a:srgbClr val="00B5AC"/>
                 </a:solidFill>
-                <a:latin typeface="페이퍼로지 5 Medium"/>
-                <a:ea typeface="페이퍼로지 5 Medium"/>
-                <a:cs typeface="페이퍼로지 5 Medium"/>
+                <a:latin typeface="Pretendard"/>
+                <a:ea typeface="Pretendard"/>
+                <a:cs typeface="Pretendard"/>
               </a:rPr>
               <a:t>06</a:t>
             </a:r>
@@ -7032,9 +7024,9 @@
                 <a:solidFill>
                   <a:srgbClr val="0A0E10"/>
                 </a:solidFill>
-                <a:latin typeface="페이퍼로지 5 Medium"/>
-                <a:ea typeface="페이퍼로지 5 Medium"/>
-                <a:cs typeface="페이퍼로지 5 Medium"/>
+                <a:latin typeface="Pretendard"/>
+                <a:ea typeface="Pretendard"/>
+                <a:cs typeface="Pretendard"/>
               </a:defRPr>
             </a:pPr>
             <a:r>
@@ -7042,9 +7034,9 @@
                 <a:solidFill>
                   <a:srgbClr val="0A0E10"/>
                 </a:solidFill>
-                <a:latin typeface="페이퍼로지 5 Medium"/>
-                <a:ea typeface="페이퍼로지 5 Medium"/>
-                <a:cs typeface="페이퍼로지 5 Medium"/>
+                <a:latin typeface="Pretendard"/>
+                <a:ea typeface="Pretendard"/>
+                <a:cs typeface="Pretendard"/>
               </a:rPr>
               <a:t>접속코드 오류</a:t>
             </a:r>
@@ -7087,9 +7079,9 @@
                 <a:solidFill>
                   <a:srgbClr val="6C7476"/>
                 </a:solidFill>
-                <a:latin typeface="페이퍼로지 4 Regular"/>
-                <a:ea typeface="페이퍼로지 4 Regular"/>
-                <a:cs typeface="페이퍼로지 4 Regular"/>
+                <a:latin typeface="Pretendard"/>
+                <a:ea typeface="Pretendard"/>
+                <a:cs typeface="Pretendard"/>
               </a:defRPr>
             </a:pPr>
             <a:r>
@@ -7097,9 +7089,9 @@
                 <a:solidFill>
                   <a:srgbClr val="6C7476"/>
                 </a:solidFill>
-                <a:latin typeface="페이퍼로지 4 Regular"/>
-                <a:ea typeface="페이퍼로지 4 Regular"/>
-                <a:cs typeface="페이퍼로지 4 Regular"/>
+                <a:latin typeface="Pretendard"/>
+                <a:ea typeface="Pretendard"/>
+                <a:cs typeface="Pretendard"/>
               </a:rPr>
               <a:t>공유 코드 다시 입력</a:t>
             </a:r>
@@ -7142,9 +7134,9 @@
                 <a:solidFill>
                   <a:srgbClr val="0A0E10"/>
                 </a:solidFill>
-                <a:latin typeface="페이퍼로지 5 Medium"/>
-                <a:ea typeface="페이퍼로지 5 Medium"/>
-                <a:cs typeface="페이퍼로지 5 Medium"/>
+                <a:latin typeface="Pretendard"/>
+                <a:ea typeface="Pretendard"/>
+                <a:cs typeface="Pretendard"/>
               </a:defRPr>
             </a:pPr>
             <a:r>
@@ -7152,9 +7144,9 @@
                 <a:solidFill>
                   <a:srgbClr val="0A0E10"/>
                 </a:solidFill>
-                <a:latin typeface="페이퍼로지 5 Medium"/>
-                <a:ea typeface="페이퍼로지 5 Medium"/>
-                <a:cs typeface="페이퍼로지 5 Medium"/>
+                <a:latin typeface="Pretendard"/>
+                <a:ea typeface="Pretendard"/>
+                <a:cs typeface="Pretendard"/>
               </a:rPr>
               <a:t>GitHub 미연결</a:t>
             </a:r>
@@ -7197,9 +7189,9 @@
                 <a:solidFill>
                   <a:srgbClr val="6C7476"/>
                 </a:solidFill>
-                <a:latin typeface="페이퍼로지 4 Regular"/>
-                <a:ea typeface="페이퍼로지 4 Regular"/>
-                <a:cs typeface="페이퍼로지 4 Regular"/>
+                <a:latin typeface="Pretendard"/>
+                <a:ea typeface="Pretendard"/>
+                <a:cs typeface="Pretendard"/>
               </a:defRPr>
             </a:pPr>
             <a:r>
@@ -7207,9 +7199,9 @@
                 <a:solidFill>
                   <a:srgbClr val="6C7476"/>
                 </a:solidFill>
-                <a:latin typeface="페이퍼로지 4 Regular"/>
-                <a:ea typeface="페이퍼로지 4 Regular"/>
-                <a:cs typeface="페이퍼로지 4 Regular"/>
+                <a:latin typeface="Pretendard"/>
+                <a:ea typeface="Pretendard"/>
+                <a:cs typeface="Pretendard"/>
               </a:rPr>
               <a:t>Secrets · PAT 확인</a:t>
             </a:r>
@@ -7252,9 +7244,9 @@
                 <a:solidFill>
                   <a:srgbClr val="0A0E10"/>
                 </a:solidFill>
-                <a:latin typeface="페이퍼로지 5 Medium"/>
-                <a:ea typeface="페이퍼로지 5 Medium"/>
-                <a:cs typeface="페이퍼로지 5 Medium"/>
+                <a:latin typeface="Pretendard"/>
+                <a:ea typeface="Pretendard"/>
+                <a:cs typeface="Pretendard"/>
               </a:defRPr>
             </a:pPr>
             <a:r>
@@ -7262,11 +7254,11 @@
                 <a:solidFill>
                   <a:srgbClr val="0A0E10"/>
                 </a:solidFill>
-                <a:latin typeface="페이퍼로지 5 Medium"/>
-                <a:ea typeface="페이퍼로지 5 Medium"/>
-                <a:cs typeface="페이퍼로지 5 Medium"/>
-              </a:rPr>
-              <a:t>N&lt;5 비공개</a:t>
+                <a:latin typeface="Pretendard"/>
+                <a:ea typeface="Pretendard"/>
+                <a:cs typeface="Pretendard"/>
+              </a:rPr>
+              <a:t>5명 미만 비공개</a:t>
             </a:r>
           </a:p>
         </p:txBody>
@@ -7307,9 +7299,9 @@
                 <a:solidFill>
                   <a:srgbClr val="6C7476"/>
                 </a:solidFill>
-                <a:latin typeface="페이퍼로지 4 Regular"/>
-                <a:ea typeface="페이퍼로지 4 Regular"/>
-                <a:cs typeface="페이퍼로지 4 Regular"/>
+                <a:latin typeface="Pretendard"/>
+                <a:ea typeface="Pretendard"/>
+                <a:cs typeface="Pretendard"/>
               </a:defRPr>
             </a:pPr>
             <a:r>
@@ -7317,9 +7309,9 @@
                 <a:solidFill>
                   <a:srgbClr val="6C7476"/>
                 </a:solidFill>
-                <a:latin typeface="페이퍼로지 4 Regular"/>
-                <a:ea typeface="페이퍼로지 4 Regular"/>
-                <a:cs typeface="페이퍼로지 4 Regular"/>
+                <a:latin typeface="Pretendard"/>
+                <a:ea typeface="Pretendard"/>
+                <a:cs typeface="Pretendard"/>
               </a:rPr>
               <a:t>표본 보호 정상 동작</a:t>
             </a:r>
@@ -7362,9 +7354,9 @@
                 <a:solidFill>
                   <a:srgbClr val="0A0E10"/>
                 </a:solidFill>
-                <a:latin typeface="페이퍼로지 5 Medium"/>
-                <a:ea typeface="페이퍼로지 5 Medium"/>
-                <a:cs typeface="페이퍼로지 5 Medium"/>
+                <a:latin typeface="Pretendard"/>
+                <a:ea typeface="Pretendard"/>
+                <a:cs typeface="Pretendard"/>
               </a:defRPr>
             </a:pPr>
             <a:r>
@@ -7372,9 +7364,9 @@
                 <a:solidFill>
                   <a:srgbClr val="0A0E10"/>
                 </a:solidFill>
-                <a:latin typeface="페이퍼로지 5 Medium"/>
-                <a:ea typeface="페이퍼로지 5 Medium"/>
-                <a:cs typeface="페이퍼로지 5 Medium"/>
+                <a:latin typeface="Pretendard"/>
+                <a:ea typeface="Pretendard"/>
+                <a:cs typeface="Pretendard"/>
               </a:rPr>
               <a:t>저장·복원 실패</a:t>
             </a:r>
@@ -7417,9 +7409,9 @@
                 <a:solidFill>
                   <a:srgbClr val="6C7476"/>
                 </a:solidFill>
-                <a:latin typeface="페이퍼로지 4 Regular"/>
-                <a:ea typeface="페이퍼로지 4 Regular"/>
-                <a:cs typeface="페이퍼로지 4 Regular"/>
+                <a:latin typeface="Pretendard"/>
+                <a:ea typeface="Pretendard"/>
+                <a:cs typeface="Pretendard"/>
               </a:defRPr>
             </a:pPr>
             <a:r>
@@ -7427,9 +7419,9 @@
                 <a:solidFill>
                   <a:srgbClr val="6C7476"/>
                 </a:solidFill>
-                <a:latin typeface="페이퍼로지 4 Regular"/>
-                <a:ea typeface="페이퍼로지 4 Regular"/>
-                <a:cs typeface="페이퍼로지 4 Regular"/>
+                <a:latin typeface="Pretendard"/>
+                <a:ea typeface="Pretendard"/>
+                <a:cs typeface="Pretendard"/>
               </a:rPr>
               <a:t>동일 코드·ID · JSON 확인</a:t>
             </a:r>
@@ -7472,9 +7464,9 @@
                 <a:solidFill>
                   <a:srgbClr val="0A0E10"/>
                 </a:solidFill>
-                <a:latin typeface="페이퍼로지 5 Medium"/>
-                <a:ea typeface="페이퍼로지 5 Medium"/>
-                <a:cs typeface="페이퍼로지 5 Medium"/>
+                <a:latin typeface="Pretendard"/>
+                <a:ea typeface="Pretendard"/>
+                <a:cs typeface="Pretendard"/>
               </a:defRPr>
             </a:pPr>
             <a:r>
@@ -7482,11 +7474,11 @@
                 <a:solidFill>
                   <a:srgbClr val="0A0E10"/>
                 </a:solidFill>
-                <a:latin typeface="페이퍼로지 5 Medium"/>
-                <a:ea typeface="페이퍼로지 5 Medium"/>
-                <a:cs typeface="페이퍼로지 5 Medium"/>
-              </a:rPr>
-              <a:t>데이터 분기</a:t>
+                <a:latin typeface="Pretendard"/>
+                <a:ea typeface="Pretendard"/>
+                <a:cs typeface="Pretendard"/>
+              </a:rPr>
+              <a:t>demo-data 저장</a:t>
             </a:r>
           </a:p>
         </p:txBody>
@@ -7527,9 +7519,9 @@
                 <a:solidFill>
                   <a:srgbClr val="6C7476"/>
                 </a:solidFill>
-                <a:latin typeface="페이퍼로지 4 Regular"/>
-                <a:ea typeface="페이퍼로지 4 Regular"/>
-                <a:cs typeface="페이퍼로지 4 Regular"/>
+                <a:latin typeface="Pretendard"/>
+                <a:ea typeface="Pretendard"/>
+                <a:cs typeface="Pretendard"/>
               </a:defRPr>
             </a:pPr>
             <a:r>
@@ -7537,11 +7529,11 @@
                 <a:solidFill>
                   <a:srgbClr val="6C7476"/>
                 </a:solidFill>
-                <a:latin typeface="페이퍼로지 4 Regular"/>
-                <a:ea typeface="페이퍼로지 4 Regular"/>
-                <a:cs typeface="페이퍼로지 4 Regular"/>
-              </a:rPr>
-              <a:t>demo-data 전용 확인</a:t>
+                <a:latin typeface="Pretendard"/>
+                <a:ea typeface="Pretendard"/>
+                <a:cs typeface="Pretendard"/>
+              </a:rPr>
+              <a:t>합성 데이터 전용 확인</a:t>
             </a:r>
           </a:p>
         </p:txBody>
@@ -7582,9 +7574,9 @@
                 <a:solidFill>
                   <a:srgbClr val="0A0E10"/>
                 </a:solidFill>
-                <a:latin typeface="페이퍼로지 5 Medium"/>
-                <a:ea typeface="페이퍼로지 5 Medium"/>
-                <a:cs typeface="페이퍼로지 5 Medium"/>
+                <a:latin typeface="Pretendard"/>
+                <a:ea typeface="Pretendard"/>
+                <a:cs typeface="Pretendard"/>
               </a:defRPr>
             </a:pPr>
             <a:r>
@@ -7592,9 +7584,9 @@
                 <a:solidFill>
                   <a:srgbClr val="0A0E10"/>
                 </a:solidFill>
-                <a:latin typeface="페이퍼로지 5 Medium"/>
-                <a:ea typeface="페이퍼로지 5 Medium"/>
-                <a:cs typeface="페이퍼로지 5 Medium"/>
+                <a:latin typeface="Pretendard"/>
+                <a:ea typeface="Pretendard"/>
+                <a:cs typeface="Pretendard"/>
               </a:rPr>
               <a:t>연결 없이 사용</a:t>
             </a:r>
@@ -7637,9 +7629,9 @@
                 <a:solidFill>
                   <a:srgbClr val="6C7476"/>
                 </a:solidFill>
-                <a:latin typeface="페이퍼로지 4 Regular"/>
-                <a:ea typeface="페이퍼로지 4 Regular"/>
-                <a:cs typeface="페이퍼로지 4 Regular"/>
+                <a:latin typeface="Pretendard"/>
+                <a:ea typeface="Pretendard"/>
+                <a:cs typeface="Pretendard"/>
               </a:defRPr>
             </a:pPr>
             <a:r>
@@ -7647,9 +7639,9 @@
                 <a:solidFill>
                   <a:srgbClr val="6C7476"/>
                 </a:solidFill>
-                <a:latin typeface="페이퍼로지 4 Regular"/>
-                <a:ea typeface="페이퍼로지 4 Regular"/>
-                <a:cs typeface="페이퍼로지 4 Regular"/>
+                <a:latin typeface="Pretendard"/>
+                <a:ea typeface="Pretendard"/>
+                <a:cs typeface="Pretendard"/>
               </a:rPr>
               <a:t>세션 · JSON · CSV 사용</a:t>
             </a:r>
@@ -7692,9 +7684,9 @@
                 <a:solidFill>
                   <a:srgbClr val="98A4A6"/>
                 </a:solidFill>
-                <a:latin typeface="페이퍼로지 4 Regular"/>
-                <a:ea typeface="페이퍼로지 4 Regular"/>
-                <a:cs typeface="페이퍼로지 4 Regular"/>
+                <a:latin typeface="Pretendard"/>
+                <a:ea typeface="Pretendard"/>
+                <a:cs typeface="Pretendard"/>
               </a:defRPr>
             </a:pPr>
             <a:r>
@@ -7702,9 +7694,9 @@
                 <a:solidFill>
                   <a:srgbClr val="98A4A6"/>
                 </a:solidFill>
-                <a:latin typeface="페이퍼로지 4 Regular"/>
-                <a:ea typeface="페이퍼로지 4 Regular"/>
-                <a:cs typeface="페이퍼로지 4 Regular"/>
+                <a:latin typeface="Pretendard"/>
+                <a:ea typeface="Pretendard"/>
+                <a:cs typeface="Pretendard"/>
               </a:rPr>
               <a:t>12</a:t>
             </a:r>
@@ -7751,9 +7743,9 @@
                 <a:solidFill>
                   <a:srgbClr val="6C7476"/>
                 </a:solidFill>
-                <a:latin typeface="페이퍼로지 4 Regular"/>
-                <a:ea typeface="페이퍼로지 4 Regular"/>
-                <a:cs typeface="페이퍼로지 4 Regular"/>
+                <a:latin typeface="Pretendard"/>
+                <a:ea typeface="Pretendard"/>
+                <a:cs typeface="Pretendard"/>
               </a:defRPr>
             </a:lvl1pPr>
           </a:lstStyle>
@@ -7764,9 +7756,9 @@
                 <a:solidFill>
                   <a:srgbClr val="6C7476"/>
                 </a:solidFill>
-                <a:latin typeface="페이퍼로지 4 Regular"/>
-                <a:ea typeface="페이퍼로지 4 Regular"/>
-                <a:cs typeface="페이퍼로지 4 Regular"/>
+                <a:latin typeface="Pretendard"/>
+                <a:ea typeface="Pretendard"/>
+                <a:cs typeface="Pretendard"/>
               </a:defRPr>
             </a:pPr>
             <a:r>
@@ -7774,9 +7766,9 @@
                 <a:solidFill>
                   <a:srgbClr val="6C7476"/>
                 </a:solidFill>
-                <a:latin typeface="페이퍼로지 4 Regular"/>
-                <a:ea typeface="페이퍼로지 4 Regular"/>
-                <a:cs typeface="페이퍼로지 4 Regular"/>
+                <a:latin typeface="Pretendard"/>
+                <a:ea typeface="Pretendard"/>
+                <a:cs typeface="Pretendard"/>
               </a:rPr>
               <a:t>QUICK START</a:t>
             </a:r>
@@ -7821,9 +7813,9 @@
                 <a:solidFill>
                   <a:srgbClr val="00B5AC"/>
                 </a:solidFill>
-                <a:latin typeface="페이퍼로지 4 Regular"/>
-                <a:ea typeface="페이퍼로지 4 Regular"/>
-                <a:cs typeface="페이퍼로지 4 Regular"/>
+                <a:latin typeface="Pretendard"/>
+                <a:ea typeface="Pretendard"/>
+                <a:cs typeface="Pretendard"/>
               </a:defRPr>
             </a:pPr>
             <a:r>
@@ -7831,9 +7823,9 @@
                 <a:solidFill>
                   <a:srgbClr val="00B5AC"/>
                 </a:solidFill>
-                <a:latin typeface="페이퍼로지 4 Regular"/>
-                <a:ea typeface="페이퍼로지 4 Regular"/>
-                <a:cs typeface="페이퍼로지 4 Regular"/>
+                <a:latin typeface="Pretendard"/>
+                <a:ea typeface="Pretendard"/>
+                <a:cs typeface="Pretendard"/>
               </a:rPr>
               <a:t>START</a:t>
             </a:r>
@@ -7871,7 +7863,7 @@
           <p:nvPr/>
         </p:nvPicPr>
         <p:blipFill>
-          <a:blip xmlns:r="http://schemas.openxmlformats.org/officeDocument/2006/relationships" xmlns:a="http://schemas.openxmlformats.org/drawingml/2006/main" r:embed="Rb349ef7116df4831"/>
+          <a:blip xmlns:r="http://schemas.openxmlformats.org/officeDocument/2006/relationships" xmlns:a="http://schemas.openxmlformats.org/drawingml/2006/main" r:embed="R69d28b3ab6764164"/>
           <a:srcRect xmlns:a="http://schemas.openxmlformats.org/drawingml/2006/main" l="-2083" t="0" r="-2083" b="0"/>
           <a:stretch xmlns:a="http://schemas.openxmlformats.org/drawingml/2006/main"/>
         </p:blipFill>
@@ -7921,9 +7913,9 @@
                 <a:solidFill>
                   <a:srgbClr val="0A0E10"/>
                 </a:solidFill>
-                <a:latin typeface="페이퍼로지 2 ExtraLight"/>
-                <a:ea typeface="페이퍼로지 2 ExtraLight"/>
-                <a:cs typeface="페이퍼로지 2 ExtraLight"/>
+                <a:latin typeface="Pretendard"/>
+                <a:ea typeface="Pretendard"/>
+                <a:cs typeface="Pretendard"/>
               </a:defRPr>
             </a:pPr>
             <a:r>
@@ -7931,11 +7923,11 @@
                 <a:solidFill>
                   <a:srgbClr val="0A0E10"/>
                 </a:solidFill>
-                <a:latin typeface="페이퍼로지 2 ExtraLight"/>
-                <a:ea typeface="페이퍼로지 2 ExtraLight"/>
-                <a:cs typeface="페이퍼로지 2 ExtraLight"/>
-              </a:rPr>
-              <a:t>TAP은 교육 전후의 변화를</a:t>
+                <a:latin typeface="Pretendard"/>
+                <a:ea typeface="Pretendard"/>
+                <a:cs typeface="Pretendard"/>
+              </a:rPr>
+              <a:t>TAP은 교육 전/후 변화를</a:t>
             </a:r>
           </a:p>
           <a:p xmlns:a="http://schemas.openxmlformats.org/drawingml/2006/main">
@@ -7945,9 +7937,9 @@
                 <a:solidFill>
                   <a:srgbClr val="0A0E10"/>
                 </a:solidFill>
-                <a:latin typeface="페이퍼로지 2 ExtraLight"/>
-                <a:ea typeface="페이퍼로지 2 ExtraLight"/>
-                <a:cs typeface="페이퍼로지 2 ExtraLight"/>
+                <a:latin typeface="Pretendard"/>
+                <a:ea typeface="Pretendard"/>
+                <a:cs typeface="Pretendard"/>
               </a:defRPr>
             </a:pPr>
             <a:r>
@@ -7955,9 +7947,9 @@
                 <a:solidFill>
                   <a:srgbClr val="0A0E10"/>
                 </a:solidFill>
-                <a:latin typeface="페이퍼로지 6 SemiBold"/>
-                <a:ea typeface="페이퍼로지 6 SemiBold"/>
-                <a:cs typeface="페이퍼로지 6 SemiBold"/>
+                <a:latin typeface="Pretendard"/>
+                <a:ea typeface="Pretendard"/>
+                <a:cs typeface="Pretendard"/>
               </a:rPr>
               <a:t>같은 기준으로 확인합니다</a:t>
             </a:r>
@@ -8000,9 +7992,9 @@
                 <a:solidFill>
                   <a:srgbClr val="6C7476"/>
                 </a:solidFill>
-                <a:latin typeface="페이퍼로지 3 Light"/>
-                <a:ea typeface="페이퍼로지 3 Light"/>
-                <a:cs typeface="페이퍼로지 3 Light"/>
+                <a:latin typeface="Pretendard"/>
+                <a:ea typeface="Pretendard"/>
+                <a:cs typeface="Pretendard"/>
               </a:defRPr>
             </a:pPr>
             <a:r>
@@ -8010,11 +8002,11 @@
                 <a:solidFill>
                   <a:srgbClr val="6C7476"/>
                 </a:solidFill>
-                <a:latin typeface="페이퍼로지 3 Light"/>
-                <a:ea typeface="페이퍼로지 3 Light"/>
-                <a:cs typeface="페이퍼로지 3 Light"/>
-              </a:rPr>
-              <a:t>교육 전 출발점을 기록하고, 현업 적용 8~10주 후 같은 행동문항으로</a:t>
+                <a:latin typeface="Pretendard"/>
+                <a:ea typeface="Pretendard"/>
+                <a:cs typeface="Pretendard"/>
+              </a:rPr>
+              <a:t>교육 전 출발점을 기록하고, 교육 중 현업 적용을 거친 뒤 같은 행동문항으로</a:t>
             </a:r>
           </a:p>
           <a:p xmlns:a="http://schemas.openxmlformats.org/drawingml/2006/main">
@@ -8024,9 +8016,9 @@
                 <a:solidFill>
                   <a:srgbClr val="6C7476"/>
                 </a:solidFill>
-                <a:latin typeface="페이퍼로지 3 Light"/>
-                <a:ea typeface="페이퍼로지 3 Light"/>
-                <a:cs typeface="페이퍼로지 3 Light"/>
+                <a:latin typeface="Pretendard"/>
+                <a:ea typeface="Pretendard"/>
+                <a:cs typeface="Pretendard"/>
               </a:defRPr>
             </a:pPr>
             <a:r>
@@ -8034,11 +8026,11 @@
                 <a:solidFill>
                   <a:srgbClr val="6C7476"/>
                 </a:solidFill>
-                <a:latin typeface="페이퍼로지 3 Light"/>
-                <a:ea typeface="페이퍼로지 3 Light"/>
-                <a:cs typeface="페이퍼로지 3 Light"/>
-              </a:rPr>
-              <a:t>다시 측정해 변화와 현업 적용환경을 확인합니다.</a:t>
+                <a:latin typeface="Pretendard"/>
+                <a:ea typeface="Pretendard"/>
+                <a:cs typeface="Pretendard"/>
+              </a:rPr>
+              <a:t>교육 후에 다시 측정해 변화와 현업 적용환경을 확인합니다.</a:t>
             </a:r>
           </a:p>
         </p:txBody>
@@ -8079,9 +8071,9 @@
                 <a:solidFill>
                   <a:srgbClr val="00B5AC"/>
                 </a:solidFill>
-                <a:latin typeface="페이퍼로지 5 Medium"/>
-                <a:ea typeface="페이퍼로지 5 Medium"/>
-                <a:cs typeface="페이퍼로지 5 Medium"/>
+                <a:latin typeface="Pretendard"/>
+                <a:ea typeface="Pretendard"/>
+                <a:cs typeface="Pretendard"/>
               </a:defRPr>
             </a:pPr>
             <a:r>
@@ -8089,9 +8081,9 @@
                 <a:solidFill>
                   <a:srgbClr val="00B5AC"/>
                 </a:solidFill>
-                <a:latin typeface="페이퍼로지 5 Medium"/>
-                <a:ea typeface="페이퍼로지 5 Medium"/>
-                <a:cs typeface="페이퍼로지 5 Medium"/>
+                <a:latin typeface="Pretendard"/>
+                <a:ea typeface="Pretendard"/>
+                <a:cs typeface="Pretendard"/>
               </a:rPr>
               <a:t>01</a:t>
             </a:r>
@@ -8134,9 +8126,9 @@
                 <a:solidFill>
                   <a:srgbClr val="0A0E10"/>
                 </a:solidFill>
-                <a:latin typeface="페이퍼로지 5 Medium"/>
-                <a:ea typeface="페이퍼로지 5 Medium"/>
-                <a:cs typeface="페이퍼로지 5 Medium"/>
+                <a:latin typeface="Pretendard"/>
+                <a:ea typeface="Pretendard"/>
+                <a:cs typeface="Pretendard"/>
               </a:defRPr>
             </a:pPr>
             <a:r>
@@ -8144,11 +8136,11 @@
                 <a:solidFill>
                   <a:srgbClr val="0A0E10"/>
                 </a:solidFill>
-                <a:latin typeface="페이퍼로지 5 Medium"/>
-                <a:ea typeface="페이퍼로지 5 Medium"/>
-                <a:cs typeface="페이퍼로지 5 Medium"/>
-              </a:rPr>
-              <a:t>사전검사</a:t>
+                <a:latin typeface="Pretendard"/>
+                <a:ea typeface="Pretendard"/>
+                <a:cs typeface="Pretendard"/>
+              </a:rPr>
+              <a:t>교육 전 검사</a:t>
             </a:r>
           </a:p>
         </p:txBody>
@@ -8189,9 +8181,9 @@
                 <a:solidFill>
                   <a:srgbClr val="6C7476"/>
                 </a:solidFill>
-                <a:latin typeface="페이퍼로지 4 Regular"/>
-                <a:ea typeface="페이퍼로지 4 Regular"/>
-                <a:cs typeface="페이퍼로지 4 Regular"/>
+                <a:latin typeface="Pretendard"/>
+                <a:ea typeface="Pretendard"/>
+                <a:cs typeface="Pretendard"/>
               </a:defRPr>
             </a:pPr>
             <a:r>
@@ -8199,9 +8191,9 @@
                 <a:solidFill>
                   <a:srgbClr val="6C7476"/>
                 </a:solidFill>
-                <a:latin typeface="페이퍼로지 4 Regular"/>
-                <a:ea typeface="페이퍼로지 4 Regular"/>
-                <a:cs typeface="페이퍼로지 4 Regular"/>
+                <a:latin typeface="Pretendard"/>
+                <a:ea typeface="Pretendard"/>
+                <a:cs typeface="Pretendard"/>
               </a:rPr>
               <a:t>교육 전</a:t>
             </a:r>
@@ -8213,9 +8205,9 @@
                 <a:solidFill>
                   <a:srgbClr val="6C7476"/>
                 </a:solidFill>
-                <a:latin typeface="페이퍼로지 4 Regular"/>
-                <a:ea typeface="페이퍼로지 4 Regular"/>
-                <a:cs typeface="페이퍼로지 4 Regular"/>
+                <a:latin typeface="Pretendard"/>
+                <a:ea typeface="Pretendard"/>
+                <a:cs typeface="Pretendard"/>
               </a:defRPr>
             </a:pPr>
             <a:r>
@@ -8223,9 +8215,9 @@
                 <a:solidFill>
                   <a:srgbClr val="6C7476"/>
                 </a:solidFill>
-                <a:latin typeface="페이퍼로지 4 Regular"/>
-                <a:ea typeface="페이퍼로지 4 Regular"/>
-                <a:cs typeface="페이퍼로지 4 Regular"/>
+                <a:latin typeface="Pretendard"/>
+                <a:ea typeface="Pretendard"/>
+                <a:cs typeface="Pretendard"/>
               </a:rPr>
               <a:t>출발점 기록</a:t>
             </a:r>
@@ -8268,9 +8260,9 @@
                 <a:solidFill>
                   <a:srgbClr val="00B5AC"/>
                 </a:solidFill>
-                <a:latin typeface="페이퍼로지 5 Medium"/>
-                <a:ea typeface="페이퍼로지 5 Medium"/>
-                <a:cs typeface="페이퍼로지 5 Medium"/>
+                <a:latin typeface="Pretendard"/>
+                <a:ea typeface="Pretendard"/>
+                <a:cs typeface="Pretendard"/>
               </a:defRPr>
             </a:pPr>
             <a:r>
@@ -8278,9 +8270,9 @@
                 <a:solidFill>
                   <a:srgbClr val="00B5AC"/>
                 </a:solidFill>
-                <a:latin typeface="페이퍼로지 5 Medium"/>
-                <a:ea typeface="페이퍼로지 5 Medium"/>
-                <a:cs typeface="페이퍼로지 5 Medium"/>
+                <a:latin typeface="Pretendard"/>
+                <a:ea typeface="Pretendard"/>
+                <a:cs typeface="Pretendard"/>
               </a:rPr>
               <a:t>02</a:t>
             </a:r>
@@ -8323,9 +8315,9 @@
                 <a:solidFill>
                   <a:srgbClr val="0A0E10"/>
                 </a:solidFill>
-                <a:latin typeface="페이퍼로지 5 Medium"/>
-                <a:ea typeface="페이퍼로지 5 Medium"/>
-                <a:cs typeface="페이퍼로지 5 Medium"/>
+                <a:latin typeface="Pretendard"/>
+                <a:ea typeface="Pretendard"/>
+                <a:cs typeface="Pretendard"/>
               </a:defRPr>
             </a:pPr>
             <a:r>
@@ -8333,11 +8325,11 @@
                 <a:solidFill>
                   <a:srgbClr val="0A0E10"/>
                 </a:solidFill>
-                <a:latin typeface="페이퍼로지 5 Medium"/>
-                <a:ea typeface="페이퍼로지 5 Medium"/>
-                <a:cs typeface="페이퍼로지 5 Medium"/>
-              </a:rPr>
-              <a:t>사후검사</a:t>
+                <a:latin typeface="Pretendard"/>
+                <a:ea typeface="Pretendard"/>
+                <a:cs typeface="Pretendard"/>
+              </a:rPr>
+              <a:t>교육 후 검사</a:t>
             </a:r>
           </a:p>
         </p:txBody>
@@ -8378,9 +8370,9 @@
                 <a:solidFill>
                   <a:srgbClr val="6C7476"/>
                 </a:solidFill>
-                <a:latin typeface="페이퍼로지 4 Regular"/>
-                <a:ea typeface="페이퍼로지 4 Regular"/>
-                <a:cs typeface="페이퍼로지 4 Regular"/>
+                <a:latin typeface="Pretendard"/>
+                <a:ea typeface="Pretendard"/>
+                <a:cs typeface="Pretendard"/>
               </a:defRPr>
             </a:pPr>
             <a:r>
@@ -8388,9 +8380,9 @@
                 <a:solidFill>
                   <a:srgbClr val="6C7476"/>
                 </a:solidFill>
-                <a:latin typeface="페이퍼로지 4 Regular"/>
-                <a:ea typeface="페이퍼로지 4 Regular"/>
-                <a:cs typeface="페이퍼로지 4 Regular"/>
+                <a:latin typeface="Pretendard"/>
+                <a:ea typeface="Pretendard"/>
+                <a:cs typeface="Pretendard"/>
               </a:rPr>
               <a:t>같은 문항으로</a:t>
             </a:r>
@@ -8402,9 +8394,9 @@
                 <a:solidFill>
                   <a:srgbClr val="6C7476"/>
                 </a:solidFill>
-                <a:latin typeface="페이퍼로지 4 Regular"/>
-                <a:ea typeface="페이퍼로지 4 Regular"/>
-                <a:cs typeface="페이퍼로지 4 Regular"/>
+                <a:latin typeface="Pretendard"/>
+                <a:ea typeface="Pretendard"/>
+                <a:cs typeface="Pretendard"/>
               </a:defRPr>
             </a:pPr>
             <a:r>
@@ -8412,9 +8404,9 @@
                 <a:solidFill>
                   <a:srgbClr val="6C7476"/>
                 </a:solidFill>
-                <a:latin typeface="페이퍼로지 4 Regular"/>
-                <a:ea typeface="페이퍼로지 4 Regular"/>
-                <a:cs typeface="페이퍼로지 4 Regular"/>
+                <a:latin typeface="Pretendard"/>
+                <a:ea typeface="Pretendard"/>
+                <a:cs typeface="Pretendard"/>
               </a:rPr>
               <a:t>현업 행동 재측정</a:t>
             </a:r>
@@ -8457,9 +8449,9 @@
                 <a:solidFill>
                   <a:srgbClr val="00B5AC"/>
                 </a:solidFill>
-                <a:latin typeface="페이퍼로지 5 Medium"/>
-                <a:ea typeface="페이퍼로지 5 Medium"/>
-                <a:cs typeface="페이퍼로지 5 Medium"/>
+                <a:latin typeface="Pretendard"/>
+                <a:ea typeface="Pretendard"/>
+                <a:cs typeface="Pretendard"/>
               </a:defRPr>
             </a:pPr>
             <a:r>
@@ -8467,9 +8459,9 @@
                 <a:solidFill>
                   <a:srgbClr val="00B5AC"/>
                 </a:solidFill>
-                <a:latin typeface="페이퍼로지 5 Medium"/>
-                <a:ea typeface="페이퍼로지 5 Medium"/>
-                <a:cs typeface="페이퍼로지 5 Medium"/>
+                <a:latin typeface="Pretendard"/>
+                <a:ea typeface="Pretendard"/>
+                <a:cs typeface="Pretendard"/>
               </a:rPr>
               <a:t>03</a:t>
             </a:r>
@@ -8512,9 +8504,9 @@
                 <a:solidFill>
                   <a:srgbClr val="0A0E10"/>
                 </a:solidFill>
-                <a:latin typeface="페이퍼로지 5 Medium"/>
-                <a:ea typeface="페이퍼로지 5 Medium"/>
-                <a:cs typeface="페이퍼로지 5 Medium"/>
+                <a:latin typeface="Pretendard"/>
+                <a:ea typeface="Pretendard"/>
+                <a:cs typeface="Pretendard"/>
               </a:defRPr>
             </a:pPr>
             <a:r>
@@ -8522,9 +8514,9 @@
                 <a:solidFill>
                   <a:srgbClr val="0A0E10"/>
                 </a:solidFill>
-                <a:latin typeface="페이퍼로지 5 Medium"/>
-                <a:ea typeface="페이퍼로지 5 Medium"/>
-                <a:cs typeface="페이퍼로지 5 Medium"/>
+                <a:latin typeface="Pretendard"/>
+                <a:ea typeface="Pretendard"/>
+                <a:cs typeface="Pretendard"/>
               </a:rPr>
               <a:t>다음 행동</a:t>
             </a:r>
@@ -8567,9 +8559,9 @@
                 <a:solidFill>
                   <a:srgbClr val="6C7476"/>
                 </a:solidFill>
-                <a:latin typeface="페이퍼로지 4 Regular"/>
-                <a:ea typeface="페이퍼로지 4 Regular"/>
-                <a:cs typeface="페이퍼로지 4 Regular"/>
+                <a:latin typeface="Pretendard"/>
+                <a:ea typeface="Pretendard"/>
+                <a:cs typeface="Pretendard"/>
               </a:defRPr>
             </a:pPr>
             <a:r>
@@ -8577,11 +8569,11 @@
                 <a:solidFill>
                   <a:srgbClr val="6C7476"/>
                 </a:solidFill>
-                <a:latin typeface="페이퍼로지 4 Regular"/>
-                <a:ea typeface="페이퍼로지 4 Regular"/>
-                <a:cs typeface="페이퍼로지 4 Regular"/>
-              </a:rPr>
-              <a:t>짝지은 변화와 전이</a:t>
+                <a:latin typeface="Pretendard"/>
+                <a:ea typeface="Pretendard"/>
+                <a:cs typeface="Pretendard"/>
+              </a:rPr>
+              <a:t>동일 참여자 변화와</a:t>
             </a:r>
           </a:p>
           <a:p xmlns:a="http://schemas.openxmlformats.org/drawingml/2006/main">
@@ -8591,9 +8583,9 @@
                 <a:solidFill>
                   <a:srgbClr val="6C7476"/>
                 </a:solidFill>
-                <a:latin typeface="페이퍼로지 4 Regular"/>
-                <a:ea typeface="페이퍼로지 4 Regular"/>
-                <a:cs typeface="페이퍼로지 4 Regular"/>
+                <a:latin typeface="Pretendard"/>
+                <a:ea typeface="Pretendard"/>
+                <a:cs typeface="Pretendard"/>
               </a:defRPr>
             </a:pPr>
             <a:r>
@@ -8601,11 +8593,11 @@
                 <a:solidFill>
                   <a:srgbClr val="6C7476"/>
                 </a:solidFill>
-                <a:latin typeface="페이퍼로지 4 Regular"/>
-                <a:ea typeface="페이퍼로지 4 Regular"/>
-                <a:cs typeface="페이퍼로지 4 Regular"/>
-              </a:rPr>
-              <a:t>조건 확인</a:t>
+                <a:latin typeface="Pretendard"/>
+                <a:ea typeface="Pretendard"/>
+                <a:cs typeface="Pretendard"/>
+              </a:rPr>
+              <a:t>전이 조건 확인</a:t>
             </a:r>
           </a:p>
         </p:txBody>
@@ -8646,9 +8638,9 @@
                 <a:solidFill>
                   <a:srgbClr val="98A4A6"/>
                 </a:solidFill>
-                <a:latin typeface="페이퍼로지 4 Regular"/>
-                <a:ea typeface="페이퍼로지 4 Regular"/>
-                <a:cs typeface="페이퍼로지 4 Regular"/>
+                <a:latin typeface="Pretendard"/>
+                <a:ea typeface="Pretendard"/>
+                <a:cs typeface="Pretendard"/>
               </a:defRPr>
             </a:pPr>
             <a:r>
@@ -8656,9 +8648,9 @@
                 <a:solidFill>
                   <a:srgbClr val="98A4A6"/>
                 </a:solidFill>
-                <a:latin typeface="페이퍼로지 4 Regular"/>
-                <a:ea typeface="페이퍼로지 4 Regular"/>
-                <a:cs typeface="페이퍼로지 4 Regular"/>
+                <a:latin typeface="Pretendard"/>
+                <a:ea typeface="Pretendard"/>
+                <a:cs typeface="Pretendard"/>
               </a:rPr>
               <a:t>02</a:t>
             </a:r>
@@ -8753,9 +8745,9 @@
                 <a:solidFill>
                   <a:srgbClr val="00B5AC"/>
                 </a:solidFill>
-                <a:latin typeface="페이퍼로지 4 Regular"/>
-                <a:ea typeface="페이퍼로지 4 Regular"/>
-                <a:cs typeface="페이퍼로지 4 Regular"/>
+                <a:latin typeface="Pretendard"/>
+                <a:ea typeface="Pretendard"/>
+                <a:cs typeface="Pretendard"/>
               </a:defRPr>
             </a:pPr>
             <a:r>
@@ -8763,9 +8755,9 @@
                 <a:solidFill>
                   <a:srgbClr val="00B5AC"/>
                 </a:solidFill>
-                <a:latin typeface="페이퍼로지 4 Regular"/>
-                <a:ea typeface="페이퍼로지 4 Regular"/>
-                <a:cs typeface="페이퍼로지 4 Regular"/>
+                <a:latin typeface="Pretendard"/>
+                <a:ea typeface="Pretendard"/>
+                <a:cs typeface="Pretendard"/>
               </a:rPr>
               <a:t>OVERVIEW</a:t>
             </a:r>
@@ -8812,9 +8804,9 @@
                 <a:solidFill>
                   <a:srgbClr val="6C7476"/>
                 </a:solidFill>
-                <a:latin typeface="페이퍼로지 4 Regular"/>
-                <a:ea typeface="페이퍼로지 4 Regular"/>
-                <a:cs typeface="페이퍼로지 4 Regular"/>
+                <a:latin typeface="Pretendard"/>
+                <a:ea typeface="Pretendard"/>
+                <a:cs typeface="Pretendard"/>
               </a:defRPr>
             </a:lvl1pPr>
           </a:lstStyle>
@@ -8825,9 +8817,9 @@
                 <a:solidFill>
                   <a:srgbClr val="6C7476"/>
                 </a:solidFill>
-                <a:latin typeface="페이퍼로지 4 Regular"/>
-                <a:ea typeface="페이퍼로지 4 Regular"/>
-                <a:cs typeface="페이퍼로지 4 Regular"/>
+                <a:latin typeface="Pretendard"/>
+                <a:ea typeface="Pretendard"/>
+                <a:cs typeface="Pretendard"/>
               </a:defRPr>
             </a:pPr>
             <a:r>
@@ -8835,9 +8827,9 @@
                 <a:solidFill>
                   <a:srgbClr val="6C7476"/>
                 </a:solidFill>
-                <a:latin typeface="페이퍼로지 4 Regular"/>
-                <a:ea typeface="페이퍼로지 4 Regular"/>
-                <a:cs typeface="페이퍼로지 4 Regular"/>
+                <a:latin typeface="Pretendard"/>
+                <a:ea typeface="Pretendard"/>
+                <a:cs typeface="Pretendard"/>
               </a:rPr>
               <a:t>SERVICE SUMMARY</a:t>
             </a:r>
@@ -8967,7 +8959,7 @@
           <p:nvPr/>
         </p:nvPicPr>
         <p:blipFill>
-          <a:blip xmlns:r="http://schemas.openxmlformats.org/officeDocument/2006/relationships" xmlns:a="http://schemas.openxmlformats.org/drawingml/2006/main" r:embed="Rf6408ae0ee8f4fe7"/>
+          <a:blip xmlns:r="http://schemas.openxmlformats.org/officeDocument/2006/relationships" xmlns:a="http://schemas.openxmlformats.org/drawingml/2006/main" r:embed="Rf8f5b792623746dc"/>
           <a:srcRect xmlns:a="http://schemas.openxmlformats.org/drawingml/2006/main" l="-2083" t="0" r="-2083" b="0"/>
           <a:stretch xmlns:a="http://schemas.openxmlformats.org/drawingml/2006/main"/>
         </p:blipFill>
@@ -9021,9 +9013,9 @@
                 <a:solidFill>
                   <a:srgbClr val="6C7476"/>
                 </a:solidFill>
-                <a:latin typeface="페이퍼로지 4 Regular"/>
-                <a:ea typeface="페이퍼로지 4 Regular"/>
-                <a:cs typeface="페이퍼로지 4 Regular"/>
+                <a:latin typeface="Pretendard"/>
+                <a:ea typeface="Pretendard"/>
+                <a:cs typeface="Pretendard"/>
               </a:defRPr>
             </a:lvl1pPr>
           </a:lstStyle>
@@ -9034,9 +9026,9 @@
                 <a:solidFill>
                   <a:srgbClr val="6C7476"/>
                 </a:solidFill>
-                <a:latin typeface="페이퍼로지 4 Regular"/>
-                <a:ea typeface="페이퍼로지 4 Regular"/>
-                <a:cs typeface="페이퍼로지 4 Regular"/>
+                <a:latin typeface="Pretendard"/>
+                <a:ea typeface="Pretendard"/>
+                <a:cs typeface="Pretendard"/>
               </a:defRPr>
             </a:pPr>
             <a:r>
@@ -9044,9 +9036,9 @@
                 <a:solidFill>
                   <a:srgbClr val="6C7476"/>
                 </a:solidFill>
-                <a:latin typeface="페이퍼로지 4 Regular"/>
-                <a:ea typeface="페이퍼로지 4 Regular"/>
-                <a:cs typeface="페이퍼로지 4 Regular"/>
+                <a:latin typeface="Pretendard"/>
+                <a:ea typeface="Pretendard"/>
+                <a:cs typeface="Pretendard"/>
               </a:rPr>
               <a:t>ROLE &amp; ACCESS</a:t>
             </a:r>
@@ -9089,9 +9081,9 @@
                 <a:solidFill>
                   <a:srgbClr val="0A0E10"/>
                 </a:solidFill>
-                <a:latin typeface="페이퍼로지 2 ExtraLight"/>
-                <a:ea typeface="페이퍼로지 2 ExtraLight"/>
-                <a:cs typeface="페이퍼로지 2 ExtraLight"/>
+                <a:latin typeface="Pretendard"/>
+                <a:ea typeface="Pretendard"/>
+                <a:cs typeface="Pretendard"/>
               </a:defRPr>
             </a:pPr>
             <a:r>
@@ -9099,9 +9091,9 @@
                 <a:solidFill>
                   <a:srgbClr val="0A0E10"/>
                 </a:solidFill>
-                <a:latin typeface="페이퍼로지 2 ExtraLight"/>
-                <a:ea typeface="페이퍼로지 2 ExtraLight"/>
-                <a:cs typeface="페이퍼로지 2 ExtraLight"/>
+                <a:latin typeface="Pretendard"/>
+                <a:ea typeface="Pretendard"/>
+                <a:cs typeface="Pretendard"/>
               </a:rPr>
               <a:t>역할마다 필요한 화면과</a:t>
             </a:r>
@@ -9121,9 +9113,9 @@
                 <a:solidFill>
                   <a:srgbClr val="0A0E10"/>
                 </a:solidFill>
-                <a:latin typeface="페이퍼로지 2 ExtraLight"/>
-                <a:ea typeface="페이퍼로지 2 ExtraLight"/>
-                <a:cs typeface="페이퍼로지 2 ExtraLight"/>
+                <a:latin typeface="Pretendard"/>
+                <a:ea typeface="Pretendard"/>
+                <a:cs typeface="Pretendard"/>
               </a:defRPr>
             </a:pPr>
             <a:r>
@@ -9131,9 +9123,9 @@
                 <a:solidFill>
                   <a:srgbClr val="0A0E10"/>
                 </a:solidFill>
-                <a:latin typeface="페이퍼로지 6 SemiBold"/>
-                <a:ea typeface="페이퍼로지 6 SemiBold"/>
-                <a:cs typeface="페이퍼로지 6 SemiBold"/>
+                <a:latin typeface="Pretendard"/>
+                <a:ea typeface="Pretendard"/>
+                <a:cs typeface="Pretendard"/>
               </a:rPr>
               <a:t>기본 열람범위가 다릅니다</a:t>
             </a:r>
@@ -9184,9 +9176,9 @@
                 <a:solidFill>
                   <a:srgbClr val="6C7476"/>
                 </a:solidFill>
-                <a:latin typeface="페이퍼로지 3 Light"/>
-                <a:ea typeface="페이퍼로지 3 Light"/>
-                <a:cs typeface="페이퍼로지 3 Light"/>
+                <a:latin typeface="Pretendard"/>
+                <a:ea typeface="Pretendard"/>
+                <a:cs typeface="Pretendard"/>
               </a:defRPr>
             </a:pPr>
             <a:r>
@@ -9194,9 +9186,9 @@
                 <a:solidFill>
                   <a:srgbClr val="6C7476"/>
                 </a:solidFill>
-                <a:latin typeface="페이퍼로지 3 Light"/>
-                <a:ea typeface="페이퍼로지 3 Light"/>
-                <a:cs typeface="페이퍼로지 3 Light"/>
+                <a:latin typeface="Pretendard"/>
+                <a:ea typeface="Pretendard"/>
+                <a:cs typeface="Pretendard"/>
               </a:rPr>
               <a:t>역할 전환은 데모 화면 안내용이며 실제 운영 권한 인증을 대신하지 않습니다.</a:t>
             </a:r>
@@ -9239,9 +9231,9 @@
                 <a:solidFill>
                   <a:srgbClr val="00B5AC"/>
                 </a:solidFill>
-                <a:latin typeface="페이퍼로지 5 Medium"/>
-                <a:ea typeface="페이퍼로지 5 Medium"/>
-                <a:cs typeface="페이퍼로지 5 Medium"/>
+                <a:latin typeface="Pretendard"/>
+                <a:ea typeface="Pretendard"/>
+                <a:cs typeface="Pretendard"/>
               </a:defRPr>
             </a:pPr>
             <a:r>
@@ -9249,9 +9241,9 @@
                 <a:solidFill>
                   <a:srgbClr val="00B5AC"/>
                 </a:solidFill>
-                <a:latin typeface="페이퍼로지 5 Medium"/>
-                <a:ea typeface="페이퍼로지 5 Medium"/>
-                <a:cs typeface="페이퍼로지 5 Medium"/>
+                <a:latin typeface="Pretendard"/>
+                <a:ea typeface="Pretendard"/>
+                <a:cs typeface="Pretendard"/>
               </a:rPr>
               <a:t>01</a:t>
             </a:r>
@@ -9294,9 +9286,9 @@
                 <a:solidFill>
                   <a:srgbClr val="0A0E10"/>
                 </a:solidFill>
-                <a:latin typeface="페이퍼로지 5 Medium"/>
-                <a:ea typeface="페이퍼로지 5 Medium"/>
-                <a:cs typeface="페이퍼로지 5 Medium"/>
+                <a:latin typeface="Pretendard"/>
+                <a:ea typeface="Pretendard"/>
+                <a:cs typeface="Pretendard"/>
               </a:defRPr>
             </a:pPr>
             <a:r>
@@ -9304,9 +9296,9 @@
                 <a:solidFill>
                   <a:srgbClr val="0A0E10"/>
                 </a:solidFill>
-                <a:latin typeface="페이퍼로지 5 Medium"/>
-                <a:ea typeface="페이퍼로지 5 Medium"/>
-                <a:cs typeface="페이퍼로지 5 Medium"/>
+                <a:latin typeface="Pretendard"/>
+                <a:ea typeface="Pretendard"/>
+                <a:cs typeface="Pretendard"/>
               </a:rPr>
               <a:t>교육담당자</a:t>
             </a:r>
@@ -9349,9 +9341,9 @@
                 <a:solidFill>
                   <a:srgbClr val="6C7476"/>
                 </a:solidFill>
-                <a:latin typeface="페이퍼로지 4 Regular"/>
-                <a:ea typeface="페이퍼로지 4 Regular"/>
-                <a:cs typeface="페이퍼로지 4 Regular"/>
+                <a:latin typeface="Pretendard"/>
+                <a:ea typeface="Pretendard"/>
+                <a:cs typeface="Pretendard"/>
               </a:defRPr>
             </a:pPr>
             <a:r>
@@ -9359,9 +9351,9 @@
                 <a:solidFill>
                   <a:srgbClr val="6C7476"/>
                 </a:solidFill>
-                <a:latin typeface="페이퍼로지 4 Regular"/>
-                <a:ea typeface="페이퍼로지 4 Regular"/>
-                <a:cs typeface="페이퍼로지 4 Regular"/>
+                <a:latin typeface="Pretendard"/>
+                <a:ea typeface="Pretendard"/>
+                <a:cs typeface="Pretendard"/>
               </a:rPr>
               <a:t>교육 일정 · 조직 변화</a:t>
             </a:r>
@@ -9404,9 +9396,9 @@
                 <a:solidFill>
                   <a:srgbClr val="00B5AC"/>
                 </a:solidFill>
-                <a:latin typeface="페이퍼로지 5 Medium"/>
-                <a:ea typeface="페이퍼로지 5 Medium"/>
-                <a:cs typeface="페이퍼로지 5 Medium"/>
+                <a:latin typeface="Pretendard"/>
+                <a:ea typeface="Pretendard"/>
+                <a:cs typeface="Pretendard"/>
               </a:defRPr>
             </a:pPr>
             <a:r>
@@ -9414,9 +9406,9 @@
                 <a:solidFill>
                   <a:srgbClr val="00B5AC"/>
                 </a:solidFill>
-                <a:latin typeface="페이퍼로지 5 Medium"/>
-                <a:ea typeface="페이퍼로지 5 Medium"/>
-                <a:cs typeface="페이퍼로지 5 Medium"/>
+                <a:latin typeface="Pretendard"/>
+                <a:ea typeface="Pretendard"/>
+                <a:cs typeface="Pretendard"/>
               </a:rPr>
               <a:t>02</a:t>
             </a:r>
@@ -9459,9 +9451,9 @@
                 <a:solidFill>
                   <a:srgbClr val="0A0E10"/>
                 </a:solidFill>
-                <a:latin typeface="페이퍼로지 5 Medium"/>
-                <a:ea typeface="페이퍼로지 5 Medium"/>
-                <a:cs typeface="페이퍼로지 5 Medium"/>
+                <a:latin typeface="Pretendard"/>
+                <a:ea typeface="Pretendard"/>
+                <a:cs typeface="Pretendard"/>
               </a:defRPr>
             </a:pPr>
             <a:r>
@@ -9469,9 +9461,9 @@
                 <a:solidFill>
                   <a:srgbClr val="0A0E10"/>
                 </a:solidFill>
-                <a:latin typeface="페이퍼로지 5 Medium"/>
-                <a:ea typeface="페이퍼로지 5 Medium"/>
-                <a:cs typeface="페이퍼로지 5 Medium"/>
+                <a:latin typeface="Pretendard"/>
+                <a:ea typeface="Pretendard"/>
+                <a:cs typeface="Pretendard"/>
               </a:rPr>
               <a:t>참여자</a:t>
             </a:r>
@@ -9514,9 +9506,9 @@
                 <a:solidFill>
                   <a:srgbClr val="6C7476"/>
                 </a:solidFill>
-                <a:latin typeface="페이퍼로지 4 Regular"/>
-                <a:ea typeface="페이퍼로지 4 Regular"/>
-                <a:cs typeface="페이퍼로지 4 Regular"/>
+                <a:latin typeface="Pretendard"/>
+                <a:ea typeface="Pretendard"/>
+                <a:cs typeface="Pretendard"/>
               </a:defRPr>
             </a:pPr>
             <a:r>
@@ -9524,11 +9516,11 @@
                 <a:solidFill>
                   <a:srgbClr val="6C7476"/>
                 </a:solidFill>
-                <a:latin typeface="페이퍼로지 4 Regular"/>
-                <a:ea typeface="페이퍼로지 4 Regular"/>
-                <a:cs typeface="페이퍼로지 4 Regular"/>
-              </a:rPr>
-              <a:t>사전·사후 · 내 변화</a:t>
+                <a:latin typeface="Pretendard"/>
+                <a:ea typeface="Pretendard"/>
+                <a:cs typeface="Pretendard"/>
+              </a:rPr>
+              <a:t>교육 전/후 · 내 변화</a:t>
             </a:r>
           </a:p>
         </p:txBody>
@@ -9569,9 +9561,9 @@
                 <a:solidFill>
                   <a:srgbClr val="00B5AC"/>
                 </a:solidFill>
-                <a:latin typeface="페이퍼로지 5 Medium"/>
-                <a:ea typeface="페이퍼로지 5 Medium"/>
-                <a:cs typeface="페이퍼로지 5 Medium"/>
+                <a:latin typeface="Pretendard"/>
+                <a:ea typeface="Pretendard"/>
+                <a:cs typeface="Pretendard"/>
               </a:defRPr>
             </a:pPr>
             <a:r>
@@ -9579,9 +9571,9 @@
                 <a:solidFill>
                   <a:srgbClr val="00B5AC"/>
                 </a:solidFill>
-                <a:latin typeface="페이퍼로지 5 Medium"/>
-                <a:ea typeface="페이퍼로지 5 Medium"/>
-                <a:cs typeface="페이퍼로지 5 Medium"/>
+                <a:latin typeface="Pretendard"/>
+                <a:ea typeface="Pretendard"/>
+                <a:cs typeface="Pretendard"/>
               </a:rPr>
               <a:t>03</a:t>
             </a:r>
@@ -9624,9 +9616,9 @@
                 <a:solidFill>
                   <a:srgbClr val="0A0E10"/>
                 </a:solidFill>
-                <a:latin typeface="페이퍼로지 5 Medium"/>
-                <a:ea typeface="페이퍼로지 5 Medium"/>
-                <a:cs typeface="페이퍼로지 5 Medium"/>
+                <a:latin typeface="Pretendard"/>
+                <a:ea typeface="Pretendard"/>
+                <a:cs typeface="Pretendard"/>
               </a:defRPr>
             </a:pPr>
             <a:r>
@@ -9634,9 +9626,9 @@
                 <a:solidFill>
                   <a:srgbClr val="0A0E10"/>
                 </a:solidFill>
-                <a:latin typeface="페이퍼로지 5 Medium"/>
-                <a:ea typeface="페이퍼로지 5 Medium"/>
-                <a:cs typeface="페이퍼로지 5 Medium"/>
+                <a:latin typeface="Pretendard"/>
+                <a:ea typeface="Pretendard"/>
+                <a:cs typeface="Pretendard"/>
               </a:rPr>
               <a:t>KMA 관리자</a:t>
             </a:r>
@@ -9679,9 +9671,9 @@
                 <a:solidFill>
                   <a:srgbClr val="6C7476"/>
                 </a:solidFill>
-                <a:latin typeface="페이퍼로지 4 Regular"/>
-                <a:ea typeface="페이퍼로지 4 Regular"/>
-                <a:cs typeface="페이퍼로지 4 Regular"/>
+                <a:latin typeface="Pretendard"/>
+                <a:ea typeface="Pretendard"/>
+                <a:cs typeface="Pretendard"/>
               </a:defRPr>
             </a:pPr>
             <a:r>
@@ -9689,9 +9681,9 @@
                 <a:solidFill>
                   <a:srgbClr val="6C7476"/>
                 </a:solidFill>
-                <a:latin typeface="페이퍼로지 4 Regular"/>
-                <a:ea typeface="페이퍼로지 4 Regular"/>
-                <a:cs typeface="페이퍼로지 4 Regular"/>
+                <a:latin typeface="Pretendard"/>
+                <a:ea typeface="Pretendard"/>
+                <a:cs typeface="Pretendard"/>
               </a:rPr>
               <a:t>운영현황 · 문항검수</a:t>
             </a:r>
@@ -9734,9 +9726,9 @@
                 <a:solidFill>
                   <a:srgbClr val="00B5AC"/>
                 </a:solidFill>
-                <a:latin typeface="페이퍼로지 5 Medium"/>
-                <a:ea typeface="페이퍼로지 5 Medium"/>
-                <a:cs typeface="페이퍼로지 5 Medium"/>
+                <a:latin typeface="Pretendard"/>
+                <a:ea typeface="Pretendard"/>
+                <a:cs typeface="Pretendard"/>
               </a:defRPr>
             </a:pPr>
             <a:r>
@@ -9744,9 +9736,9 @@
                 <a:solidFill>
                   <a:srgbClr val="00B5AC"/>
                 </a:solidFill>
-                <a:latin typeface="페이퍼로지 5 Medium"/>
-                <a:ea typeface="페이퍼로지 5 Medium"/>
-                <a:cs typeface="페이퍼로지 5 Medium"/>
+                <a:latin typeface="Pretendard"/>
+                <a:ea typeface="Pretendard"/>
+                <a:cs typeface="Pretendard"/>
               </a:rPr>
               <a:t>04</a:t>
             </a:r>
@@ -9789,9 +9781,9 @@
                 <a:solidFill>
                   <a:srgbClr val="0A0E10"/>
                 </a:solidFill>
-                <a:latin typeface="페이퍼로지 5 Medium"/>
-                <a:ea typeface="페이퍼로지 5 Medium"/>
-                <a:cs typeface="페이퍼로지 5 Medium"/>
+                <a:latin typeface="Pretendard"/>
+                <a:ea typeface="Pretendard"/>
+                <a:cs typeface="Pretendard"/>
               </a:defRPr>
             </a:pPr>
             <a:r>
@@ -9799,9 +9791,9 @@
                 <a:solidFill>
                   <a:srgbClr val="0A0E10"/>
                 </a:solidFill>
-                <a:latin typeface="페이퍼로지 5 Medium"/>
-                <a:ea typeface="페이퍼로지 5 Medium"/>
-                <a:cs typeface="페이퍼로지 5 Medium"/>
+                <a:latin typeface="Pretendard"/>
+                <a:ea typeface="Pretendard"/>
+                <a:cs typeface="Pretendard"/>
               </a:rPr>
               <a:t>공통 원칙</a:t>
             </a:r>
@@ -9844,9 +9836,9 @@
                 <a:solidFill>
                   <a:srgbClr val="6C7476"/>
                 </a:solidFill>
-                <a:latin typeface="페이퍼로지 4 Regular"/>
-                <a:ea typeface="페이퍼로지 4 Regular"/>
-                <a:cs typeface="페이퍼로지 4 Regular"/>
+                <a:latin typeface="Pretendard"/>
+                <a:ea typeface="Pretendard"/>
+                <a:cs typeface="Pretendard"/>
               </a:defRPr>
             </a:pPr>
             <a:r>
@@ -9854,9 +9846,9 @@
                 <a:solidFill>
                   <a:srgbClr val="6C7476"/>
                 </a:solidFill>
-                <a:latin typeface="페이퍼로지 4 Regular"/>
-                <a:ea typeface="페이퍼로지 4 Regular"/>
-                <a:cs typeface="페이퍼로지 4 Regular"/>
+                <a:latin typeface="Pretendard"/>
+                <a:ea typeface="Pretendard"/>
+                <a:cs typeface="Pretendard"/>
               </a:rPr>
               <a:t>개인정보 최소 공개</a:t>
             </a:r>
@@ -9899,9 +9891,9 @@
                 <a:solidFill>
                   <a:srgbClr val="98A4A6"/>
                 </a:solidFill>
-                <a:latin typeface="페이퍼로지 4 Regular"/>
-                <a:ea typeface="페이퍼로지 4 Regular"/>
-                <a:cs typeface="페이퍼로지 4 Regular"/>
+                <a:latin typeface="Pretendard"/>
+                <a:ea typeface="Pretendard"/>
+                <a:cs typeface="Pretendard"/>
               </a:defRPr>
             </a:pPr>
             <a:r>
@@ -9909,9 +9901,9 @@
                 <a:solidFill>
                   <a:srgbClr val="98A4A6"/>
                 </a:solidFill>
-                <a:latin typeface="페이퍼로지 4 Regular"/>
-                <a:ea typeface="페이퍼로지 4 Regular"/>
-                <a:cs typeface="페이퍼로지 4 Regular"/>
+                <a:latin typeface="Pretendard"/>
+                <a:ea typeface="Pretendard"/>
+                <a:cs typeface="Pretendard"/>
               </a:rPr>
               <a:t>03</a:t>
             </a:r>
@@ -9956,9 +9948,9 @@
                 <a:solidFill>
                   <a:srgbClr val="00B5AC"/>
                 </a:solidFill>
-                <a:latin typeface="페이퍼로지 4 Regular"/>
-                <a:ea typeface="페이퍼로지 4 Regular"/>
-                <a:cs typeface="페이퍼로지 4 Regular"/>
+                <a:latin typeface="Pretendard"/>
+                <a:ea typeface="Pretendard"/>
+                <a:cs typeface="Pretendard"/>
               </a:defRPr>
             </a:pPr>
             <a:r>
@@ -9966,9 +9958,9 @@
                 <a:solidFill>
                   <a:srgbClr val="00B5AC"/>
                 </a:solidFill>
-                <a:latin typeface="페이퍼로지 4 Regular"/>
-                <a:ea typeface="페이퍼로지 4 Regular"/>
-                <a:cs typeface="페이퍼로지 4 Regular"/>
+                <a:latin typeface="Pretendard"/>
+                <a:ea typeface="Pretendard"/>
+                <a:cs typeface="Pretendard"/>
               </a:rPr>
               <a:t>OVERVIEW</a:t>
             </a:r>
@@ -10103,9 +10095,9 @@
                 <a:solidFill>
                   <a:srgbClr val="FFFFFF"/>
                 </a:solidFill>
-                <a:latin typeface="페이퍼로지 6 SemiBold"/>
-                <a:ea typeface="페이퍼로지 6 SemiBold"/>
-                <a:cs typeface="페이퍼로지 6 SemiBold"/>
+                <a:latin typeface="Pretendard"/>
+                <a:ea typeface="Pretendard"/>
+                <a:cs typeface="Pretendard"/>
               </a:defRPr>
             </a:pPr>
             <a:r>
@@ -10113,9 +10105,9 @@
                 <a:solidFill>
                   <a:srgbClr val="FFFFFF"/>
                 </a:solidFill>
-                <a:latin typeface="페이퍼로지 6 SemiBold"/>
-                <a:ea typeface="페이퍼로지 6 SemiBold"/>
-                <a:cs typeface="페이퍼로지 6 SemiBold"/>
+                <a:latin typeface="Pretendard"/>
+                <a:ea typeface="Pretendard"/>
+                <a:cs typeface="Pretendard"/>
               </a:rPr>
               <a:t>역할별 화면 · 접근 분리</a:t>
             </a:r>
@@ -10172,9 +10164,9 @@
                 <a:solidFill>
                   <a:srgbClr val="0A0E10"/>
                 </a:solidFill>
-                <a:latin typeface="페이퍼로지 5 Medium"/>
-                <a:ea typeface="페이퍼로지 5 Medium"/>
-                <a:cs typeface="페이퍼로지 5 Medium"/>
+                <a:latin typeface="Pretendard"/>
+                <a:ea typeface="Pretendard"/>
+                <a:cs typeface="Pretendard"/>
               </a:defRPr>
             </a:pPr>
             <a:r>
@@ -10182,9 +10174,9 @@
                 <a:solidFill>
                   <a:srgbClr val="0A0E10"/>
                 </a:solidFill>
-                <a:latin typeface="페이퍼로지 5 Medium"/>
-                <a:ea typeface="페이퍼로지 5 Medium"/>
-                <a:cs typeface="페이퍼로지 5 Medium"/>
+                <a:latin typeface="Pretendard"/>
+                <a:ea typeface="Pretendard"/>
+                <a:cs typeface="Pretendard"/>
               </a:rPr>
               <a:t>교육담당자</a:t>
             </a:r>
@@ -10196,9 +10188,9 @@
                 <a:solidFill>
                   <a:srgbClr val="0A0E10"/>
                 </a:solidFill>
-                <a:latin typeface="페이퍼로지 5 Medium"/>
-                <a:ea typeface="페이퍼로지 5 Medium"/>
-                <a:cs typeface="페이퍼로지 5 Medium"/>
+                <a:latin typeface="Pretendard"/>
+                <a:ea typeface="Pretendard"/>
+                <a:cs typeface="Pretendard"/>
               </a:defRPr>
             </a:pPr>
             <a:r>
@@ -10206,9 +10198,9 @@
                 <a:solidFill>
                   <a:srgbClr val="0A0E10"/>
                 </a:solidFill>
-                <a:latin typeface="페이퍼로지 5 Medium"/>
-                <a:ea typeface="페이퍼로지 5 Medium"/>
-                <a:cs typeface="페이퍼로지 5 Medium"/>
+                <a:latin typeface="Pretendard"/>
+                <a:ea typeface="Pretendard"/>
+                <a:cs typeface="Pretendard"/>
               </a:rPr>
               <a:t>조직 운영</a:t>
             </a:r>
@@ -10265,9 +10257,9 @@
                 <a:solidFill>
                   <a:srgbClr val="0A0E10"/>
                 </a:solidFill>
-                <a:latin typeface="페이퍼로지 5 Medium"/>
-                <a:ea typeface="페이퍼로지 5 Medium"/>
-                <a:cs typeface="페이퍼로지 5 Medium"/>
+                <a:latin typeface="Pretendard"/>
+                <a:ea typeface="Pretendard"/>
+                <a:cs typeface="Pretendard"/>
               </a:defRPr>
             </a:pPr>
             <a:r>
@@ -10275,9 +10267,9 @@
                 <a:solidFill>
                   <a:srgbClr val="0A0E10"/>
                 </a:solidFill>
-                <a:latin typeface="페이퍼로지 5 Medium"/>
-                <a:ea typeface="페이퍼로지 5 Medium"/>
-                <a:cs typeface="페이퍼로지 5 Medium"/>
+                <a:latin typeface="Pretendard"/>
+                <a:ea typeface="Pretendard"/>
+                <a:cs typeface="Pretendard"/>
               </a:rPr>
               <a:t>참여자</a:t>
             </a:r>
@@ -10289,9 +10281,9 @@
                 <a:solidFill>
                   <a:srgbClr val="0A0E10"/>
                 </a:solidFill>
-                <a:latin typeface="페이퍼로지 5 Medium"/>
-                <a:ea typeface="페이퍼로지 5 Medium"/>
-                <a:cs typeface="페이퍼로지 5 Medium"/>
+                <a:latin typeface="Pretendard"/>
+                <a:ea typeface="Pretendard"/>
+                <a:cs typeface="Pretendard"/>
               </a:defRPr>
             </a:pPr>
             <a:r>
@@ -10299,9 +10291,9 @@
                 <a:solidFill>
                   <a:srgbClr val="0A0E10"/>
                 </a:solidFill>
-                <a:latin typeface="페이퍼로지 5 Medium"/>
-                <a:ea typeface="페이퍼로지 5 Medium"/>
-                <a:cs typeface="페이퍼로지 5 Medium"/>
+                <a:latin typeface="Pretendard"/>
+                <a:ea typeface="Pretendard"/>
+                <a:cs typeface="Pretendard"/>
               </a:rPr>
               <a:t>본인 결과</a:t>
             </a:r>
@@ -10358,9 +10350,9 @@
                 <a:solidFill>
                   <a:srgbClr val="0A0E10"/>
                 </a:solidFill>
-                <a:latin typeface="페이퍼로지 5 Medium"/>
-                <a:ea typeface="페이퍼로지 5 Medium"/>
-                <a:cs typeface="페이퍼로지 5 Medium"/>
+                <a:latin typeface="Pretendard"/>
+                <a:ea typeface="Pretendard"/>
+                <a:cs typeface="Pretendard"/>
               </a:defRPr>
             </a:pPr>
             <a:r>
@@ -10368,9 +10360,9 @@
                 <a:solidFill>
                   <a:srgbClr val="0A0E10"/>
                 </a:solidFill>
-                <a:latin typeface="페이퍼로지 5 Medium"/>
-                <a:ea typeface="페이퍼로지 5 Medium"/>
-                <a:cs typeface="페이퍼로지 5 Medium"/>
+                <a:latin typeface="Pretendard"/>
+                <a:ea typeface="Pretendard"/>
+                <a:cs typeface="Pretendard"/>
               </a:rPr>
               <a:t>KMA 관리자</a:t>
             </a:r>
@@ -10382,9 +10374,9 @@
                 <a:solidFill>
                   <a:srgbClr val="0A0E10"/>
                 </a:solidFill>
-                <a:latin typeface="페이퍼로지 5 Medium"/>
-                <a:ea typeface="페이퍼로지 5 Medium"/>
-                <a:cs typeface="페이퍼로지 5 Medium"/>
+                <a:latin typeface="Pretendard"/>
+                <a:ea typeface="Pretendard"/>
+                <a:cs typeface="Pretendard"/>
               </a:defRPr>
             </a:pPr>
             <a:r>
@@ -10392,9 +10384,9 @@
                 <a:solidFill>
                   <a:srgbClr val="0A0E10"/>
                 </a:solidFill>
-                <a:latin typeface="페이퍼로지 5 Medium"/>
-                <a:ea typeface="페이퍼로지 5 Medium"/>
-                <a:cs typeface="페이퍼로지 5 Medium"/>
+                <a:latin typeface="Pretendard"/>
+                <a:ea typeface="Pretendard"/>
+                <a:cs typeface="Pretendard"/>
               </a:rPr>
               <a:t>도구 품질</a:t>
             </a:r>
@@ -10447,9 +10439,9 @@
                 <a:solidFill>
                   <a:srgbClr val="1E2324"/>
                 </a:solidFill>
-                <a:latin typeface="페이퍼로지 5 Medium"/>
-                <a:ea typeface="페이퍼로지 5 Medium"/>
-                <a:cs typeface="페이퍼로지 5 Medium"/>
+                <a:latin typeface="Pretendard"/>
+                <a:ea typeface="Pretendard"/>
+                <a:cs typeface="Pretendard"/>
               </a:defRPr>
             </a:pPr>
             <a:r>
@@ -10457,11 +10449,11 @@
                 <a:solidFill>
                   <a:srgbClr val="1E2324"/>
                 </a:solidFill>
-                <a:latin typeface="페이퍼로지 5 Medium"/>
-                <a:ea typeface="페이퍼로지 5 Medium"/>
-                <a:cs typeface="페이퍼로지 5 Medium"/>
-              </a:rPr>
-              <a:t>N≥5 집계</a:t>
+                <a:latin typeface="Pretendard"/>
+                <a:ea typeface="Pretendard"/>
+                <a:cs typeface="Pretendard"/>
+              </a:rPr>
+              <a:t>5명 이상 공개</a:t>
             </a:r>
           </a:p>
         </p:txBody>
@@ -10512,9 +10504,9 @@
                 <a:solidFill>
                   <a:srgbClr val="1E2324"/>
                 </a:solidFill>
-                <a:latin typeface="페이퍼로지 5 Medium"/>
-                <a:ea typeface="페이퍼로지 5 Medium"/>
-                <a:cs typeface="페이퍼로지 5 Medium"/>
+                <a:latin typeface="Pretendard"/>
+                <a:ea typeface="Pretendard"/>
+                <a:cs typeface="Pretendard"/>
               </a:defRPr>
             </a:pPr>
             <a:r>
@@ -10522,9 +10514,9 @@
                 <a:solidFill>
                   <a:srgbClr val="1E2324"/>
                 </a:solidFill>
-                <a:latin typeface="페이퍼로지 5 Medium"/>
-                <a:ea typeface="페이퍼로지 5 Medium"/>
-                <a:cs typeface="페이퍼로지 5 Medium"/>
+                <a:latin typeface="Pretendard"/>
+                <a:ea typeface="Pretendard"/>
+                <a:cs typeface="Pretendard"/>
               </a:rPr>
               <a:t>공유는 선택</a:t>
             </a:r>
@@ -10577,9 +10569,9 @@
                 <a:solidFill>
                   <a:srgbClr val="1E2324"/>
                 </a:solidFill>
-                <a:latin typeface="페이퍼로지 5 Medium"/>
-                <a:ea typeface="페이퍼로지 5 Medium"/>
-                <a:cs typeface="페이퍼로지 5 Medium"/>
+                <a:latin typeface="Pretendard"/>
+                <a:ea typeface="Pretendard"/>
+                <a:cs typeface="Pretendard"/>
               </a:defRPr>
             </a:pPr>
             <a:r>
@@ -10587,9 +10579,9 @@
                 <a:solidFill>
                   <a:srgbClr val="1E2324"/>
                 </a:solidFill>
-                <a:latin typeface="페이퍼로지 5 Medium"/>
-                <a:ea typeface="페이퍼로지 5 Medium"/>
-                <a:cs typeface="페이퍼로지 5 Medium"/>
+                <a:latin typeface="Pretendard"/>
+                <a:ea typeface="Pretendard"/>
+                <a:cs typeface="Pretendard"/>
               </a:rPr>
               <a:t>점수 기본 미열람</a:t>
             </a:r>
@@ -10642,9 +10634,9 @@
                 <a:solidFill>
                   <a:srgbClr val="00B5AC"/>
                 </a:solidFill>
-                <a:latin typeface="페이퍼로지 5 Medium"/>
-                <a:ea typeface="페이퍼로지 5 Medium"/>
-                <a:cs typeface="페이퍼로지 5 Medium"/>
+                <a:latin typeface="Pretendard"/>
+                <a:ea typeface="Pretendard"/>
+                <a:cs typeface="Pretendard"/>
               </a:defRPr>
             </a:pPr>
             <a:r>
@@ -10652,9 +10644,9 @@
                 <a:solidFill>
                   <a:srgbClr val="00B5AC"/>
                 </a:solidFill>
-                <a:latin typeface="페이퍼로지 5 Medium"/>
-                <a:ea typeface="페이퍼로지 5 Medium"/>
-                <a:cs typeface="페이퍼로지 5 Medium"/>
+                <a:latin typeface="Pretendard"/>
+                <a:ea typeface="Pretendard"/>
+                <a:cs typeface="Pretendard"/>
               </a:rPr>
               <a:t>교육담당자 · 참여자</a:t>
             </a:r>
@@ -10707,9 +10699,9 @@
                 <a:solidFill>
                   <a:srgbClr val="00B5AC"/>
                 </a:solidFill>
-                <a:latin typeface="페이퍼로지 5 Medium"/>
-                <a:ea typeface="페이퍼로지 5 Medium"/>
-                <a:cs typeface="페이퍼로지 5 Medium"/>
+                <a:latin typeface="Pretendard"/>
+                <a:ea typeface="Pretendard"/>
+                <a:cs typeface="Pretendard"/>
               </a:defRPr>
             </a:pPr>
             <a:r>
@@ -10717,9 +10709,9 @@
                 <a:solidFill>
                   <a:srgbClr val="00B5AC"/>
                 </a:solidFill>
-                <a:latin typeface="페이퍼로지 5 Medium"/>
-                <a:ea typeface="페이퍼로지 5 Medium"/>
-                <a:cs typeface="페이퍼로지 5 Medium"/>
+                <a:latin typeface="Pretendard"/>
+                <a:ea typeface="Pretendard"/>
+                <a:cs typeface="Pretendard"/>
               </a:rPr>
               <a:t>KMA</a:t>
             </a:r>
@@ -10849,7 +10841,7 @@
           <p:nvPr/>
         </p:nvPicPr>
         <p:blipFill>
-          <a:blip xmlns:r="http://schemas.openxmlformats.org/officeDocument/2006/relationships" xmlns:a="http://schemas.openxmlformats.org/drawingml/2006/main" r:embed="R68edc56a0f004e0d"/>
+          <a:blip xmlns:r="http://schemas.openxmlformats.org/officeDocument/2006/relationships" xmlns:a="http://schemas.openxmlformats.org/drawingml/2006/main" r:embed="Rbec72da7f61b4da9"/>
           <a:srcRect xmlns:a="http://schemas.openxmlformats.org/drawingml/2006/main" l="-2083" t="0" r="-2083" b="0"/>
           <a:stretch xmlns:a="http://schemas.openxmlformats.org/drawingml/2006/main"/>
         </p:blipFill>
@@ -10903,9 +10895,9 @@
                 <a:solidFill>
                   <a:srgbClr val="6C7476"/>
                 </a:solidFill>
-                <a:latin typeface="페이퍼로지 4 Regular"/>
-                <a:ea typeface="페이퍼로지 4 Regular"/>
-                <a:cs typeface="페이퍼로지 4 Regular"/>
+                <a:latin typeface="Pretendard"/>
+                <a:ea typeface="Pretendard"/>
+                <a:cs typeface="Pretendard"/>
               </a:defRPr>
             </a:lvl1pPr>
           </a:lstStyle>
@@ -10916,9 +10908,9 @@
                 <a:solidFill>
                   <a:srgbClr val="6C7476"/>
                 </a:solidFill>
-                <a:latin typeface="페이퍼로지 4 Regular"/>
-                <a:ea typeface="페이퍼로지 4 Regular"/>
-                <a:cs typeface="페이퍼로지 4 Regular"/>
+                <a:latin typeface="Pretendard"/>
+                <a:ea typeface="Pretendard"/>
+                <a:cs typeface="Pretendard"/>
               </a:defRPr>
             </a:pPr>
             <a:r>
@@ -10926,9 +10918,9 @@
                 <a:solidFill>
                   <a:srgbClr val="6C7476"/>
                 </a:solidFill>
-                <a:latin typeface="페이퍼로지 4 Regular"/>
-                <a:ea typeface="페이퍼로지 4 Regular"/>
-                <a:cs typeface="페이퍼로지 4 Regular"/>
+                <a:latin typeface="Pretendard"/>
+                <a:ea typeface="Pretendard"/>
+                <a:cs typeface="Pretendard"/>
               </a:rPr>
               <a:t>RESULT USE</a:t>
             </a:r>
@@ -10971,9 +10963,9 @@
                 <a:solidFill>
                   <a:srgbClr val="0A0E10"/>
                 </a:solidFill>
-                <a:latin typeface="페이퍼로지 2 ExtraLight"/>
-                <a:ea typeface="페이퍼로지 2 ExtraLight"/>
-                <a:cs typeface="페이퍼로지 2 ExtraLight"/>
+                <a:latin typeface="Pretendard"/>
+                <a:ea typeface="Pretendard"/>
+                <a:cs typeface="Pretendard"/>
               </a:defRPr>
             </a:pPr>
             <a:r>
@@ -10981,11 +10973,11 @@
                 <a:solidFill>
                   <a:srgbClr val="0A0E10"/>
                 </a:solidFill>
-                <a:latin typeface="페이퍼로지 2 ExtraLight"/>
-                <a:ea typeface="페이퍼로지 2 ExtraLight"/>
-                <a:cs typeface="페이퍼로지 2 ExtraLight"/>
-              </a:rPr>
-              <a:t>전후 변화와 전이 조건으로</a:t>
+                <a:latin typeface="Pretendard"/>
+                <a:ea typeface="Pretendard"/>
+                <a:cs typeface="Pretendard"/>
+              </a:rPr>
+              <a:t>교육 전/후 변화와 전이 조건을</a:t>
             </a:r>
           </a:p>
           <a:p xmlns:a="http://schemas.openxmlformats.org/drawingml/2006/main">
@@ -10995,9 +10987,9 @@
                 <a:solidFill>
                   <a:srgbClr val="0A0E10"/>
                 </a:solidFill>
-                <a:latin typeface="페이퍼로지 2 ExtraLight"/>
-                <a:ea typeface="페이퍼로지 2 ExtraLight"/>
-                <a:cs typeface="페이퍼로지 2 ExtraLight"/>
+                <a:latin typeface="Pretendard"/>
+                <a:ea typeface="Pretendard"/>
+                <a:cs typeface="Pretendard"/>
               </a:defRPr>
             </a:pPr>
             <a:r>
@@ -11005,11 +10997,11 @@
                 <a:solidFill>
                   <a:srgbClr val="0A0E10"/>
                 </a:solidFill>
-                <a:latin typeface="페이퍼로지 6 SemiBold"/>
-                <a:ea typeface="페이퍼로지 6 SemiBold"/>
-                <a:cs typeface="페이퍼로지 6 SemiBold"/>
-              </a:rPr>
-              <a:t>다음 개선을 정합니다</a:t>
+                <a:latin typeface="Pretendard"/>
+                <a:ea typeface="Pretendard"/>
+                <a:cs typeface="Pretendard"/>
+              </a:rPr>
+              <a:t>다음 개선에 반영합니다</a:t>
             </a:r>
           </a:p>
         </p:txBody>
@@ -11050,9 +11042,9 @@
                 <a:solidFill>
                   <a:srgbClr val="6C7476"/>
                 </a:solidFill>
-                <a:latin typeface="페이퍼로지 3 Light"/>
-                <a:ea typeface="페이퍼로지 3 Light"/>
-                <a:cs typeface="페이퍼로지 3 Light"/>
+                <a:latin typeface="Pretendard"/>
+                <a:ea typeface="Pretendard"/>
+                <a:cs typeface="Pretendard"/>
               </a:defRPr>
             </a:pPr>
             <a:r>
@@ -11060,11 +11052,11 @@
                 <a:solidFill>
                   <a:srgbClr val="6C7476"/>
                 </a:solidFill>
-                <a:latin typeface="페이퍼로지 3 Light"/>
-                <a:ea typeface="페이퍼로지 3 Light"/>
-                <a:cs typeface="페이퍼로지 3 Light"/>
-              </a:rPr>
-              <a:t>사후점수만으로 교육효과를 단정하지 않습니다.</a:t>
+                <a:latin typeface="Pretendard"/>
+                <a:ea typeface="Pretendard"/>
+                <a:cs typeface="Pretendard"/>
+              </a:rPr>
+              <a:t>교육 후 점수만으로 교육효과를 단정하지 않습니다.</a:t>
             </a:r>
           </a:p>
           <a:p xmlns:a="http://schemas.openxmlformats.org/drawingml/2006/main">
@@ -11074,9 +11066,9 @@
                 <a:solidFill>
                   <a:srgbClr val="6C7476"/>
                 </a:solidFill>
-                <a:latin typeface="페이퍼로지 3 Light"/>
-                <a:ea typeface="페이퍼로지 3 Light"/>
-                <a:cs typeface="페이퍼로지 3 Light"/>
+                <a:latin typeface="Pretendard"/>
+                <a:ea typeface="Pretendard"/>
+                <a:cs typeface="Pretendard"/>
               </a:defRPr>
             </a:pPr>
             <a:r>
@@ -11084,9 +11076,9 @@
                 <a:solidFill>
                   <a:srgbClr val="6C7476"/>
                 </a:solidFill>
-                <a:latin typeface="페이퍼로지 3 Light"/>
-                <a:ea typeface="페이퍼로지 3 Light"/>
-                <a:cs typeface="페이퍼로지 3 Light"/>
+                <a:latin typeface="Pretendard"/>
+                <a:ea typeface="Pretendard"/>
+                <a:cs typeface="Pretendard"/>
               </a:rPr>
               <a:t>적용기회 · 상사지원 · 도구 · 권한을 함께 봅니다.</a:t>
             </a:r>
@@ -11171,9 +11163,9 @@
                 <a:solidFill>
                   <a:srgbClr val="0A0E10"/>
                 </a:solidFill>
-                <a:latin typeface="페이퍼로지 5 Medium"/>
-                <a:ea typeface="페이퍼로지 5 Medium"/>
-                <a:cs typeface="페이퍼로지 5 Medium"/>
+                <a:latin typeface="Pretendard"/>
+                <a:ea typeface="Pretendard"/>
+                <a:cs typeface="Pretendard"/>
               </a:defRPr>
             </a:pPr>
             <a:r>
@@ -11181,11 +11173,11 @@
                 <a:solidFill>
                   <a:srgbClr val="0A0E10"/>
                 </a:solidFill>
-                <a:latin typeface="페이퍼로지 5 Medium"/>
-                <a:ea typeface="페이퍼로지 5 Medium"/>
-                <a:cs typeface="페이퍼로지 5 Medium"/>
-              </a:rPr>
-              <a:t>개인 리포트 · 본인의 사전·사후 변화 확인</a:t>
+                <a:latin typeface="Pretendard"/>
+                <a:ea typeface="Pretendard"/>
+                <a:cs typeface="Pretendard"/>
+              </a:rPr>
+              <a:t>개인 리포트 · 본인의 교육 전/후 변화 확인</a:t>
             </a:r>
           </a:p>
         </p:txBody>
@@ -11226,9 +11218,9 @@
                 <a:solidFill>
                   <a:srgbClr val="6C7476"/>
                 </a:solidFill>
-                <a:latin typeface="페이퍼로지 4 Regular"/>
-                <a:ea typeface="페이퍼로지 4 Regular"/>
-                <a:cs typeface="페이퍼로지 4 Regular"/>
+                <a:latin typeface="Pretendard"/>
+                <a:ea typeface="Pretendard"/>
+                <a:cs typeface="Pretendard"/>
               </a:defRPr>
             </a:pPr>
             <a:r>
@@ -11236,11 +11228,11 @@
                 <a:solidFill>
                   <a:srgbClr val="6C7476"/>
                 </a:solidFill>
-                <a:latin typeface="페이퍼로지 4 Regular"/>
-                <a:ea typeface="페이퍼로지 4 Regular"/>
-                <a:cs typeface="페이퍼로지 4 Regular"/>
-              </a:rPr>
-              <a:t>동일 문항의 전후 점수 · 관찰 변화 · 현업 적용환경</a:t>
+                <a:latin typeface="Pretendard"/>
+                <a:ea typeface="Pretendard"/>
+                <a:cs typeface="Pretendard"/>
+              </a:rPr>
+              <a:t>동일 문항의 교육 전/후 점수 · 관찰 변화 · 현업 적용환경</a:t>
             </a:r>
           </a:p>
         </p:txBody>
@@ -11323,9 +11315,9 @@
                 <a:solidFill>
                   <a:srgbClr val="0A0E10"/>
                 </a:solidFill>
-                <a:latin typeface="페이퍼로지 5 Medium"/>
-                <a:ea typeface="페이퍼로지 5 Medium"/>
-                <a:cs typeface="페이퍼로지 5 Medium"/>
+                <a:latin typeface="Pretendard"/>
+                <a:ea typeface="Pretendard"/>
+                <a:cs typeface="Pretendard"/>
               </a:defRPr>
             </a:pPr>
             <a:r>
@@ -11333,11 +11325,11 @@
                 <a:solidFill>
                   <a:srgbClr val="0A0E10"/>
                 </a:solidFill>
-                <a:latin typeface="페이퍼로지 5 Medium"/>
-                <a:ea typeface="페이퍼로지 5 Medium"/>
-                <a:cs typeface="페이퍼로지 5 Medium"/>
-              </a:rPr>
-              <a:t>조직 리포트 · 짝지어진 집단 변화 확인</a:t>
+                <a:latin typeface="Pretendard"/>
+                <a:ea typeface="Pretendard"/>
+                <a:cs typeface="Pretendard"/>
+              </a:rPr>
+              <a:t>조직 리포트 · 동일 참여자의 집단 변화 확인</a:t>
             </a:r>
           </a:p>
         </p:txBody>
@@ -11378,9 +11370,9 @@
                 <a:solidFill>
                   <a:srgbClr val="00B5AC"/>
                 </a:solidFill>
-                <a:latin typeface="페이퍼로지 5 Medium"/>
-                <a:ea typeface="페이퍼로지 5 Medium"/>
-                <a:cs typeface="페이퍼로지 5 Medium"/>
+                <a:latin typeface="Pretendard"/>
+                <a:ea typeface="Pretendard"/>
+                <a:cs typeface="Pretendard"/>
               </a:defRPr>
             </a:pPr>
             <a:r>
@@ -11388,11 +11380,11 @@
                 <a:solidFill>
                   <a:srgbClr val="00B5AC"/>
                 </a:solidFill>
-                <a:latin typeface="페이퍼로지 5 Medium"/>
-                <a:ea typeface="페이퍼로지 5 Medium"/>
-                <a:cs typeface="페이퍼로지 5 Medium"/>
-              </a:rPr>
-              <a:t>사전</a:t>
+                <a:latin typeface="Pretendard"/>
+                <a:ea typeface="Pretendard"/>
+                <a:cs typeface="Pretendard"/>
+              </a:rPr>
+              <a:t>교육 전</a:t>
             </a:r>
           </a:p>
         </p:txBody>
@@ -11433,9 +11425,9 @@
                 <a:solidFill>
                   <a:srgbClr val="6C7476"/>
                 </a:solidFill>
-                <a:latin typeface="페이퍼로지 4 Regular"/>
-                <a:ea typeface="페이퍼로지 4 Regular"/>
-                <a:cs typeface="페이퍼로지 4 Regular"/>
+                <a:latin typeface="Pretendard"/>
+                <a:ea typeface="Pretendard"/>
+                <a:cs typeface="Pretendard"/>
               </a:defRPr>
             </a:pPr>
             <a:r>
@@ -11443,9 +11435,9 @@
                 <a:solidFill>
                   <a:srgbClr val="6C7476"/>
                 </a:solidFill>
-                <a:latin typeface="페이퍼로지 4 Regular"/>
-                <a:ea typeface="페이퍼로지 4 Regular"/>
-                <a:cs typeface="페이퍼로지 4 Regular"/>
+                <a:latin typeface="Pretendard"/>
+                <a:ea typeface="Pretendard"/>
+                <a:cs typeface="Pretendard"/>
               </a:rPr>
               <a:t>출발점</a:t>
             </a:r>
@@ -11488,9 +11480,9 @@
                 <a:solidFill>
                   <a:srgbClr val="00B5AC"/>
                 </a:solidFill>
-                <a:latin typeface="페이퍼로지 5 Medium"/>
-                <a:ea typeface="페이퍼로지 5 Medium"/>
-                <a:cs typeface="페이퍼로지 5 Medium"/>
+                <a:latin typeface="Pretendard"/>
+                <a:ea typeface="Pretendard"/>
+                <a:cs typeface="Pretendard"/>
               </a:defRPr>
             </a:pPr>
             <a:r>
@@ -11498,11 +11490,11 @@
                 <a:solidFill>
                   <a:srgbClr val="00B5AC"/>
                 </a:solidFill>
-                <a:latin typeface="페이퍼로지 5 Medium"/>
-                <a:ea typeface="페이퍼로지 5 Medium"/>
-                <a:cs typeface="페이퍼로지 5 Medium"/>
-              </a:rPr>
-              <a:t>사후</a:t>
+                <a:latin typeface="Pretendard"/>
+                <a:ea typeface="Pretendard"/>
+                <a:cs typeface="Pretendard"/>
+              </a:rPr>
+              <a:t>교육 후</a:t>
             </a:r>
           </a:p>
         </p:txBody>
@@ -11543,9 +11535,9 @@
                 <a:solidFill>
                   <a:srgbClr val="6C7476"/>
                 </a:solidFill>
-                <a:latin typeface="페이퍼로지 4 Regular"/>
-                <a:ea typeface="페이퍼로지 4 Regular"/>
-                <a:cs typeface="페이퍼로지 4 Regular"/>
+                <a:latin typeface="Pretendard"/>
+                <a:ea typeface="Pretendard"/>
+                <a:cs typeface="Pretendard"/>
               </a:defRPr>
             </a:pPr>
             <a:r>
@@ -11553,9 +11545,9 @@
                 <a:solidFill>
                   <a:srgbClr val="6C7476"/>
                 </a:solidFill>
-                <a:latin typeface="페이퍼로지 4 Regular"/>
-                <a:ea typeface="페이퍼로지 4 Regular"/>
-                <a:cs typeface="페이퍼로지 4 Regular"/>
+                <a:latin typeface="Pretendard"/>
+                <a:ea typeface="Pretendard"/>
+                <a:cs typeface="Pretendard"/>
               </a:rPr>
               <a:t>관찰 변화</a:t>
             </a:r>
@@ -11598,9 +11590,9 @@
                 <a:solidFill>
                   <a:srgbClr val="00B5AC"/>
                 </a:solidFill>
-                <a:latin typeface="페이퍼로지 5 Medium"/>
-                <a:ea typeface="페이퍼로지 5 Medium"/>
-                <a:cs typeface="페이퍼로지 5 Medium"/>
+                <a:latin typeface="Pretendard"/>
+                <a:ea typeface="Pretendard"/>
+                <a:cs typeface="Pretendard"/>
               </a:defRPr>
             </a:pPr>
             <a:r>
@@ -11608,9 +11600,9 @@
                 <a:solidFill>
                   <a:srgbClr val="00B5AC"/>
                 </a:solidFill>
-                <a:latin typeface="페이퍼로지 5 Medium"/>
-                <a:ea typeface="페이퍼로지 5 Medium"/>
-                <a:cs typeface="페이퍼로지 5 Medium"/>
+                <a:latin typeface="Pretendard"/>
+                <a:ea typeface="Pretendard"/>
+                <a:cs typeface="Pretendard"/>
               </a:rPr>
               <a:t>맥락</a:t>
             </a:r>
@@ -11653,9 +11645,9 @@
                 <a:solidFill>
                   <a:srgbClr val="6C7476"/>
                 </a:solidFill>
-                <a:latin typeface="페이퍼로지 4 Regular"/>
-                <a:ea typeface="페이퍼로지 4 Regular"/>
-                <a:cs typeface="페이퍼로지 4 Regular"/>
+                <a:latin typeface="Pretendard"/>
+                <a:ea typeface="Pretendard"/>
+                <a:cs typeface="Pretendard"/>
               </a:defRPr>
             </a:pPr>
             <a:r>
@@ -11663,9 +11655,9 @@
                 <a:solidFill>
                   <a:srgbClr val="6C7476"/>
                 </a:solidFill>
-                <a:latin typeface="페이퍼로지 4 Regular"/>
-                <a:ea typeface="페이퍼로지 4 Regular"/>
-                <a:cs typeface="페이퍼로지 4 Regular"/>
+                <a:latin typeface="Pretendard"/>
+                <a:ea typeface="Pretendard"/>
+                <a:cs typeface="Pretendard"/>
               </a:rPr>
               <a:t>적용환경</a:t>
             </a:r>
@@ -11708,9 +11700,9 @@
                 <a:solidFill>
                   <a:srgbClr val="00B5AC"/>
                 </a:solidFill>
-                <a:latin typeface="페이퍼로지 5 Medium"/>
-                <a:ea typeface="페이퍼로지 5 Medium"/>
-                <a:cs typeface="페이퍼로지 5 Medium"/>
+                <a:latin typeface="Pretendard"/>
+                <a:ea typeface="Pretendard"/>
+                <a:cs typeface="Pretendard"/>
               </a:defRPr>
             </a:pPr>
             <a:r>
@@ -11718,9 +11710,9 @@
                 <a:solidFill>
                   <a:srgbClr val="00B5AC"/>
                 </a:solidFill>
-                <a:latin typeface="페이퍼로지 5 Medium"/>
-                <a:ea typeface="페이퍼로지 5 Medium"/>
-                <a:cs typeface="페이퍼로지 5 Medium"/>
+                <a:latin typeface="Pretendard"/>
+                <a:ea typeface="Pretendard"/>
+                <a:cs typeface="Pretendard"/>
               </a:rPr>
               <a:t>공개</a:t>
             </a:r>
@@ -11763,9 +11755,9 @@
                 <a:solidFill>
                   <a:srgbClr val="6C7476"/>
                 </a:solidFill>
-                <a:latin typeface="페이퍼로지 4 Regular"/>
-                <a:ea typeface="페이퍼로지 4 Regular"/>
-                <a:cs typeface="페이퍼로지 4 Regular"/>
+                <a:latin typeface="Pretendard"/>
+                <a:ea typeface="Pretendard"/>
+                <a:cs typeface="Pretendard"/>
               </a:defRPr>
             </a:pPr>
             <a:r>
@@ -11773,11 +11765,11 @@
                 <a:solidFill>
                   <a:srgbClr val="6C7476"/>
                 </a:solidFill>
-                <a:latin typeface="페이퍼로지 4 Regular"/>
-                <a:ea typeface="페이퍼로지 4 Regular"/>
-                <a:cs typeface="페이퍼로지 4 Regular"/>
-              </a:rPr>
-              <a:t>N≥5 집계</a:t>
+                <a:latin typeface="Pretendard"/>
+                <a:ea typeface="Pretendard"/>
+                <a:cs typeface="Pretendard"/>
+              </a:rPr>
+              <a:t>5명 이상 공개</a:t>
             </a:r>
           </a:p>
         </p:txBody>
@@ -11818,9 +11810,9 @@
                 <a:solidFill>
                   <a:srgbClr val="98A4A6"/>
                 </a:solidFill>
-                <a:latin typeface="페이퍼로지 4 Regular"/>
-                <a:ea typeface="페이퍼로지 4 Regular"/>
-                <a:cs typeface="페이퍼로지 4 Regular"/>
+                <a:latin typeface="Pretendard"/>
+                <a:ea typeface="Pretendard"/>
+                <a:cs typeface="Pretendard"/>
               </a:defRPr>
             </a:pPr>
             <a:r>
@@ -11828,11 +11820,11 @@
                 <a:solidFill>
                   <a:srgbClr val="98A4A6"/>
                 </a:solidFill>
-                <a:latin typeface="페이퍼로지 4 Regular"/>
-                <a:ea typeface="페이퍼로지 4 Regular"/>
-                <a:cs typeface="페이퍼로지 4 Regular"/>
-              </a:rPr>
-              <a:t>비교집단이 없으면 교육의 인과효과가 아니라 ‘교육 전후 관찰된 변화’로 표현합니다.</a:t>
+                <a:latin typeface="Pretendard"/>
+                <a:ea typeface="Pretendard"/>
+                <a:cs typeface="Pretendard"/>
+              </a:rPr>
+              <a:t>비교집단이 없으면 교육의 인과효과가 아니라 ‘교육 전/후 관찰 변화’로 표현합니다.</a:t>
             </a:r>
           </a:p>
         </p:txBody>
@@ -11873,9 +11865,9 @@
                 <a:solidFill>
                   <a:srgbClr val="98A4A6"/>
                 </a:solidFill>
-                <a:latin typeface="페이퍼로지 4 Regular"/>
-                <a:ea typeface="페이퍼로지 4 Regular"/>
-                <a:cs typeface="페이퍼로지 4 Regular"/>
+                <a:latin typeface="Pretendard"/>
+                <a:ea typeface="Pretendard"/>
+                <a:cs typeface="Pretendard"/>
               </a:defRPr>
             </a:pPr>
             <a:r>
@@ -11883,9 +11875,9 @@
                 <a:solidFill>
                   <a:srgbClr val="98A4A6"/>
                 </a:solidFill>
-                <a:latin typeface="페이퍼로지 4 Regular"/>
-                <a:ea typeface="페이퍼로지 4 Regular"/>
-                <a:cs typeface="페이퍼로지 4 Regular"/>
+                <a:latin typeface="Pretendard"/>
+                <a:ea typeface="Pretendard"/>
+                <a:cs typeface="Pretendard"/>
               </a:rPr>
               <a:t>04</a:t>
             </a:r>
@@ -11930,9 +11922,9 @@
                 <a:solidFill>
                   <a:srgbClr val="00B5AC"/>
                 </a:solidFill>
-                <a:latin typeface="페이퍼로지 4 Regular"/>
-                <a:ea typeface="페이퍼로지 4 Regular"/>
-                <a:cs typeface="페이퍼로지 4 Regular"/>
+                <a:latin typeface="Pretendard"/>
+                <a:ea typeface="Pretendard"/>
+                <a:cs typeface="Pretendard"/>
               </a:defRPr>
             </a:pPr>
             <a:r>
@@ -11940,9 +11932,9 @@
                 <a:solidFill>
                   <a:srgbClr val="00B5AC"/>
                 </a:solidFill>
-                <a:latin typeface="페이퍼로지 4 Regular"/>
-                <a:ea typeface="페이퍼로지 4 Regular"/>
-                <a:cs typeface="페이퍼로지 4 Regular"/>
+                <a:latin typeface="Pretendard"/>
+                <a:ea typeface="Pretendard"/>
+                <a:cs typeface="Pretendard"/>
               </a:rPr>
               <a:t>OVERVIEW</a:t>
             </a:r>
@@ -12077,9 +12069,9 @@
                 <a:solidFill>
                   <a:srgbClr val="FFFFFF"/>
                 </a:solidFill>
-                <a:latin typeface="페이퍼로지 6 SemiBold"/>
-                <a:ea typeface="페이퍼로지 6 SemiBold"/>
-                <a:cs typeface="페이퍼로지 6 SemiBold"/>
+                <a:latin typeface="Pretendard"/>
+                <a:ea typeface="Pretendard"/>
+                <a:cs typeface="Pretendard"/>
               </a:defRPr>
             </a:pPr>
             <a:r>
@@ -12087,11 +12079,11 @@
                 <a:solidFill>
                   <a:srgbClr val="FFFFFF"/>
                 </a:solidFill>
-                <a:latin typeface="페이퍼로지 6 SemiBold"/>
-                <a:ea typeface="페이퍼로지 6 SemiBold"/>
-                <a:cs typeface="페이퍼로지 6 SemiBold"/>
-              </a:rPr>
-              <a:t>교육 전후 해석의 흐름</a:t>
+                <a:latin typeface="Pretendard"/>
+                <a:ea typeface="Pretendard"/>
+                <a:cs typeface="Pretendard"/>
+              </a:rPr>
+              <a:t>교육 전/후 해석의 흐름</a:t>
             </a:r>
           </a:p>
         </p:txBody>
@@ -12140,9 +12132,9 @@
                 <a:solidFill>
                   <a:srgbClr val="98A4A6"/>
                 </a:solidFill>
-                <a:latin typeface="페이퍼로지 4 Regular"/>
-                <a:ea typeface="페이퍼로지 4 Regular"/>
-                <a:cs typeface="페이퍼로지 4 Regular"/>
+                <a:latin typeface="Pretendard"/>
+                <a:ea typeface="Pretendard"/>
+                <a:cs typeface="Pretendard"/>
               </a:defRPr>
             </a:pPr>
             <a:r>
@@ -12150,9 +12142,9 @@
                 <a:solidFill>
                   <a:srgbClr val="98A4A6"/>
                 </a:solidFill>
-                <a:latin typeface="페이퍼로지 4 Regular"/>
-                <a:ea typeface="페이퍼로지 4 Regular"/>
-                <a:cs typeface="페이퍼로지 4 Regular"/>
+                <a:latin typeface="Pretendard"/>
+                <a:ea typeface="Pretendard"/>
+                <a:cs typeface="Pretendard"/>
               </a:rPr>
               <a:t>개인</a:t>
             </a:r>
@@ -12203,9 +12195,9 @@
                 <a:solidFill>
                   <a:srgbClr val="98A4A6"/>
                 </a:solidFill>
-                <a:latin typeface="페이퍼로지 4 Regular"/>
-                <a:ea typeface="페이퍼로지 4 Regular"/>
-                <a:cs typeface="페이퍼로지 4 Regular"/>
+                <a:latin typeface="Pretendard"/>
+                <a:ea typeface="Pretendard"/>
+                <a:cs typeface="Pretendard"/>
               </a:defRPr>
             </a:pPr>
             <a:r>
@@ -12213,9 +12205,9 @@
                 <a:solidFill>
                   <a:srgbClr val="98A4A6"/>
                 </a:solidFill>
-                <a:latin typeface="페이퍼로지 4 Regular"/>
-                <a:ea typeface="페이퍼로지 4 Regular"/>
-                <a:cs typeface="페이퍼로지 4 Regular"/>
+                <a:latin typeface="Pretendard"/>
+                <a:ea typeface="Pretendard"/>
+                <a:cs typeface="Pretendard"/>
               </a:rPr>
               <a:t>조직</a:t>
             </a:r>
@@ -12266,9 +12258,9 @@
                 <a:solidFill>
                   <a:srgbClr val="98A4A6"/>
                 </a:solidFill>
-                <a:latin typeface="페이퍼로지 4 Regular"/>
-                <a:ea typeface="페이퍼로지 4 Regular"/>
-                <a:cs typeface="페이퍼로지 4 Regular"/>
+                <a:latin typeface="Pretendard"/>
+                <a:ea typeface="Pretendard"/>
+                <a:cs typeface="Pretendard"/>
               </a:defRPr>
             </a:pPr>
             <a:r>
@@ -12276,9 +12268,9 @@
                 <a:solidFill>
                   <a:srgbClr val="98A4A6"/>
                 </a:solidFill>
-                <a:latin typeface="페이퍼로지 4 Regular"/>
-                <a:ea typeface="페이퍼로지 4 Regular"/>
-                <a:cs typeface="페이퍼로지 4 Regular"/>
+                <a:latin typeface="Pretendard"/>
+                <a:ea typeface="Pretendard"/>
+                <a:cs typeface="Pretendard"/>
               </a:rPr>
               <a:t>결정</a:t>
             </a:r>
@@ -12331,9 +12323,9 @@
                 <a:solidFill>
                   <a:srgbClr val="0A0E10"/>
                 </a:solidFill>
-                <a:latin typeface="페이퍼로지 5 Medium"/>
-                <a:ea typeface="페이퍼로지 5 Medium"/>
-                <a:cs typeface="페이퍼로지 5 Medium"/>
+                <a:latin typeface="Pretendard"/>
+                <a:ea typeface="Pretendard"/>
+                <a:cs typeface="Pretendard"/>
               </a:defRPr>
             </a:pPr>
             <a:r>
@@ -12341,9 +12333,9 @@
                 <a:solidFill>
                   <a:srgbClr val="0A0E10"/>
                 </a:solidFill>
-                <a:latin typeface="페이퍼로지 5 Medium"/>
-                <a:ea typeface="페이퍼로지 5 Medium"/>
-                <a:cs typeface="페이퍼로지 5 Medium"/>
+                <a:latin typeface="Pretendard"/>
+                <a:ea typeface="Pretendard"/>
+                <a:cs typeface="Pretendard"/>
               </a:rPr>
               <a:t>리포트</a:t>
             </a:r>
@@ -12396,9 +12388,9 @@
                 <a:solidFill>
                   <a:srgbClr val="0A0E10"/>
                 </a:solidFill>
-                <a:latin typeface="페이퍼로지 5 Medium"/>
-                <a:ea typeface="페이퍼로지 5 Medium"/>
-                <a:cs typeface="페이퍼로지 5 Medium"/>
+                <a:latin typeface="Pretendard"/>
+                <a:ea typeface="Pretendard"/>
+                <a:cs typeface="Pretendard"/>
               </a:defRPr>
             </a:pPr>
             <a:r>
@@ -12406,9 +12398,9 @@
                 <a:solidFill>
                   <a:srgbClr val="0A0E10"/>
                 </a:solidFill>
-                <a:latin typeface="페이퍼로지 5 Medium"/>
-                <a:ea typeface="페이퍼로지 5 Medium"/>
-                <a:cs typeface="페이퍼로지 5 Medium"/>
+                <a:latin typeface="Pretendard"/>
+                <a:ea typeface="Pretendard"/>
+                <a:cs typeface="Pretendard"/>
               </a:rPr>
               <a:t>다음</a:t>
             </a:r>
@@ -12420,9 +12412,9 @@
                 <a:solidFill>
                   <a:srgbClr val="0A0E10"/>
                 </a:solidFill>
-                <a:latin typeface="페이퍼로지 5 Medium"/>
-                <a:ea typeface="페이퍼로지 5 Medium"/>
-                <a:cs typeface="페이퍼로지 5 Medium"/>
+                <a:latin typeface="Pretendard"/>
+                <a:ea typeface="Pretendard"/>
+                <a:cs typeface="Pretendard"/>
               </a:defRPr>
             </a:pPr>
             <a:r>
@@ -12430,9 +12422,9 @@
                 <a:solidFill>
                   <a:srgbClr val="0A0E10"/>
                 </a:solidFill>
-                <a:latin typeface="페이퍼로지 5 Medium"/>
-                <a:ea typeface="페이퍼로지 5 Medium"/>
-                <a:cs typeface="페이퍼로지 5 Medium"/>
+                <a:latin typeface="Pretendard"/>
+                <a:ea typeface="Pretendard"/>
+                <a:cs typeface="Pretendard"/>
               </a:rPr>
               <a:t>행동</a:t>
             </a:r>
@@ -12489,9 +12481,9 @@
                 <a:solidFill>
                   <a:srgbClr val="FFFFFF"/>
                 </a:solidFill>
-                <a:latin typeface="페이퍼로지 6 SemiBold"/>
-                <a:ea typeface="페이퍼로지 6 SemiBold"/>
-                <a:cs typeface="페이퍼로지 6 SemiBold"/>
+                <a:latin typeface="Pretendard"/>
+                <a:ea typeface="Pretendard"/>
+                <a:cs typeface="Pretendard"/>
               </a:defRPr>
             </a:pPr>
             <a:r>
@@ -12499,11 +12491,11 @@
                 <a:solidFill>
                   <a:srgbClr val="FFFFFF"/>
                 </a:solidFill>
-                <a:latin typeface="페이퍼로지 6 SemiBold"/>
-                <a:ea typeface="페이퍼로지 6 SemiBold"/>
-                <a:cs typeface="페이퍼로지 6 SemiBold"/>
-              </a:rPr>
-              <a:t>사전</a:t>
+                <a:latin typeface="Pretendard"/>
+                <a:ea typeface="Pretendard"/>
+                <a:cs typeface="Pretendard"/>
+              </a:rPr>
+              <a:t>교육 전</a:t>
             </a:r>
           </a:p>
           <a:p xmlns:a="http://schemas.openxmlformats.org/drawingml/2006/main">
@@ -12513,9 +12505,9 @@
                 <a:solidFill>
                   <a:srgbClr val="FFFFFF"/>
                 </a:solidFill>
-                <a:latin typeface="페이퍼로지 6 SemiBold"/>
-                <a:ea typeface="페이퍼로지 6 SemiBold"/>
-                <a:cs typeface="페이퍼로지 6 SemiBold"/>
+                <a:latin typeface="Pretendard"/>
+                <a:ea typeface="Pretendard"/>
+                <a:cs typeface="Pretendard"/>
               </a:defRPr>
             </a:pPr>
             <a:r>
@@ -12523,9 +12515,9 @@
                 <a:solidFill>
                   <a:srgbClr val="FFFFFF"/>
                 </a:solidFill>
-                <a:latin typeface="페이퍼로지 6 SemiBold"/>
-                <a:ea typeface="페이퍼로지 6 SemiBold"/>
-                <a:cs typeface="페이퍼로지 6 SemiBold"/>
+                <a:latin typeface="Pretendard"/>
+                <a:ea typeface="Pretendard"/>
+                <a:cs typeface="Pretendard"/>
               </a:rPr>
               <a:t>출발점</a:t>
             </a:r>
@@ -12576,9 +12568,9 @@
                 <a:solidFill>
                   <a:srgbClr val="00B5AC"/>
                 </a:solidFill>
-                <a:latin typeface="페이퍼로지 6 SemiBold"/>
-                <a:ea typeface="페이퍼로지 6 SemiBold"/>
-                <a:cs typeface="페이퍼로지 6 SemiBold"/>
+                <a:latin typeface="Pretendard"/>
+                <a:ea typeface="Pretendard"/>
+                <a:cs typeface="Pretendard"/>
               </a:defRPr>
             </a:pPr>
             <a:r>
@@ -12586,9 +12578,9 @@
                 <a:solidFill>
                   <a:srgbClr val="00B5AC"/>
                 </a:solidFill>
-                <a:latin typeface="페이퍼로지 6 SemiBold"/>
-                <a:ea typeface="페이퍼로지 6 SemiBold"/>
-                <a:cs typeface="페이퍼로지 6 SemiBold"/>
+                <a:latin typeface="Pretendard"/>
+                <a:ea typeface="Pretendard"/>
+                <a:cs typeface="Pretendard"/>
               </a:rPr>
               <a:t>전이</a:t>
             </a:r>
@@ -12600,9 +12592,9 @@
                 <a:solidFill>
                   <a:srgbClr val="00B5AC"/>
                 </a:solidFill>
-                <a:latin typeface="페이퍼로지 6 SemiBold"/>
-                <a:ea typeface="페이퍼로지 6 SemiBold"/>
-                <a:cs typeface="페이퍼로지 6 SemiBold"/>
+                <a:latin typeface="Pretendard"/>
+                <a:ea typeface="Pretendard"/>
+                <a:cs typeface="Pretendard"/>
               </a:defRPr>
             </a:pPr>
             <a:r>
@@ -12610,9 +12602,9 @@
                 <a:solidFill>
                   <a:srgbClr val="00B5AC"/>
                 </a:solidFill>
-                <a:latin typeface="페이퍼로지 6 SemiBold"/>
-                <a:ea typeface="페이퍼로지 6 SemiBold"/>
-                <a:cs typeface="페이퍼로지 6 SemiBold"/>
+                <a:latin typeface="Pretendard"/>
+                <a:ea typeface="Pretendard"/>
+                <a:cs typeface="Pretendard"/>
               </a:rPr>
               <a:t>조건</a:t>
             </a:r>
@@ -12669,9 +12661,9 @@
                 <a:solidFill>
                   <a:srgbClr val="FFFFFF"/>
                 </a:solidFill>
-                <a:latin typeface="페이퍼로지 6 SemiBold"/>
-                <a:ea typeface="페이퍼로지 6 SemiBold"/>
-                <a:cs typeface="페이퍼로지 6 SemiBold"/>
+                <a:latin typeface="Pretendard"/>
+                <a:ea typeface="Pretendard"/>
+                <a:cs typeface="Pretendard"/>
               </a:defRPr>
             </a:pPr>
             <a:r>
@@ -12679,11 +12671,11 @@
                 <a:solidFill>
                   <a:srgbClr val="FFFFFF"/>
                 </a:solidFill>
-                <a:latin typeface="페이퍼로지 6 SemiBold"/>
-                <a:ea typeface="페이퍼로지 6 SemiBold"/>
-                <a:cs typeface="페이퍼로지 6 SemiBold"/>
-              </a:rPr>
-              <a:t>사후</a:t>
+                <a:latin typeface="Pretendard"/>
+                <a:ea typeface="Pretendard"/>
+                <a:cs typeface="Pretendard"/>
+              </a:rPr>
+              <a:t>교육 후</a:t>
             </a:r>
           </a:p>
           <a:p xmlns:a="http://schemas.openxmlformats.org/drawingml/2006/main">
@@ -12693,9 +12685,9 @@
                 <a:solidFill>
                   <a:srgbClr val="FFFFFF"/>
                 </a:solidFill>
-                <a:latin typeface="페이퍼로지 6 SemiBold"/>
-                <a:ea typeface="페이퍼로지 6 SemiBold"/>
-                <a:cs typeface="페이퍼로지 6 SemiBold"/>
+                <a:latin typeface="Pretendard"/>
+                <a:ea typeface="Pretendard"/>
+                <a:cs typeface="Pretendard"/>
               </a:defRPr>
             </a:pPr>
             <a:r>
@@ -12703,9 +12695,9 @@
                 <a:solidFill>
                   <a:srgbClr val="FFFFFF"/>
                 </a:solidFill>
-                <a:latin typeface="페이퍼로지 6 SemiBold"/>
-                <a:ea typeface="페이퍼로지 6 SemiBold"/>
-                <a:cs typeface="페이퍼로지 6 SemiBold"/>
+                <a:latin typeface="Pretendard"/>
+                <a:ea typeface="Pretendard"/>
+                <a:cs typeface="Pretendard"/>
               </a:rPr>
               <a:t>재측정</a:t>
             </a:r>
@@ -12756,9 +12748,9 @@
                 <a:solidFill>
                   <a:srgbClr val="00B5AC"/>
                 </a:solidFill>
-                <a:latin typeface="페이퍼로지 6 SemiBold"/>
-                <a:ea typeface="페이퍼로지 6 SemiBold"/>
-                <a:cs typeface="페이퍼로지 6 SemiBold"/>
+                <a:latin typeface="Pretendard"/>
+                <a:ea typeface="Pretendard"/>
+                <a:cs typeface="Pretendard"/>
               </a:defRPr>
             </a:pPr>
             <a:r>
@@ -12766,9 +12758,9 @@
                 <a:solidFill>
                   <a:srgbClr val="00B5AC"/>
                 </a:solidFill>
-                <a:latin typeface="페이퍼로지 6 SemiBold"/>
-                <a:ea typeface="페이퍼로지 6 SemiBold"/>
-                <a:cs typeface="페이퍼로지 6 SemiBold"/>
+                <a:latin typeface="Pretendard"/>
+                <a:ea typeface="Pretendard"/>
+                <a:cs typeface="Pretendard"/>
               </a:rPr>
               <a:t>교육</a:t>
             </a:r>
@@ -12780,9 +12772,9 @@
                 <a:solidFill>
                   <a:srgbClr val="00B5AC"/>
                 </a:solidFill>
-                <a:latin typeface="페이퍼로지 6 SemiBold"/>
-                <a:ea typeface="페이퍼로지 6 SemiBold"/>
-                <a:cs typeface="페이퍼로지 6 SemiBold"/>
+                <a:latin typeface="Pretendard"/>
+                <a:ea typeface="Pretendard"/>
+                <a:cs typeface="Pretendard"/>
               </a:defRPr>
             </a:pPr>
             <a:r>
@@ -12790,9 +12782,9 @@
                 <a:solidFill>
                   <a:srgbClr val="00B5AC"/>
                 </a:solidFill>
-                <a:latin typeface="페이퍼로지 6 SemiBold"/>
-                <a:ea typeface="페이퍼로지 6 SemiBold"/>
-                <a:cs typeface="페이퍼로지 6 SemiBold"/>
+                <a:latin typeface="Pretendard"/>
+                <a:ea typeface="Pretendard"/>
+                <a:cs typeface="Pretendard"/>
               </a:rPr>
               <a:t>보완</a:t>
             </a:r>
@@ -12849,9 +12841,9 @@
                 <a:solidFill>
                   <a:srgbClr val="FFFFFF"/>
                 </a:solidFill>
-                <a:latin typeface="페이퍼로지 6 SemiBold"/>
-                <a:ea typeface="페이퍼로지 6 SemiBold"/>
-                <a:cs typeface="페이퍼로지 6 SemiBold"/>
+                <a:latin typeface="Pretendard"/>
+                <a:ea typeface="Pretendard"/>
+                <a:cs typeface="Pretendard"/>
               </a:defRPr>
             </a:pPr>
             <a:r>
@@ -12859,11 +12851,11 @@
                 <a:solidFill>
                   <a:srgbClr val="FFFFFF"/>
                 </a:solidFill>
-                <a:latin typeface="페이퍼로지 6 SemiBold"/>
-                <a:ea typeface="페이퍼로지 6 SemiBold"/>
-                <a:cs typeface="페이퍼로지 6 SemiBold"/>
-              </a:rPr>
-              <a:t>짝지은</a:t>
+                <a:latin typeface="Pretendard"/>
+                <a:ea typeface="Pretendard"/>
+                <a:cs typeface="Pretendard"/>
+              </a:rPr>
+              <a:t>동일인</a:t>
             </a:r>
           </a:p>
           <a:p xmlns:a="http://schemas.openxmlformats.org/drawingml/2006/main">
@@ -12873,9 +12865,9 @@
                 <a:solidFill>
                   <a:srgbClr val="FFFFFF"/>
                 </a:solidFill>
-                <a:latin typeface="페이퍼로지 6 SemiBold"/>
-                <a:ea typeface="페이퍼로지 6 SemiBold"/>
-                <a:cs typeface="페이퍼로지 6 SemiBold"/>
+                <a:latin typeface="Pretendard"/>
+                <a:ea typeface="Pretendard"/>
+                <a:cs typeface="Pretendard"/>
               </a:defRPr>
             </a:pPr>
             <a:r>
@@ -12883,9 +12875,9 @@
                 <a:solidFill>
                   <a:srgbClr val="FFFFFF"/>
                 </a:solidFill>
-                <a:latin typeface="페이퍼로지 6 SemiBold"/>
-                <a:ea typeface="페이퍼로지 6 SemiBold"/>
-                <a:cs typeface="페이퍼로지 6 SemiBold"/>
+                <a:latin typeface="Pretendard"/>
+                <a:ea typeface="Pretendard"/>
+                <a:cs typeface="Pretendard"/>
               </a:rPr>
               <a:t>변화</a:t>
             </a:r>
@@ -12936,9 +12928,9 @@
                 <a:solidFill>
                   <a:srgbClr val="00B5AC"/>
                 </a:solidFill>
-                <a:latin typeface="페이퍼로지 6 SemiBold"/>
-                <a:ea typeface="페이퍼로지 6 SemiBold"/>
-                <a:cs typeface="페이퍼로지 6 SemiBold"/>
+                <a:latin typeface="Pretendard"/>
+                <a:ea typeface="Pretendard"/>
+                <a:cs typeface="Pretendard"/>
               </a:defRPr>
             </a:pPr>
             <a:r>
@@ -12946,9 +12938,9 @@
                 <a:solidFill>
                   <a:srgbClr val="00B5AC"/>
                 </a:solidFill>
-                <a:latin typeface="페이퍼로지 6 SemiBold"/>
-                <a:ea typeface="페이퍼로지 6 SemiBold"/>
-                <a:cs typeface="페이퍼로지 6 SemiBold"/>
+                <a:latin typeface="Pretendard"/>
+                <a:ea typeface="Pretendard"/>
+                <a:cs typeface="Pretendard"/>
               </a:rPr>
               <a:t>환경</a:t>
             </a:r>
@@ -12960,9 +12952,9 @@
                 <a:solidFill>
                   <a:srgbClr val="00B5AC"/>
                 </a:solidFill>
-                <a:latin typeface="페이퍼로지 6 SemiBold"/>
-                <a:ea typeface="페이퍼로지 6 SemiBold"/>
-                <a:cs typeface="페이퍼로지 6 SemiBold"/>
+                <a:latin typeface="Pretendard"/>
+                <a:ea typeface="Pretendard"/>
+                <a:cs typeface="Pretendard"/>
               </a:defRPr>
             </a:pPr>
             <a:r>
@@ -12970,9 +12962,9 @@
                 <a:solidFill>
                   <a:srgbClr val="00B5AC"/>
                 </a:solidFill>
-                <a:latin typeface="페이퍼로지 6 SemiBold"/>
-                <a:ea typeface="페이퍼로지 6 SemiBold"/>
-                <a:cs typeface="페이퍼로지 6 SemiBold"/>
+                <a:latin typeface="Pretendard"/>
+                <a:ea typeface="Pretendard"/>
+                <a:cs typeface="Pretendard"/>
               </a:rPr>
               <a:t>개선</a:t>
             </a:r>
@@ -13031,9 +13023,9 @@
                 <a:solidFill>
                   <a:srgbClr val="1E2324"/>
                 </a:solidFill>
-                <a:latin typeface="페이퍼로지 5 Medium"/>
-                <a:ea typeface="페이퍼로지 5 Medium"/>
-                <a:cs typeface="페이퍼로지 5 Medium"/>
+                <a:latin typeface="Pretendard"/>
+                <a:ea typeface="Pretendard"/>
+                <a:cs typeface="Pretendard"/>
               </a:defRPr>
             </a:pPr>
             <a:r>
@@ -13041,11 +13033,11 @@
                 <a:solidFill>
                   <a:srgbClr val="1E2324"/>
                 </a:solidFill>
-                <a:latin typeface="페이퍼로지 5 Medium"/>
-                <a:ea typeface="페이퍼로지 5 Medium"/>
-                <a:cs typeface="페이퍼로지 5 Medium"/>
-              </a:rPr>
-              <a:t>개인 순위가 아니라 같은 사람의 전후 변화를 확인</a:t>
+                <a:latin typeface="Pretendard"/>
+                <a:ea typeface="Pretendard"/>
+                <a:cs typeface="Pretendard"/>
+              </a:rPr>
+              <a:t>개인 순위가 아니라 같은 참여자의 교육 전/후 변화를 확인</a:t>
             </a:r>
           </a:p>
         </p:txBody>
@@ -13081,7 +13073,7 @@
           <p:nvPr/>
         </p:nvPicPr>
         <p:blipFill>
-          <a:blip xmlns:r="http://schemas.openxmlformats.org/officeDocument/2006/relationships" xmlns:a="http://schemas.openxmlformats.org/drawingml/2006/main" r:embed="R1eeee3ff54604ab9"/>
+          <a:blip xmlns:r="http://schemas.openxmlformats.org/officeDocument/2006/relationships" xmlns:a="http://schemas.openxmlformats.org/drawingml/2006/main" r:embed="R93032c74aa6048e8"/>
           <a:srcRect xmlns:a="http://schemas.openxmlformats.org/drawingml/2006/main" l="-2083" t="0" r="-2083" b="0"/>
           <a:stretch xmlns:a="http://schemas.openxmlformats.org/drawingml/2006/main"/>
         </p:blipFill>
@@ -13131,9 +13123,9 @@
                 <a:solidFill>
                   <a:srgbClr val="0A0E10"/>
                 </a:solidFill>
-                <a:latin typeface="페이퍼로지 2 ExtraLight"/>
-                <a:ea typeface="페이퍼로지 2 ExtraLight"/>
-                <a:cs typeface="페이퍼로지 2 ExtraLight"/>
+                <a:latin typeface="Pretendard"/>
+                <a:ea typeface="Pretendard"/>
+                <a:cs typeface="Pretendard"/>
               </a:defRPr>
             </a:pPr>
             <a:r>
@@ -13141,9 +13133,9 @@
                 <a:solidFill>
                   <a:srgbClr val="0A0E10"/>
                 </a:solidFill>
-                <a:latin typeface="페이퍼로지 2 ExtraLight"/>
-                <a:ea typeface="페이퍼로지 2 ExtraLight"/>
-                <a:cs typeface="페이퍼로지 2 ExtraLight"/>
+                <a:latin typeface="Pretendard"/>
+                <a:ea typeface="Pretendard"/>
+                <a:cs typeface="Pretendard"/>
               </a:rPr>
               <a:t>개인순위 · 인사평가 ·</a:t>
             </a:r>
@@ -13155,9 +13147,9 @@
                 <a:solidFill>
                   <a:srgbClr val="0A0E10"/>
                 </a:solidFill>
-                <a:latin typeface="페이퍼로지 2 ExtraLight"/>
-                <a:ea typeface="페이퍼로지 2 ExtraLight"/>
-                <a:cs typeface="페이퍼로지 2 ExtraLight"/>
+                <a:latin typeface="Pretendard"/>
+                <a:ea typeface="Pretendard"/>
+                <a:cs typeface="Pretendard"/>
               </a:defRPr>
             </a:pPr>
             <a:r>
@@ -13165,11 +13157,11 @@
                 <a:solidFill>
                   <a:srgbClr val="0A0E10"/>
                 </a:solidFill>
-                <a:latin typeface="페이퍼로지 6 SemiBold"/>
-                <a:ea typeface="페이퍼로지 6 SemiBold"/>
-                <a:cs typeface="페이퍼로지 6 SemiBold"/>
-              </a:rPr>
-              <a:t>소수집단 공개는 하지 않습니다</a:t>
+                <a:latin typeface="Pretendard"/>
+                <a:ea typeface="Pretendard"/>
+                <a:cs typeface="Pretendard"/>
+              </a:rPr>
+              <a:t>5명 미만 결과는 공개하지 않습니다</a:t>
             </a:r>
           </a:p>
         </p:txBody>
@@ -13210,9 +13202,9 @@
                 <a:solidFill>
                   <a:srgbClr val="6C7476"/>
                 </a:solidFill>
-                <a:latin typeface="페이퍼로지 3 Light"/>
-                <a:ea typeface="페이퍼로지 3 Light"/>
-                <a:cs typeface="페이퍼로지 3 Light"/>
+                <a:latin typeface="Pretendard"/>
+                <a:ea typeface="Pretendard"/>
+                <a:cs typeface="Pretendard"/>
               </a:defRPr>
             </a:pPr>
             <a:r>
@@ -13220,11 +13212,11 @@
                 <a:solidFill>
                   <a:srgbClr val="6C7476"/>
                 </a:solidFill>
-                <a:latin typeface="페이퍼로지 3 Light"/>
-                <a:ea typeface="페이퍼로지 3 Light"/>
-                <a:cs typeface="페이퍼로지 3 Light"/>
-              </a:rPr>
-              <a:t>교육개발용 자기보고 전후 평가입니다. 아래 여섯 가지 경계를 지켜 사용합니다.</a:t>
+                <a:latin typeface="Pretendard"/>
+                <a:ea typeface="Pretendard"/>
+                <a:cs typeface="Pretendard"/>
+              </a:rPr>
+              <a:t>자기보고 교육 전/후 평가입니다. 아래 여섯 가지 원칙을 지켜 사용합니다.</a:t>
             </a:r>
           </a:p>
         </p:txBody>
@@ -13307,9 +13299,9 @@
                 <a:solidFill>
                   <a:srgbClr val="00B5AC"/>
                 </a:solidFill>
-                <a:latin typeface="페이퍼로지 5 Medium"/>
-                <a:ea typeface="페이퍼로지 5 Medium"/>
-                <a:cs typeface="페이퍼로지 5 Medium"/>
+                <a:latin typeface="Pretendard"/>
+                <a:ea typeface="Pretendard"/>
+                <a:cs typeface="Pretendard"/>
               </a:defRPr>
             </a:pPr>
             <a:r>
@@ -13317,9 +13309,9 @@
                 <a:solidFill>
                   <a:srgbClr val="00B5AC"/>
                 </a:solidFill>
-                <a:latin typeface="페이퍼로지 5 Medium"/>
-                <a:ea typeface="페이퍼로지 5 Medium"/>
-                <a:cs typeface="페이퍼로지 5 Medium"/>
+                <a:latin typeface="Pretendard"/>
+                <a:ea typeface="Pretendard"/>
+                <a:cs typeface="Pretendard"/>
               </a:rPr>
               <a:t>01</a:t>
             </a:r>
@@ -13362,9 +13354,9 @@
                 <a:solidFill>
                   <a:srgbClr val="0A0E10"/>
                 </a:solidFill>
-                <a:latin typeface="페이퍼로지 5 Medium"/>
-                <a:ea typeface="페이퍼로지 5 Medium"/>
-                <a:cs typeface="페이퍼로지 5 Medium"/>
+                <a:latin typeface="Pretendard"/>
+                <a:ea typeface="Pretendard"/>
+                <a:cs typeface="Pretendard"/>
               </a:defRPr>
             </a:pPr>
             <a:r>
@@ -13372,9 +13364,9 @@
                 <a:solidFill>
                   <a:srgbClr val="0A0E10"/>
                 </a:solidFill>
-                <a:latin typeface="페이퍼로지 5 Medium"/>
-                <a:ea typeface="페이퍼로지 5 Medium"/>
-                <a:cs typeface="페이퍼로지 5 Medium"/>
+                <a:latin typeface="Pretendard"/>
+                <a:ea typeface="Pretendard"/>
+                <a:cs typeface="Pretendard"/>
               </a:rPr>
               <a:t>개인순위 없음</a:t>
             </a:r>
@@ -13417,9 +13409,9 @@
                 <a:solidFill>
                   <a:srgbClr val="6C7476"/>
                 </a:solidFill>
-                <a:latin typeface="페이퍼로지 4 Regular"/>
-                <a:ea typeface="페이퍼로지 4 Regular"/>
-                <a:cs typeface="페이퍼로지 4 Regular"/>
+                <a:latin typeface="Pretendard"/>
+                <a:ea typeface="Pretendard"/>
+                <a:cs typeface="Pretendard"/>
               </a:defRPr>
             </a:pPr>
             <a:r>
@@ -13427,9 +13419,9 @@
                 <a:solidFill>
                   <a:srgbClr val="6C7476"/>
                 </a:solidFill>
-                <a:latin typeface="페이퍼로지 4 Regular"/>
-                <a:ea typeface="페이퍼로지 4 Regular"/>
-                <a:cs typeface="페이퍼로지 4 Regular"/>
+                <a:latin typeface="Pretendard"/>
+                <a:ea typeface="Pretendard"/>
+                <a:cs typeface="Pretendard"/>
               </a:rPr>
               <a:t>백분위 · 규준 아님</a:t>
             </a:r>
@@ -13514,9 +13506,9 @@
                 <a:solidFill>
                   <a:srgbClr val="00B5AC"/>
                 </a:solidFill>
-                <a:latin typeface="페이퍼로지 5 Medium"/>
-                <a:ea typeface="페이퍼로지 5 Medium"/>
-                <a:cs typeface="페이퍼로지 5 Medium"/>
+                <a:latin typeface="Pretendard"/>
+                <a:ea typeface="Pretendard"/>
+                <a:cs typeface="Pretendard"/>
               </a:defRPr>
             </a:pPr>
             <a:r>
@@ -13524,9 +13516,9 @@
                 <a:solidFill>
                   <a:srgbClr val="00B5AC"/>
                 </a:solidFill>
-                <a:latin typeface="페이퍼로지 5 Medium"/>
-                <a:ea typeface="페이퍼로지 5 Medium"/>
-                <a:cs typeface="페이퍼로지 5 Medium"/>
+                <a:latin typeface="Pretendard"/>
+                <a:ea typeface="Pretendard"/>
+                <a:cs typeface="Pretendard"/>
               </a:rPr>
               <a:t>02</a:t>
             </a:r>
@@ -13569,9 +13561,9 @@
                 <a:solidFill>
                   <a:srgbClr val="0A0E10"/>
                 </a:solidFill>
-                <a:latin typeface="페이퍼로지 5 Medium"/>
-                <a:ea typeface="페이퍼로지 5 Medium"/>
-                <a:cs typeface="페이퍼로지 5 Medium"/>
+                <a:latin typeface="Pretendard"/>
+                <a:ea typeface="Pretendard"/>
+                <a:cs typeface="Pretendard"/>
               </a:defRPr>
             </a:pPr>
             <a:r>
@@ -13579,9 +13571,9 @@
                 <a:solidFill>
                   <a:srgbClr val="0A0E10"/>
                 </a:solidFill>
-                <a:latin typeface="페이퍼로지 5 Medium"/>
-                <a:ea typeface="페이퍼로지 5 Medium"/>
-                <a:cs typeface="페이퍼로지 5 Medium"/>
+                <a:latin typeface="Pretendard"/>
+                <a:ea typeface="Pretendard"/>
+                <a:cs typeface="Pretendard"/>
               </a:rPr>
               <a:t>인사평가 금지</a:t>
             </a:r>
@@ -13624,9 +13616,9 @@
                 <a:solidFill>
                   <a:srgbClr val="6C7476"/>
                 </a:solidFill>
-                <a:latin typeface="페이퍼로지 4 Regular"/>
-                <a:ea typeface="페이퍼로지 4 Regular"/>
-                <a:cs typeface="페이퍼로지 4 Regular"/>
+                <a:latin typeface="Pretendard"/>
+                <a:ea typeface="Pretendard"/>
+                <a:cs typeface="Pretendard"/>
               </a:defRPr>
             </a:pPr>
             <a:r>
@@ -13634,9 +13626,9 @@
                 <a:solidFill>
                   <a:srgbClr val="6C7476"/>
                 </a:solidFill>
-                <a:latin typeface="페이퍼로지 4 Regular"/>
-                <a:ea typeface="페이퍼로지 4 Regular"/>
-                <a:cs typeface="페이퍼로지 4 Regular"/>
+                <a:latin typeface="Pretendard"/>
+                <a:ea typeface="Pretendard"/>
+                <a:cs typeface="Pretendard"/>
               </a:rPr>
               <a:t>채용 · 승진 · 보상 금지</a:t>
             </a:r>
@@ -13721,9 +13713,9 @@
                 <a:solidFill>
                   <a:srgbClr val="00B5AC"/>
                 </a:solidFill>
-                <a:latin typeface="페이퍼로지 5 Medium"/>
-                <a:ea typeface="페이퍼로지 5 Medium"/>
-                <a:cs typeface="페이퍼로지 5 Medium"/>
+                <a:latin typeface="Pretendard"/>
+                <a:ea typeface="Pretendard"/>
+                <a:cs typeface="Pretendard"/>
               </a:defRPr>
             </a:pPr>
             <a:r>
@@ -13731,9 +13723,9 @@
                 <a:solidFill>
                   <a:srgbClr val="00B5AC"/>
                 </a:solidFill>
-                <a:latin typeface="페이퍼로지 5 Medium"/>
-                <a:ea typeface="페이퍼로지 5 Medium"/>
-                <a:cs typeface="페이퍼로지 5 Medium"/>
+                <a:latin typeface="Pretendard"/>
+                <a:ea typeface="Pretendard"/>
+                <a:cs typeface="Pretendard"/>
               </a:rPr>
               <a:t>03</a:t>
             </a:r>
@@ -13776,9 +13768,9 @@
                 <a:solidFill>
                   <a:srgbClr val="0A0E10"/>
                 </a:solidFill>
-                <a:latin typeface="페이퍼로지 5 Medium"/>
-                <a:ea typeface="페이퍼로지 5 Medium"/>
-                <a:cs typeface="페이퍼로지 5 Medium"/>
+                <a:latin typeface="Pretendard"/>
+                <a:ea typeface="Pretendard"/>
+                <a:cs typeface="Pretendard"/>
               </a:defRPr>
             </a:pPr>
             <a:r>
@@ -13786,9 +13778,9 @@
                 <a:solidFill>
                   <a:srgbClr val="0A0E10"/>
                 </a:solidFill>
-                <a:latin typeface="페이퍼로지 5 Medium"/>
-                <a:ea typeface="페이퍼로지 5 Medium"/>
-                <a:cs typeface="페이퍼로지 5 Medium"/>
+                <a:latin typeface="Pretendard"/>
+                <a:ea typeface="Pretendard"/>
+                <a:cs typeface="Pretendard"/>
               </a:rPr>
               <a:t>개인결과 공유는 선택</a:t>
             </a:r>
@@ -13831,9 +13823,9 @@
                 <a:solidFill>
                   <a:srgbClr val="6C7476"/>
                 </a:solidFill>
-                <a:latin typeface="페이퍼로지 4 Regular"/>
-                <a:ea typeface="페이퍼로지 4 Regular"/>
-                <a:cs typeface="페이퍼로지 4 Regular"/>
+                <a:latin typeface="Pretendard"/>
+                <a:ea typeface="Pretendard"/>
+                <a:cs typeface="Pretendard"/>
               </a:defRPr>
             </a:pPr>
             <a:r>
@@ -13841,9 +13833,9 @@
                 <a:solidFill>
                   <a:srgbClr val="6C7476"/>
                 </a:solidFill>
-                <a:latin typeface="페이퍼로지 4 Regular"/>
-                <a:ea typeface="페이퍼로지 4 Regular"/>
-                <a:cs typeface="페이퍼로지 4 Regular"/>
+                <a:latin typeface="Pretendard"/>
+                <a:ea typeface="Pretendard"/>
+                <a:cs typeface="Pretendard"/>
               </a:rPr>
               <a:t>본인 동의 필요</a:t>
             </a:r>
@@ -13928,9 +13920,9 @@
                 <a:solidFill>
                   <a:srgbClr val="00B5AC"/>
                 </a:solidFill>
-                <a:latin typeface="페이퍼로지 5 Medium"/>
-                <a:ea typeface="페이퍼로지 5 Medium"/>
-                <a:cs typeface="페이퍼로지 5 Medium"/>
+                <a:latin typeface="Pretendard"/>
+                <a:ea typeface="Pretendard"/>
+                <a:cs typeface="Pretendard"/>
               </a:defRPr>
             </a:pPr>
             <a:r>
@@ -13938,9 +13930,9 @@
                 <a:solidFill>
                   <a:srgbClr val="00B5AC"/>
                 </a:solidFill>
-                <a:latin typeface="페이퍼로지 5 Medium"/>
-                <a:ea typeface="페이퍼로지 5 Medium"/>
-                <a:cs typeface="페이퍼로지 5 Medium"/>
+                <a:latin typeface="Pretendard"/>
+                <a:ea typeface="Pretendard"/>
+                <a:cs typeface="Pretendard"/>
               </a:rPr>
               <a:t>04</a:t>
             </a:r>
@@ -13983,9 +13975,9 @@
                 <a:solidFill>
                   <a:srgbClr val="0A0E10"/>
                 </a:solidFill>
-                <a:latin typeface="페이퍼로지 5 Medium"/>
-                <a:ea typeface="페이퍼로지 5 Medium"/>
-                <a:cs typeface="페이퍼로지 5 Medium"/>
+                <a:latin typeface="Pretendard"/>
+                <a:ea typeface="Pretendard"/>
+                <a:cs typeface="Pretendard"/>
               </a:defRPr>
             </a:pPr>
             <a:r>
@@ -13993,11 +13985,11 @@
                 <a:solidFill>
                   <a:srgbClr val="0A0E10"/>
                 </a:solidFill>
-                <a:latin typeface="페이퍼로지 5 Medium"/>
-                <a:ea typeface="페이퍼로지 5 Medium"/>
-                <a:cs typeface="페이퍼로지 5 Medium"/>
-              </a:rPr>
-              <a:t>N&lt;5 비공개</a:t>
+                <a:latin typeface="Pretendard"/>
+                <a:ea typeface="Pretendard"/>
+                <a:cs typeface="Pretendard"/>
+              </a:rPr>
+              <a:t>5명 미만 비공개</a:t>
             </a:r>
           </a:p>
         </p:txBody>
@@ -14038,9 +14030,9 @@
                 <a:solidFill>
                   <a:srgbClr val="6C7476"/>
                 </a:solidFill>
-                <a:latin typeface="페이퍼로지 4 Regular"/>
-                <a:ea typeface="페이퍼로지 4 Regular"/>
-                <a:cs typeface="페이퍼로지 4 Regular"/>
+                <a:latin typeface="Pretendard"/>
+                <a:ea typeface="Pretendard"/>
+                <a:cs typeface="Pretendard"/>
               </a:defRPr>
             </a:pPr>
             <a:r>
@@ -14048,11 +14040,11 @@
                 <a:solidFill>
                   <a:srgbClr val="6C7476"/>
                 </a:solidFill>
-                <a:latin typeface="페이퍼로지 4 Regular"/>
-                <a:ea typeface="페이퍼로지 4 Regular"/>
-                <a:cs typeface="페이퍼로지 4 Regular"/>
-              </a:rPr>
-              <a:t>공개 최소기준일 뿐</a:t>
+                <a:latin typeface="Pretendard"/>
+                <a:ea typeface="Pretendard"/>
+                <a:cs typeface="Pretendard"/>
+              </a:rPr>
+              <a:t>개인정보 보호 최소기준</a:t>
             </a:r>
           </a:p>
         </p:txBody>
@@ -14135,9 +14127,9 @@
                 <a:solidFill>
                   <a:srgbClr val="00B5AC"/>
                 </a:solidFill>
-                <a:latin typeface="페이퍼로지 5 Medium"/>
-                <a:ea typeface="페이퍼로지 5 Medium"/>
-                <a:cs typeface="페이퍼로지 5 Medium"/>
+                <a:latin typeface="Pretendard"/>
+                <a:ea typeface="Pretendard"/>
+                <a:cs typeface="Pretendard"/>
               </a:defRPr>
             </a:pPr>
             <a:r>
@@ -14145,9 +14137,9 @@
                 <a:solidFill>
                   <a:srgbClr val="00B5AC"/>
                 </a:solidFill>
-                <a:latin typeface="페이퍼로지 5 Medium"/>
-                <a:ea typeface="페이퍼로지 5 Medium"/>
-                <a:cs typeface="페이퍼로지 5 Medium"/>
+                <a:latin typeface="Pretendard"/>
+                <a:ea typeface="Pretendard"/>
+                <a:cs typeface="Pretendard"/>
               </a:rPr>
               <a:t>05</a:t>
             </a:r>
@@ -14190,9 +14182,9 @@
                 <a:solidFill>
                   <a:srgbClr val="0A0E10"/>
                 </a:solidFill>
-                <a:latin typeface="페이퍼로지 5 Medium"/>
-                <a:ea typeface="페이퍼로지 5 Medium"/>
-                <a:cs typeface="페이퍼로지 5 Medium"/>
+                <a:latin typeface="Pretendard"/>
+                <a:ea typeface="Pretendard"/>
+                <a:cs typeface="Pretendard"/>
               </a:defRPr>
             </a:pPr>
             <a:r>
@@ -14200,11 +14192,11 @@
                 <a:solidFill>
                   <a:srgbClr val="0A0E10"/>
                 </a:solidFill>
-                <a:latin typeface="페이퍼로지 5 Medium"/>
-                <a:ea typeface="페이퍼로지 5 Medium"/>
-                <a:cs typeface="페이퍼로지 5 Medium"/>
-              </a:rPr>
-              <a:t>공개 데모 실데이터 금지</a:t>
+                <a:latin typeface="Pretendard"/>
+                <a:ea typeface="Pretendard"/>
+                <a:cs typeface="Pretendard"/>
+              </a:rPr>
+              <a:t>공개 데모 개인정보 금지</a:t>
             </a:r>
           </a:p>
         </p:txBody>
@@ -14245,9 +14237,9 @@
                 <a:solidFill>
                   <a:srgbClr val="6C7476"/>
                 </a:solidFill>
-                <a:latin typeface="페이퍼로지 4 Regular"/>
-                <a:ea typeface="페이퍼로지 4 Regular"/>
-                <a:cs typeface="페이퍼로지 4 Regular"/>
+                <a:latin typeface="Pretendard"/>
+                <a:ea typeface="Pretendard"/>
+                <a:cs typeface="Pretendard"/>
               </a:defRPr>
             </a:pPr>
             <a:r>
@@ -14255,11 +14247,11 @@
                 <a:solidFill>
                   <a:srgbClr val="6C7476"/>
                 </a:solidFill>
-                <a:latin typeface="페이퍼로지 4 Regular"/>
-                <a:ea typeface="페이퍼로지 4 Regular"/>
-                <a:cs typeface="페이퍼로지 4 Regular"/>
-              </a:rPr>
-              <a:t>세션에만 임시 저장</a:t>
+                <a:latin typeface="Pretendard"/>
+                <a:ea typeface="Pretendard"/>
+                <a:cs typeface="Pretendard"/>
+              </a:rPr>
+              <a:t>합성 데이터만 저장</a:t>
             </a:r>
           </a:p>
         </p:txBody>
@@ -14342,9 +14334,9 @@
                 <a:solidFill>
                   <a:srgbClr val="00B5AC"/>
                 </a:solidFill>
-                <a:latin typeface="페이퍼로지 5 Medium"/>
-                <a:ea typeface="페이퍼로지 5 Medium"/>
-                <a:cs typeface="페이퍼로지 5 Medium"/>
+                <a:latin typeface="Pretendard"/>
+                <a:ea typeface="Pretendard"/>
+                <a:cs typeface="Pretendard"/>
               </a:defRPr>
             </a:pPr>
             <a:r>
@@ -14352,9 +14344,9 @@
                 <a:solidFill>
                   <a:srgbClr val="00B5AC"/>
                 </a:solidFill>
-                <a:latin typeface="페이퍼로지 5 Medium"/>
-                <a:ea typeface="페이퍼로지 5 Medium"/>
-                <a:cs typeface="페이퍼로지 5 Medium"/>
+                <a:latin typeface="Pretendard"/>
+                <a:ea typeface="Pretendard"/>
+                <a:cs typeface="Pretendard"/>
               </a:rPr>
               <a:t>06</a:t>
             </a:r>
@@ -14397,9 +14389,9 @@
                 <a:solidFill>
                   <a:srgbClr val="0A0E10"/>
                 </a:solidFill>
-                <a:latin typeface="페이퍼로지 5 Medium"/>
-                <a:ea typeface="페이퍼로지 5 Medium"/>
-                <a:cs typeface="페이퍼로지 5 Medium"/>
+                <a:latin typeface="Pretendard"/>
+                <a:ea typeface="Pretendard"/>
+                <a:cs typeface="Pretendard"/>
               </a:defRPr>
             </a:pPr>
             <a:r>
@@ -14407,9 +14399,9 @@
                 <a:solidFill>
                   <a:srgbClr val="0A0E10"/>
                 </a:solidFill>
-                <a:latin typeface="페이퍼로지 5 Medium"/>
-                <a:ea typeface="페이퍼로지 5 Medium"/>
-                <a:cs typeface="페이퍼로지 5 Medium"/>
+                <a:latin typeface="Pretendard"/>
+                <a:ea typeface="Pretendard"/>
+                <a:cs typeface="Pretendard"/>
               </a:rPr>
               <a:t>인과효과 아님</a:t>
             </a:r>
@@ -14452,9 +14444,9 @@
                 <a:solidFill>
                   <a:srgbClr val="6C7476"/>
                 </a:solidFill>
-                <a:latin typeface="페이퍼로지 4 Regular"/>
-                <a:ea typeface="페이퍼로지 4 Regular"/>
-                <a:cs typeface="페이퍼로지 4 Regular"/>
+                <a:latin typeface="Pretendard"/>
+                <a:ea typeface="Pretendard"/>
+                <a:cs typeface="Pretendard"/>
               </a:defRPr>
             </a:pPr>
             <a:r>
@@ -14462,9 +14454,9 @@
                 <a:solidFill>
                   <a:srgbClr val="6C7476"/>
                 </a:solidFill>
-                <a:latin typeface="페이퍼로지 4 Regular"/>
-                <a:ea typeface="페이퍼로지 4 Regular"/>
-                <a:cs typeface="페이퍼로지 4 Regular"/>
+                <a:latin typeface="Pretendard"/>
+                <a:ea typeface="Pretendard"/>
+                <a:cs typeface="Pretendard"/>
               </a:rPr>
               <a:t>비교집단 없으면 관찰 변화</a:t>
             </a:r>
@@ -14507,9 +14499,9 @@
                 <a:solidFill>
                   <a:srgbClr val="98A4A6"/>
                 </a:solidFill>
-                <a:latin typeface="페이퍼로지 4 Regular"/>
-                <a:ea typeface="페이퍼로지 4 Regular"/>
-                <a:cs typeface="페이퍼로지 4 Regular"/>
+                <a:latin typeface="Pretendard"/>
+                <a:ea typeface="Pretendard"/>
+                <a:cs typeface="Pretendard"/>
               </a:defRPr>
             </a:pPr>
             <a:r>
@@ -14517,9 +14509,9 @@
                 <a:solidFill>
                   <a:srgbClr val="98A4A6"/>
                 </a:solidFill>
-                <a:latin typeface="페이퍼로지 4 Regular"/>
-                <a:ea typeface="페이퍼로지 4 Regular"/>
-                <a:cs typeface="페이퍼로지 4 Regular"/>
+                <a:latin typeface="Pretendard"/>
+                <a:ea typeface="Pretendard"/>
+                <a:cs typeface="Pretendard"/>
               </a:rPr>
               <a:t>05</a:t>
             </a:r>
@@ -14614,9 +14606,9 @@
                 <a:solidFill>
                   <a:srgbClr val="00B5AC"/>
                 </a:solidFill>
-                <a:latin typeface="페이퍼로지 4 Regular"/>
-                <a:ea typeface="페이퍼로지 4 Regular"/>
-                <a:cs typeface="페이퍼로지 4 Regular"/>
+                <a:latin typeface="Pretendard"/>
+                <a:ea typeface="Pretendard"/>
+                <a:cs typeface="Pretendard"/>
               </a:defRPr>
             </a:pPr>
             <a:r>
@@ -14624,9 +14616,9 @@
                 <a:solidFill>
                   <a:srgbClr val="00B5AC"/>
                 </a:solidFill>
-                <a:latin typeface="페이퍼로지 4 Regular"/>
-                <a:ea typeface="페이퍼로지 4 Regular"/>
-                <a:cs typeface="페이퍼로지 4 Regular"/>
+                <a:latin typeface="Pretendard"/>
+                <a:ea typeface="Pretendard"/>
+                <a:cs typeface="Pretendard"/>
               </a:rPr>
               <a:t>OVERVIEW</a:t>
             </a:r>
@@ -14673,9 +14665,9 @@
                 <a:solidFill>
                   <a:srgbClr val="6C7476"/>
                 </a:solidFill>
-                <a:latin typeface="페이퍼로지 4 Regular"/>
-                <a:ea typeface="페이퍼로지 4 Regular"/>
-                <a:cs typeface="페이퍼로지 4 Regular"/>
+                <a:latin typeface="Pretendard"/>
+                <a:ea typeface="Pretendard"/>
+                <a:cs typeface="Pretendard"/>
               </a:defRPr>
             </a:lvl1pPr>
           </a:lstStyle>
@@ -14686,9 +14678,9 @@
                 <a:solidFill>
                   <a:srgbClr val="6C7476"/>
                 </a:solidFill>
-                <a:latin typeface="페이퍼로지 4 Regular"/>
-                <a:ea typeface="페이퍼로지 4 Regular"/>
-                <a:cs typeface="페이퍼로지 4 Regular"/>
+                <a:latin typeface="Pretendard"/>
+                <a:ea typeface="Pretendard"/>
+                <a:cs typeface="Pretendard"/>
               </a:defRPr>
             </a:pPr>
             <a:r>
@@ -14696,9 +14688,9 @@
                 <a:solidFill>
                   <a:srgbClr val="6C7476"/>
                 </a:solidFill>
-                <a:latin typeface="페이퍼로지 4 Regular"/>
-                <a:ea typeface="페이퍼로지 4 Regular"/>
-                <a:cs typeface="페이퍼로지 4 Regular"/>
+                <a:latin typeface="Pretendard"/>
+                <a:ea typeface="Pretendard"/>
+                <a:cs typeface="Pretendard"/>
               </a:rPr>
               <a:t>SAFE USE</a:t>
             </a:r>
@@ -14828,7 +14820,7 @@
           <p:nvPr/>
         </p:nvPicPr>
         <p:blipFill>
-          <a:blip xmlns:r="http://schemas.openxmlformats.org/officeDocument/2006/relationships" xmlns:a="http://schemas.openxmlformats.org/drawingml/2006/main" r:embed="Re0df7fe853d04b90"/>
+          <a:blip xmlns:r="http://schemas.openxmlformats.org/officeDocument/2006/relationships" xmlns:a="http://schemas.openxmlformats.org/drawingml/2006/main" r:embed="R3625117aaacb4e9c"/>
           <a:srcRect xmlns:a="http://schemas.openxmlformats.org/drawingml/2006/main" l="-2083" t="0" r="-2083" b="0"/>
           <a:stretch xmlns:a="http://schemas.openxmlformats.org/drawingml/2006/main"/>
         </p:blipFill>
@@ -14851,7 +14843,7 @@
           <p:nvPr/>
         </p:nvPicPr>
         <p:blipFill>
-          <a:blip xmlns:r="http://schemas.openxmlformats.org/officeDocument/2006/relationships" xmlns:a="http://schemas.openxmlformats.org/drawingml/2006/main" r:embed="R9b1e5c3ec9e9496d"/>
+          <a:blip xmlns:r="http://schemas.openxmlformats.org/officeDocument/2006/relationships" xmlns:a="http://schemas.openxmlformats.org/drawingml/2006/main" r:embed="Refad31cb31334474"/>
           <a:srcRect xmlns:a="http://schemas.openxmlformats.org/drawingml/2006/main" l="-2083" t="0" r="-2083" b="0"/>
           <a:stretch xmlns:a="http://schemas.openxmlformats.org/drawingml/2006/main"/>
         </p:blipFill>
@@ -15158,9 +15150,9 @@
                 <a:solidFill>
                   <a:srgbClr val="0A0E10"/>
                 </a:solidFill>
-                <a:latin typeface="페이퍼로지 2 ExtraLight"/>
-                <a:ea typeface="페이퍼로지 2 ExtraLight"/>
-                <a:cs typeface="페이퍼로지 2 ExtraLight"/>
+                <a:latin typeface="Pretendard"/>
+                <a:ea typeface="Pretendard"/>
+                <a:cs typeface="Pretendard"/>
               </a:defRPr>
             </a:pPr>
             <a:r>
@@ -15168,11 +15160,11 @@
                 <a:solidFill>
                   <a:srgbClr val="0A0E10"/>
                 </a:solidFill>
-                <a:latin typeface="페이퍼로지 2 ExtraLight"/>
-                <a:ea typeface="페이퍼로지 2 ExtraLight"/>
-                <a:cs typeface="페이퍼로지 2 ExtraLight"/>
-              </a:rPr>
-              <a:t>프로젝트 코드로 사전·사후를</a:t>
+                <a:latin typeface="Pretendard"/>
+                <a:ea typeface="Pretendard"/>
+                <a:cs typeface="Pretendard"/>
+              </a:rPr>
+              <a:t>프로젝트 코드로 교육 전/후를</a:t>
             </a:r>
           </a:p>
           <a:p xmlns:a="http://schemas.openxmlformats.org/drawingml/2006/main">
@@ -15182,9 +15174,9 @@
                 <a:solidFill>
                   <a:srgbClr val="0A0E10"/>
                 </a:solidFill>
-                <a:latin typeface="페이퍼로지 2 ExtraLight"/>
-                <a:ea typeface="페이퍼로지 2 ExtraLight"/>
-                <a:cs typeface="페이퍼로지 2 ExtraLight"/>
+                <a:latin typeface="Pretendard"/>
+                <a:ea typeface="Pretendard"/>
+                <a:cs typeface="Pretendard"/>
               </a:defRPr>
             </a:pPr>
             <a:r>
@@ -15192,9 +15184,9 @@
                 <a:solidFill>
                   <a:srgbClr val="0A0E10"/>
                 </a:solidFill>
-                <a:latin typeface="페이퍼로지 6 SemiBold"/>
-                <a:ea typeface="페이퍼로지 6 SemiBold"/>
-                <a:cs typeface="페이퍼로지 6 SemiBold"/>
+                <a:latin typeface="Pretendard"/>
+                <a:ea typeface="Pretendard"/>
+                <a:cs typeface="Pretendard"/>
               </a:rPr>
               <a:t>같은 기록에 연결합니다</a:t>
             </a:r>
@@ -15237,9 +15229,9 @@
                 <a:solidFill>
                   <a:srgbClr val="6C7476"/>
                 </a:solidFill>
-                <a:latin typeface="페이퍼로지 3 Light"/>
-                <a:ea typeface="페이퍼로지 3 Light"/>
-                <a:cs typeface="페이퍼로지 3 Light"/>
+                <a:latin typeface="Pretendard"/>
+                <a:ea typeface="Pretendard"/>
+                <a:cs typeface="Pretendard"/>
               </a:defRPr>
             </a:pPr>
             <a:r>
@@ -15247,11 +15239,11 @@
                 <a:solidFill>
                   <a:srgbClr val="6C7476"/>
                 </a:solidFill>
-                <a:latin typeface="페이퍼로지 3 Light"/>
-                <a:ea typeface="페이퍼로지 3 Light"/>
-                <a:cs typeface="페이퍼로지 3 Light"/>
-              </a:rPr>
-              <a:t>설정 저장 뒤 프로젝트 코드를 공유합니다. 참여자는 접속코드와 같은 ID로 사전·사후검사를 연결합니다.</a:t>
+                <a:latin typeface="Pretendard"/>
+                <a:ea typeface="Pretendard"/>
+                <a:cs typeface="Pretendard"/>
+              </a:rPr>
+              <a:t>설정 저장 뒤 프로젝트 코드를 공유합니다. 참여자는 프로젝트 코드·접속코드·동일한 교육 참여자 ID로 교육 전/후 검사를 연결합니다.</a:t>
             </a:r>
           </a:p>
         </p:txBody>
@@ -15292,9 +15284,9 @@
                 <a:solidFill>
                   <a:srgbClr val="FFFFFF"/>
                 </a:solidFill>
-                <a:latin typeface="페이퍼로지 5 Medium"/>
-                <a:ea typeface="페이퍼로지 5 Medium"/>
-                <a:cs typeface="페이퍼로지 5 Medium"/>
+                <a:latin typeface="Pretendard"/>
+                <a:ea typeface="Pretendard"/>
+                <a:cs typeface="Pretendard"/>
               </a:defRPr>
             </a:pPr>
             <a:r>
@@ -15302,9 +15294,9 @@
                 <a:solidFill>
                   <a:srgbClr val="FFFFFF"/>
                 </a:solidFill>
-                <a:latin typeface="페이퍼로지 5 Medium"/>
-                <a:ea typeface="페이퍼로지 5 Medium"/>
-                <a:cs typeface="페이퍼로지 5 Medium"/>
+                <a:latin typeface="Pretendard"/>
+                <a:ea typeface="Pretendard"/>
+                <a:cs typeface="Pretendard"/>
               </a:rPr>
               <a:t>01</a:t>
             </a:r>
@@ -15347,9 +15339,9 @@
                 <a:solidFill>
                   <a:srgbClr val="00B5AC"/>
                 </a:solidFill>
-                <a:latin typeface="페이퍼로지 5 Medium"/>
-                <a:ea typeface="페이퍼로지 5 Medium"/>
-                <a:cs typeface="페이퍼로지 5 Medium"/>
+                <a:latin typeface="Pretendard"/>
+                <a:ea typeface="Pretendard"/>
+                <a:cs typeface="Pretendard"/>
               </a:defRPr>
             </a:pPr>
             <a:r>
@@ -15357,9 +15349,9 @@
                 <a:solidFill>
                   <a:srgbClr val="00B5AC"/>
                 </a:solidFill>
-                <a:latin typeface="페이퍼로지 5 Medium"/>
-                <a:ea typeface="페이퍼로지 5 Medium"/>
-                <a:cs typeface="페이퍼로지 5 Medium"/>
+                <a:latin typeface="Pretendard"/>
+                <a:ea typeface="Pretendard"/>
+                <a:cs typeface="Pretendard"/>
               </a:rPr>
               <a:t>02</a:t>
             </a:r>
@@ -15402,9 +15394,9 @@
                 <a:solidFill>
                   <a:srgbClr val="00B5AC"/>
                 </a:solidFill>
-                <a:latin typeface="페이퍼로지 5 Medium"/>
-                <a:ea typeface="페이퍼로지 5 Medium"/>
-                <a:cs typeface="페이퍼로지 5 Medium"/>
+                <a:latin typeface="Pretendard"/>
+                <a:ea typeface="Pretendard"/>
+                <a:cs typeface="Pretendard"/>
               </a:defRPr>
             </a:pPr>
             <a:r>
@@ -15412,9 +15404,9 @@
                 <a:solidFill>
                   <a:srgbClr val="00B5AC"/>
                 </a:solidFill>
-                <a:latin typeface="페이퍼로지 5 Medium"/>
-                <a:ea typeface="페이퍼로지 5 Medium"/>
-                <a:cs typeface="페이퍼로지 5 Medium"/>
+                <a:latin typeface="Pretendard"/>
+                <a:ea typeface="Pretendard"/>
+                <a:cs typeface="Pretendard"/>
               </a:rPr>
               <a:t>03</a:t>
             </a:r>
@@ -15457,9 +15449,9 @@
                 <a:solidFill>
                   <a:srgbClr val="00B5AC"/>
                 </a:solidFill>
-                <a:latin typeface="페이퍼로지 5 Medium"/>
-                <a:ea typeface="페이퍼로지 5 Medium"/>
-                <a:cs typeface="페이퍼로지 5 Medium"/>
+                <a:latin typeface="Pretendard"/>
+                <a:ea typeface="Pretendard"/>
+                <a:cs typeface="Pretendard"/>
               </a:defRPr>
             </a:pPr>
             <a:r>
@@ -15467,9 +15459,9 @@
                 <a:solidFill>
                   <a:srgbClr val="00B5AC"/>
                 </a:solidFill>
-                <a:latin typeface="페이퍼로지 5 Medium"/>
-                <a:ea typeface="페이퍼로지 5 Medium"/>
-                <a:cs typeface="페이퍼로지 5 Medium"/>
+                <a:latin typeface="Pretendard"/>
+                <a:ea typeface="Pretendard"/>
+                <a:cs typeface="Pretendard"/>
               </a:rPr>
               <a:t>04</a:t>
             </a:r>
@@ -15512,9 +15504,9 @@
                 <a:solidFill>
                   <a:srgbClr val="00B5AC"/>
                 </a:solidFill>
-                <a:latin typeface="페이퍼로지 5 Medium"/>
-                <a:ea typeface="페이퍼로지 5 Medium"/>
-                <a:cs typeface="페이퍼로지 5 Medium"/>
+                <a:latin typeface="Pretendard"/>
+                <a:ea typeface="Pretendard"/>
+                <a:cs typeface="Pretendard"/>
               </a:defRPr>
             </a:pPr>
             <a:r>
@@ -15522,9 +15514,9 @@
                 <a:solidFill>
                   <a:srgbClr val="00B5AC"/>
                 </a:solidFill>
-                <a:latin typeface="페이퍼로지 5 Medium"/>
-                <a:ea typeface="페이퍼로지 5 Medium"/>
-                <a:cs typeface="페이퍼로지 5 Medium"/>
+                <a:latin typeface="Pretendard"/>
+                <a:ea typeface="Pretendard"/>
+                <a:cs typeface="Pretendard"/>
               </a:rPr>
               <a:t>05</a:t>
             </a:r>
@@ -15567,9 +15559,9 @@
                 <a:solidFill>
                   <a:srgbClr val="00B5AC"/>
                 </a:solidFill>
-                <a:latin typeface="페이퍼로지 5 Medium"/>
-                <a:ea typeface="페이퍼로지 5 Medium"/>
-                <a:cs typeface="페이퍼로지 5 Medium"/>
+                <a:latin typeface="Pretendard"/>
+                <a:ea typeface="Pretendard"/>
+                <a:cs typeface="Pretendard"/>
               </a:defRPr>
             </a:pPr>
             <a:r>
@@ -15577,9 +15569,9 @@
                 <a:solidFill>
                   <a:srgbClr val="00B5AC"/>
                 </a:solidFill>
-                <a:latin typeface="페이퍼로지 5 Medium"/>
-                <a:ea typeface="페이퍼로지 5 Medium"/>
-                <a:cs typeface="페이퍼로지 5 Medium"/>
+                <a:latin typeface="Pretendard"/>
+                <a:ea typeface="Pretendard"/>
+                <a:cs typeface="Pretendard"/>
               </a:rPr>
               <a:t>06</a:t>
             </a:r>
@@ -15622,9 +15614,9 @@
                 <a:solidFill>
                   <a:srgbClr val="0A0E10"/>
                 </a:solidFill>
-                <a:latin typeface="페이퍼로지 5 Medium"/>
-                <a:ea typeface="페이퍼로지 5 Medium"/>
-                <a:cs typeface="페이퍼로지 5 Medium"/>
+                <a:latin typeface="Pretendard"/>
+                <a:ea typeface="Pretendard"/>
+                <a:cs typeface="Pretendard"/>
               </a:defRPr>
             </a:pPr>
             <a:r>
@@ -15632,9 +15624,9 @@
                 <a:solidFill>
                   <a:srgbClr val="0A0E10"/>
                 </a:solidFill>
-                <a:latin typeface="페이퍼로지 5 Medium"/>
-                <a:ea typeface="페이퍼로지 5 Medium"/>
-                <a:cs typeface="페이퍼로지 5 Medium"/>
+                <a:latin typeface="Pretendard"/>
+                <a:ea typeface="Pretendard"/>
+                <a:cs typeface="Pretendard"/>
               </a:rPr>
               <a:t>교육·평가 설정</a:t>
             </a:r>
@@ -15677,9 +15669,9 @@
                 <a:solidFill>
                   <a:srgbClr val="6C7476"/>
                 </a:solidFill>
-                <a:latin typeface="페이퍼로지 4 Regular"/>
-                <a:ea typeface="페이퍼로지 4 Regular"/>
-                <a:cs typeface="페이퍼로지 4 Regular"/>
+                <a:latin typeface="Pretendard"/>
+                <a:ea typeface="Pretendard"/>
+                <a:cs typeface="Pretendard"/>
               </a:defRPr>
             </a:pPr>
             <a:r>
@@ -15687,9 +15679,9 @@
                 <a:solidFill>
                   <a:srgbClr val="6C7476"/>
                 </a:solidFill>
-                <a:latin typeface="페이퍼로지 4 Regular"/>
-                <a:ea typeface="페이퍼로지 4 Regular"/>
-                <a:cs typeface="페이퍼로지 4 Regular"/>
+                <a:latin typeface="Pretendard"/>
+                <a:ea typeface="Pretendard"/>
+                <a:cs typeface="Pretendard"/>
               </a:rPr>
               <a:t>프로젝트 코드 · 기간 · 역량</a:t>
             </a:r>
@@ -15732,9 +15724,9 @@
                 <a:solidFill>
                   <a:srgbClr val="0A0E10"/>
                 </a:solidFill>
-                <a:latin typeface="페이퍼로지 5 Medium"/>
-                <a:ea typeface="페이퍼로지 5 Medium"/>
-                <a:cs typeface="페이퍼로지 5 Medium"/>
+                <a:latin typeface="Pretendard"/>
+                <a:ea typeface="Pretendard"/>
+                <a:cs typeface="Pretendard"/>
               </a:defRPr>
             </a:pPr>
             <a:r>
@@ -15742,11 +15734,11 @@
                 <a:solidFill>
                   <a:srgbClr val="0A0E10"/>
                 </a:solidFill>
-                <a:latin typeface="페이퍼로지 5 Medium"/>
-                <a:ea typeface="페이퍼로지 5 Medium"/>
-                <a:cs typeface="페이퍼로지 5 Medium"/>
-              </a:rPr>
-              <a:t>사전검사</a:t>
+                <a:latin typeface="Pretendard"/>
+                <a:ea typeface="Pretendard"/>
+                <a:cs typeface="Pretendard"/>
+              </a:rPr>
+              <a:t>교육 전 검사</a:t>
             </a:r>
           </a:p>
         </p:txBody>
@@ -15787,9 +15779,9 @@
                 <a:solidFill>
                   <a:srgbClr val="6C7476"/>
                 </a:solidFill>
-                <a:latin typeface="페이퍼로지 4 Regular"/>
-                <a:ea typeface="페이퍼로지 4 Regular"/>
-                <a:cs typeface="페이퍼로지 4 Regular"/>
+                <a:latin typeface="Pretendard"/>
+                <a:ea typeface="Pretendard"/>
+                <a:cs typeface="Pretendard"/>
               </a:defRPr>
             </a:pPr>
             <a:r>
@@ -15797,9 +15789,9 @@
                 <a:solidFill>
                   <a:srgbClr val="6C7476"/>
                 </a:solidFill>
-                <a:latin typeface="페이퍼로지 4 Regular"/>
-                <a:ea typeface="페이퍼로지 4 Regular"/>
-                <a:cs typeface="페이퍼로지 4 Regular"/>
+                <a:latin typeface="Pretendard"/>
+                <a:ea typeface="Pretendard"/>
+                <a:cs typeface="Pretendard"/>
               </a:rPr>
               <a:t>접속코드 · 참여자 ID</a:t>
             </a:r>
@@ -15842,9 +15834,9 @@
                 <a:solidFill>
                   <a:srgbClr val="00B5AC"/>
                 </a:solidFill>
-                <a:latin typeface="페이퍼로지 5 Medium"/>
-                <a:ea typeface="페이퍼로지 5 Medium"/>
-                <a:cs typeface="페이퍼로지 5 Medium"/>
+                <a:latin typeface="Pretendard"/>
+                <a:ea typeface="Pretendard"/>
+                <a:cs typeface="Pretendard"/>
               </a:defRPr>
             </a:pPr>
             <a:r>
@@ -15852,9 +15844,9 @@
                 <a:solidFill>
                   <a:srgbClr val="00B5AC"/>
                 </a:solidFill>
-                <a:latin typeface="페이퍼로지 5 Medium"/>
-                <a:ea typeface="페이퍼로지 5 Medium"/>
-                <a:cs typeface="페이퍼로지 5 Medium"/>
+                <a:latin typeface="Pretendard"/>
+                <a:ea typeface="Pretendard"/>
+                <a:cs typeface="Pretendard"/>
               </a:rPr>
               <a:t>완료 기록 저장</a:t>
             </a:r>
@@ -15897,9 +15889,9 @@
                 <a:solidFill>
                   <a:srgbClr val="1E2324"/>
                 </a:solidFill>
-                <a:latin typeface="페이퍼로지 4 Regular"/>
-                <a:ea typeface="페이퍼로지 4 Regular"/>
-                <a:cs typeface="페이퍼로지 4 Regular"/>
+                <a:latin typeface="Pretendard"/>
+                <a:ea typeface="Pretendard"/>
+                <a:cs typeface="Pretendard"/>
               </a:defRPr>
             </a:pPr>
             <a:r>
@@ -15907,11 +15899,11 @@
                 <a:solidFill>
                   <a:srgbClr val="1E2324"/>
                 </a:solidFill>
-                <a:latin typeface="페이퍼로지 4 Regular"/>
-                <a:ea typeface="페이퍼로지 4 Regular"/>
-                <a:cs typeface="페이퍼로지 4 Regular"/>
-              </a:rPr>
-              <a:t>사전 완료 시 GitHub 저장</a:t>
+                <a:latin typeface="Pretendard"/>
+                <a:ea typeface="Pretendard"/>
+                <a:cs typeface="Pretendard"/>
+              </a:rPr>
+              <a:t>교육 전 완료 시 GitHub 저장</a:t>
             </a:r>
           </a:p>
         </p:txBody>
@@ -15952,9 +15944,9 @@
                 <a:solidFill>
                   <a:srgbClr val="00B5AC"/>
                 </a:solidFill>
-                <a:latin typeface="페이퍼로지 5 Medium"/>
-                <a:ea typeface="페이퍼로지 5 Medium"/>
-                <a:cs typeface="페이퍼로지 5 Medium"/>
+                <a:latin typeface="Pretendard"/>
+                <a:ea typeface="Pretendard"/>
+                <a:cs typeface="Pretendard"/>
               </a:defRPr>
             </a:pPr>
             <a:r>
@@ -15962,11 +15954,11 @@
                 <a:solidFill>
                   <a:srgbClr val="00B5AC"/>
                 </a:solidFill>
-                <a:latin typeface="페이퍼로지 5 Medium"/>
-                <a:ea typeface="페이퍼로지 5 Medium"/>
-                <a:cs typeface="페이퍼로지 5 Medium"/>
-              </a:rPr>
-              <a:t>8~10주 후 복원</a:t>
+                <a:latin typeface="Pretendard"/>
+                <a:ea typeface="Pretendard"/>
+                <a:cs typeface="Pretendard"/>
+              </a:rPr>
+              <a:t>교육 중 현업 적용</a:t>
             </a:r>
           </a:p>
         </p:txBody>
@@ -16007,9 +15999,9 @@
                 <a:solidFill>
                   <a:srgbClr val="1E2324"/>
                 </a:solidFill>
-                <a:latin typeface="페이퍼로지 4 Regular"/>
-                <a:ea typeface="페이퍼로지 4 Regular"/>
-                <a:cs typeface="페이퍼로지 4 Regular"/>
+                <a:latin typeface="Pretendard"/>
+                <a:ea typeface="Pretendard"/>
+                <a:cs typeface="Pretendard"/>
               </a:defRPr>
             </a:pPr>
             <a:r>
@@ -16017,9 +16009,9 @@
                 <a:solidFill>
                   <a:srgbClr val="1E2324"/>
                 </a:solidFill>
-                <a:latin typeface="페이퍼로지 4 Regular"/>
-                <a:ea typeface="페이퍼로지 4 Regular"/>
-                <a:cs typeface="페이퍼로지 4 Regular"/>
+                <a:latin typeface="Pretendard"/>
+                <a:ea typeface="Pretendard"/>
+                <a:cs typeface="Pretendard"/>
               </a:rPr>
               <a:t>프로젝트 코드 · 동일 ID</a:t>
             </a:r>
@@ -16062,9 +16054,9 @@
                 <a:solidFill>
                   <a:srgbClr val="00B5AC"/>
                 </a:solidFill>
-                <a:latin typeface="페이퍼로지 5 Medium"/>
-                <a:ea typeface="페이퍼로지 5 Medium"/>
-                <a:cs typeface="페이퍼로지 5 Medium"/>
+                <a:latin typeface="Pretendard"/>
+                <a:ea typeface="Pretendard"/>
+                <a:cs typeface="Pretendard"/>
               </a:defRPr>
             </a:pPr>
             <a:r>
@@ -16072,11 +16064,11 @@
                 <a:solidFill>
                   <a:srgbClr val="00B5AC"/>
                 </a:solidFill>
-                <a:latin typeface="페이퍼로지 5 Medium"/>
-                <a:ea typeface="페이퍼로지 5 Medium"/>
-                <a:cs typeface="페이퍼로지 5 Medium"/>
-              </a:rPr>
-              <a:t>사후검사</a:t>
+                <a:latin typeface="Pretendard"/>
+                <a:ea typeface="Pretendard"/>
+                <a:cs typeface="Pretendard"/>
+              </a:rPr>
+              <a:t>교육 후 검사</a:t>
             </a:r>
           </a:p>
         </p:txBody>
@@ -16117,9 +16109,9 @@
                 <a:solidFill>
                   <a:srgbClr val="1E2324"/>
                 </a:solidFill>
-                <a:latin typeface="페이퍼로지 4 Regular"/>
-                <a:ea typeface="페이퍼로지 4 Regular"/>
-                <a:cs typeface="페이퍼로지 4 Regular"/>
+                <a:latin typeface="Pretendard"/>
+                <a:ea typeface="Pretendard"/>
+                <a:cs typeface="Pretendard"/>
               </a:defRPr>
             </a:pPr>
             <a:r>
@@ -16127,9 +16119,9 @@
                 <a:solidFill>
                   <a:srgbClr val="1E2324"/>
                 </a:solidFill>
-                <a:latin typeface="페이퍼로지 4 Regular"/>
-                <a:ea typeface="페이퍼로지 4 Regular"/>
-                <a:cs typeface="페이퍼로지 4 Regular"/>
+                <a:latin typeface="Pretendard"/>
+                <a:ea typeface="Pretendard"/>
+                <a:cs typeface="Pretendard"/>
               </a:rPr>
               <a:t>같은 문항 · 최근 8주</a:t>
             </a:r>
@@ -16172,9 +16164,9 @@
                 <a:solidFill>
                   <a:srgbClr val="0A0E10"/>
                 </a:solidFill>
-                <a:latin typeface="페이퍼로지 5 Medium"/>
-                <a:ea typeface="페이퍼로지 5 Medium"/>
-                <a:cs typeface="페이퍼로지 5 Medium"/>
+                <a:latin typeface="Pretendard"/>
+                <a:ea typeface="Pretendard"/>
+                <a:cs typeface="Pretendard"/>
               </a:defRPr>
             </a:pPr>
             <a:r>
@@ -16182,11 +16174,11 @@
                 <a:solidFill>
                   <a:srgbClr val="0A0E10"/>
                 </a:solidFill>
-                <a:latin typeface="페이퍼로지 5 Medium"/>
-                <a:ea typeface="페이퍼로지 5 Medium"/>
-                <a:cs typeface="페이퍼로지 5 Medium"/>
-              </a:rPr>
-              <a:t>전후 비교</a:t>
+                <a:latin typeface="Pretendard"/>
+                <a:ea typeface="Pretendard"/>
+                <a:cs typeface="Pretendard"/>
+              </a:rPr>
+              <a:t>교육 전/후 비교</a:t>
             </a:r>
           </a:p>
         </p:txBody>
@@ -16227,9 +16219,9 @@
                 <a:solidFill>
                   <a:srgbClr val="6C7476"/>
                 </a:solidFill>
-                <a:latin typeface="페이퍼로지 4 Regular"/>
-                <a:ea typeface="페이퍼로지 4 Regular"/>
-                <a:cs typeface="페이퍼로지 4 Regular"/>
+                <a:latin typeface="Pretendard"/>
+                <a:ea typeface="Pretendard"/>
+                <a:cs typeface="Pretendard"/>
               </a:defRPr>
             </a:pPr>
             <a:r>
@@ -16237,11 +16229,11 @@
                 <a:solidFill>
                   <a:srgbClr val="6C7476"/>
                 </a:solidFill>
-                <a:latin typeface="페이퍼로지 4 Regular"/>
-                <a:ea typeface="페이퍼로지 4 Regular"/>
-                <a:cs typeface="페이퍼로지 4 Regular"/>
-              </a:rPr>
-              <a:t>짝지은 변화 · 전이</a:t>
+                <a:latin typeface="Pretendard"/>
+                <a:ea typeface="Pretendard"/>
+                <a:cs typeface="Pretendard"/>
+              </a:rPr>
+              <a:t>동일 참여자 변화 · 전이</a:t>
             </a:r>
           </a:p>
         </p:txBody>
@@ -16282,9 +16274,9 @@
                 <a:solidFill>
                   <a:srgbClr val="98A4A6"/>
                 </a:solidFill>
-                <a:latin typeface="페이퍼로지 4 Regular"/>
-                <a:ea typeface="페이퍼로지 4 Regular"/>
-                <a:cs typeface="페이퍼로지 4 Regular"/>
+                <a:latin typeface="Pretendard"/>
+                <a:ea typeface="Pretendard"/>
+                <a:cs typeface="Pretendard"/>
               </a:defRPr>
             </a:pPr>
             <a:r>
@@ -16292,9 +16284,9 @@
                 <a:solidFill>
                   <a:srgbClr val="98A4A6"/>
                 </a:solidFill>
-                <a:latin typeface="페이퍼로지 4 Regular"/>
-                <a:ea typeface="페이퍼로지 4 Regular"/>
-                <a:cs typeface="페이퍼로지 4 Regular"/>
+                <a:latin typeface="Pretendard"/>
+                <a:ea typeface="Pretendard"/>
+                <a:cs typeface="Pretendard"/>
               </a:rPr>
               <a:t>06</a:t>
             </a:r>
@@ -16341,9 +16333,9 @@
                 <a:solidFill>
                   <a:srgbClr val="6C7476"/>
                 </a:solidFill>
-                <a:latin typeface="페이퍼로지 4 Regular"/>
-                <a:ea typeface="페이퍼로지 4 Regular"/>
-                <a:cs typeface="페이퍼로지 4 Regular"/>
+                <a:latin typeface="Pretendard"/>
+                <a:ea typeface="Pretendard"/>
+                <a:cs typeface="Pretendard"/>
               </a:defRPr>
             </a:lvl1pPr>
           </a:lstStyle>
@@ -16354,9 +16346,9 @@
                 <a:solidFill>
                   <a:srgbClr val="6C7476"/>
                 </a:solidFill>
-                <a:latin typeface="페이퍼로지 4 Regular"/>
-                <a:ea typeface="페이퍼로지 4 Regular"/>
-                <a:cs typeface="페이퍼로지 4 Regular"/>
+                <a:latin typeface="Pretendard"/>
+                <a:ea typeface="Pretendard"/>
+                <a:cs typeface="Pretendard"/>
               </a:defRPr>
             </a:pPr>
             <a:r>
@@ -16364,9 +16356,9 @@
                 <a:solidFill>
                   <a:srgbClr val="6C7476"/>
                 </a:solidFill>
-                <a:latin typeface="페이퍼로지 4 Regular"/>
-                <a:ea typeface="페이퍼로지 4 Regular"/>
-                <a:cs typeface="페이퍼로지 4 Regular"/>
+                <a:latin typeface="Pretendard"/>
+                <a:ea typeface="Pretendard"/>
+                <a:cs typeface="Pretendard"/>
               </a:rPr>
               <a:t>HOW IT WORKS</a:t>
             </a:r>
@@ -16411,9 +16403,9 @@
                 <a:solidFill>
                   <a:srgbClr val="00B5AC"/>
                 </a:solidFill>
-                <a:latin typeface="페이퍼로지 4 Regular"/>
-                <a:ea typeface="페이퍼로지 4 Regular"/>
-                <a:cs typeface="페이퍼로지 4 Regular"/>
+                <a:latin typeface="Pretendard"/>
+                <a:ea typeface="Pretendard"/>
+                <a:cs typeface="Pretendard"/>
               </a:defRPr>
             </a:pPr>
             <a:r>
@@ -16421,9 +16413,9 @@
                 <a:solidFill>
                   <a:srgbClr val="00B5AC"/>
                 </a:solidFill>
-                <a:latin typeface="페이퍼로지 4 Regular"/>
-                <a:ea typeface="페이퍼로지 4 Regular"/>
-                <a:cs typeface="페이퍼로지 4 Regular"/>
+                <a:latin typeface="Pretendard"/>
+                <a:ea typeface="Pretendard"/>
+                <a:cs typeface="Pretendard"/>
               </a:rPr>
               <a:t>PROCESS</a:t>
             </a:r>
@@ -16520,9 +16512,9 @@
                 <a:solidFill>
                   <a:srgbClr val="0A0E10"/>
                 </a:solidFill>
-                <a:latin typeface="페이퍼로지 4 Regular"/>
-                <a:ea typeface="페이퍼로지 4 Regular"/>
-                <a:cs typeface="페이퍼로지 4 Regular"/>
+                <a:latin typeface="Pretendard"/>
+                <a:ea typeface="Pretendard"/>
+                <a:cs typeface="Pretendard"/>
               </a:defRPr>
             </a:pPr>
             <a:r>
@@ -16530,9 +16522,9 @@
                 <a:solidFill>
                   <a:srgbClr val="00B5AC"/>
                 </a:solidFill>
-                <a:latin typeface="페이퍼로지 4 Regular"/>
-                <a:ea typeface="페이퍼로지 4 Regular"/>
-                <a:cs typeface="페이퍼로지 4 Regular"/>
+                <a:latin typeface="Pretendard"/>
+                <a:ea typeface="Pretendard"/>
+                <a:cs typeface="Pretendard"/>
               </a:rPr>
               <a:t>1. 프로젝트 설정</a:t>
             </a:r>
@@ -16544,9 +16536,9 @@
                 <a:solidFill>
                   <a:srgbClr val="0A0E10"/>
                 </a:solidFill>
-                <a:latin typeface="페이퍼로지 4 Regular"/>
-                <a:ea typeface="페이퍼로지 4 Regular"/>
-                <a:cs typeface="페이퍼로지 4 Regular"/>
+                <a:latin typeface="Pretendard"/>
+                <a:ea typeface="Pretendard"/>
+                <a:cs typeface="Pretendard"/>
               </a:defRPr>
             </a:pPr>
             <a:r>
@@ -16554,9 +16546,9 @@
                 <a:solidFill>
                   <a:srgbClr val="0A0E10"/>
                 </a:solidFill>
-                <a:latin typeface="페이퍼로지 6 SemiBold"/>
-                <a:ea typeface="페이퍼로지 6 SemiBold"/>
-                <a:cs typeface="페이퍼로지 6 SemiBold"/>
+                <a:latin typeface="Pretendard"/>
+                <a:ea typeface="Pretendard"/>
+                <a:cs typeface="Pretendard"/>
               </a:rPr>
               <a:t>코드 공유</a:t>
             </a:r>
@@ -16615,9 +16607,9 @@
                 <a:solidFill>
                   <a:srgbClr val="0A0E10"/>
                 </a:solidFill>
-                <a:latin typeface="페이퍼로지 4 Regular"/>
-                <a:ea typeface="페이퍼로지 4 Regular"/>
-                <a:cs typeface="페이퍼로지 4 Regular"/>
+                <a:latin typeface="Pretendard"/>
+                <a:ea typeface="Pretendard"/>
+                <a:cs typeface="Pretendard"/>
               </a:defRPr>
             </a:pPr>
             <a:r>
@@ -16625,11 +16617,11 @@
                 <a:solidFill>
                   <a:srgbClr val="00B5AC"/>
                 </a:solidFill>
-                <a:latin typeface="페이퍼로지 4 Regular"/>
-                <a:ea typeface="페이퍼로지 4 Regular"/>
-                <a:cs typeface="페이퍼로지 4 Regular"/>
-              </a:rPr>
-              <a:t>2. 사전 완료</a:t>
+                <a:latin typeface="Pretendard"/>
+                <a:ea typeface="Pretendard"/>
+                <a:cs typeface="Pretendard"/>
+              </a:rPr>
+              <a:t>2. 교육 전 완료</a:t>
             </a:r>
           </a:p>
           <a:p xmlns:a="http://schemas.openxmlformats.org/drawingml/2006/main">
@@ -16639,9 +16631,9 @@
                 <a:solidFill>
                   <a:srgbClr val="0A0E10"/>
                 </a:solidFill>
-                <a:latin typeface="페이퍼로지 4 Regular"/>
-                <a:ea typeface="페이퍼로지 4 Regular"/>
-                <a:cs typeface="페이퍼로지 4 Regular"/>
+                <a:latin typeface="Pretendard"/>
+                <a:ea typeface="Pretendard"/>
+                <a:cs typeface="Pretendard"/>
               </a:defRPr>
             </a:pPr>
             <a:r>
@@ -16649,9 +16641,9 @@
                 <a:solidFill>
                   <a:srgbClr val="0A0E10"/>
                 </a:solidFill>
-                <a:latin typeface="페이퍼로지 6 SemiBold"/>
-                <a:ea typeface="페이퍼로지 6 SemiBold"/>
-                <a:cs typeface="페이퍼로지 6 SemiBold"/>
+                <a:latin typeface="Pretendard"/>
+                <a:ea typeface="Pretendard"/>
+                <a:cs typeface="Pretendard"/>
               </a:rPr>
               <a:t>GitHub 저장</a:t>
             </a:r>
@@ -16708,9 +16700,9 @@
                 <a:solidFill>
                   <a:srgbClr val="0A0E10"/>
                 </a:solidFill>
-                <a:latin typeface="페이퍼로지 4 Regular"/>
-                <a:ea typeface="페이퍼로지 4 Regular"/>
-                <a:cs typeface="페이퍼로지 4 Regular"/>
+                <a:latin typeface="Pretendard"/>
+                <a:ea typeface="Pretendard"/>
+                <a:cs typeface="Pretendard"/>
               </a:defRPr>
             </a:pPr>
             <a:r>
@@ -16718,9 +16710,9 @@
                 <a:solidFill>
                   <a:srgbClr val="0A0E10"/>
                 </a:solidFill>
-                <a:latin typeface="페이퍼로지 6 SemiBold"/>
-                <a:ea typeface="페이퍼로지 6 SemiBold"/>
-                <a:cs typeface="페이퍼로지 6 SemiBold"/>
+                <a:latin typeface="Pretendard"/>
+                <a:ea typeface="Pretendard"/>
+                <a:cs typeface="Pretendard"/>
               </a:rPr>
               <a:t>TAP</a:t>
             </a:r>
@@ -16732,9 +16724,9 @@
                 <a:solidFill>
                   <a:srgbClr val="0A0E10"/>
                 </a:solidFill>
-                <a:latin typeface="페이퍼로지 4 Regular"/>
-                <a:ea typeface="페이퍼로지 4 Regular"/>
-                <a:cs typeface="페이퍼로지 4 Regular"/>
+                <a:latin typeface="Pretendard"/>
+                <a:ea typeface="Pretendard"/>
+                <a:cs typeface="Pretendard"/>
               </a:defRPr>
             </a:pPr>
             <a:r>
@@ -16742,11 +16734,11 @@
                 <a:solidFill>
                   <a:srgbClr val="00B5AC"/>
                 </a:solidFill>
-                <a:latin typeface="페이퍼로지 4 Regular"/>
-                <a:ea typeface="페이퍼로지 4 Regular"/>
-                <a:cs typeface="페이퍼로지 4 Regular"/>
-              </a:rPr>
-              <a:t>전후 비교</a:t>
+                <a:latin typeface="Pretendard"/>
+                <a:ea typeface="Pretendard"/>
+                <a:cs typeface="Pretendard"/>
+              </a:rPr>
+              <a:t>전/후 비교</a:t>
             </a:r>
           </a:p>
         </p:txBody>
@@ -16803,9 +16795,9 @@
                 <a:solidFill>
                   <a:srgbClr val="0A0E10"/>
                 </a:solidFill>
-                <a:latin typeface="페이퍼로지 4 Regular"/>
-                <a:ea typeface="페이퍼로지 4 Regular"/>
-                <a:cs typeface="페이퍼로지 4 Regular"/>
+                <a:latin typeface="Pretendard"/>
+                <a:ea typeface="Pretendard"/>
+                <a:cs typeface="Pretendard"/>
               </a:defRPr>
             </a:pPr>
             <a:r>
@@ -16813,9 +16805,9 @@
                 <a:solidFill>
                   <a:srgbClr val="00B5AC"/>
                 </a:solidFill>
-                <a:latin typeface="페이퍼로지 4 Regular"/>
-                <a:ea typeface="페이퍼로지 4 Regular"/>
-                <a:cs typeface="페이퍼로지 4 Regular"/>
+                <a:latin typeface="Pretendard"/>
+                <a:ea typeface="Pretendard"/>
+                <a:cs typeface="Pretendard"/>
               </a:rPr>
               <a:t>3–4. 같은 ID</a:t>
             </a:r>
@@ -16827,9 +16819,9 @@
                 <a:solidFill>
                   <a:srgbClr val="0A0E10"/>
                 </a:solidFill>
-                <a:latin typeface="페이퍼로지 4 Regular"/>
-                <a:ea typeface="페이퍼로지 4 Regular"/>
-                <a:cs typeface="페이퍼로지 4 Regular"/>
+                <a:latin typeface="Pretendard"/>
+                <a:ea typeface="Pretendard"/>
+                <a:cs typeface="Pretendard"/>
               </a:defRPr>
             </a:pPr>
             <a:r>
@@ -16837,11 +16829,11 @@
                 <a:solidFill>
                   <a:srgbClr val="0A0E10"/>
                 </a:solidFill>
-                <a:latin typeface="페이퍼로지 6 SemiBold"/>
-                <a:ea typeface="페이퍼로지 6 SemiBold"/>
-                <a:cs typeface="페이퍼로지 6 SemiBold"/>
-              </a:rPr>
-              <a:t>복원·사후</a:t>
+                <a:latin typeface="Pretendard"/>
+                <a:ea typeface="Pretendard"/>
+                <a:cs typeface="Pretendard"/>
+              </a:rPr>
+              <a:t>복원·교육 후</a:t>
             </a:r>
           </a:p>
         </p:txBody>
@@ -16969,7 +16961,7 @@
           <p:nvPr/>
         </p:nvPicPr>
         <p:blipFill>
-          <a:blip xmlns:r="http://schemas.openxmlformats.org/officeDocument/2006/relationships" xmlns:a="http://schemas.openxmlformats.org/drawingml/2006/main" r:embed="Reffadb3015b94d56"/>
+          <a:blip xmlns:r="http://schemas.openxmlformats.org/officeDocument/2006/relationships" xmlns:a="http://schemas.openxmlformats.org/drawingml/2006/main" r:embed="R74905c317d4c45f2"/>
           <a:srcRect xmlns:a="http://schemas.openxmlformats.org/drawingml/2006/main" l="-2083" t="0" r="-2083" b="0"/>
           <a:stretch xmlns:a="http://schemas.openxmlformats.org/drawingml/2006/main"/>
         </p:blipFill>
@@ -17065,9 +17057,9 @@
                 <a:solidFill>
                   <a:srgbClr val="6C7476"/>
                 </a:solidFill>
-                <a:latin typeface="페이퍼로지 4 Regular"/>
-                <a:ea typeface="페이퍼로지 4 Regular"/>
-                <a:cs typeface="페이퍼로지 4 Regular"/>
+                <a:latin typeface="Pretendard"/>
+                <a:ea typeface="Pretendard"/>
+                <a:cs typeface="Pretendard"/>
               </a:defRPr>
             </a:lvl1pPr>
           </a:lstStyle>
@@ -17078,9 +17070,9 @@
                 <a:solidFill>
                   <a:srgbClr val="6C7476"/>
                 </a:solidFill>
-                <a:latin typeface="페이퍼로지 4 Regular"/>
-                <a:ea typeface="페이퍼로지 4 Regular"/>
-                <a:cs typeface="페이퍼로지 4 Regular"/>
+                <a:latin typeface="Pretendard"/>
+                <a:ea typeface="Pretendard"/>
+                <a:cs typeface="Pretendard"/>
               </a:defRPr>
             </a:pPr>
             <a:r>
@@ -17088,9 +17080,9 @@
                 <a:solidFill>
                   <a:srgbClr val="6C7476"/>
                 </a:solidFill>
-                <a:latin typeface="페이퍼로지 4 Regular"/>
-                <a:ea typeface="페이퍼로지 4 Regular"/>
-                <a:cs typeface="페이퍼로지 4 Regular"/>
+                <a:latin typeface="Pretendard"/>
+                <a:ea typeface="Pretendard"/>
+                <a:cs typeface="Pretendard"/>
               </a:rPr>
               <a:t>EDUCATION MANAGER</a:t>
             </a:r>
@@ -17133,9 +17125,9 @@
                 <a:solidFill>
                   <a:srgbClr val="0A0E10"/>
                 </a:solidFill>
-                <a:latin typeface="페이퍼로지 2 ExtraLight"/>
-                <a:ea typeface="페이퍼로지 2 ExtraLight"/>
-                <a:cs typeface="페이퍼로지 2 ExtraLight"/>
+                <a:latin typeface="Pretendard"/>
+                <a:ea typeface="Pretendard"/>
+                <a:cs typeface="Pretendard"/>
               </a:defRPr>
             </a:pPr>
             <a:r>
@@ -17143,9 +17135,9 @@
                 <a:solidFill>
                   <a:srgbClr val="0A0E10"/>
                 </a:solidFill>
-                <a:latin typeface="페이퍼로지 2 ExtraLight"/>
-                <a:ea typeface="페이퍼로지 2 ExtraLight"/>
-                <a:cs typeface="페이퍼로지 2 ExtraLight"/>
+                <a:latin typeface="Pretendard"/>
+                <a:ea typeface="Pretendard"/>
+                <a:cs typeface="Pretendard"/>
               </a:rPr>
               <a:t>관리자 대시보드는 완료된</a:t>
             </a:r>
@@ -17157,9 +17149,9 @@
                 <a:solidFill>
                   <a:srgbClr val="0A0E10"/>
                 </a:solidFill>
-                <a:latin typeface="페이퍼로지 2 ExtraLight"/>
-                <a:ea typeface="페이퍼로지 2 ExtraLight"/>
-                <a:cs typeface="페이퍼로지 2 ExtraLight"/>
+                <a:latin typeface="Pretendard"/>
+                <a:ea typeface="Pretendard"/>
+                <a:cs typeface="Pretendard"/>
               </a:defRPr>
             </a:pPr>
             <a:r>
@@ -17167,11 +17159,11 @@
                 <a:solidFill>
                   <a:srgbClr val="0A0E10"/>
                 </a:solidFill>
-                <a:latin typeface="페이퍼로지 6 SemiBold"/>
-                <a:ea typeface="페이퍼로지 6 SemiBold"/>
-                <a:cs typeface="페이퍼로지 6 SemiBold"/>
-              </a:rPr>
-              <a:t>합성데이터를 누적합니다</a:t>
+                <a:latin typeface="Pretendard"/>
+                <a:ea typeface="Pretendard"/>
+                <a:cs typeface="Pretendard"/>
+              </a:rPr>
+              <a:t>합성 데이터를 누적합니다</a:t>
             </a:r>
           </a:p>
         </p:txBody>
@@ -17212,9 +17204,9 @@
                 <a:solidFill>
                   <a:srgbClr val="6C7476"/>
                 </a:solidFill>
-                <a:latin typeface="페이퍼로지 3 Light"/>
-                <a:ea typeface="페이퍼로지 3 Light"/>
-                <a:cs typeface="페이퍼로지 3 Light"/>
+                <a:latin typeface="Pretendard"/>
+                <a:ea typeface="Pretendard"/>
+                <a:cs typeface="Pretendard"/>
               </a:defRPr>
             </a:pPr>
             <a:r>
@@ -17222,11 +17214,11 @@
                 <a:solidFill>
                   <a:srgbClr val="6C7476"/>
                 </a:solidFill>
-                <a:latin typeface="페이퍼로지 3 Light"/>
-                <a:ea typeface="페이퍼로지 3 Light"/>
-                <a:cs typeface="페이퍼로지 3 Light"/>
-              </a:rPr>
-              <a:t>GitHub 저장을 켜면 demo-data 분기의 완료된 사전·사후 스냅샷을 프로젝트 코드 기준으로 합산합니다. 연결이 없거나 오류가 나면 현재 세션 데이터로 전환합니다.</a:t>
+                <a:latin typeface="Pretendard"/>
+                <a:ea typeface="Pretendard"/>
+                <a:cs typeface="Pretendard"/>
+              </a:rPr>
+              <a:t>GitHub 저장을 켜면 demo-data 분기의 완료된 교육 전/후 스냅샷을 프로젝트 코드 기준으로 합산합니다. 연결이 없거나 오류가 나면 현재 세션 데이터로 전환합니다.</a:t>
             </a:r>
           </a:p>
         </p:txBody>
@@ -17309,9 +17301,9 @@
                 <a:solidFill>
                   <a:srgbClr val="0A0E10"/>
                 </a:solidFill>
-                <a:latin typeface="페이퍼로지 5 Medium"/>
-                <a:ea typeface="페이퍼로지 5 Medium"/>
-                <a:cs typeface="페이퍼로지 5 Medium"/>
+                <a:latin typeface="Pretendard"/>
+                <a:ea typeface="Pretendard"/>
+                <a:cs typeface="Pretendard"/>
               </a:defRPr>
             </a:pPr>
             <a:r>
@@ -17319,9 +17311,9 @@
                 <a:solidFill>
                   <a:srgbClr val="0A0E10"/>
                 </a:solidFill>
-                <a:latin typeface="페이퍼로지 5 Medium"/>
-                <a:ea typeface="페이퍼로지 5 Medium"/>
-                <a:cs typeface="페이퍼로지 5 Medium"/>
+                <a:latin typeface="Pretendard"/>
+                <a:ea typeface="Pretendard"/>
+                <a:cs typeface="Pretendard"/>
               </a:rPr>
               <a:t>대시보드 확인</a:t>
             </a:r>
@@ -17406,9 +17398,9 @@
                 <a:solidFill>
                   <a:srgbClr val="00B5AC"/>
                 </a:solidFill>
-                <a:latin typeface="페이퍼로지 5 Medium"/>
-                <a:ea typeface="페이퍼로지 5 Medium"/>
-                <a:cs typeface="페이퍼로지 5 Medium"/>
+                <a:latin typeface="Pretendard"/>
+                <a:ea typeface="Pretendard"/>
+                <a:cs typeface="Pretendard"/>
               </a:defRPr>
             </a:pPr>
             <a:r>
@@ -17416,9 +17408,9 @@
                 <a:solidFill>
                   <a:srgbClr val="00B5AC"/>
                 </a:solidFill>
-                <a:latin typeface="페이퍼로지 5 Medium"/>
-                <a:ea typeface="페이퍼로지 5 Medium"/>
-                <a:cs typeface="페이퍼로지 5 Medium"/>
+                <a:latin typeface="Pretendard"/>
+                <a:ea typeface="Pretendard"/>
+                <a:cs typeface="Pretendard"/>
               </a:rPr>
               <a:t>01</a:t>
             </a:r>
@@ -17461,9 +17453,9 @@
                 <a:solidFill>
                   <a:srgbClr val="1E2324"/>
                 </a:solidFill>
-                <a:latin typeface="페이퍼로지 4 Regular"/>
-                <a:ea typeface="페이퍼로지 4 Regular"/>
-                <a:cs typeface="페이퍼로지 4 Regular"/>
+                <a:latin typeface="Pretendard"/>
+                <a:ea typeface="Pretendard"/>
+                <a:cs typeface="Pretendard"/>
               </a:defRPr>
             </a:pPr>
             <a:r>
@@ -17471,9 +17463,9 @@
                 <a:solidFill>
                   <a:srgbClr val="1E2324"/>
                 </a:solidFill>
-                <a:latin typeface="페이퍼로지 4 Regular"/>
-                <a:ea typeface="페이퍼로지 4 Regular"/>
-                <a:cs typeface="페이퍼로지 4 Regular"/>
+                <a:latin typeface="Pretendard"/>
+                <a:ea typeface="Pretendard"/>
+                <a:cs typeface="Pretendard"/>
               </a:rPr>
               <a:t>누적 프로젝트 · 참여자</a:t>
             </a:r>
@@ -17558,9 +17550,9 @@
                 <a:solidFill>
                   <a:srgbClr val="00B5AC"/>
                 </a:solidFill>
-                <a:latin typeface="페이퍼로지 5 Medium"/>
-                <a:ea typeface="페이퍼로지 5 Medium"/>
-                <a:cs typeface="페이퍼로지 5 Medium"/>
+                <a:latin typeface="Pretendard"/>
+                <a:ea typeface="Pretendard"/>
+                <a:cs typeface="Pretendard"/>
               </a:defRPr>
             </a:pPr>
             <a:r>
@@ -17568,9 +17560,9 @@
                 <a:solidFill>
                   <a:srgbClr val="00B5AC"/>
                 </a:solidFill>
-                <a:latin typeface="페이퍼로지 5 Medium"/>
-                <a:ea typeface="페이퍼로지 5 Medium"/>
-                <a:cs typeface="페이퍼로지 5 Medium"/>
+                <a:latin typeface="Pretendard"/>
+                <a:ea typeface="Pretendard"/>
+                <a:cs typeface="Pretendard"/>
               </a:rPr>
               <a:t>02</a:t>
             </a:r>
@@ -17613,9 +17605,9 @@
                 <a:solidFill>
                   <a:srgbClr val="1E2324"/>
                 </a:solidFill>
-                <a:latin typeface="페이퍼로지 4 Regular"/>
-                <a:ea typeface="페이퍼로지 4 Regular"/>
-                <a:cs typeface="페이퍼로지 4 Regular"/>
+                <a:latin typeface="Pretendard"/>
+                <a:ea typeface="Pretendard"/>
+                <a:cs typeface="Pretendard"/>
               </a:defRPr>
             </a:pPr>
             <a:r>
@@ -17623,11 +17615,11 @@
                 <a:solidFill>
                   <a:srgbClr val="1E2324"/>
                 </a:solidFill>
-                <a:latin typeface="페이퍼로지 4 Regular"/>
-                <a:ea typeface="페이퍼로지 4 Regular"/>
-                <a:cs typeface="페이퍼로지 4 Regular"/>
-              </a:rPr>
-              <a:t>사전·사후 완료 건수</a:t>
+                <a:latin typeface="Pretendard"/>
+                <a:ea typeface="Pretendard"/>
+                <a:cs typeface="Pretendard"/>
+              </a:rPr>
+              <a:t>교육 전/후 완료 건수</a:t>
             </a:r>
           </a:p>
         </p:txBody>
@@ -17668,9 +17660,9 @@
                 <a:solidFill>
                   <a:srgbClr val="00B5AC"/>
                 </a:solidFill>
-                <a:latin typeface="페이퍼로지 5 Medium"/>
-                <a:ea typeface="페이퍼로지 5 Medium"/>
-                <a:cs typeface="페이퍼로지 5 Medium"/>
+                <a:latin typeface="Pretendard"/>
+                <a:ea typeface="Pretendard"/>
+                <a:cs typeface="Pretendard"/>
               </a:defRPr>
             </a:pPr>
             <a:r>
@@ -17678,9 +17670,9 @@
                 <a:solidFill>
                   <a:srgbClr val="00B5AC"/>
                 </a:solidFill>
-                <a:latin typeface="페이퍼로지 5 Medium"/>
-                <a:ea typeface="페이퍼로지 5 Medium"/>
-                <a:cs typeface="페이퍼로지 5 Medium"/>
+                <a:latin typeface="Pretendard"/>
+                <a:ea typeface="Pretendard"/>
+                <a:cs typeface="Pretendard"/>
               </a:rPr>
               <a:t>03</a:t>
             </a:r>
@@ -17723,9 +17715,9 @@
                 <a:solidFill>
                   <a:srgbClr val="1E2324"/>
                 </a:solidFill>
-                <a:latin typeface="페이퍼로지 4 Regular"/>
-                <a:ea typeface="페이퍼로지 4 Regular"/>
-                <a:cs typeface="페이퍼로지 4 Regular"/>
+                <a:latin typeface="Pretendard"/>
+                <a:ea typeface="Pretendard"/>
+                <a:cs typeface="Pretendard"/>
               </a:defRPr>
             </a:pPr>
             <a:r>
@@ -17733,11 +17725,11 @@
                 <a:solidFill>
                   <a:srgbClr val="1E2324"/>
                 </a:solidFill>
-                <a:latin typeface="페이퍼로지 4 Regular"/>
-                <a:ea typeface="페이퍼로지 4 Regular"/>
-                <a:cs typeface="페이퍼로지 4 Regular"/>
-              </a:rPr>
-              <a:t>짝지은 변화 상태</a:t>
+                <a:latin typeface="Pretendard"/>
+                <a:ea typeface="Pretendard"/>
+                <a:cs typeface="Pretendard"/>
+              </a:rPr>
+              <a:t>동일 참여자 변화 상태</a:t>
             </a:r>
           </a:p>
         </p:txBody>
@@ -17820,9 +17812,9 @@
                 <a:solidFill>
                   <a:srgbClr val="0A0E10"/>
                 </a:solidFill>
-                <a:latin typeface="페이퍼로지 5 Medium"/>
-                <a:ea typeface="페이퍼로지 5 Medium"/>
-                <a:cs typeface="페이퍼로지 5 Medium"/>
+                <a:latin typeface="Pretendard"/>
+                <a:ea typeface="Pretendard"/>
+                <a:cs typeface="Pretendard"/>
               </a:defRPr>
             </a:pPr>
             <a:r>
@@ -17830,9 +17822,9 @@
                 <a:solidFill>
                   <a:srgbClr val="0A0E10"/>
                 </a:solidFill>
-                <a:latin typeface="페이퍼로지 5 Medium"/>
-                <a:ea typeface="페이퍼로지 5 Medium"/>
-                <a:cs typeface="페이퍼로지 5 Medium"/>
+                <a:latin typeface="Pretendard"/>
+                <a:ea typeface="Pretendard"/>
+                <a:cs typeface="Pretendard"/>
               </a:rPr>
               <a:t>프로젝트 설정</a:t>
             </a:r>
@@ -17917,9 +17909,9 @@
                 <a:solidFill>
                   <a:srgbClr val="00B5AC"/>
                 </a:solidFill>
-                <a:latin typeface="페이퍼로지 5 Medium"/>
-                <a:ea typeface="페이퍼로지 5 Medium"/>
-                <a:cs typeface="페이퍼로지 5 Medium"/>
+                <a:latin typeface="Pretendard"/>
+                <a:ea typeface="Pretendard"/>
+                <a:cs typeface="Pretendard"/>
               </a:defRPr>
             </a:pPr>
             <a:r>
@@ -17927,9 +17919,9 @@
                 <a:solidFill>
                   <a:srgbClr val="00B5AC"/>
                 </a:solidFill>
-                <a:latin typeface="페이퍼로지 5 Medium"/>
-                <a:ea typeface="페이퍼로지 5 Medium"/>
-                <a:cs typeface="페이퍼로지 5 Medium"/>
+                <a:latin typeface="Pretendard"/>
+                <a:ea typeface="Pretendard"/>
+                <a:cs typeface="Pretendard"/>
               </a:rPr>
               <a:t>01</a:t>
             </a:r>
@@ -17972,9 +17964,9 @@
                 <a:solidFill>
                   <a:srgbClr val="1E2324"/>
                 </a:solidFill>
-                <a:latin typeface="페이퍼로지 4 Regular"/>
-                <a:ea typeface="페이퍼로지 4 Regular"/>
-                <a:cs typeface="페이퍼로지 4 Regular"/>
+                <a:latin typeface="Pretendard"/>
+                <a:ea typeface="Pretendard"/>
+                <a:cs typeface="Pretendard"/>
               </a:defRPr>
             </a:pPr>
             <a:r>
@@ -17982,9 +17974,9 @@
                 <a:solidFill>
                   <a:srgbClr val="1E2324"/>
                 </a:solidFill>
-                <a:latin typeface="페이퍼로지 4 Regular"/>
-                <a:ea typeface="페이퍼로지 4 Regular"/>
-                <a:cs typeface="페이퍼로지 4 Regular"/>
+                <a:latin typeface="Pretendard"/>
+                <a:ea typeface="Pretendard"/>
+                <a:cs typeface="Pretendard"/>
               </a:rPr>
               <a:t>프로젝트 코드 생성</a:t>
             </a:r>
@@ -18069,9 +18061,9 @@
                 <a:solidFill>
                   <a:srgbClr val="00B5AC"/>
                 </a:solidFill>
-                <a:latin typeface="페이퍼로지 5 Medium"/>
-                <a:ea typeface="페이퍼로지 5 Medium"/>
-                <a:cs typeface="페이퍼로지 5 Medium"/>
+                <a:latin typeface="Pretendard"/>
+                <a:ea typeface="Pretendard"/>
+                <a:cs typeface="Pretendard"/>
               </a:defRPr>
             </a:pPr>
             <a:r>
@@ -18079,9 +18071,9 @@
                 <a:solidFill>
                   <a:srgbClr val="00B5AC"/>
                 </a:solidFill>
-                <a:latin typeface="페이퍼로지 5 Medium"/>
-                <a:ea typeface="페이퍼로지 5 Medium"/>
-                <a:cs typeface="페이퍼로지 5 Medium"/>
+                <a:latin typeface="Pretendard"/>
+                <a:ea typeface="Pretendard"/>
+                <a:cs typeface="Pretendard"/>
               </a:rPr>
               <a:t>02</a:t>
             </a:r>
@@ -18124,9 +18116,9 @@
                 <a:solidFill>
                   <a:srgbClr val="1E2324"/>
                 </a:solidFill>
-                <a:latin typeface="페이퍼로지 4 Regular"/>
-                <a:ea typeface="페이퍼로지 4 Regular"/>
-                <a:cs typeface="페이퍼로지 4 Regular"/>
+                <a:latin typeface="Pretendard"/>
+                <a:ea typeface="Pretendard"/>
+                <a:cs typeface="Pretendard"/>
               </a:defRPr>
             </a:pPr>
             <a:r>
@@ -18134,11 +18126,11 @@
                 <a:solidFill>
                   <a:srgbClr val="1E2324"/>
                 </a:solidFill>
-                <a:latin typeface="페이퍼로지 4 Regular"/>
-                <a:ea typeface="페이퍼로지 4 Regular"/>
-                <a:cs typeface="페이퍼로지 4 Regular"/>
-              </a:rPr>
-              <a:t>교육일 · 전후 기간</a:t>
+                <a:latin typeface="Pretendard"/>
+                <a:ea typeface="Pretendard"/>
+                <a:cs typeface="Pretendard"/>
+              </a:rPr>
+              <a:t>교육일 · 전/후 기간</a:t>
             </a:r>
           </a:p>
         </p:txBody>
@@ -18179,9 +18171,9 @@
                 <a:solidFill>
                   <a:srgbClr val="00B5AC"/>
                 </a:solidFill>
-                <a:latin typeface="페이퍼로지 5 Medium"/>
-                <a:ea typeface="페이퍼로지 5 Medium"/>
-                <a:cs typeface="페이퍼로지 5 Medium"/>
+                <a:latin typeface="Pretendard"/>
+                <a:ea typeface="Pretendard"/>
+                <a:cs typeface="Pretendard"/>
               </a:defRPr>
             </a:pPr>
             <a:r>
@@ -18189,9 +18181,9 @@
                 <a:solidFill>
                   <a:srgbClr val="00B5AC"/>
                 </a:solidFill>
-                <a:latin typeface="페이퍼로지 5 Medium"/>
-                <a:ea typeface="페이퍼로지 5 Medium"/>
-                <a:cs typeface="페이퍼로지 5 Medium"/>
+                <a:latin typeface="Pretendard"/>
+                <a:ea typeface="Pretendard"/>
+                <a:cs typeface="Pretendard"/>
               </a:rPr>
               <a:t>03</a:t>
             </a:r>
@@ -18234,9 +18226,9 @@
                 <a:solidFill>
                   <a:srgbClr val="1E2324"/>
                 </a:solidFill>
-                <a:latin typeface="페이퍼로지 4 Regular"/>
-                <a:ea typeface="페이퍼로지 4 Regular"/>
-                <a:cs typeface="페이퍼로지 4 Regular"/>
+                <a:latin typeface="Pretendard"/>
+                <a:ea typeface="Pretendard"/>
+                <a:cs typeface="Pretendard"/>
               </a:defRPr>
             </a:pPr>
             <a:r>
@@ -18244,9 +18236,9 @@
                 <a:solidFill>
                   <a:srgbClr val="1E2324"/>
                 </a:solidFill>
-                <a:latin typeface="페이퍼로지 4 Regular"/>
-                <a:ea typeface="페이퍼로지 4 Regular"/>
-                <a:cs typeface="페이퍼로지 4 Regular"/>
+                <a:latin typeface="Pretendard"/>
+                <a:ea typeface="Pretendard"/>
+                <a:cs typeface="Pretendard"/>
               </a:rPr>
               <a:t>역량 선택 · 저장</a:t>
             </a:r>
@@ -18289,9 +18281,9 @@
                 <a:solidFill>
                   <a:srgbClr val="98A4A6"/>
                 </a:solidFill>
-                <a:latin typeface="페이퍼로지 4 Regular"/>
-                <a:ea typeface="페이퍼로지 4 Regular"/>
-                <a:cs typeface="페이퍼로지 4 Regular"/>
+                <a:latin typeface="Pretendard"/>
+                <a:ea typeface="Pretendard"/>
+                <a:cs typeface="Pretendard"/>
               </a:defRPr>
             </a:pPr>
             <a:r>
@@ -18299,9 +18291,9 @@
                 <a:solidFill>
                   <a:srgbClr val="98A4A6"/>
                 </a:solidFill>
-                <a:latin typeface="페이퍼로지 4 Regular"/>
-                <a:ea typeface="페이퍼로지 4 Regular"/>
-                <a:cs typeface="페이퍼로지 4 Regular"/>
+                <a:latin typeface="Pretendard"/>
+                <a:ea typeface="Pretendard"/>
+                <a:cs typeface="Pretendard"/>
               </a:rPr>
               <a:t>07</a:t>
             </a:r>
@@ -18346,9 +18338,9 @@
                 <a:solidFill>
                   <a:srgbClr val="00B5AC"/>
                 </a:solidFill>
-                <a:latin typeface="페이퍼로지 4 Regular"/>
-                <a:ea typeface="페이퍼로지 4 Regular"/>
-                <a:cs typeface="페이퍼로지 4 Regular"/>
+                <a:latin typeface="Pretendard"/>
+                <a:ea typeface="Pretendard"/>
+                <a:cs typeface="Pretendard"/>
               </a:defRPr>
             </a:pPr>
             <a:r>
@@ -18356,9 +18348,9 @@
                 <a:solidFill>
                   <a:srgbClr val="00B5AC"/>
                 </a:solidFill>
-                <a:latin typeface="페이퍼로지 4 Regular"/>
-                <a:ea typeface="페이퍼로지 4 Regular"/>
-                <a:cs typeface="페이퍼로지 4 Regular"/>
+                <a:latin typeface="Pretendard"/>
+                <a:ea typeface="Pretendard"/>
+                <a:cs typeface="Pretendard"/>
               </a:rPr>
               <a:t>HOW TO</a:t>
             </a:r>
@@ -18374,7 +18366,7 @@
           <p:nvPr/>
         </p:nvPicPr>
         <p:blipFill>
-          <a:blip xmlns:r="http://schemas.openxmlformats.org/officeDocument/2006/relationships" xmlns:a="http://schemas.openxmlformats.org/drawingml/2006/main" r:embed="R76525f252fe14ad4"/>
+          <a:blip xmlns:r="http://schemas.openxmlformats.org/officeDocument/2006/relationships" xmlns:a="http://schemas.openxmlformats.org/drawingml/2006/main" r:embed="R66749f0e920d4ed5"/>
           <a:stretch xmlns:a="http://schemas.openxmlformats.org/drawingml/2006/main"/>
         </p:blipFill>
         <p:spPr>
@@ -18510,7 +18502,7 @@
           <p:nvPr/>
         </p:nvPicPr>
         <p:blipFill>
-          <a:blip xmlns:r="http://schemas.openxmlformats.org/officeDocument/2006/relationships" xmlns:a="http://schemas.openxmlformats.org/drawingml/2006/main" r:embed="Rd927e6d02622491e"/>
+          <a:blip xmlns:r="http://schemas.openxmlformats.org/officeDocument/2006/relationships" xmlns:a="http://schemas.openxmlformats.org/drawingml/2006/main" r:embed="Rf33be9a20d3b4289"/>
           <a:srcRect xmlns:a="http://schemas.openxmlformats.org/drawingml/2006/main" l="-2083" t="0" r="-2083" b="0"/>
           <a:stretch xmlns:a="http://schemas.openxmlformats.org/drawingml/2006/main"/>
         </p:blipFill>
@@ -18606,9 +18598,9 @@
                 <a:solidFill>
                   <a:srgbClr val="6C7476"/>
                 </a:solidFill>
-                <a:latin typeface="페이퍼로지 4 Regular"/>
-                <a:ea typeface="페이퍼로지 4 Regular"/>
-                <a:cs typeface="페이퍼로지 4 Regular"/>
+                <a:latin typeface="Pretendard"/>
+                <a:ea typeface="Pretendard"/>
+                <a:cs typeface="Pretendard"/>
               </a:defRPr>
             </a:lvl1pPr>
           </a:lstStyle>
@@ -18619,9 +18611,9 @@
                 <a:solidFill>
                   <a:srgbClr val="6C7476"/>
                 </a:solidFill>
-                <a:latin typeface="페이퍼로지 4 Regular"/>
-                <a:ea typeface="페이퍼로지 4 Regular"/>
-                <a:cs typeface="페이퍼로지 4 Regular"/>
+                <a:latin typeface="Pretendard"/>
+                <a:ea typeface="Pretendard"/>
+                <a:cs typeface="Pretendard"/>
               </a:defRPr>
             </a:pPr>
             <a:r>
@@ -18629,9 +18621,9 @@
                 <a:solidFill>
                   <a:srgbClr val="6C7476"/>
                 </a:solidFill>
-                <a:latin typeface="페이퍼로지 4 Regular"/>
-                <a:ea typeface="페이퍼로지 4 Regular"/>
-                <a:cs typeface="페이퍼로지 4 Regular"/>
+                <a:latin typeface="Pretendard"/>
+                <a:ea typeface="Pretendard"/>
+                <a:cs typeface="Pretendard"/>
               </a:rPr>
               <a:t>PARTICIPANT</a:t>
             </a:r>
@@ -18674,9 +18666,9 @@
                 <a:solidFill>
                   <a:srgbClr val="0A0E10"/>
                 </a:solidFill>
-                <a:latin typeface="페이퍼로지 2 ExtraLight"/>
-                <a:ea typeface="페이퍼로지 2 ExtraLight"/>
-                <a:cs typeface="페이퍼로지 2 ExtraLight"/>
+                <a:latin typeface="Pretendard"/>
+                <a:ea typeface="Pretendard"/>
+                <a:cs typeface="Pretendard"/>
               </a:defRPr>
             </a:pPr>
             <a:r>
@@ -18684,9 +18676,9 @@
                 <a:solidFill>
                   <a:srgbClr val="0A0E10"/>
                 </a:solidFill>
-                <a:latin typeface="페이퍼로지 2 ExtraLight"/>
-                <a:ea typeface="페이퍼로지 2 ExtraLight"/>
-                <a:cs typeface="페이퍼로지 2 ExtraLight"/>
+                <a:latin typeface="Pretendard"/>
+                <a:ea typeface="Pretendard"/>
+                <a:cs typeface="Pretendard"/>
               </a:rPr>
               <a:t>프로젝트 코드·접속코드·ID로</a:t>
             </a:r>
@@ -18698,9 +18690,9 @@
                 <a:solidFill>
                   <a:srgbClr val="0A0E10"/>
                 </a:solidFill>
-                <a:latin typeface="페이퍼로지 2 ExtraLight"/>
-                <a:ea typeface="페이퍼로지 2 ExtraLight"/>
-                <a:cs typeface="페이퍼로지 2 ExtraLight"/>
+                <a:latin typeface="Pretendard"/>
+                <a:ea typeface="Pretendard"/>
+                <a:cs typeface="Pretendard"/>
               </a:defRPr>
             </a:pPr>
             <a:r>
@@ -18708,9 +18700,9 @@
                 <a:solidFill>
                   <a:srgbClr val="0A0E10"/>
                 </a:solidFill>
-                <a:latin typeface="페이퍼로지 6 SemiBold"/>
-                <a:ea typeface="페이퍼로지 6 SemiBold"/>
-                <a:cs typeface="페이퍼로지 6 SemiBold"/>
+                <a:latin typeface="Pretendard"/>
+                <a:ea typeface="Pretendard"/>
+                <a:cs typeface="Pretendard"/>
               </a:rPr>
               <a:t>실제 검사에 참여합니다</a:t>
             </a:r>
@@ -18753,9 +18745,9 @@
                 <a:solidFill>
                   <a:srgbClr val="6C7476"/>
                 </a:solidFill>
-                <a:latin typeface="페이퍼로지 3 Light"/>
-                <a:ea typeface="페이퍼로지 3 Light"/>
-                <a:cs typeface="페이퍼로지 3 Light"/>
+                <a:latin typeface="Pretendard"/>
+                <a:ea typeface="Pretendard"/>
+                <a:cs typeface="Pretendard"/>
               </a:defRPr>
             </a:pPr>
             <a:r>
@@ -18763,11 +18755,11 @@
                 <a:solidFill>
                   <a:srgbClr val="6C7476"/>
                 </a:solidFill>
-                <a:latin typeface="페이퍼로지 3 Light"/>
-                <a:ea typeface="페이퍼로지 3 Light"/>
-                <a:cs typeface="페이퍼로지 3 Light"/>
-              </a:rPr>
-              <a:t>사전·사후 완료 시점에만 GitHub에 저장합니다. 사후는 같은 프로젝트 코드와 참여자 ID로 사전 결과를 불러오며, 실패하면 기준파일 JSON으로 복원합니다.</a:t>
+                <a:latin typeface="Pretendard"/>
+                <a:ea typeface="Pretendard"/>
+                <a:cs typeface="Pretendard"/>
+              </a:rPr>
+              <a:t>교육 전/후 완료 시점에만 GitHub에 저장합니다. 교육 후 검사는 같은 프로젝트 코드와 참여자 ID로 교육 전 결과를 불러오며, 실패하면 기준파일 JSON으로 복원합니다.</a:t>
             </a:r>
           </a:p>
         </p:txBody>
@@ -18850,9 +18842,9 @@
                 <a:solidFill>
                   <a:srgbClr val="0A0E10"/>
                 </a:solidFill>
-                <a:latin typeface="페이퍼로지 5 Medium"/>
-                <a:ea typeface="페이퍼로지 5 Medium"/>
-                <a:cs typeface="페이퍼로지 5 Medium"/>
+                <a:latin typeface="Pretendard"/>
+                <a:ea typeface="Pretendard"/>
+                <a:cs typeface="Pretendard"/>
               </a:defRPr>
             </a:pPr>
             <a:r>
@@ -18860,9 +18852,9 @@
                 <a:solidFill>
                   <a:srgbClr val="0A0E10"/>
                 </a:solidFill>
-                <a:latin typeface="페이퍼로지 5 Medium"/>
-                <a:ea typeface="페이퍼로지 5 Medium"/>
-                <a:cs typeface="페이퍼로지 5 Medium"/>
+                <a:latin typeface="Pretendard"/>
+                <a:ea typeface="Pretendard"/>
+                <a:cs typeface="Pretendard"/>
               </a:rPr>
               <a:t>검사 순서</a:t>
             </a:r>
@@ -18947,9 +18939,9 @@
                 <a:solidFill>
                   <a:srgbClr val="00B5AC"/>
                 </a:solidFill>
-                <a:latin typeface="페이퍼로지 5 Medium"/>
-                <a:ea typeface="페이퍼로지 5 Medium"/>
-                <a:cs typeface="페이퍼로지 5 Medium"/>
+                <a:latin typeface="Pretendard"/>
+                <a:ea typeface="Pretendard"/>
+                <a:cs typeface="Pretendard"/>
               </a:defRPr>
             </a:pPr>
             <a:r>
@@ -18957,9 +18949,9 @@
                 <a:solidFill>
                   <a:srgbClr val="00B5AC"/>
                 </a:solidFill>
-                <a:latin typeface="페이퍼로지 5 Medium"/>
-                <a:ea typeface="페이퍼로지 5 Medium"/>
-                <a:cs typeface="페이퍼로지 5 Medium"/>
+                <a:latin typeface="Pretendard"/>
+                <a:ea typeface="Pretendard"/>
+                <a:cs typeface="Pretendard"/>
               </a:rPr>
               <a:t>01</a:t>
             </a:r>
@@ -19002,9 +18994,9 @@
                 <a:solidFill>
                   <a:srgbClr val="1E2324"/>
                 </a:solidFill>
-                <a:latin typeface="페이퍼로지 4 Regular"/>
-                <a:ea typeface="페이퍼로지 4 Regular"/>
-                <a:cs typeface="페이퍼로지 4 Regular"/>
+                <a:latin typeface="Pretendard"/>
+                <a:ea typeface="Pretendard"/>
+                <a:cs typeface="Pretendard"/>
               </a:defRPr>
             </a:pPr>
             <a:r>
@@ -19012,9 +19004,9 @@
                 <a:solidFill>
                   <a:srgbClr val="1E2324"/>
                 </a:solidFill>
-                <a:latin typeface="페이퍼로지 4 Regular"/>
-                <a:ea typeface="페이퍼로지 4 Regular"/>
-                <a:cs typeface="페이퍼로지 4 Regular"/>
+                <a:latin typeface="Pretendard"/>
+                <a:ea typeface="Pretendard"/>
+                <a:cs typeface="Pretendard"/>
               </a:rPr>
               <a:t>프로젝트 코드 입력</a:t>
             </a:r>
@@ -19099,9 +19091,9 @@
                 <a:solidFill>
                   <a:srgbClr val="00B5AC"/>
                 </a:solidFill>
-                <a:latin typeface="페이퍼로지 5 Medium"/>
-                <a:ea typeface="페이퍼로지 5 Medium"/>
-                <a:cs typeface="페이퍼로지 5 Medium"/>
+                <a:latin typeface="Pretendard"/>
+                <a:ea typeface="Pretendard"/>
+                <a:cs typeface="Pretendard"/>
               </a:defRPr>
             </a:pPr>
             <a:r>
@@ -19109,9 +19101,9 @@
                 <a:solidFill>
                   <a:srgbClr val="00B5AC"/>
                 </a:solidFill>
-                <a:latin typeface="페이퍼로지 5 Medium"/>
-                <a:ea typeface="페이퍼로지 5 Medium"/>
-                <a:cs typeface="페이퍼로지 5 Medium"/>
+                <a:latin typeface="Pretendard"/>
+                <a:ea typeface="Pretendard"/>
+                <a:cs typeface="Pretendard"/>
               </a:rPr>
               <a:t>02</a:t>
             </a:r>
@@ -19154,9 +19146,9 @@
                 <a:solidFill>
                   <a:srgbClr val="1E2324"/>
                 </a:solidFill>
-                <a:latin typeface="페이퍼로지 4 Regular"/>
-                <a:ea typeface="페이퍼로지 4 Regular"/>
-                <a:cs typeface="페이퍼로지 4 Regular"/>
+                <a:latin typeface="Pretendard"/>
+                <a:ea typeface="Pretendard"/>
+                <a:cs typeface="Pretendard"/>
               </a:defRPr>
             </a:pPr>
             <a:r>
@@ -19164,9 +19156,9 @@
                 <a:solidFill>
                   <a:srgbClr val="1E2324"/>
                 </a:solidFill>
-                <a:latin typeface="페이퍼로지 4 Regular"/>
-                <a:ea typeface="페이퍼로지 4 Regular"/>
-                <a:cs typeface="페이퍼로지 4 Regular"/>
+                <a:latin typeface="Pretendard"/>
+                <a:ea typeface="Pretendard"/>
+                <a:cs typeface="Pretendard"/>
               </a:rPr>
               <a:t>기획검증 접속코드 입력</a:t>
             </a:r>
@@ -19209,9 +19201,9 @@
                 <a:solidFill>
                   <a:srgbClr val="00B5AC"/>
                 </a:solidFill>
-                <a:latin typeface="페이퍼로지 5 Medium"/>
-                <a:ea typeface="페이퍼로지 5 Medium"/>
-                <a:cs typeface="페이퍼로지 5 Medium"/>
+                <a:latin typeface="Pretendard"/>
+                <a:ea typeface="Pretendard"/>
+                <a:cs typeface="Pretendard"/>
               </a:defRPr>
             </a:pPr>
             <a:r>
@@ -19219,9 +19211,9 @@
                 <a:solidFill>
                   <a:srgbClr val="00B5AC"/>
                 </a:solidFill>
-                <a:latin typeface="페이퍼로지 5 Medium"/>
-                <a:ea typeface="페이퍼로지 5 Medium"/>
-                <a:cs typeface="페이퍼로지 5 Medium"/>
+                <a:latin typeface="Pretendard"/>
+                <a:ea typeface="Pretendard"/>
+                <a:cs typeface="Pretendard"/>
               </a:rPr>
               <a:t>03</a:t>
             </a:r>
@@ -19264,9 +19256,9 @@
                 <a:solidFill>
                   <a:srgbClr val="1E2324"/>
                 </a:solidFill>
-                <a:latin typeface="페이퍼로지 4 Regular"/>
-                <a:ea typeface="페이퍼로지 4 Regular"/>
-                <a:cs typeface="페이퍼로지 4 Regular"/>
+                <a:latin typeface="Pretendard"/>
+                <a:ea typeface="Pretendard"/>
+                <a:cs typeface="Pretendard"/>
               </a:defRPr>
             </a:pPr>
             <a:r>
@@ -19274,9 +19266,9 @@
                 <a:solidFill>
                   <a:srgbClr val="1E2324"/>
                 </a:solidFill>
-                <a:latin typeface="페이퍼로지 4 Regular"/>
-                <a:ea typeface="페이퍼로지 4 Regular"/>
-                <a:cs typeface="페이퍼로지 4 Regular"/>
+                <a:latin typeface="Pretendard"/>
+                <a:ea typeface="Pretendard"/>
+                <a:cs typeface="Pretendard"/>
               </a:rPr>
               <a:t>참여자 ID · 응답 · 완료</a:t>
             </a:r>
@@ -19361,9 +19353,9 @@
                 <a:solidFill>
                   <a:srgbClr val="0A0E10"/>
                 </a:solidFill>
-                <a:latin typeface="페이퍼로지 5 Medium"/>
-                <a:ea typeface="페이퍼로지 5 Medium"/>
-                <a:cs typeface="페이퍼로지 5 Medium"/>
+                <a:latin typeface="Pretendard"/>
+                <a:ea typeface="Pretendard"/>
+                <a:cs typeface="Pretendard"/>
               </a:defRPr>
             </a:pPr>
             <a:r>
@@ -19371,11 +19363,11 @@
                 <a:solidFill>
                   <a:srgbClr val="0A0E10"/>
                 </a:solidFill>
-                <a:latin typeface="페이퍼로지 5 Medium"/>
-                <a:ea typeface="페이퍼로지 5 Medium"/>
-                <a:cs typeface="페이퍼로지 5 Medium"/>
-              </a:rPr>
-              <a:t>사후 복원</a:t>
+                <a:latin typeface="Pretendard"/>
+                <a:ea typeface="Pretendard"/>
+                <a:cs typeface="Pretendard"/>
+              </a:rPr>
+              <a:t>교육 후 연결</a:t>
             </a:r>
           </a:p>
         </p:txBody>
@@ -19458,9 +19450,9 @@
                 <a:solidFill>
                   <a:srgbClr val="00B5AC"/>
                 </a:solidFill>
-                <a:latin typeface="페이퍼로지 5 Medium"/>
-                <a:ea typeface="페이퍼로지 5 Medium"/>
-                <a:cs typeface="페이퍼로지 5 Medium"/>
+                <a:latin typeface="Pretendard"/>
+                <a:ea typeface="Pretendard"/>
+                <a:cs typeface="Pretendard"/>
               </a:defRPr>
             </a:pPr>
             <a:r>
@@ -19468,9 +19460,9 @@
                 <a:solidFill>
                   <a:srgbClr val="00B5AC"/>
                 </a:solidFill>
-                <a:latin typeface="페이퍼로지 5 Medium"/>
-                <a:ea typeface="페이퍼로지 5 Medium"/>
-                <a:cs typeface="페이퍼로지 5 Medium"/>
+                <a:latin typeface="Pretendard"/>
+                <a:ea typeface="Pretendard"/>
+                <a:cs typeface="Pretendard"/>
               </a:rPr>
               <a:t>01</a:t>
             </a:r>
@@ -19513,9 +19505,9 @@
                 <a:solidFill>
                   <a:srgbClr val="1E2324"/>
                 </a:solidFill>
-                <a:latin typeface="페이퍼로지 4 Regular"/>
-                <a:ea typeface="페이퍼로지 4 Regular"/>
-                <a:cs typeface="페이퍼로지 4 Regular"/>
+                <a:latin typeface="Pretendard"/>
+                <a:ea typeface="Pretendard"/>
+                <a:cs typeface="Pretendard"/>
               </a:defRPr>
             </a:pPr>
             <a:r>
@@ -19523,9 +19515,9 @@
                 <a:solidFill>
                   <a:srgbClr val="1E2324"/>
                 </a:solidFill>
-                <a:latin typeface="페이퍼로지 4 Regular"/>
-                <a:ea typeface="페이퍼로지 4 Regular"/>
-                <a:cs typeface="페이퍼로지 4 Regular"/>
+                <a:latin typeface="Pretendard"/>
+                <a:ea typeface="Pretendard"/>
+                <a:cs typeface="Pretendard"/>
               </a:rPr>
               <a:t>같은 코드 · ID로 접속</a:t>
             </a:r>
@@ -19610,9 +19602,9 @@
                 <a:solidFill>
                   <a:srgbClr val="00B5AC"/>
                 </a:solidFill>
-                <a:latin typeface="페이퍼로지 5 Medium"/>
-                <a:ea typeface="페이퍼로지 5 Medium"/>
-                <a:cs typeface="페이퍼로지 5 Medium"/>
+                <a:latin typeface="Pretendard"/>
+                <a:ea typeface="Pretendard"/>
+                <a:cs typeface="Pretendard"/>
               </a:defRPr>
             </a:pPr>
             <a:r>
@@ -19620,9 +19612,9 @@
                 <a:solidFill>
                   <a:srgbClr val="00B5AC"/>
                 </a:solidFill>
-                <a:latin typeface="페이퍼로지 5 Medium"/>
-                <a:ea typeface="페이퍼로지 5 Medium"/>
-                <a:cs typeface="페이퍼로지 5 Medium"/>
+                <a:latin typeface="Pretendard"/>
+                <a:ea typeface="Pretendard"/>
+                <a:cs typeface="Pretendard"/>
               </a:rPr>
               <a:t>02</a:t>
             </a:r>
@@ -19665,9 +19657,9 @@
                 <a:solidFill>
                   <a:srgbClr val="1E2324"/>
                 </a:solidFill>
-                <a:latin typeface="페이퍼로지 4 Regular"/>
-                <a:ea typeface="페이퍼로지 4 Regular"/>
-                <a:cs typeface="페이퍼로지 4 Regular"/>
+                <a:latin typeface="Pretendard"/>
+                <a:ea typeface="Pretendard"/>
+                <a:cs typeface="Pretendard"/>
               </a:defRPr>
             </a:pPr>
             <a:r>
@@ -19675,11 +19667,11 @@
                 <a:solidFill>
                   <a:srgbClr val="1E2324"/>
                 </a:solidFill>
-                <a:latin typeface="페이퍼로지 4 Regular"/>
-                <a:ea typeface="페이퍼로지 4 Regular"/>
-                <a:cs typeface="페이퍼로지 4 Regular"/>
-              </a:rPr>
-              <a:t>사전 완료 기록 불러오기</a:t>
+                <a:latin typeface="Pretendard"/>
+                <a:ea typeface="Pretendard"/>
+                <a:cs typeface="Pretendard"/>
+              </a:rPr>
+              <a:t>교육 전 완료 기록 불러오기</a:t>
             </a:r>
           </a:p>
         </p:txBody>
@@ -19720,9 +19712,9 @@
                 <a:solidFill>
                   <a:srgbClr val="00B5AC"/>
                 </a:solidFill>
-                <a:latin typeface="페이퍼로지 5 Medium"/>
-                <a:ea typeface="페이퍼로지 5 Medium"/>
-                <a:cs typeface="페이퍼로지 5 Medium"/>
+                <a:latin typeface="Pretendard"/>
+                <a:ea typeface="Pretendard"/>
+                <a:cs typeface="Pretendard"/>
               </a:defRPr>
             </a:pPr>
             <a:r>
@@ -19730,9 +19722,9 @@
                 <a:solidFill>
                   <a:srgbClr val="00B5AC"/>
                 </a:solidFill>
-                <a:latin typeface="페이퍼로지 5 Medium"/>
-                <a:ea typeface="페이퍼로지 5 Medium"/>
-                <a:cs typeface="페이퍼로지 5 Medium"/>
+                <a:latin typeface="Pretendard"/>
+                <a:ea typeface="Pretendard"/>
+                <a:cs typeface="Pretendard"/>
               </a:rPr>
               <a:t>03</a:t>
             </a:r>
@@ -19775,9 +19767,9 @@
                 <a:solidFill>
                   <a:srgbClr val="1E2324"/>
                 </a:solidFill>
-                <a:latin typeface="페이퍼로지 4 Regular"/>
-                <a:ea typeface="페이퍼로지 4 Regular"/>
-                <a:cs typeface="페이퍼로지 4 Regular"/>
+                <a:latin typeface="Pretendard"/>
+                <a:ea typeface="Pretendard"/>
+                <a:cs typeface="Pretendard"/>
               </a:defRPr>
             </a:pPr>
             <a:r>
@@ -19785,9 +19777,9 @@
                 <a:solidFill>
                   <a:srgbClr val="1E2324"/>
                 </a:solidFill>
-                <a:latin typeface="페이퍼로지 4 Regular"/>
-                <a:ea typeface="페이퍼로지 4 Regular"/>
-                <a:cs typeface="페이퍼로지 4 Regular"/>
+                <a:latin typeface="Pretendard"/>
+                <a:ea typeface="Pretendard"/>
+                <a:cs typeface="Pretendard"/>
               </a:rPr>
               <a:t>실패 시 JSON 업로드</a:t>
             </a:r>
@@ -19830,9 +19822,9 @@
                 <a:solidFill>
                   <a:srgbClr val="98A4A6"/>
                 </a:solidFill>
-                <a:latin typeface="페이퍼로지 4 Regular"/>
-                <a:ea typeface="페이퍼로지 4 Regular"/>
-                <a:cs typeface="페이퍼로지 4 Regular"/>
+                <a:latin typeface="Pretendard"/>
+                <a:ea typeface="Pretendard"/>
+                <a:cs typeface="Pretendard"/>
               </a:defRPr>
             </a:pPr>
             <a:r>
@@ -19840,9 +19832,9 @@
                 <a:solidFill>
                   <a:srgbClr val="98A4A6"/>
                 </a:solidFill>
-                <a:latin typeface="페이퍼로지 4 Regular"/>
-                <a:ea typeface="페이퍼로지 4 Regular"/>
-                <a:cs typeface="페이퍼로지 4 Regular"/>
+                <a:latin typeface="Pretendard"/>
+                <a:ea typeface="Pretendard"/>
+                <a:cs typeface="Pretendard"/>
               </a:rPr>
               <a:t>08</a:t>
             </a:r>
@@ -19887,9 +19879,9 @@
                 <a:solidFill>
                   <a:srgbClr val="00B5AC"/>
                 </a:solidFill>
-                <a:latin typeface="페이퍼로지 4 Regular"/>
-                <a:ea typeface="페이퍼로지 4 Regular"/>
-                <a:cs typeface="페이퍼로지 4 Regular"/>
+                <a:latin typeface="Pretendard"/>
+                <a:ea typeface="Pretendard"/>
+                <a:cs typeface="Pretendard"/>
               </a:defRPr>
             </a:pPr>
             <a:r>
@@ -19897,9 +19889,9 @@
                 <a:solidFill>
                   <a:srgbClr val="00B5AC"/>
                 </a:solidFill>
-                <a:latin typeface="페이퍼로지 4 Regular"/>
-                <a:ea typeface="페이퍼로지 4 Regular"/>
-                <a:cs typeface="페이퍼로지 4 Regular"/>
+                <a:latin typeface="Pretendard"/>
+                <a:ea typeface="Pretendard"/>
+                <a:cs typeface="Pretendard"/>
               </a:rPr>
               <a:t>HOW TO</a:t>
             </a:r>
@@ -19915,7 +19907,7 @@
           <p:nvPr/>
         </p:nvPicPr>
         <p:blipFill>
-          <a:blip xmlns:r="http://schemas.openxmlformats.org/officeDocument/2006/relationships" xmlns:a="http://schemas.openxmlformats.org/drawingml/2006/main" r:embed="Rc377ea65311a4c67"/>
+          <a:blip xmlns:r="http://schemas.openxmlformats.org/officeDocument/2006/relationships" xmlns:a="http://schemas.openxmlformats.org/drawingml/2006/main" r:embed="Re1f8a51fff444cc8"/>
           <a:stretch xmlns:a="http://schemas.openxmlformats.org/drawingml/2006/main"/>
         </p:blipFill>
         <p:spPr>
@@ -20051,7 +20043,7 @@
           <p:nvPr/>
         </p:nvPicPr>
         <p:blipFill>
-          <a:blip xmlns:r="http://schemas.openxmlformats.org/officeDocument/2006/relationships" xmlns:a="http://schemas.openxmlformats.org/drawingml/2006/main" r:embed="Re38b7503e20b4588"/>
+          <a:blip xmlns:r="http://schemas.openxmlformats.org/officeDocument/2006/relationships" xmlns:a="http://schemas.openxmlformats.org/drawingml/2006/main" r:embed="Re92183df2ba94264"/>
           <a:srcRect xmlns:a="http://schemas.openxmlformats.org/drawingml/2006/main" l="-2083" t="0" r="-2083" b="0"/>
           <a:stretch xmlns:a="http://schemas.openxmlformats.org/drawingml/2006/main"/>
         </p:blipFill>
@@ -20147,9 +20139,9 @@
                 <a:solidFill>
                   <a:srgbClr val="6C7476"/>
                 </a:solidFill>
-                <a:latin typeface="페이퍼로지 4 Regular"/>
-                <a:ea typeface="페이퍼로지 4 Regular"/>
-                <a:cs typeface="페이퍼로지 4 Regular"/>
+                <a:latin typeface="Pretendard"/>
+                <a:ea typeface="Pretendard"/>
+                <a:cs typeface="Pretendard"/>
               </a:defRPr>
             </a:lvl1pPr>
           </a:lstStyle>
@@ -20160,9 +20152,9 @@
                 <a:solidFill>
                   <a:srgbClr val="6C7476"/>
                 </a:solidFill>
-                <a:latin typeface="페이퍼로지 4 Regular"/>
-                <a:ea typeface="페이퍼로지 4 Regular"/>
-                <a:cs typeface="페이퍼로지 4 Regular"/>
+                <a:latin typeface="Pretendard"/>
+                <a:ea typeface="Pretendard"/>
+                <a:cs typeface="Pretendard"/>
               </a:defRPr>
             </a:pPr>
             <a:r>
@@ -20170,9 +20162,9 @@
                 <a:solidFill>
                   <a:srgbClr val="6C7476"/>
                 </a:solidFill>
-                <a:latin typeface="페이퍼로지 4 Regular"/>
-                <a:ea typeface="페이퍼로지 4 Regular"/>
-                <a:cs typeface="페이퍼로지 4 Regular"/>
+                <a:latin typeface="Pretendard"/>
+                <a:ea typeface="Pretendard"/>
+                <a:cs typeface="Pretendard"/>
               </a:rPr>
               <a:t>ORGANIZATION REPORT</a:t>
             </a:r>
@@ -20215,9 +20207,9 @@
                 <a:solidFill>
                   <a:srgbClr val="0A0E10"/>
                 </a:solidFill>
-                <a:latin typeface="페이퍼로지 2 ExtraLight"/>
-                <a:ea typeface="페이퍼로지 2 ExtraLight"/>
-                <a:cs typeface="페이퍼로지 2 ExtraLight"/>
+                <a:latin typeface="Pretendard"/>
+                <a:ea typeface="Pretendard"/>
+                <a:cs typeface="Pretendard"/>
               </a:defRPr>
             </a:pPr>
             <a:r>
@@ -20225,11 +20217,11 @@
                 <a:solidFill>
                   <a:srgbClr val="0A0E10"/>
                 </a:solidFill>
-                <a:latin typeface="페이퍼로지 2 ExtraLight"/>
-                <a:ea typeface="페이퍼로지 2 ExtraLight"/>
-                <a:cs typeface="페이퍼로지 2 ExtraLight"/>
-              </a:rPr>
-              <a:t>프로젝트 코드만 입력하면</a:t>
+                <a:latin typeface="Pretendard"/>
+                <a:ea typeface="Pretendard"/>
+                <a:cs typeface="Pretendard"/>
+              </a:rPr>
+              <a:t>실시 프로젝트에서 교육 전/후</a:t>
             </a:r>
           </a:p>
           <a:p xmlns:a="http://schemas.openxmlformats.org/drawingml/2006/main">
@@ -20239,9 +20231,9 @@
                 <a:solidFill>
                   <a:srgbClr val="0A0E10"/>
                 </a:solidFill>
-                <a:latin typeface="페이퍼로지 2 ExtraLight"/>
-                <a:ea typeface="페이퍼로지 2 ExtraLight"/>
-                <a:cs typeface="페이퍼로지 2 ExtraLight"/>
+                <a:latin typeface="Pretendard"/>
+                <a:ea typeface="Pretendard"/>
+                <a:cs typeface="Pretendard"/>
               </a:defRPr>
             </a:pPr>
             <a:r>
@@ -20249,11 +20241,11 @@
                 <a:solidFill>
                   <a:srgbClr val="0A0E10"/>
                 </a:solidFill>
-                <a:latin typeface="페이퍼로지 6 SemiBold"/>
-                <a:ea typeface="페이퍼로지 6 SemiBold"/>
-                <a:cs typeface="페이퍼로지 6 SemiBold"/>
-              </a:rPr>
-              <a:t>조직 전후 리포트를 불러옵니다</a:t>
+                <a:latin typeface="Pretendard"/>
+                <a:ea typeface="Pretendard"/>
+                <a:cs typeface="Pretendard"/>
+              </a:rPr>
+              <a:t>조직 리포트를 바로 엽니다</a:t>
             </a:r>
           </a:p>
         </p:txBody>
@@ -20294,9 +20286,9 @@
                 <a:solidFill>
                   <a:srgbClr val="6C7476"/>
                 </a:solidFill>
-                <a:latin typeface="페이퍼로지 3 Light"/>
-                <a:ea typeface="페이퍼로지 3 Light"/>
-                <a:cs typeface="페이퍼로지 3 Light"/>
+                <a:latin typeface="Pretendard"/>
+                <a:ea typeface="Pretendard"/>
+                <a:cs typeface="Pretendard"/>
               </a:defRPr>
             </a:pPr>
             <a:r>
@@ -20304,11 +20296,11 @@
                 <a:solidFill>
                   <a:srgbClr val="6C7476"/>
                 </a:solidFill>
-                <a:latin typeface="페이퍼로지 3 Light"/>
-                <a:ea typeface="페이퍼로지 3 Light"/>
-                <a:cs typeface="페이퍼로지 3 Light"/>
-              </a:rPr>
-              <a:t>GitHub 연결 시 프로젝트 코드의 완료 데이터를 우선 집계하고, 연결이 없으면 현재 세션 또는 조직결과 CSV를 사용합니다. 동일 ID를 짝지으며 역량별 N≥5만 공개합니다.</a:t>
+                <a:latin typeface="Pretendard"/>
+                <a:ea typeface="Pretendard"/>
+                <a:cs typeface="Pretendard"/>
+              </a:rPr>
+              <a:t>GitHub 누적 프로젝트를 선택해 완료 데이터를 불러옵니다. 교육 전/후 완료 인원과 동일 참여자 변화를 확인하고, 공개 가능한 3~8개 역량을 N각형 레이더로 비교합니다. CSV 비교는 하단 보조 기능입니다.</a:t>
             </a:r>
           </a:p>
         </p:txBody>
@@ -20391,9 +20383,9 @@
                 <a:solidFill>
                   <a:srgbClr val="0A0E10"/>
                 </a:solidFill>
-                <a:latin typeface="페이퍼로지 5 Medium"/>
-                <a:ea typeface="페이퍼로지 5 Medium"/>
-                <a:cs typeface="페이퍼로지 5 Medium"/>
+                <a:latin typeface="Pretendard"/>
+                <a:ea typeface="Pretendard"/>
+                <a:cs typeface="Pretendard"/>
               </a:defRPr>
             </a:pPr>
             <a:r>
@@ -20401,9 +20393,9 @@
                 <a:solidFill>
                   <a:srgbClr val="0A0E10"/>
                 </a:solidFill>
-                <a:latin typeface="페이퍼로지 5 Medium"/>
-                <a:ea typeface="페이퍼로지 5 Medium"/>
-                <a:cs typeface="페이퍼로지 5 Medium"/>
+                <a:latin typeface="Pretendard"/>
+                <a:ea typeface="Pretendard"/>
+                <a:cs typeface="Pretendard"/>
               </a:rPr>
               <a:t>준비 순서</a:t>
             </a:r>
@@ -20488,9 +20480,9 @@
                 <a:solidFill>
                   <a:srgbClr val="00B5AC"/>
                 </a:solidFill>
-                <a:latin typeface="페이퍼로지 5 Medium"/>
-                <a:ea typeface="페이퍼로지 5 Medium"/>
-                <a:cs typeface="페이퍼로지 5 Medium"/>
+                <a:latin typeface="Pretendard"/>
+                <a:ea typeface="Pretendard"/>
+                <a:cs typeface="Pretendard"/>
               </a:defRPr>
             </a:pPr>
             <a:r>
@@ -20498,9 +20490,9 @@
                 <a:solidFill>
                   <a:srgbClr val="00B5AC"/>
                 </a:solidFill>
-                <a:latin typeface="페이퍼로지 5 Medium"/>
-                <a:ea typeface="페이퍼로지 5 Medium"/>
-                <a:cs typeface="페이퍼로지 5 Medium"/>
+                <a:latin typeface="Pretendard"/>
+                <a:ea typeface="Pretendard"/>
+                <a:cs typeface="Pretendard"/>
               </a:rPr>
               <a:t>01</a:t>
             </a:r>
@@ -20543,9 +20535,9 @@
                 <a:solidFill>
                   <a:srgbClr val="1E2324"/>
                 </a:solidFill>
-                <a:latin typeface="페이퍼로지 4 Regular"/>
-                <a:ea typeface="페이퍼로지 4 Regular"/>
-                <a:cs typeface="페이퍼로지 4 Regular"/>
+                <a:latin typeface="Pretendard"/>
+                <a:ea typeface="Pretendard"/>
+                <a:cs typeface="Pretendard"/>
               </a:defRPr>
             </a:pPr>
             <a:r>
@@ -20553,11 +20545,11 @@
                 <a:solidFill>
                   <a:srgbClr val="1E2324"/>
                 </a:solidFill>
-                <a:latin typeface="페이퍼로지 4 Regular"/>
-                <a:ea typeface="페이퍼로지 4 Regular"/>
-                <a:cs typeface="페이퍼로지 4 Regular"/>
-              </a:rPr>
-              <a:t>프로젝트 코드 입력</a:t>
+                <a:latin typeface="Pretendard"/>
+                <a:ea typeface="Pretendard"/>
+                <a:cs typeface="Pretendard"/>
+              </a:rPr>
+              <a:t>실시 프로젝트 선택</a:t>
             </a:r>
           </a:p>
         </p:txBody>
@@ -20640,9 +20632,9 @@
                 <a:solidFill>
                   <a:srgbClr val="00B5AC"/>
                 </a:solidFill>
-                <a:latin typeface="페이퍼로지 5 Medium"/>
-                <a:ea typeface="페이퍼로지 5 Medium"/>
-                <a:cs typeface="페이퍼로지 5 Medium"/>
+                <a:latin typeface="Pretendard"/>
+                <a:ea typeface="Pretendard"/>
+                <a:cs typeface="Pretendard"/>
               </a:defRPr>
             </a:pPr>
             <a:r>
@@ -20650,9 +20642,9 @@
                 <a:solidFill>
                   <a:srgbClr val="00B5AC"/>
                 </a:solidFill>
-                <a:latin typeface="페이퍼로지 5 Medium"/>
-                <a:ea typeface="페이퍼로지 5 Medium"/>
-                <a:cs typeface="페이퍼로지 5 Medium"/>
+                <a:latin typeface="Pretendard"/>
+                <a:ea typeface="Pretendard"/>
+                <a:cs typeface="Pretendard"/>
               </a:rPr>
               <a:t>02</a:t>
             </a:r>
@@ -20695,9 +20687,9 @@
                 <a:solidFill>
                   <a:srgbClr val="1E2324"/>
                 </a:solidFill>
-                <a:latin typeface="페이퍼로지 4 Regular"/>
-                <a:ea typeface="페이퍼로지 4 Regular"/>
-                <a:cs typeface="페이퍼로지 4 Regular"/>
+                <a:latin typeface="Pretendard"/>
+                <a:ea typeface="Pretendard"/>
+                <a:cs typeface="Pretendard"/>
               </a:defRPr>
             </a:pPr>
             <a:r>
@@ -20705,11 +20697,11 @@
                 <a:solidFill>
                   <a:srgbClr val="1E2324"/>
                 </a:solidFill>
-                <a:latin typeface="페이퍼로지 4 Regular"/>
-                <a:ea typeface="페이퍼로지 4 Regular"/>
-                <a:cs typeface="페이퍼로지 4 Regular"/>
-              </a:rPr>
-              <a:t>누적 완료 데이터 조회</a:t>
+                <a:latin typeface="Pretendard"/>
+                <a:ea typeface="Pretendard"/>
+                <a:cs typeface="Pretendard"/>
+              </a:rPr>
+              <a:t>프로젝트 새로고침</a:t>
             </a:r>
           </a:p>
         </p:txBody>
@@ -20750,9 +20742,9 @@
                 <a:solidFill>
                   <a:srgbClr val="00B5AC"/>
                 </a:solidFill>
-                <a:latin typeface="페이퍼로지 5 Medium"/>
-                <a:ea typeface="페이퍼로지 5 Medium"/>
-                <a:cs typeface="페이퍼로지 5 Medium"/>
+                <a:latin typeface="Pretendard"/>
+                <a:ea typeface="Pretendard"/>
+                <a:cs typeface="Pretendard"/>
               </a:defRPr>
             </a:pPr>
             <a:r>
@@ -20760,9 +20752,9 @@
                 <a:solidFill>
                   <a:srgbClr val="00B5AC"/>
                 </a:solidFill>
-                <a:latin typeface="페이퍼로지 5 Medium"/>
-                <a:ea typeface="페이퍼로지 5 Medium"/>
-                <a:cs typeface="페이퍼로지 5 Medium"/>
+                <a:latin typeface="Pretendard"/>
+                <a:ea typeface="Pretendard"/>
+                <a:cs typeface="Pretendard"/>
               </a:rPr>
               <a:t>03</a:t>
             </a:r>
@@ -20805,9 +20797,9 @@
                 <a:solidFill>
                   <a:srgbClr val="1E2324"/>
                 </a:solidFill>
-                <a:latin typeface="페이퍼로지 4 Regular"/>
-                <a:ea typeface="페이퍼로지 4 Regular"/>
-                <a:cs typeface="페이퍼로지 4 Regular"/>
+                <a:latin typeface="Pretendard"/>
+                <a:ea typeface="Pretendard"/>
+                <a:cs typeface="Pretendard"/>
               </a:defRPr>
             </a:pPr>
             <a:r>
@@ -20815,11 +20807,11 @@
                 <a:solidFill>
                   <a:srgbClr val="1E2324"/>
                 </a:solidFill>
-                <a:latin typeface="페이퍼로지 4 Regular"/>
-                <a:ea typeface="페이퍼로지 4 Regular"/>
-                <a:cs typeface="페이퍼로지 4 Regular"/>
-              </a:rPr>
-              <a:t>조직 리포트 생성</a:t>
+                <a:latin typeface="Pretendard"/>
+                <a:ea typeface="Pretendard"/>
+                <a:cs typeface="Pretendard"/>
+              </a:rPr>
+              <a:t>교육 전/후 리포트 확인</a:t>
             </a:r>
           </a:p>
         </p:txBody>
@@ -20902,9 +20894,9 @@
                 <a:solidFill>
                   <a:srgbClr val="0A0E10"/>
                 </a:solidFill>
-                <a:latin typeface="페이퍼로지 5 Medium"/>
-                <a:ea typeface="페이퍼로지 5 Medium"/>
-                <a:cs typeface="페이퍼로지 5 Medium"/>
+                <a:latin typeface="Pretendard"/>
+                <a:ea typeface="Pretendard"/>
+                <a:cs typeface="Pretendard"/>
               </a:defRPr>
             </a:pPr>
             <a:r>
@@ -20912,9 +20904,9 @@
                 <a:solidFill>
                   <a:srgbClr val="0A0E10"/>
                 </a:solidFill>
-                <a:latin typeface="페이퍼로지 5 Medium"/>
-                <a:ea typeface="페이퍼로지 5 Medium"/>
-                <a:cs typeface="페이퍼로지 5 Medium"/>
+                <a:latin typeface="Pretendard"/>
+                <a:ea typeface="Pretendard"/>
+                <a:cs typeface="Pretendard"/>
               </a:rPr>
               <a:t>해석 기준</a:t>
             </a:r>
@@ -20999,9 +20991,9 @@
                 <a:solidFill>
                   <a:srgbClr val="00B5AC"/>
                 </a:solidFill>
-                <a:latin typeface="페이퍼로지 5 Medium"/>
-                <a:ea typeface="페이퍼로지 5 Medium"/>
-                <a:cs typeface="페이퍼로지 5 Medium"/>
+                <a:latin typeface="Pretendard"/>
+                <a:ea typeface="Pretendard"/>
+                <a:cs typeface="Pretendard"/>
               </a:defRPr>
             </a:pPr>
             <a:r>
@@ -21009,9 +21001,9 @@
                 <a:solidFill>
                   <a:srgbClr val="00B5AC"/>
                 </a:solidFill>
-                <a:latin typeface="페이퍼로지 5 Medium"/>
-                <a:ea typeface="페이퍼로지 5 Medium"/>
-                <a:cs typeface="페이퍼로지 5 Medium"/>
+                <a:latin typeface="Pretendard"/>
+                <a:ea typeface="Pretendard"/>
+                <a:cs typeface="Pretendard"/>
               </a:rPr>
               <a:t>01</a:t>
             </a:r>
@@ -21054,9 +21046,9 @@
                 <a:solidFill>
                   <a:srgbClr val="1E2324"/>
                 </a:solidFill>
-                <a:latin typeface="페이퍼로지 4 Regular"/>
-                <a:ea typeface="페이퍼로지 4 Regular"/>
-                <a:cs typeface="페이퍼로지 4 Regular"/>
+                <a:latin typeface="Pretendard"/>
+                <a:ea typeface="Pretendard"/>
+                <a:cs typeface="Pretendard"/>
               </a:defRPr>
             </a:pPr>
             <a:r>
@@ -21064,9 +21056,9 @@
                 <a:solidFill>
                   <a:srgbClr val="1E2324"/>
                 </a:solidFill>
-                <a:latin typeface="페이퍼로지 4 Regular"/>
-                <a:ea typeface="페이퍼로지 4 Regular"/>
-                <a:cs typeface="페이퍼로지 4 Regular"/>
+                <a:latin typeface="Pretendard"/>
+                <a:ea typeface="Pretendard"/>
+                <a:cs typeface="Pretendard"/>
               </a:rPr>
               <a:t>동일 ID · 역량 · 버전</a:t>
             </a:r>
@@ -21151,9 +21143,9 @@
                 <a:solidFill>
                   <a:srgbClr val="00B5AC"/>
                 </a:solidFill>
-                <a:latin typeface="페이퍼로지 5 Medium"/>
-                <a:ea typeface="페이퍼로지 5 Medium"/>
-                <a:cs typeface="페이퍼로지 5 Medium"/>
+                <a:latin typeface="Pretendard"/>
+                <a:ea typeface="Pretendard"/>
+                <a:cs typeface="Pretendard"/>
               </a:defRPr>
             </a:pPr>
             <a:r>
@@ -21161,9 +21153,9 @@
                 <a:solidFill>
                   <a:srgbClr val="00B5AC"/>
                 </a:solidFill>
-                <a:latin typeface="페이퍼로지 5 Medium"/>
-                <a:ea typeface="페이퍼로지 5 Medium"/>
-                <a:cs typeface="페이퍼로지 5 Medium"/>
+                <a:latin typeface="Pretendard"/>
+                <a:ea typeface="Pretendard"/>
+                <a:cs typeface="Pretendard"/>
               </a:rPr>
               <a:t>02</a:t>
             </a:r>
@@ -21206,9 +21198,9 @@
                 <a:solidFill>
                   <a:srgbClr val="1E2324"/>
                 </a:solidFill>
-                <a:latin typeface="페이퍼로지 4 Regular"/>
-                <a:ea typeface="페이퍼로지 4 Regular"/>
-                <a:cs typeface="페이퍼로지 4 Regular"/>
+                <a:latin typeface="Pretendard"/>
+                <a:ea typeface="Pretendard"/>
+                <a:cs typeface="Pretendard"/>
               </a:defRPr>
             </a:pPr>
             <a:r>
@@ -21216,11 +21208,11 @@
                 <a:solidFill>
                   <a:srgbClr val="1E2324"/>
                 </a:solidFill>
-                <a:latin typeface="페이퍼로지 4 Regular"/>
-                <a:ea typeface="페이퍼로지 4 Regular"/>
-                <a:cs typeface="페이퍼로지 4 Regular"/>
-              </a:rPr>
-              <a:t>역량별 짝지은 N≥5</a:t>
+                <a:latin typeface="Pretendard"/>
+                <a:ea typeface="Pretendard"/>
+                <a:cs typeface="Pretendard"/>
+              </a:rPr>
+              <a:t>역량별 5명 이상 공개</a:t>
             </a:r>
           </a:p>
         </p:txBody>
@@ -21261,9 +21253,9 @@
                 <a:solidFill>
                   <a:srgbClr val="00B5AC"/>
                 </a:solidFill>
-                <a:latin typeface="페이퍼로지 5 Medium"/>
-                <a:ea typeface="페이퍼로지 5 Medium"/>
-                <a:cs typeface="페이퍼로지 5 Medium"/>
+                <a:latin typeface="Pretendard"/>
+                <a:ea typeface="Pretendard"/>
+                <a:cs typeface="Pretendard"/>
               </a:defRPr>
             </a:pPr>
             <a:r>
@@ -21271,9 +21263,9 @@
                 <a:solidFill>
                   <a:srgbClr val="00B5AC"/>
                 </a:solidFill>
-                <a:latin typeface="페이퍼로지 5 Medium"/>
-                <a:ea typeface="페이퍼로지 5 Medium"/>
-                <a:cs typeface="페이퍼로지 5 Medium"/>
+                <a:latin typeface="Pretendard"/>
+                <a:ea typeface="Pretendard"/>
+                <a:cs typeface="Pretendard"/>
               </a:rPr>
               <a:t>03</a:t>
             </a:r>
@@ -21316,9 +21308,9 @@
                 <a:solidFill>
                   <a:srgbClr val="1E2324"/>
                 </a:solidFill>
-                <a:latin typeface="페이퍼로지 4 Regular"/>
-                <a:ea typeface="페이퍼로지 4 Regular"/>
-                <a:cs typeface="페이퍼로지 4 Regular"/>
+                <a:latin typeface="Pretendard"/>
+                <a:ea typeface="Pretendard"/>
+                <a:cs typeface="Pretendard"/>
               </a:defRPr>
             </a:pPr>
             <a:r>
@@ -21326,11 +21318,11 @@
                 <a:solidFill>
                   <a:srgbClr val="1E2324"/>
                 </a:solidFill>
-                <a:latin typeface="페이퍼로지 4 Regular"/>
-                <a:ea typeface="페이퍼로지 4 Regular"/>
-                <a:cs typeface="페이퍼로지 4 Regular"/>
-              </a:rPr>
-              <a:t>GitHub · 세션 · CSV 구분</a:t>
+                <a:latin typeface="Pretendard"/>
+                <a:ea typeface="Pretendard"/>
+                <a:cs typeface="Pretendard"/>
+              </a:rPr>
+              <a:t>3~8축 레이더 · CSV 보조</a:t>
             </a:r>
           </a:p>
         </p:txBody>
@@ -21371,9 +21363,9 @@
                 <a:solidFill>
                   <a:srgbClr val="98A4A6"/>
                 </a:solidFill>
-                <a:latin typeface="페이퍼로지 4 Regular"/>
-                <a:ea typeface="페이퍼로지 4 Regular"/>
-                <a:cs typeface="페이퍼로지 4 Regular"/>
+                <a:latin typeface="Pretendard"/>
+                <a:ea typeface="Pretendard"/>
+                <a:cs typeface="Pretendard"/>
               </a:defRPr>
             </a:pPr>
             <a:r>
@@ -21381,9 +21373,9 @@
                 <a:solidFill>
                   <a:srgbClr val="98A4A6"/>
                 </a:solidFill>
-                <a:latin typeface="페이퍼로지 4 Regular"/>
-                <a:ea typeface="페이퍼로지 4 Regular"/>
-                <a:cs typeface="페이퍼로지 4 Regular"/>
+                <a:latin typeface="Pretendard"/>
+                <a:ea typeface="Pretendard"/>
+                <a:cs typeface="Pretendard"/>
               </a:rPr>
               <a:t>09</a:t>
             </a:r>
@@ -21428,9 +21420,9 @@
                 <a:solidFill>
                   <a:srgbClr val="00B5AC"/>
                 </a:solidFill>
-                <a:latin typeface="페이퍼로지 4 Regular"/>
-                <a:ea typeface="페이퍼로지 4 Regular"/>
-                <a:cs typeface="페이퍼로지 4 Regular"/>
+                <a:latin typeface="Pretendard"/>
+                <a:ea typeface="Pretendard"/>
+                <a:cs typeface="Pretendard"/>
               </a:defRPr>
             </a:pPr>
             <a:r>
@@ -21438,9 +21430,9 @@
                 <a:solidFill>
                   <a:srgbClr val="00B5AC"/>
                 </a:solidFill>
-                <a:latin typeface="페이퍼로지 4 Regular"/>
-                <a:ea typeface="페이퍼로지 4 Regular"/>
-                <a:cs typeface="페이퍼로지 4 Regular"/>
+                <a:latin typeface="Pretendard"/>
+                <a:ea typeface="Pretendard"/>
+                <a:cs typeface="Pretendard"/>
               </a:rPr>
               <a:t>HOW TO</a:t>
             </a:r>
@@ -21456,13 +21448,13 @@
           <p:nvPr/>
         </p:nvPicPr>
         <p:blipFill>
-          <a:blip xmlns:r="http://schemas.openxmlformats.org/officeDocument/2006/relationships" xmlns:a="http://schemas.openxmlformats.org/drawingml/2006/main" r:embed="R6be76066685a45cf"/>
+          <a:blip xmlns:r="http://schemas.openxmlformats.org/officeDocument/2006/relationships" xmlns:a="http://schemas.openxmlformats.org/drawingml/2006/main" r:embed="R7a0832cf18fd4be9"/>
           <a:stretch xmlns:a="http://schemas.openxmlformats.org/drawingml/2006/main"/>
         </p:blipFill>
         <p:spPr>
           <a:xfrm xmlns:a="http://schemas.openxmlformats.org/drawingml/2006/main" flipH="0" flipV="0">
-            <a:off x="10668286" y="3619563"/>
-            <a:ext cx="6096286" cy="3429161"/>
+            <a:off x="10668286" y="3663354"/>
+            <a:ext cx="6096286" cy="3341579"/>
           </a:xfrm>
           <a:prstGeom xmlns:a="http://schemas.openxmlformats.org/drawingml/2006/main" prst="rect">
             <a:avLst/>
